--- a/topic13-parsing/unit-13a-lectures/talk-1/a-parsers.pptx
+++ b/topic13-parsing/unit-13a-lectures/talk-1/a-parsers.pptx
@@ -5,19 +5,25 @@
     <p:sldMasterId id="2147483729" r:id="rId1"/>
   </p:sldMasterIdLst>
   <p:notesMasterIdLst>
-    <p:notesMasterId r:id="rId9"/>
+    <p:notesMasterId r:id="rId15"/>
   </p:notesMasterIdLst>
   <p:handoutMasterIdLst>
-    <p:handoutMasterId r:id="rId10"/>
+    <p:handoutMasterId r:id="rId16"/>
   </p:handoutMasterIdLst>
   <p:sldIdLst>
     <p:sldId id="308" r:id="rId2"/>
     <p:sldId id="278" r:id="rId3"/>
     <p:sldId id="309" r:id="rId4"/>
     <p:sldId id="310" r:id="rId5"/>
-    <p:sldId id="311" r:id="rId6"/>
-    <p:sldId id="313" r:id="rId7"/>
-    <p:sldId id="312" r:id="rId8"/>
+    <p:sldId id="344" r:id="rId6"/>
+    <p:sldId id="311" r:id="rId7"/>
+    <p:sldId id="313" r:id="rId8"/>
+    <p:sldId id="312" r:id="rId9"/>
+    <p:sldId id="314" r:id="rId10"/>
+    <p:sldId id="315" r:id="rId11"/>
+    <p:sldId id="316" r:id="rId12"/>
+    <p:sldId id="317" r:id="rId13"/>
+    <p:sldId id="343" r:id="rId14"/>
   </p:sldIdLst>
   <p:sldSz cx="9144000" cy="6858000" type="screen4x3"/>
   <p:notesSz cx="7089775" cy="10218738"/>
@@ -572,14 +578,14 @@
           </a:ln>
           <a:extLst>
             <a:ext uri="{909E8E84-426E-40dd-AFC4-6F175D3DCCD1}">
-              <a14:hiddenFill xmlns:a14="http://schemas.microsoft.com/office/drawing/2010/main" xmlns="">
+              <a14:hiddenFill xmlns="" xmlns:a14="http://schemas.microsoft.com/office/drawing/2010/main">
                 <a:solidFill>
                   <a:srgbClr val="FFFFFF"/>
                 </a:solidFill>
               </a14:hiddenFill>
             </a:ext>
             <a:ext uri="{FAA26D3D-D897-4be2-8F04-BA451C77F1D7}">
-              <ma14:placeholderFlag xmlns:ma14="http://schemas.microsoft.com/office/mac/drawingml/2011/main" xmlns="" val="1"/>
+              <ma14:placeholderFlag xmlns="" xmlns:ma14="http://schemas.microsoft.com/office/mac/drawingml/2011/main" val="1"/>
             </a:ext>
           </a:extLst>
         </p:spPr>
@@ -1171,7 +1177,7 @@
               <a:pPr>
                 <a:defRPr/>
               </a:pPr>
-              <a:t>4/1/26</a:t>
+              <a:t>4/2/26</a:t>
             </a:fld>
             <a:endParaRPr lang="en-US" altLang="en-US"/>
           </a:p>
@@ -1601,7 +1607,7 @@
               <a:pPr>
                 <a:defRPr/>
               </a:pPr>
-              <a:t>4/1/26</a:t>
+              <a:t>4/2/26</a:t>
             </a:fld>
             <a:endParaRPr lang="en-US" altLang="en-US"/>
           </a:p>
@@ -1953,7 +1959,7 @@
               <a:pPr>
                 <a:defRPr/>
               </a:pPr>
-              <a:t>4/1/26</a:t>
+              <a:t>4/2/26</a:t>
             </a:fld>
             <a:endParaRPr lang="en-US" altLang="en-US"/>
           </a:p>
@@ -2374,7 +2380,7 @@
               <a:pPr>
                 <a:defRPr/>
               </a:pPr>
-              <a:t>4/1/26</a:t>
+              <a:t>4/2/26</a:t>
             </a:fld>
             <a:endParaRPr lang="en-US" altLang="en-US"/>
           </a:p>
@@ -2958,7 +2964,7 @@
               <a:pPr>
                 <a:defRPr/>
               </a:pPr>
-              <a:t>4/1/26</a:t>
+              <a:t>4/2/26</a:t>
             </a:fld>
             <a:endParaRPr lang="en-US" altLang="en-US"/>
           </a:p>
@@ -3655,7 +3661,7 @@
               <a:pPr>
                 <a:defRPr/>
               </a:pPr>
-              <a:t>4/1/26</a:t>
+              <a:t>4/2/26</a:t>
             </a:fld>
             <a:endParaRPr lang="en-US" altLang="en-US"/>
           </a:p>
@@ -4584,7 +4590,7 @@
               <a:pPr>
                 <a:defRPr/>
               </a:pPr>
-              <a:t>4/1/26</a:t>
+              <a:t>4/2/26</a:t>
             </a:fld>
             <a:endParaRPr lang="en-US" altLang="en-US"/>
           </a:p>
@@ -4913,7 +4919,7 @@
               <a:pPr>
                 <a:defRPr/>
               </a:pPr>
-              <a:t>4/1/26</a:t>
+              <a:t>4/2/26</a:t>
             </a:fld>
             <a:endParaRPr lang="en-US" altLang="en-US"/>
           </a:p>
@@ -5195,7 +5201,7 @@
               <a:pPr>
                 <a:defRPr/>
               </a:pPr>
-              <a:t>4/1/26</a:t>
+              <a:t>4/2/26</a:t>
             </a:fld>
             <a:endParaRPr lang="en-US" altLang="en-US"/>
           </a:p>
@@ -5550,7 +5556,7 @@
               <a:pPr>
                 <a:defRPr/>
               </a:pPr>
-              <a:t>4/1/26</a:t>
+              <a:t>4/2/26</a:t>
             </a:fld>
             <a:endParaRPr lang="en-US" altLang="en-US"/>
           </a:p>
@@ -5954,7 +5960,7 @@
               <a:pPr>
                 <a:defRPr/>
               </a:pPr>
-              <a:t>4/1/26</a:t>
+              <a:t>4/2/26</a:t>
             </a:fld>
             <a:endParaRPr lang="en-US" altLang="en-US"/>
           </a:p>
@@ -6345,7 +6351,7 @@
               <a:pPr>
                 <a:defRPr/>
               </a:pPr>
-              <a:t>4/1/26</a:t>
+              <a:t>4/2/26</a:t>
             </a:fld>
             <a:endParaRPr lang="en-US" altLang="en-US"/>
           </a:p>
@@ -6866,7 +6872,7 @@
               <a:pPr>
                 <a:defRPr/>
               </a:pPr>
-              <a:t>4/1/26</a:t>
+              <a:t>4/2/26</a:t>
             </a:fld>
             <a:endParaRPr lang="en-US" altLang="en-US"/>
           </a:p>
@@ -7152,7 +7158,7 @@
               <a:pPr>
                 <a:defRPr/>
               </a:pPr>
-              <a:t>4/1/26</a:t>
+              <a:t>4/2/26</a:t>
             </a:fld>
             <a:endParaRPr lang="en-US" altLang="en-US"/>
           </a:p>
@@ -7337,7 +7343,7 @@
               <a:pPr>
                 <a:defRPr/>
               </a:pPr>
-              <a:t>4/1/26</a:t>
+              <a:t>4/2/26</a:t>
             </a:fld>
             <a:endParaRPr lang="en-US" altLang="en-US"/>
           </a:p>
@@ -7742,7 +7748,7 @@
               <a:pPr>
                 <a:defRPr/>
               </a:pPr>
-              <a:t>4/1/26</a:t>
+              <a:t>4/2/26</a:t>
             </a:fld>
             <a:endParaRPr lang="en-US" altLang="en-US"/>
           </a:p>
@@ -8169,7 +8175,7 @@
               <a:pPr>
                 <a:defRPr/>
               </a:pPr>
-              <a:t>4/1/26</a:t>
+              <a:t>4/2/26</a:t>
             </a:fld>
             <a:endParaRPr lang="en-US" altLang="en-US"/>
           </a:p>
@@ -8431,7 +8437,7 @@
               <a:pPr>
                 <a:defRPr/>
               </a:pPr>
-              <a:t>4/1/26</a:t>
+              <a:t>4/2/26</a:t>
             </a:fld>
             <a:endParaRPr lang="en-US" altLang="en-US"/>
           </a:p>
@@ -8872,14 +8878,14 @@
           <a:ln/>
           <a:extLst>
             <a:ext uri="{909E8E84-426E-40dd-AFC4-6F175D3DCCD1}">
-              <a14:hiddenFill xmlns:a14="http://schemas.microsoft.com/office/drawing/2010/main" xmlns="">
+              <a14:hiddenFill xmlns="" xmlns:a14="http://schemas.microsoft.com/office/drawing/2010/main">
                 <a:solidFill>
                   <a:srgbClr val="FFFFFF"/>
                 </a:solidFill>
               </a14:hiddenFill>
             </a:ext>
             <a:ext uri="{91240B29-F687-4f45-9708-019B960494DF}">
-              <a14:hiddenLine xmlns:a14="http://schemas.microsoft.com/office/drawing/2010/main" xmlns="" w="9525">
+              <a14:hiddenLine xmlns="" xmlns:a14="http://schemas.microsoft.com/office/drawing/2010/main" w="9525">
                 <a:solidFill>
                   <a:srgbClr val="000000"/>
                 </a:solidFill>
@@ -9032,14 +9038,14 @@
           </a:ln>
           <a:extLst>
             <a:ext uri="{909E8E84-426E-40dd-AFC4-6F175D3DCCD1}">
-              <a14:hiddenFill xmlns:a14="http://schemas.microsoft.com/office/drawing/2010/main" xmlns="">
+              <a14:hiddenFill xmlns="" xmlns:a14="http://schemas.microsoft.com/office/drawing/2010/main">
                 <a:solidFill>
                   <a:srgbClr val="FFFFFF"/>
                 </a:solidFill>
               </a14:hiddenFill>
             </a:ext>
             <a:ext uri="{91240B29-F687-4f45-9708-019B960494DF}">
-              <a14:hiddenLine xmlns:a14="http://schemas.microsoft.com/office/drawing/2010/main" xmlns="" w="9525">
+              <a14:hiddenLine xmlns="" xmlns:a14="http://schemas.microsoft.com/office/drawing/2010/main" w="9525">
                 <a:solidFill>
                   <a:srgbClr val="000000"/>
                 </a:solidFill>
@@ -9198,14 +9204,14 @@
           </a:ln>
           <a:extLst>
             <a:ext uri="{909E8E84-426E-40dd-AFC4-6F175D3DCCD1}">
-              <a14:hiddenFill xmlns:a14="http://schemas.microsoft.com/office/drawing/2010/main" xmlns="">
+              <a14:hiddenFill xmlns="" xmlns:a14="http://schemas.microsoft.com/office/drawing/2010/main">
                 <a:solidFill>
                   <a:srgbClr val="FFFFFF"/>
                 </a:solidFill>
               </a14:hiddenFill>
             </a:ext>
             <a:ext uri="{91240B29-F687-4f45-9708-019B960494DF}">
-              <a14:hiddenLine xmlns:a14="http://schemas.microsoft.com/office/drawing/2010/main" xmlns="" w="9525">
+              <a14:hiddenLine xmlns="" xmlns:a14="http://schemas.microsoft.com/office/drawing/2010/main" w="9525">
                 <a:solidFill>
                   <a:srgbClr val="000000"/>
                 </a:solidFill>
@@ -9267,6 +9273,1619 @@
           </a:ln>
           <a:extLst>
             <a:ext uri="{909E8E84-426E-40dd-AFC4-6F175D3DCCD1}">
+              <a14:hiddenFill xmlns="" xmlns:a14="http://schemas.microsoft.com/office/drawing/2010/main">
+                <a:solidFill>
+                  <a:srgbClr val="FFFFFF"/>
+                </a:solidFill>
+              </a14:hiddenFill>
+            </a:ext>
+            <a:ext uri="{91240B29-F687-4f45-9708-019B960494DF}">
+              <a14:hiddenLine xmlns="" xmlns:a14="http://schemas.microsoft.com/office/drawing/2010/main" w="9525">
+                <a:solidFill>
+                  <a:srgbClr val="000000"/>
+                </a:solidFill>
+                <a:miter lim="800000"/>
+                <a:headEnd/>
+                <a:tailEnd/>
+              </a14:hiddenLine>
+            </a:ext>
+          </a:extLst>
+        </p:spPr>
+      </p:pic>
+    </p:spTree>
+  </p:cSld>
+  <p:clrMapOvr>
+    <a:overrideClrMapping bg1="dk1" tx1="lt1" bg2="dk2" tx2="lt2" accent1="accent1" accent2="accent2" accent3="accent3" accent4="accent4" accent5="accent5" accent6="accent6" hlink="hlink" folHlink="folHlink"/>
+  </p:clrMapOvr>
+</p:sld>
+</file>
+
+<file path=ppt/slides/slide10.xml><?xml version="1.0" encoding="utf-8"?>
+<p:sld xmlns:a="http://schemas.openxmlformats.org/drawingml/2006/main" xmlns:r="http://schemas.openxmlformats.org/officeDocument/2006/relationships" xmlns:p="http://schemas.openxmlformats.org/presentationml/2006/main">
+  <p:cSld>
+    <p:spTree>
+      <p:nvGrpSpPr>
+        <p:cNvPr id="1" name=""/>
+        <p:cNvGrpSpPr/>
+        <p:nvPr/>
+      </p:nvGrpSpPr>
+      <p:grpSpPr>
+        <a:xfrm>
+          <a:off x="0" y="0"/>
+          <a:ext cx="0" cy="0"/>
+          <a:chOff x="0" y="0"/>
+          <a:chExt cx="0" cy="0"/>
+        </a:xfrm>
+      </p:grpSpPr>
+      <p:sp>
+        <p:nvSpPr>
+          <p:cNvPr id="2" name="Title 1">
+            <a:extLst>
+              <a:ext uri="{FF2B5EF4-FFF2-40B4-BE49-F238E27FC236}">
+                <a16:creationId xmlns:a16="http://schemas.microsoft.com/office/drawing/2014/main" id="{304B3FD9-D314-3406-8E4D-44F02A3261A6}"/>
+              </a:ext>
+            </a:extLst>
+          </p:cNvPr>
+          <p:cNvSpPr>
+            <a:spLocks noGrp="1"/>
+          </p:cNvSpPr>
+          <p:nvPr>
+            <p:ph type="title"/>
+          </p:nvPr>
+        </p:nvSpPr>
+        <p:spPr/>
+        <p:txBody>
+          <a:bodyPr/>
+          <a:lstStyle/>
+          <a:p>
+            <a:r>
+              <a:rPr lang="en-US" dirty="0"/>
+              <a:t>Helper function - satisfy</a:t>
+            </a:r>
+          </a:p>
+        </p:txBody>
+      </p:sp>
+      <p:sp>
+        <p:nvSpPr>
+          <p:cNvPr id="3" name="Content Placeholder 2">
+            <a:extLst>
+              <a:ext uri="{FF2B5EF4-FFF2-40B4-BE49-F238E27FC236}">
+                <a16:creationId xmlns:a16="http://schemas.microsoft.com/office/drawing/2014/main" id="{4D5E0EA5-E81C-7B0F-08BC-4EEBD3635D46}"/>
+              </a:ext>
+            </a:extLst>
+          </p:cNvPr>
+          <p:cNvSpPr>
+            <a:spLocks noGrp="1"/>
+          </p:cNvSpPr>
+          <p:nvPr>
+            <p:ph idx="1"/>
+          </p:nvPr>
+        </p:nvSpPr>
+        <p:spPr>
+          <a:xfrm>
+            <a:off x="510241" y="2336873"/>
+            <a:ext cx="7210396" cy="3120651"/>
+          </a:xfrm>
+          <a:solidFill>
+            <a:schemeClr val="accent1"/>
+          </a:solidFill>
+        </p:spPr>
+        <p:txBody>
+          <a:bodyPr/>
+          <a:lstStyle/>
+          <a:p>
+            <a:pPr marL="0" indent="0">
+              <a:buNone/>
+            </a:pPr>
+            <a:r>
+              <a:rPr lang="en-IE" dirty="0"/>
+              <a:t>--  Parse one character satisfying a predicate.</a:t>
+            </a:r>
+          </a:p>
+          <a:p>
+            <a:pPr marL="0" indent="0">
+              <a:buNone/>
+            </a:pPr>
+            <a:r>
+              <a:rPr lang="en-IE" dirty="0"/>
+              <a:t>-- This is the most general primitive; everything else is built on it.</a:t>
+            </a:r>
+          </a:p>
+          <a:p>
+            <a:pPr marL="0" indent="0">
+              <a:buNone/>
+            </a:pPr>
+            <a:r>
+              <a:rPr lang="en-IE" dirty="0"/>
+              <a:t>satisfy :: (Char -&gt; Bool) -&gt; String -&gt; Parser Char</a:t>
+            </a:r>
+          </a:p>
+          <a:p>
+            <a:pPr marL="0" indent="0">
+              <a:buNone/>
+            </a:pPr>
+            <a:r>
+              <a:rPr lang="en-IE" dirty="0"/>
+              <a:t>satisfy p </a:t>
+            </a:r>
+            <a:r>
+              <a:rPr lang="en-IE" dirty="0" err="1"/>
+              <a:t>desc</a:t>
+            </a:r>
+            <a:r>
+              <a:rPr lang="en-IE" dirty="0"/>
+              <a:t> = Parser $ \input -&gt;</a:t>
+            </a:r>
+          </a:p>
+          <a:p>
+            <a:pPr marL="0" indent="0">
+              <a:buNone/>
+            </a:pPr>
+            <a:r>
+              <a:rPr lang="en-IE" dirty="0"/>
+              <a:t>      case input of</a:t>
+            </a:r>
+          </a:p>
+          <a:p>
+            <a:pPr marL="0" indent="0">
+              <a:buNone/>
+            </a:pPr>
+            <a:r>
+              <a:rPr lang="en-IE" dirty="0"/>
+              <a:t>           (</a:t>
+            </a:r>
+            <a:r>
+              <a:rPr lang="en-IE" dirty="0" err="1"/>
+              <a:t>x:xs</a:t>
+            </a:r>
+            <a:r>
+              <a:rPr lang="en-IE" dirty="0"/>
+              <a:t>) | p x -&gt; Right (</a:t>
+            </a:r>
+            <a:r>
+              <a:rPr lang="en-IE" dirty="0" err="1"/>
+              <a:t>xs</a:t>
+            </a:r>
+            <a:r>
+              <a:rPr lang="en-IE" dirty="0"/>
+              <a:t>, x)</a:t>
+            </a:r>
+          </a:p>
+          <a:p>
+            <a:pPr marL="0" indent="0">
+              <a:buNone/>
+            </a:pPr>
+            <a:r>
+              <a:rPr lang="en-IE" dirty="0"/>
+              <a:t>           [] -&gt; Left ("unexpected end of input, expected " ++ </a:t>
+            </a:r>
+            <a:r>
+              <a:rPr lang="en-IE" dirty="0" err="1"/>
+              <a:t>desc</a:t>
+            </a:r>
+            <a:r>
+              <a:rPr lang="en-IE" dirty="0"/>
+              <a:t>)</a:t>
+            </a:r>
+          </a:p>
+          <a:p>
+            <a:pPr marL="0" indent="0">
+              <a:buNone/>
+            </a:pPr>
+            <a:r>
+              <a:rPr lang="en-IE" dirty="0"/>
+              <a:t>           (x:_) -&gt; Left ("unexpected '" ++ [x] ++ "', expected " ++ </a:t>
+            </a:r>
+            <a:r>
+              <a:rPr lang="en-IE" dirty="0" err="1"/>
+              <a:t>desc</a:t>
+            </a:r>
+            <a:r>
+              <a:rPr lang="en-IE" dirty="0"/>
+              <a:t>)</a:t>
+            </a:r>
+          </a:p>
+          <a:p>
+            <a:endParaRPr lang="en-US" dirty="0"/>
+          </a:p>
+        </p:txBody>
+      </p:sp>
+      <p:sp>
+        <p:nvSpPr>
+          <p:cNvPr id="4" name="Slide Number Placeholder 3">
+            <a:extLst>
+              <a:ext uri="{FF2B5EF4-FFF2-40B4-BE49-F238E27FC236}">
+                <a16:creationId xmlns:a16="http://schemas.microsoft.com/office/drawing/2014/main" id="{B844B49B-AD6F-B565-04C9-8563FCB152A3}"/>
+              </a:ext>
+            </a:extLst>
+          </p:cNvPr>
+          <p:cNvSpPr>
+            <a:spLocks noGrp="1"/>
+          </p:cNvSpPr>
+          <p:nvPr>
+            <p:ph type="sldNum" sz="quarter" idx="12"/>
+          </p:nvPr>
+        </p:nvSpPr>
+        <p:spPr/>
+        <p:txBody>
+          <a:bodyPr/>
+          <a:lstStyle/>
+          <a:p>
+            <a:pPr>
+              <a:defRPr/>
+            </a:pPr>
+            <a:fld id="{6BCA5543-1E1F-F043-9EBC-BC37C93D4920}" type="slidenum">
+              <a:rPr lang="en-US" smtClean="0"/>
+              <a:pPr>
+                <a:defRPr/>
+              </a:pPr>
+              <a:t>9</a:t>
+            </a:fld>
+            <a:endParaRPr lang="en-US"/>
+          </a:p>
+        </p:txBody>
+      </p:sp>
+    </p:spTree>
+    <p:extLst>
+      <p:ext uri="{BB962C8B-B14F-4D97-AF65-F5344CB8AC3E}">
+        <p14:creationId xmlns:p14="http://schemas.microsoft.com/office/powerpoint/2010/main" val="1362674803"/>
+      </p:ext>
+    </p:extLst>
+  </p:cSld>
+  <p:clrMapOvr>
+    <a:masterClrMapping/>
+  </p:clrMapOvr>
+</p:sld>
+</file>
+
+<file path=ppt/slides/slide11.xml><?xml version="1.0" encoding="utf-8"?>
+<p:sld xmlns:a="http://schemas.openxmlformats.org/drawingml/2006/main" xmlns:r="http://schemas.openxmlformats.org/officeDocument/2006/relationships" xmlns:p="http://schemas.openxmlformats.org/presentationml/2006/main">
+  <p:cSld>
+    <p:spTree>
+      <p:nvGrpSpPr>
+        <p:cNvPr id="1" name=""/>
+        <p:cNvGrpSpPr/>
+        <p:nvPr/>
+      </p:nvGrpSpPr>
+      <p:grpSpPr>
+        <a:xfrm>
+          <a:off x="0" y="0"/>
+          <a:ext cx="0" cy="0"/>
+          <a:chOff x="0" y="0"/>
+          <a:chExt cx="0" cy="0"/>
+        </a:xfrm>
+      </p:grpSpPr>
+      <p:sp>
+        <p:nvSpPr>
+          <p:cNvPr id="2" name="Title 1">
+            <a:extLst>
+              <a:ext uri="{FF2B5EF4-FFF2-40B4-BE49-F238E27FC236}">
+                <a16:creationId xmlns:a16="http://schemas.microsoft.com/office/drawing/2014/main" id="{2537BBC9-231D-3FA1-6514-D24AAB856749}"/>
+              </a:ext>
+            </a:extLst>
+          </p:cNvPr>
+          <p:cNvSpPr>
+            <a:spLocks noGrp="1"/>
+          </p:cNvSpPr>
+          <p:nvPr>
+            <p:ph type="title"/>
+          </p:nvPr>
+        </p:nvSpPr>
+        <p:spPr/>
+        <p:txBody>
+          <a:bodyPr/>
+          <a:lstStyle/>
+          <a:p>
+            <a:r>
+              <a:rPr lang="en-IE" dirty="0"/>
+              <a:t>Examples of use of satisfy </a:t>
+            </a:r>
+            <a:br>
+              <a:rPr lang="en-IE" dirty="0"/>
+            </a:br>
+            <a:endParaRPr lang="en-US" dirty="0"/>
+          </a:p>
+        </p:txBody>
+      </p:sp>
+      <p:sp>
+        <p:nvSpPr>
+          <p:cNvPr id="4" name="Slide Number Placeholder 3">
+            <a:extLst>
+              <a:ext uri="{FF2B5EF4-FFF2-40B4-BE49-F238E27FC236}">
+                <a16:creationId xmlns:a16="http://schemas.microsoft.com/office/drawing/2014/main" id="{7B5EFC35-E3D8-F7B6-4BEF-20F312820F1C}"/>
+              </a:ext>
+            </a:extLst>
+          </p:cNvPr>
+          <p:cNvSpPr>
+            <a:spLocks noGrp="1"/>
+          </p:cNvSpPr>
+          <p:nvPr>
+            <p:ph type="sldNum" sz="quarter" idx="12"/>
+          </p:nvPr>
+        </p:nvSpPr>
+        <p:spPr/>
+        <p:txBody>
+          <a:bodyPr/>
+          <a:lstStyle/>
+          <a:p>
+            <a:pPr>
+              <a:defRPr/>
+            </a:pPr>
+            <a:fld id="{6BCA5543-1E1F-F043-9EBC-BC37C93D4920}" type="slidenum">
+              <a:rPr lang="en-US" smtClean="0"/>
+              <a:pPr>
+                <a:defRPr/>
+              </a:pPr>
+              <a:t>10</a:t>
+            </a:fld>
+            <a:endParaRPr lang="en-US"/>
+          </a:p>
+        </p:txBody>
+      </p:sp>
+      <p:sp>
+        <p:nvSpPr>
+          <p:cNvPr id="5" name="Content Placeholder 2">
+            <a:extLst>
+              <a:ext uri="{FF2B5EF4-FFF2-40B4-BE49-F238E27FC236}">
+                <a16:creationId xmlns:a16="http://schemas.microsoft.com/office/drawing/2014/main" id="{9F0DE2C7-F4F1-15CB-4CAF-5A5E9B2A8D89}"/>
+              </a:ext>
+            </a:extLst>
+          </p:cNvPr>
+          <p:cNvSpPr txBox="1">
+            <a:spLocks noGrp="1"/>
+          </p:cNvSpPr>
+          <p:nvPr>
+            <p:ph idx="1"/>
+          </p:nvPr>
+        </p:nvSpPr>
+        <p:spPr>
+          <a:xfrm>
+            <a:off x="336194" y="2302657"/>
+            <a:ext cx="8229498" cy="483329"/>
+          </a:xfrm>
+          <a:prstGeom prst="rect">
+            <a:avLst/>
+          </a:prstGeom>
+          <a:solidFill>
+            <a:schemeClr val="accent1"/>
+          </a:solidFill>
+        </p:spPr>
+        <p:txBody>
+          <a:bodyPr vert="horz" lIns="91440" tIns="45720" rIns="91440" bIns="45720" rtlCol="0">
+            <a:normAutofit/>
+          </a:bodyPr>
+          <a:lstStyle>
+            <a:lvl1pPr marL="171450" indent="-171450" algn="l" defTabSz="685800" rtl="0" eaLnBrk="1" latinLnBrk="0" hangingPunct="1">
+              <a:lnSpc>
+                <a:spcPct val="90000"/>
+              </a:lnSpc>
+              <a:spcBef>
+                <a:spcPts val="750"/>
+              </a:spcBef>
+              <a:buFont typeface="Arial" panose="020B0604020202020204" pitchFamily="34" charset="0"/>
+              <a:buChar char="•"/>
+              <a:defRPr sz="1800" kern="1200">
+                <a:solidFill>
+                  <a:schemeClr val="tx1"/>
+                </a:solidFill>
+                <a:latin typeface="+mn-lt"/>
+                <a:ea typeface="+mn-ea"/>
+                <a:cs typeface="+mn-cs"/>
+              </a:defRPr>
+            </a:lvl1pPr>
+            <a:lvl2pPr marL="514350" indent="-171450" algn="l" defTabSz="685800" rtl="0" eaLnBrk="1" latinLnBrk="0" hangingPunct="1">
+              <a:lnSpc>
+                <a:spcPct val="90000"/>
+              </a:lnSpc>
+              <a:spcBef>
+                <a:spcPts val="375"/>
+              </a:spcBef>
+              <a:buFont typeface="Arial" panose="020B0604020202020204" pitchFamily="34" charset="0"/>
+              <a:buChar char="•"/>
+              <a:defRPr sz="1500" kern="1200">
+                <a:solidFill>
+                  <a:schemeClr val="tx1"/>
+                </a:solidFill>
+                <a:latin typeface="+mn-lt"/>
+                <a:ea typeface="+mn-ea"/>
+                <a:cs typeface="+mn-cs"/>
+              </a:defRPr>
+            </a:lvl2pPr>
+            <a:lvl3pPr marL="857250" indent="-171450" algn="l" defTabSz="685800" rtl="0" eaLnBrk="1" latinLnBrk="0" hangingPunct="1">
+              <a:lnSpc>
+                <a:spcPct val="90000"/>
+              </a:lnSpc>
+              <a:spcBef>
+                <a:spcPts val="375"/>
+              </a:spcBef>
+              <a:buFont typeface="Arial" panose="020B0604020202020204" pitchFamily="34" charset="0"/>
+              <a:buChar char="•"/>
+              <a:defRPr sz="1350" kern="1200">
+                <a:solidFill>
+                  <a:schemeClr val="tx1"/>
+                </a:solidFill>
+                <a:latin typeface="+mn-lt"/>
+                <a:ea typeface="+mn-ea"/>
+                <a:cs typeface="+mn-cs"/>
+              </a:defRPr>
+            </a:lvl3pPr>
+            <a:lvl4pPr marL="1200150" indent="-171450" algn="l" defTabSz="685800" rtl="0" eaLnBrk="1" latinLnBrk="0" hangingPunct="1">
+              <a:lnSpc>
+                <a:spcPct val="90000"/>
+              </a:lnSpc>
+              <a:spcBef>
+                <a:spcPts val="375"/>
+              </a:spcBef>
+              <a:buFont typeface="Arial" panose="020B0604020202020204" pitchFamily="34" charset="0"/>
+              <a:buChar char="•"/>
+              <a:defRPr sz="1200" kern="1200">
+                <a:solidFill>
+                  <a:schemeClr val="tx1"/>
+                </a:solidFill>
+                <a:latin typeface="+mn-lt"/>
+                <a:ea typeface="+mn-ea"/>
+                <a:cs typeface="+mn-cs"/>
+              </a:defRPr>
+            </a:lvl4pPr>
+            <a:lvl5pPr marL="1543050" indent="-171450" algn="l" defTabSz="685800" rtl="0" eaLnBrk="1" latinLnBrk="0" hangingPunct="1">
+              <a:lnSpc>
+                <a:spcPct val="90000"/>
+              </a:lnSpc>
+              <a:spcBef>
+                <a:spcPts val="375"/>
+              </a:spcBef>
+              <a:buFont typeface="Arial" panose="020B0604020202020204" pitchFamily="34" charset="0"/>
+              <a:buChar char="•"/>
+              <a:defRPr sz="1200" kern="1200">
+                <a:solidFill>
+                  <a:schemeClr val="tx1"/>
+                </a:solidFill>
+                <a:latin typeface="+mn-lt"/>
+                <a:ea typeface="+mn-ea"/>
+                <a:cs typeface="+mn-cs"/>
+              </a:defRPr>
+            </a:lvl5pPr>
+            <a:lvl6pPr marL="1885950" indent="-171450" algn="l" defTabSz="685800" rtl="0" eaLnBrk="1" latinLnBrk="0" hangingPunct="1">
+              <a:lnSpc>
+                <a:spcPct val="90000"/>
+              </a:lnSpc>
+              <a:spcBef>
+                <a:spcPts val="375"/>
+              </a:spcBef>
+              <a:buFont typeface="Arial" panose="020B0604020202020204" pitchFamily="34" charset="0"/>
+              <a:buChar char="•"/>
+              <a:defRPr sz="1050" kern="1200">
+                <a:solidFill>
+                  <a:schemeClr val="tx1"/>
+                </a:solidFill>
+                <a:latin typeface="+mn-lt"/>
+                <a:ea typeface="+mn-ea"/>
+                <a:cs typeface="+mn-cs"/>
+              </a:defRPr>
+            </a:lvl6pPr>
+            <a:lvl7pPr marL="2228850" indent="-171450" algn="l" defTabSz="685800" rtl="0" eaLnBrk="1" latinLnBrk="0" hangingPunct="1">
+              <a:lnSpc>
+                <a:spcPct val="90000"/>
+              </a:lnSpc>
+              <a:spcBef>
+                <a:spcPts val="375"/>
+              </a:spcBef>
+              <a:buFont typeface="Arial" panose="020B0604020202020204" pitchFamily="34" charset="0"/>
+              <a:buChar char="•"/>
+              <a:defRPr sz="1050" kern="1200">
+                <a:solidFill>
+                  <a:schemeClr val="tx1"/>
+                </a:solidFill>
+                <a:latin typeface="+mn-lt"/>
+                <a:ea typeface="+mn-ea"/>
+                <a:cs typeface="+mn-cs"/>
+              </a:defRPr>
+            </a:lvl7pPr>
+            <a:lvl8pPr marL="2571750" indent="-171450" algn="l" defTabSz="685800" rtl="0" eaLnBrk="1" latinLnBrk="0" hangingPunct="1">
+              <a:lnSpc>
+                <a:spcPct val="90000"/>
+              </a:lnSpc>
+              <a:spcBef>
+                <a:spcPts val="375"/>
+              </a:spcBef>
+              <a:buFont typeface="Arial" panose="020B0604020202020204" pitchFamily="34" charset="0"/>
+              <a:buChar char="•"/>
+              <a:defRPr sz="1050" kern="1200">
+                <a:solidFill>
+                  <a:schemeClr val="tx1"/>
+                </a:solidFill>
+                <a:latin typeface="+mn-lt"/>
+                <a:ea typeface="+mn-ea"/>
+                <a:cs typeface="+mn-cs"/>
+              </a:defRPr>
+            </a:lvl8pPr>
+            <a:lvl9pPr marL="2914650" indent="-171450" algn="l" defTabSz="685800" rtl="0" eaLnBrk="1" latinLnBrk="0" hangingPunct="1">
+              <a:lnSpc>
+                <a:spcPct val="90000"/>
+              </a:lnSpc>
+              <a:spcBef>
+                <a:spcPts val="375"/>
+              </a:spcBef>
+              <a:buFont typeface="Arial" panose="020B0604020202020204" pitchFamily="34" charset="0"/>
+              <a:buChar char="•"/>
+              <a:defRPr sz="1050" kern="1200">
+                <a:solidFill>
+                  <a:schemeClr val="tx1"/>
+                </a:solidFill>
+                <a:latin typeface="+mn-lt"/>
+                <a:ea typeface="+mn-ea"/>
+                <a:cs typeface="+mn-cs"/>
+              </a:defRPr>
+            </a:lvl9pPr>
+          </a:lstStyle>
+          <a:p>
+            <a:pPr marL="0" indent="0" fontAlgn="auto">
+              <a:spcAft>
+                <a:spcPts val="0"/>
+              </a:spcAft>
+              <a:buNone/>
+            </a:pPr>
+            <a:r>
+              <a:rPr lang="en-IE" dirty="0" err="1"/>
+              <a:t>charP</a:t>
+            </a:r>
+            <a:r>
+              <a:rPr lang="en-IE" dirty="0"/>
+              <a:t> c = satisfy (== c) ("'" ++ [c] ++ "'") -- equivalent one-liner to previous def</a:t>
+            </a:r>
+          </a:p>
+          <a:p>
+            <a:pPr marL="0" indent="0" fontAlgn="auto">
+              <a:spcAft>
+                <a:spcPts val="0"/>
+              </a:spcAft>
+              <a:buNone/>
+            </a:pPr>
+            <a:endParaRPr lang="en-US" dirty="0"/>
+          </a:p>
+        </p:txBody>
+      </p:sp>
+      <p:sp>
+        <p:nvSpPr>
+          <p:cNvPr id="6" name="Content Placeholder 2">
+            <a:extLst>
+              <a:ext uri="{FF2B5EF4-FFF2-40B4-BE49-F238E27FC236}">
+                <a16:creationId xmlns:a16="http://schemas.microsoft.com/office/drawing/2014/main" id="{DE10A650-6946-54B7-9CD1-92E5A3AD9DE9}"/>
+              </a:ext>
+            </a:extLst>
+          </p:cNvPr>
+          <p:cNvSpPr txBox="1">
+            <a:spLocks/>
+          </p:cNvSpPr>
+          <p:nvPr/>
+        </p:nvSpPr>
+        <p:spPr>
+          <a:xfrm>
+            <a:off x="385114" y="3155513"/>
+            <a:ext cx="3940702" cy="1080939"/>
+          </a:xfrm>
+          <a:prstGeom prst="rect">
+            <a:avLst/>
+          </a:prstGeom>
+          <a:solidFill>
+            <a:schemeClr val="accent1"/>
+          </a:solidFill>
+        </p:spPr>
+        <p:txBody>
+          <a:bodyPr vert="horz" lIns="91440" tIns="45720" rIns="91440" bIns="45720" rtlCol="0">
+            <a:normAutofit/>
+          </a:bodyPr>
+          <a:lstStyle>
+            <a:lvl1pPr marL="171450" indent="-171450" algn="l" defTabSz="685800" rtl="0" eaLnBrk="1" latinLnBrk="0" hangingPunct="1">
+              <a:lnSpc>
+                <a:spcPct val="90000"/>
+              </a:lnSpc>
+              <a:spcBef>
+                <a:spcPts val="750"/>
+              </a:spcBef>
+              <a:buFont typeface="Arial" panose="020B0604020202020204" pitchFamily="34" charset="0"/>
+              <a:buChar char="•"/>
+              <a:defRPr sz="1800" kern="1200">
+                <a:solidFill>
+                  <a:schemeClr val="tx1"/>
+                </a:solidFill>
+                <a:latin typeface="+mn-lt"/>
+                <a:ea typeface="+mn-ea"/>
+                <a:cs typeface="+mn-cs"/>
+              </a:defRPr>
+            </a:lvl1pPr>
+            <a:lvl2pPr marL="514350" indent="-171450" algn="l" defTabSz="685800" rtl="0" eaLnBrk="1" latinLnBrk="0" hangingPunct="1">
+              <a:lnSpc>
+                <a:spcPct val="90000"/>
+              </a:lnSpc>
+              <a:spcBef>
+                <a:spcPts val="375"/>
+              </a:spcBef>
+              <a:buFont typeface="Arial" panose="020B0604020202020204" pitchFamily="34" charset="0"/>
+              <a:buChar char="•"/>
+              <a:defRPr sz="1500" kern="1200">
+                <a:solidFill>
+                  <a:schemeClr val="tx1"/>
+                </a:solidFill>
+                <a:latin typeface="+mn-lt"/>
+                <a:ea typeface="+mn-ea"/>
+                <a:cs typeface="+mn-cs"/>
+              </a:defRPr>
+            </a:lvl2pPr>
+            <a:lvl3pPr marL="857250" indent="-171450" algn="l" defTabSz="685800" rtl="0" eaLnBrk="1" latinLnBrk="0" hangingPunct="1">
+              <a:lnSpc>
+                <a:spcPct val="90000"/>
+              </a:lnSpc>
+              <a:spcBef>
+                <a:spcPts val="375"/>
+              </a:spcBef>
+              <a:buFont typeface="Arial" panose="020B0604020202020204" pitchFamily="34" charset="0"/>
+              <a:buChar char="•"/>
+              <a:defRPr sz="1350" kern="1200">
+                <a:solidFill>
+                  <a:schemeClr val="tx1"/>
+                </a:solidFill>
+                <a:latin typeface="+mn-lt"/>
+                <a:ea typeface="+mn-ea"/>
+                <a:cs typeface="+mn-cs"/>
+              </a:defRPr>
+            </a:lvl3pPr>
+            <a:lvl4pPr marL="1200150" indent="-171450" algn="l" defTabSz="685800" rtl="0" eaLnBrk="1" latinLnBrk="0" hangingPunct="1">
+              <a:lnSpc>
+                <a:spcPct val="90000"/>
+              </a:lnSpc>
+              <a:spcBef>
+                <a:spcPts val="375"/>
+              </a:spcBef>
+              <a:buFont typeface="Arial" panose="020B0604020202020204" pitchFamily="34" charset="0"/>
+              <a:buChar char="•"/>
+              <a:defRPr sz="1200" kern="1200">
+                <a:solidFill>
+                  <a:schemeClr val="tx1"/>
+                </a:solidFill>
+                <a:latin typeface="+mn-lt"/>
+                <a:ea typeface="+mn-ea"/>
+                <a:cs typeface="+mn-cs"/>
+              </a:defRPr>
+            </a:lvl4pPr>
+            <a:lvl5pPr marL="1543050" indent="-171450" algn="l" defTabSz="685800" rtl="0" eaLnBrk="1" latinLnBrk="0" hangingPunct="1">
+              <a:lnSpc>
+                <a:spcPct val="90000"/>
+              </a:lnSpc>
+              <a:spcBef>
+                <a:spcPts val="375"/>
+              </a:spcBef>
+              <a:buFont typeface="Arial" panose="020B0604020202020204" pitchFamily="34" charset="0"/>
+              <a:buChar char="•"/>
+              <a:defRPr sz="1200" kern="1200">
+                <a:solidFill>
+                  <a:schemeClr val="tx1"/>
+                </a:solidFill>
+                <a:latin typeface="+mn-lt"/>
+                <a:ea typeface="+mn-ea"/>
+                <a:cs typeface="+mn-cs"/>
+              </a:defRPr>
+            </a:lvl5pPr>
+            <a:lvl6pPr marL="1885950" indent="-171450" algn="l" defTabSz="685800" rtl="0" eaLnBrk="1" latinLnBrk="0" hangingPunct="1">
+              <a:lnSpc>
+                <a:spcPct val="90000"/>
+              </a:lnSpc>
+              <a:spcBef>
+                <a:spcPts val="375"/>
+              </a:spcBef>
+              <a:buFont typeface="Arial" panose="020B0604020202020204" pitchFamily="34" charset="0"/>
+              <a:buChar char="•"/>
+              <a:defRPr sz="1050" kern="1200">
+                <a:solidFill>
+                  <a:schemeClr val="tx1"/>
+                </a:solidFill>
+                <a:latin typeface="+mn-lt"/>
+                <a:ea typeface="+mn-ea"/>
+                <a:cs typeface="+mn-cs"/>
+              </a:defRPr>
+            </a:lvl6pPr>
+            <a:lvl7pPr marL="2228850" indent="-171450" algn="l" defTabSz="685800" rtl="0" eaLnBrk="1" latinLnBrk="0" hangingPunct="1">
+              <a:lnSpc>
+                <a:spcPct val="90000"/>
+              </a:lnSpc>
+              <a:spcBef>
+                <a:spcPts val="375"/>
+              </a:spcBef>
+              <a:buFont typeface="Arial" panose="020B0604020202020204" pitchFamily="34" charset="0"/>
+              <a:buChar char="•"/>
+              <a:defRPr sz="1050" kern="1200">
+                <a:solidFill>
+                  <a:schemeClr val="tx1"/>
+                </a:solidFill>
+                <a:latin typeface="+mn-lt"/>
+                <a:ea typeface="+mn-ea"/>
+                <a:cs typeface="+mn-cs"/>
+              </a:defRPr>
+            </a:lvl7pPr>
+            <a:lvl8pPr marL="2571750" indent="-171450" algn="l" defTabSz="685800" rtl="0" eaLnBrk="1" latinLnBrk="0" hangingPunct="1">
+              <a:lnSpc>
+                <a:spcPct val="90000"/>
+              </a:lnSpc>
+              <a:spcBef>
+                <a:spcPts val="375"/>
+              </a:spcBef>
+              <a:buFont typeface="Arial" panose="020B0604020202020204" pitchFamily="34" charset="0"/>
+              <a:buChar char="•"/>
+              <a:defRPr sz="1050" kern="1200">
+                <a:solidFill>
+                  <a:schemeClr val="tx1"/>
+                </a:solidFill>
+                <a:latin typeface="+mn-lt"/>
+                <a:ea typeface="+mn-ea"/>
+                <a:cs typeface="+mn-cs"/>
+              </a:defRPr>
+            </a:lvl8pPr>
+            <a:lvl9pPr marL="2914650" indent="-171450" algn="l" defTabSz="685800" rtl="0" eaLnBrk="1" latinLnBrk="0" hangingPunct="1">
+              <a:lnSpc>
+                <a:spcPct val="90000"/>
+              </a:lnSpc>
+              <a:spcBef>
+                <a:spcPts val="375"/>
+              </a:spcBef>
+              <a:buFont typeface="Arial" panose="020B0604020202020204" pitchFamily="34" charset="0"/>
+              <a:buChar char="•"/>
+              <a:defRPr sz="1050" kern="1200">
+                <a:solidFill>
+                  <a:schemeClr val="tx1"/>
+                </a:solidFill>
+                <a:latin typeface="+mn-lt"/>
+                <a:ea typeface="+mn-ea"/>
+                <a:cs typeface="+mn-cs"/>
+              </a:defRPr>
+            </a:lvl9pPr>
+          </a:lstStyle>
+          <a:p>
+            <a:pPr marL="0" indent="0" fontAlgn="auto">
+              <a:spcAft>
+                <a:spcPts val="0"/>
+              </a:spcAft>
+              <a:buFont typeface="Arial" panose="020B0604020202020204" pitchFamily="34" charset="0"/>
+              <a:buNone/>
+            </a:pPr>
+            <a:r>
+              <a:rPr lang="en-IE" dirty="0"/>
+              <a:t>-- | Parse a digit character ('0'..'9').</a:t>
+            </a:r>
+            <a:endParaRPr lang="en-US" dirty="0"/>
+          </a:p>
+          <a:p>
+            <a:pPr marL="0" indent="0" fontAlgn="auto">
+              <a:spcAft>
+                <a:spcPts val="0"/>
+              </a:spcAft>
+              <a:buFont typeface="Arial" panose="020B0604020202020204" pitchFamily="34" charset="0"/>
+              <a:buNone/>
+            </a:pPr>
+            <a:r>
+              <a:rPr lang="en-US" dirty="0"/>
+              <a:t>digit :: Parser Char</a:t>
+            </a:r>
+          </a:p>
+          <a:p>
+            <a:pPr marL="0" indent="0" fontAlgn="auto">
+              <a:spcAft>
+                <a:spcPts val="0"/>
+              </a:spcAft>
+              <a:buFont typeface="Arial" panose="020B0604020202020204" pitchFamily="34" charset="0"/>
+              <a:buNone/>
+            </a:pPr>
+            <a:r>
+              <a:rPr lang="en-US" dirty="0"/>
+              <a:t>digit = satisfy </a:t>
+            </a:r>
+            <a:r>
+              <a:rPr lang="en-US" dirty="0" err="1"/>
+              <a:t>isdigit</a:t>
+            </a:r>
+            <a:r>
+              <a:rPr lang="en-US" dirty="0"/>
+              <a:t> ”digit”</a:t>
+            </a:r>
+          </a:p>
+          <a:p>
+            <a:pPr marL="0" indent="0" fontAlgn="auto">
+              <a:spcAft>
+                <a:spcPts val="0"/>
+              </a:spcAft>
+              <a:buFont typeface="Arial" panose="020B0604020202020204" pitchFamily="34" charset="0"/>
+              <a:buNone/>
+            </a:pPr>
+            <a:endParaRPr lang="en-US" dirty="0"/>
+          </a:p>
+        </p:txBody>
+      </p:sp>
+      <p:sp>
+        <p:nvSpPr>
+          <p:cNvPr id="7" name="Content Placeholder 2">
+            <a:extLst>
+              <a:ext uri="{FF2B5EF4-FFF2-40B4-BE49-F238E27FC236}">
+                <a16:creationId xmlns:a16="http://schemas.microsoft.com/office/drawing/2014/main" id="{AF15ACD4-DF88-29DF-937C-9B29C11738C5}"/>
+              </a:ext>
+            </a:extLst>
+          </p:cNvPr>
+          <p:cNvSpPr txBox="1">
+            <a:spLocks/>
+          </p:cNvSpPr>
+          <p:nvPr/>
+        </p:nvSpPr>
+        <p:spPr>
+          <a:xfrm>
+            <a:off x="457251" y="4695092"/>
+            <a:ext cx="3604796" cy="1336431"/>
+          </a:xfrm>
+          <a:prstGeom prst="rect">
+            <a:avLst/>
+          </a:prstGeom>
+          <a:solidFill>
+            <a:schemeClr val="accent1"/>
+          </a:solidFill>
+        </p:spPr>
+        <p:txBody>
+          <a:bodyPr vert="horz" lIns="91440" tIns="45720" rIns="91440" bIns="45720" rtlCol="0">
+            <a:normAutofit/>
+          </a:bodyPr>
+          <a:lstStyle>
+            <a:lvl1pPr marL="171450" indent="-171450" algn="l" defTabSz="685800" rtl="0" eaLnBrk="1" latinLnBrk="0" hangingPunct="1">
+              <a:lnSpc>
+                <a:spcPct val="90000"/>
+              </a:lnSpc>
+              <a:spcBef>
+                <a:spcPts val="750"/>
+              </a:spcBef>
+              <a:buFont typeface="Arial" panose="020B0604020202020204" pitchFamily="34" charset="0"/>
+              <a:buChar char="•"/>
+              <a:defRPr sz="1800" kern="1200">
+                <a:solidFill>
+                  <a:schemeClr val="tx1"/>
+                </a:solidFill>
+                <a:latin typeface="+mn-lt"/>
+                <a:ea typeface="+mn-ea"/>
+                <a:cs typeface="+mn-cs"/>
+              </a:defRPr>
+            </a:lvl1pPr>
+            <a:lvl2pPr marL="514350" indent="-171450" algn="l" defTabSz="685800" rtl="0" eaLnBrk="1" latinLnBrk="0" hangingPunct="1">
+              <a:lnSpc>
+                <a:spcPct val="90000"/>
+              </a:lnSpc>
+              <a:spcBef>
+                <a:spcPts val="375"/>
+              </a:spcBef>
+              <a:buFont typeface="Arial" panose="020B0604020202020204" pitchFamily="34" charset="0"/>
+              <a:buChar char="•"/>
+              <a:defRPr sz="1500" kern="1200">
+                <a:solidFill>
+                  <a:schemeClr val="tx1"/>
+                </a:solidFill>
+                <a:latin typeface="+mn-lt"/>
+                <a:ea typeface="+mn-ea"/>
+                <a:cs typeface="+mn-cs"/>
+              </a:defRPr>
+            </a:lvl2pPr>
+            <a:lvl3pPr marL="857250" indent="-171450" algn="l" defTabSz="685800" rtl="0" eaLnBrk="1" latinLnBrk="0" hangingPunct="1">
+              <a:lnSpc>
+                <a:spcPct val="90000"/>
+              </a:lnSpc>
+              <a:spcBef>
+                <a:spcPts val="375"/>
+              </a:spcBef>
+              <a:buFont typeface="Arial" panose="020B0604020202020204" pitchFamily="34" charset="0"/>
+              <a:buChar char="•"/>
+              <a:defRPr sz="1350" kern="1200">
+                <a:solidFill>
+                  <a:schemeClr val="tx1"/>
+                </a:solidFill>
+                <a:latin typeface="+mn-lt"/>
+                <a:ea typeface="+mn-ea"/>
+                <a:cs typeface="+mn-cs"/>
+              </a:defRPr>
+            </a:lvl3pPr>
+            <a:lvl4pPr marL="1200150" indent="-171450" algn="l" defTabSz="685800" rtl="0" eaLnBrk="1" latinLnBrk="0" hangingPunct="1">
+              <a:lnSpc>
+                <a:spcPct val="90000"/>
+              </a:lnSpc>
+              <a:spcBef>
+                <a:spcPts val="375"/>
+              </a:spcBef>
+              <a:buFont typeface="Arial" panose="020B0604020202020204" pitchFamily="34" charset="0"/>
+              <a:buChar char="•"/>
+              <a:defRPr sz="1200" kern="1200">
+                <a:solidFill>
+                  <a:schemeClr val="tx1"/>
+                </a:solidFill>
+                <a:latin typeface="+mn-lt"/>
+                <a:ea typeface="+mn-ea"/>
+                <a:cs typeface="+mn-cs"/>
+              </a:defRPr>
+            </a:lvl4pPr>
+            <a:lvl5pPr marL="1543050" indent="-171450" algn="l" defTabSz="685800" rtl="0" eaLnBrk="1" latinLnBrk="0" hangingPunct="1">
+              <a:lnSpc>
+                <a:spcPct val="90000"/>
+              </a:lnSpc>
+              <a:spcBef>
+                <a:spcPts val="375"/>
+              </a:spcBef>
+              <a:buFont typeface="Arial" panose="020B0604020202020204" pitchFamily="34" charset="0"/>
+              <a:buChar char="•"/>
+              <a:defRPr sz="1200" kern="1200">
+                <a:solidFill>
+                  <a:schemeClr val="tx1"/>
+                </a:solidFill>
+                <a:latin typeface="+mn-lt"/>
+                <a:ea typeface="+mn-ea"/>
+                <a:cs typeface="+mn-cs"/>
+              </a:defRPr>
+            </a:lvl5pPr>
+            <a:lvl6pPr marL="1885950" indent="-171450" algn="l" defTabSz="685800" rtl="0" eaLnBrk="1" latinLnBrk="0" hangingPunct="1">
+              <a:lnSpc>
+                <a:spcPct val="90000"/>
+              </a:lnSpc>
+              <a:spcBef>
+                <a:spcPts val="375"/>
+              </a:spcBef>
+              <a:buFont typeface="Arial" panose="020B0604020202020204" pitchFamily="34" charset="0"/>
+              <a:buChar char="•"/>
+              <a:defRPr sz="1050" kern="1200">
+                <a:solidFill>
+                  <a:schemeClr val="tx1"/>
+                </a:solidFill>
+                <a:latin typeface="+mn-lt"/>
+                <a:ea typeface="+mn-ea"/>
+                <a:cs typeface="+mn-cs"/>
+              </a:defRPr>
+            </a:lvl6pPr>
+            <a:lvl7pPr marL="2228850" indent="-171450" algn="l" defTabSz="685800" rtl="0" eaLnBrk="1" latinLnBrk="0" hangingPunct="1">
+              <a:lnSpc>
+                <a:spcPct val="90000"/>
+              </a:lnSpc>
+              <a:spcBef>
+                <a:spcPts val="375"/>
+              </a:spcBef>
+              <a:buFont typeface="Arial" panose="020B0604020202020204" pitchFamily="34" charset="0"/>
+              <a:buChar char="•"/>
+              <a:defRPr sz="1050" kern="1200">
+                <a:solidFill>
+                  <a:schemeClr val="tx1"/>
+                </a:solidFill>
+                <a:latin typeface="+mn-lt"/>
+                <a:ea typeface="+mn-ea"/>
+                <a:cs typeface="+mn-cs"/>
+              </a:defRPr>
+            </a:lvl7pPr>
+            <a:lvl8pPr marL="2571750" indent="-171450" algn="l" defTabSz="685800" rtl="0" eaLnBrk="1" latinLnBrk="0" hangingPunct="1">
+              <a:lnSpc>
+                <a:spcPct val="90000"/>
+              </a:lnSpc>
+              <a:spcBef>
+                <a:spcPts val="375"/>
+              </a:spcBef>
+              <a:buFont typeface="Arial" panose="020B0604020202020204" pitchFamily="34" charset="0"/>
+              <a:buChar char="•"/>
+              <a:defRPr sz="1050" kern="1200">
+                <a:solidFill>
+                  <a:schemeClr val="tx1"/>
+                </a:solidFill>
+                <a:latin typeface="+mn-lt"/>
+                <a:ea typeface="+mn-ea"/>
+                <a:cs typeface="+mn-cs"/>
+              </a:defRPr>
+            </a:lvl8pPr>
+            <a:lvl9pPr marL="2914650" indent="-171450" algn="l" defTabSz="685800" rtl="0" eaLnBrk="1" latinLnBrk="0" hangingPunct="1">
+              <a:lnSpc>
+                <a:spcPct val="90000"/>
+              </a:lnSpc>
+              <a:spcBef>
+                <a:spcPts val="375"/>
+              </a:spcBef>
+              <a:buFont typeface="Arial" panose="020B0604020202020204" pitchFamily="34" charset="0"/>
+              <a:buChar char="•"/>
+              <a:defRPr sz="1050" kern="1200">
+                <a:solidFill>
+                  <a:schemeClr val="tx1"/>
+                </a:solidFill>
+                <a:latin typeface="+mn-lt"/>
+                <a:ea typeface="+mn-ea"/>
+                <a:cs typeface="+mn-cs"/>
+              </a:defRPr>
+            </a:lvl9pPr>
+          </a:lstStyle>
+          <a:p>
+            <a:pPr marL="0" indent="0" fontAlgn="auto">
+              <a:lnSpc>
+                <a:spcPct val="110000"/>
+              </a:lnSpc>
+              <a:spcAft>
+                <a:spcPts val="0"/>
+              </a:spcAft>
+              <a:buNone/>
+            </a:pPr>
+            <a:r>
+              <a:rPr lang="en-IE" dirty="0"/>
+              <a:t>-- | Parse a letter (a-z, A-Z).</a:t>
+            </a:r>
+          </a:p>
+          <a:p>
+            <a:pPr marL="0" indent="0" fontAlgn="auto">
+              <a:lnSpc>
+                <a:spcPct val="110000"/>
+              </a:lnSpc>
+              <a:spcAft>
+                <a:spcPts val="0"/>
+              </a:spcAft>
+              <a:buNone/>
+            </a:pPr>
+            <a:r>
+              <a:rPr lang="en-IE" dirty="0"/>
+              <a:t>letter :: Parser Char</a:t>
+            </a:r>
+          </a:p>
+          <a:p>
+            <a:pPr marL="0" indent="0" fontAlgn="auto">
+              <a:lnSpc>
+                <a:spcPct val="110000"/>
+              </a:lnSpc>
+              <a:spcAft>
+                <a:spcPts val="0"/>
+              </a:spcAft>
+              <a:buNone/>
+            </a:pPr>
+            <a:r>
+              <a:rPr lang="en-IE" dirty="0"/>
+              <a:t>letter = satisfy </a:t>
+            </a:r>
+            <a:r>
+              <a:rPr lang="en-IE" dirty="0" err="1"/>
+              <a:t>isAlpha</a:t>
+            </a:r>
+            <a:r>
+              <a:rPr lang="en-IE" dirty="0"/>
+              <a:t> "letter"</a:t>
+            </a:r>
+          </a:p>
+        </p:txBody>
+      </p:sp>
+    </p:spTree>
+    <p:extLst>
+      <p:ext uri="{BB962C8B-B14F-4D97-AF65-F5344CB8AC3E}">
+        <p14:creationId xmlns:p14="http://schemas.microsoft.com/office/powerpoint/2010/main" val="47649786"/>
+      </p:ext>
+    </p:extLst>
+  </p:cSld>
+  <p:clrMapOvr>
+    <a:masterClrMapping/>
+  </p:clrMapOvr>
+</p:sld>
+</file>
+
+<file path=ppt/slides/slide12.xml><?xml version="1.0" encoding="utf-8"?>
+<p:sld xmlns:a="http://schemas.openxmlformats.org/drawingml/2006/main" xmlns:r="http://schemas.openxmlformats.org/officeDocument/2006/relationships" xmlns:p="http://schemas.openxmlformats.org/presentationml/2006/main">
+  <p:cSld>
+    <p:spTree>
+      <p:nvGrpSpPr>
+        <p:cNvPr id="1" name=""/>
+        <p:cNvGrpSpPr/>
+        <p:nvPr/>
+      </p:nvGrpSpPr>
+      <p:grpSpPr>
+        <a:xfrm>
+          <a:off x="0" y="0"/>
+          <a:ext cx="0" cy="0"/>
+          <a:chOff x="0" y="0"/>
+          <a:chExt cx="0" cy="0"/>
+        </a:xfrm>
+      </p:grpSpPr>
+      <p:sp>
+        <p:nvSpPr>
+          <p:cNvPr id="2" name="Title 1">
+            <a:extLst>
+              <a:ext uri="{FF2B5EF4-FFF2-40B4-BE49-F238E27FC236}">
+                <a16:creationId xmlns:a16="http://schemas.microsoft.com/office/drawing/2014/main" id="{15964606-1AF0-41A1-5D68-31F2ACEAA4AD}"/>
+              </a:ext>
+            </a:extLst>
+          </p:cNvPr>
+          <p:cNvSpPr>
+            <a:spLocks noGrp="1"/>
+          </p:cNvSpPr>
+          <p:nvPr>
+            <p:ph type="title"/>
+          </p:nvPr>
+        </p:nvSpPr>
+        <p:spPr/>
+        <p:txBody>
+          <a:bodyPr/>
+          <a:lstStyle/>
+          <a:p>
+            <a:r>
+              <a:rPr lang="en-US" dirty="0"/>
+              <a:t>Run a parser</a:t>
+            </a:r>
+          </a:p>
+        </p:txBody>
+      </p:sp>
+      <p:sp>
+        <p:nvSpPr>
+          <p:cNvPr id="4" name="Slide Number Placeholder 3">
+            <a:extLst>
+              <a:ext uri="{FF2B5EF4-FFF2-40B4-BE49-F238E27FC236}">
+                <a16:creationId xmlns:a16="http://schemas.microsoft.com/office/drawing/2014/main" id="{06697D49-6C16-D9CA-140C-60101718B1A5}"/>
+              </a:ext>
+            </a:extLst>
+          </p:cNvPr>
+          <p:cNvSpPr>
+            <a:spLocks noGrp="1"/>
+          </p:cNvSpPr>
+          <p:nvPr>
+            <p:ph type="sldNum" sz="quarter" idx="12"/>
+          </p:nvPr>
+        </p:nvSpPr>
+        <p:spPr/>
+        <p:txBody>
+          <a:bodyPr/>
+          <a:lstStyle/>
+          <a:p>
+            <a:pPr>
+              <a:defRPr/>
+            </a:pPr>
+            <a:fld id="{6BCA5543-1E1F-F043-9EBC-BC37C93D4920}" type="slidenum">
+              <a:rPr lang="en-US" smtClean="0"/>
+              <a:pPr>
+                <a:defRPr/>
+              </a:pPr>
+              <a:t>11</a:t>
+            </a:fld>
+            <a:endParaRPr lang="en-US"/>
+          </a:p>
+        </p:txBody>
+      </p:sp>
+      <p:sp>
+        <p:nvSpPr>
+          <p:cNvPr id="6" name="TextBox 5">
+            <a:extLst>
+              <a:ext uri="{FF2B5EF4-FFF2-40B4-BE49-F238E27FC236}">
+                <a16:creationId xmlns:a16="http://schemas.microsoft.com/office/drawing/2014/main" id="{9A419A8E-081E-482D-5A5F-5F40C901CAA9}"/>
+              </a:ext>
+            </a:extLst>
+          </p:cNvPr>
+          <p:cNvSpPr txBox="1"/>
+          <p:nvPr/>
+        </p:nvSpPr>
+        <p:spPr>
+          <a:xfrm>
+            <a:off x="1230922" y="2762944"/>
+            <a:ext cx="5908431" cy="954107"/>
+          </a:xfrm>
+          <a:prstGeom prst="rect">
+            <a:avLst/>
+          </a:prstGeom>
+          <a:solidFill>
+            <a:schemeClr val="accent1"/>
+          </a:solidFill>
+        </p:spPr>
+        <p:txBody>
+          <a:bodyPr wrap="square">
+            <a:spAutoFit/>
+          </a:bodyPr>
+          <a:lstStyle/>
+          <a:p>
+            <a:r>
+              <a:rPr lang="en-IE" dirty="0"/>
+              <a:t>print $ </a:t>
+            </a:r>
+            <a:r>
+              <a:rPr lang="en-IE" dirty="0" err="1"/>
+              <a:t>runParser</a:t>
+            </a:r>
+            <a:r>
+              <a:rPr lang="en-IE" dirty="0"/>
+              <a:t> (</a:t>
+            </a:r>
+            <a:r>
+              <a:rPr lang="en-IE" dirty="0" err="1"/>
+              <a:t>charP</a:t>
+            </a:r>
+            <a:r>
+              <a:rPr lang="en-IE" dirty="0"/>
+              <a:t> 'a') "</a:t>
+            </a:r>
+            <a:r>
+              <a:rPr lang="en-IE" dirty="0" err="1"/>
+              <a:t>abc</a:t>
+            </a:r>
+            <a:r>
+              <a:rPr lang="en-IE" dirty="0"/>
+              <a:t>"</a:t>
+            </a:r>
+          </a:p>
+          <a:p>
+            <a:r>
+              <a:rPr lang="en-IE" dirty="0"/>
+              <a:t>print $ </a:t>
+            </a:r>
+            <a:r>
+              <a:rPr lang="en-IE" dirty="0" err="1"/>
+              <a:t>runParser</a:t>
+            </a:r>
+            <a:r>
+              <a:rPr lang="en-IE" dirty="0"/>
+              <a:t> (</a:t>
+            </a:r>
+            <a:r>
+              <a:rPr lang="en-IE" dirty="0" err="1"/>
+              <a:t>charP</a:t>
+            </a:r>
+            <a:r>
+              <a:rPr lang="en-IE" dirty="0"/>
+              <a:t> 'x') "</a:t>
+            </a:r>
+            <a:r>
+              <a:rPr lang="en-IE" dirty="0" err="1"/>
+              <a:t>abc</a:t>
+            </a:r>
+            <a:r>
+              <a:rPr lang="en-IE" dirty="0"/>
+              <a:t>"</a:t>
+            </a:r>
+          </a:p>
+        </p:txBody>
+      </p:sp>
+      <p:pic>
+        <p:nvPicPr>
+          <p:cNvPr id="7" name="Picture 6">
+            <a:extLst>
+              <a:ext uri="{FF2B5EF4-FFF2-40B4-BE49-F238E27FC236}">
+                <a16:creationId xmlns:a16="http://schemas.microsoft.com/office/drawing/2014/main" id="{46C4FCD7-5269-D08D-D56B-03E2F690C571}"/>
+              </a:ext>
+            </a:extLst>
+          </p:cNvPr>
+          <p:cNvPicPr>
+            <a:picLocks noChangeAspect="1"/>
+          </p:cNvPicPr>
+          <p:nvPr/>
+        </p:nvPicPr>
+        <p:blipFill>
+          <a:blip r:embed="rId2"/>
+          <a:stretch>
+            <a:fillRect/>
+          </a:stretch>
+        </p:blipFill>
+        <p:spPr>
+          <a:xfrm>
+            <a:off x="1230922" y="4602080"/>
+            <a:ext cx="4579155" cy="756556"/>
+          </a:xfrm>
+          <a:prstGeom prst="rect">
+            <a:avLst/>
+          </a:prstGeom>
+        </p:spPr>
+      </p:pic>
+      <p:sp>
+        <p:nvSpPr>
+          <p:cNvPr id="8" name="TextBox 7">
+            <a:extLst>
+              <a:ext uri="{FF2B5EF4-FFF2-40B4-BE49-F238E27FC236}">
+                <a16:creationId xmlns:a16="http://schemas.microsoft.com/office/drawing/2014/main" id="{8EA5822E-D349-FED9-F8B6-E09CC202D67D}"/>
+              </a:ext>
+            </a:extLst>
+          </p:cNvPr>
+          <p:cNvSpPr txBox="1"/>
+          <p:nvPr/>
+        </p:nvSpPr>
+        <p:spPr>
+          <a:xfrm>
+            <a:off x="1336431" y="3897955"/>
+            <a:ext cx="1820008" cy="523220"/>
+          </a:xfrm>
+          <a:prstGeom prst="rect">
+            <a:avLst/>
+          </a:prstGeom>
+          <a:noFill/>
+        </p:spPr>
+        <p:txBody>
+          <a:bodyPr wrap="square" rtlCol="0">
+            <a:spAutoFit/>
+          </a:bodyPr>
+          <a:lstStyle/>
+          <a:p>
+            <a:r>
+              <a:rPr lang="en-US" dirty="0"/>
+              <a:t>returns:</a:t>
+            </a:r>
+          </a:p>
+        </p:txBody>
+      </p:sp>
+    </p:spTree>
+    <p:extLst>
+      <p:ext uri="{BB962C8B-B14F-4D97-AF65-F5344CB8AC3E}">
+        <p14:creationId xmlns:p14="http://schemas.microsoft.com/office/powerpoint/2010/main" val="4211363429"/>
+      </p:ext>
+    </p:extLst>
+  </p:cSld>
+  <p:clrMapOvr>
+    <a:masterClrMapping/>
+  </p:clrMapOvr>
+  <p:timing>
+    <p:tnLst>
+      <p:par>
+        <p:cTn id="1" dur="indefinite" restart="never" nodeType="tmRoot">
+          <p:childTnLst>
+            <p:seq concurrent="1" nextAc="seek">
+              <p:cTn id="2" dur="indefinite" nodeType="mainSeq">
+                <p:childTnLst>
+                  <p:par>
+                    <p:cTn id="3" fill="hold">
+                      <p:stCondLst>
+                        <p:cond delay="indefinite"/>
+                      </p:stCondLst>
+                      <p:childTnLst>
+                        <p:par>
+                          <p:cTn id="4" fill="hold">
+                            <p:stCondLst>
+                              <p:cond delay="0"/>
+                            </p:stCondLst>
+                            <p:childTnLst>
+                              <p:par>
+                                <p:cTn id="5" presetID="2" presetClass="entr" presetSubtype="4" fill="hold" grpId="0" nodeType="clickEffect">
+                                  <p:stCondLst>
+                                    <p:cond delay="0"/>
+                                  </p:stCondLst>
+                                  <p:childTnLst>
+                                    <p:set>
+                                      <p:cBhvr>
+                                        <p:cTn id="6" dur="1" fill="hold">
+                                          <p:stCondLst>
+                                            <p:cond delay="0"/>
+                                          </p:stCondLst>
+                                        </p:cTn>
+                                        <p:tgtEl>
+                                          <p:spTgt spid="8"/>
+                                        </p:tgtEl>
+                                        <p:attrNameLst>
+                                          <p:attrName>style.visibility</p:attrName>
+                                        </p:attrNameLst>
+                                      </p:cBhvr>
+                                      <p:to>
+                                        <p:strVal val="visible"/>
+                                      </p:to>
+                                    </p:set>
+                                    <p:anim calcmode="lin" valueType="num">
+                                      <p:cBhvr additive="base">
+                                        <p:cTn id="7" dur="500" fill="hold"/>
+                                        <p:tgtEl>
+                                          <p:spTgt spid="8"/>
+                                        </p:tgtEl>
+                                        <p:attrNameLst>
+                                          <p:attrName>ppt_x</p:attrName>
+                                        </p:attrNameLst>
+                                      </p:cBhvr>
+                                      <p:tavLst>
+                                        <p:tav tm="0">
+                                          <p:val>
+                                            <p:strVal val="#ppt_x"/>
+                                          </p:val>
+                                        </p:tav>
+                                        <p:tav tm="100000">
+                                          <p:val>
+                                            <p:strVal val="#ppt_x"/>
+                                          </p:val>
+                                        </p:tav>
+                                      </p:tavLst>
+                                    </p:anim>
+                                    <p:anim calcmode="lin" valueType="num">
+                                      <p:cBhvr additive="base">
+                                        <p:cTn id="8" dur="500" fill="hold"/>
+                                        <p:tgtEl>
+                                          <p:spTgt spid="8"/>
+                                        </p:tgtEl>
+                                        <p:attrNameLst>
+                                          <p:attrName>ppt_y</p:attrName>
+                                        </p:attrNameLst>
+                                      </p:cBhvr>
+                                      <p:tavLst>
+                                        <p:tav tm="0">
+                                          <p:val>
+                                            <p:strVal val="1+#ppt_h/2"/>
+                                          </p:val>
+                                        </p:tav>
+                                        <p:tav tm="100000">
+                                          <p:val>
+                                            <p:strVal val="#ppt_y"/>
+                                          </p:val>
+                                        </p:tav>
+                                      </p:tavLst>
+                                    </p:anim>
+                                  </p:childTnLst>
+                                </p:cTn>
+                              </p:par>
+                            </p:childTnLst>
+                          </p:cTn>
+                        </p:par>
+                      </p:childTnLst>
+                    </p:cTn>
+                  </p:par>
+                  <p:par>
+                    <p:cTn id="9" fill="hold">
+                      <p:stCondLst>
+                        <p:cond delay="indefinite"/>
+                      </p:stCondLst>
+                      <p:childTnLst>
+                        <p:par>
+                          <p:cTn id="10" fill="hold">
+                            <p:stCondLst>
+                              <p:cond delay="0"/>
+                            </p:stCondLst>
+                            <p:childTnLst>
+                              <p:par>
+                                <p:cTn id="11" presetID="2" presetClass="entr" presetSubtype="4" fill="hold" nodeType="clickEffect">
+                                  <p:stCondLst>
+                                    <p:cond delay="0"/>
+                                  </p:stCondLst>
+                                  <p:childTnLst>
+                                    <p:set>
+                                      <p:cBhvr>
+                                        <p:cTn id="12" dur="1" fill="hold">
+                                          <p:stCondLst>
+                                            <p:cond delay="0"/>
+                                          </p:stCondLst>
+                                        </p:cTn>
+                                        <p:tgtEl>
+                                          <p:spTgt spid="7"/>
+                                        </p:tgtEl>
+                                        <p:attrNameLst>
+                                          <p:attrName>style.visibility</p:attrName>
+                                        </p:attrNameLst>
+                                      </p:cBhvr>
+                                      <p:to>
+                                        <p:strVal val="visible"/>
+                                      </p:to>
+                                    </p:set>
+                                    <p:anim calcmode="lin" valueType="num">
+                                      <p:cBhvr additive="base">
+                                        <p:cTn id="13" dur="500" fill="hold"/>
+                                        <p:tgtEl>
+                                          <p:spTgt spid="7"/>
+                                        </p:tgtEl>
+                                        <p:attrNameLst>
+                                          <p:attrName>ppt_x</p:attrName>
+                                        </p:attrNameLst>
+                                      </p:cBhvr>
+                                      <p:tavLst>
+                                        <p:tav tm="0">
+                                          <p:val>
+                                            <p:strVal val="#ppt_x"/>
+                                          </p:val>
+                                        </p:tav>
+                                        <p:tav tm="100000">
+                                          <p:val>
+                                            <p:strVal val="#ppt_x"/>
+                                          </p:val>
+                                        </p:tav>
+                                      </p:tavLst>
+                                    </p:anim>
+                                    <p:anim calcmode="lin" valueType="num">
+                                      <p:cBhvr additive="base">
+                                        <p:cTn id="14" dur="500" fill="hold"/>
+                                        <p:tgtEl>
+                                          <p:spTgt spid="7"/>
+                                        </p:tgtEl>
+                                        <p:attrNameLst>
+                                          <p:attrName>ppt_y</p:attrName>
+                                        </p:attrNameLst>
+                                      </p:cBhvr>
+                                      <p:tavLst>
+                                        <p:tav tm="0">
+                                          <p:val>
+                                            <p:strVal val="1+#ppt_h/2"/>
+                                          </p:val>
+                                        </p:tav>
+                                        <p:tav tm="100000">
+                                          <p:val>
+                                            <p:strVal val="#ppt_y"/>
+                                          </p:val>
+                                        </p:tav>
+                                      </p:tavLst>
+                                    </p:anim>
+                                  </p:childTnLst>
+                                </p:cTn>
+                              </p:par>
+                            </p:childTnLst>
+                          </p:cTn>
+                        </p:par>
+                      </p:childTnLst>
+                    </p:cTn>
+                  </p:par>
+                </p:childTnLst>
+              </p:cTn>
+              <p:prevCondLst>
+                <p:cond evt="onPrev" delay="0">
+                  <p:tgtEl>
+                    <p:sldTgt/>
+                  </p:tgtEl>
+                </p:cond>
+              </p:prevCondLst>
+              <p:nextCondLst>
+                <p:cond evt="onNext" delay="0">
+                  <p:tgtEl>
+                    <p:sldTgt/>
+                  </p:tgtEl>
+                </p:cond>
+              </p:nextCondLst>
+            </p:seq>
+          </p:childTnLst>
+        </p:cTn>
+      </p:par>
+    </p:tnLst>
+    <p:bldLst>
+      <p:bldP spid="8" grpId="0"/>
+    </p:bldLst>
+  </p:timing>
+</p:sld>
+</file>
+
+<file path=ppt/slides/slide13.xml><?xml version="1.0" encoding="utf-8"?>
+<p:sld xmlns:a="http://schemas.openxmlformats.org/drawingml/2006/main" xmlns:r="http://schemas.openxmlformats.org/officeDocument/2006/relationships" xmlns:p="http://schemas.openxmlformats.org/presentationml/2006/main">
+  <p:cSld>
+    <p:spTree>
+      <p:nvGrpSpPr>
+        <p:cNvPr id="1" name=""/>
+        <p:cNvGrpSpPr/>
+        <p:nvPr/>
+      </p:nvGrpSpPr>
+      <p:grpSpPr>
+        <a:xfrm>
+          <a:off x="0" y="0"/>
+          <a:ext cx="0" cy="0"/>
+          <a:chOff x="0" y="0"/>
+          <a:chExt cx="0" cy="0"/>
+        </a:xfrm>
+      </p:grpSpPr>
+      <p:pic>
+        <p:nvPicPr>
+          <p:cNvPr id="42" name="Picture 41" descr="Text&#10;&#10;Description automatically generated">
+            <a:extLst>
+              <a:ext uri="{FF2B5EF4-FFF2-40B4-BE49-F238E27FC236}">
+                <a16:creationId xmlns:a16="http://schemas.microsoft.com/office/drawing/2014/main" id="{2C6DED11-E24C-1747-9B8B-24AF63DEAB2F}"/>
+              </a:ext>
+            </a:extLst>
+          </p:cNvPr>
+          <p:cNvPicPr>
+            <a:picLocks noChangeAspect="1"/>
+          </p:cNvPicPr>
+          <p:nvPr/>
+        </p:nvPicPr>
+        <p:blipFill>
+          <a:blip r:embed="rId2"/>
+          <a:stretch>
+            <a:fillRect/>
+          </a:stretch>
+        </p:blipFill>
+        <p:spPr>
+          <a:xfrm>
+            <a:off x="1171136" y="1012380"/>
+            <a:ext cx="6359526" cy="4833240"/>
+          </a:xfrm>
+          <a:prstGeom prst="rect">
+            <a:avLst/>
+          </a:prstGeom>
+          <a:noFill/>
+        </p:spPr>
+      </p:pic>
+      <p:sp>
+        <p:nvSpPr>
+          <p:cNvPr id="16385" name="Slide Number Placeholder 2"/>
+          <p:cNvSpPr>
+            <a:spLocks noGrp="1"/>
+          </p:cNvSpPr>
+          <p:nvPr>
+            <p:ph type="sldNum" sz="quarter" idx="12"/>
+          </p:nvPr>
+        </p:nvSpPr>
+        <p:spPr>
+          <a:extLst>
+            <a:ext uri="{909E8E84-426E-40dd-AFC4-6F175D3DCCD1}">
               <a14:hiddenFill xmlns:a14="http://schemas.microsoft.com/office/drawing/2010/main" xmlns="">
                 <a:solidFill>
                   <a:srgbClr val="FFFFFF"/>
@@ -9285,11 +10904,146 @@
             </a:ext>
           </a:extLst>
         </p:spPr>
-      </p:pic>
+        <p:txBody>
+          <a:bodyPr wrap="square" anchor="t">
+            <a:normAutofit/>
+          </a:bodyPr>
+          <a:lstStyle>
+            <a:lvl1pPr>
+              <a:defRPr sz="2100">
+                <a:solidFill>
+                  <a:schemeClr val="tx1"/>
+                </a:solidFill>
+                <a:latin typeface="Tahoma" charset="0"/>
+                <a:ea typeface="ＭＳ Ｐゴシック" charset="0"/>
+                <a:cs typeface="ＭＳ Ｐゴシック" charset="0"/>
+              </a:defRPr>
+            </a:lvl1pPr>
+            <a:lvl2pPr marL="557213" indent="-214313">
+              <a:defRPr sz="2100">
+                <a:solidFill>
+                  <a:schemeClr val="tx1"/>
+                </a:solidFill>
+                <a:latin typeface="Tahoma" charset="0"/>
+                <a:ea typeface="ＭＳ Ｐゴシック" charset="0"/>
+              </a:defRPr>
+            </a:lvl2pPr>
+            <a:lvl3pPr marL="857250" indent="-171450">
+              <a:defRPr sz="2100">
+                <a:solidFill>
+                  <a:schemeClr val="tx1"/>
+                </a:solidFill>
+                <a:latin typeface="Tahoma" charset="0"/>
+                <a:ea typeface="ＭＳ Ｐゴシック" charset="0"/>
+              </a:defRPr>
+            </a:lvl3pPr>
+            <a:lvl4pPr marL="1200150" indent="-171450">
+              <a:defRPr sz="2100">
+                <a:solidFill>
+                  <a:schemeClr val="tx1"/>
+                </a:solidFill>
+                <a:latin typeface="Tahoma" charset="0"/>
+                <a:ea typeface="ＭＳ Ｐゴシック" charset="0"/>
+              </a:defRPr>
+            </a:lvl4pPr>
+            <a:lvl5pPr marL="1543050" indent="-171450">
+              <a:defRPr sz="2100">
+                <a:solidFill>
+                  <a:schemeClr val="tx1"/>
+                </a:solidFill>
+                <a:latin typeface="Tahoma" charset="0"/>
+                <a:ea typeface="ＭＳ Ｐゴシック" charset="0"/>
+              </a:defRPr>
+            </a:lvl5pPr>
+            <a:lvl6pPr marL="1885950" indent="-171450" eaLnBrk="0" fontAlgn="base" hangingPunct="0">
+              <a:spcBef>
+                <a:spcPct val="0"/>
+              </a:spcBef>
+              <a:spcAft>
+                <a:spcPct val="0"/>
+              </a:spcAft>
+              <a:defRPr sz="2100">
+                <a:solidFill>
+                  <a:schemeClr val="tx1"/>
+                </a:solidFill>
+                <a:latin typeface="Tahoma" charset="0"/>
+                <a:ea typeface="ＭＳ Ｐゴシック" charset="0"/>
+              </a:defRPr>
+            </a:lvl6pPr>
+            <a:lvl7pPr marL="2228850" indent="-171450" eaLnBrk="0" fontAlgn="base" hangingPunct="0">
+              <a:spcBef>
+                <a:spcPct val="0"/>
+              </a:spcBef>
+              <a:spcAft>
+                <a:spcPct val="0"/>
+              </a:spcAft>
+              <a:defRPr sz="2100">
+                <a:solidFill>
+                  <a:schemeClr val="tx1"/>
+                </a:solidFill>
+                <a:latin typeface="Tahoma" charset="0"/>
+                <a:ea typeface="ＭＳ Ｐゴシック" charset="0"/>
+              </a:defRPr>
+            </a:lvl7pPr>
+            <a:lvl8pPr marL="2571750" indent="-171450" eaLnBrk="0" fontAlgn="base" hangingPunct="0">
+              <a:spcBef>
+                <a:spcPct val="0"/>
+              </a:spcBef>
+              <a:spcAft>
+                <a:spcPct val="0"/>
+              </a:spcAft>
+              <a:defRPr sz="2100">
+                <a:solidFill>
+                  <a:schemeClr val="tx1"/>
+                </a:solidFill>
+                <a:latin typeface="Tahoma" charset="0"/>
+                <a:ea typeface="ＭＳ Ｐゴシック" charset="0"/>
+              </a:defRPr>
+            </a:lvl8pPr>
+            <a:lvl9pPr marL="2914650" indent="-171450" eaLnBrk="0" fontAlgn="base" hangingPunct="0">
+              <a:spcBef>
+                <a:spcPct val="0"/>
+              </a:spcBef>
+              <a:spcAft>
+                <a:spcPct val="0"/>
+              </a:spcAft>
+              <a:defRPr sz="2100">
+                <a:solidFill>
+                  <a:schemeClr val="tx1"/>
+                </a:solidFill>
+                <a:latin typeface="Tahoma" charset="0"/>
+                <a:ea typeface="ＭＳ Ｐゴシック" charset="0"/>
+              </a:defRPr>
+            </a:lvl9pPr>
+          </a:lstStyle>
+          <a:p>
+            <a:pPr>
+              <a:spcAft>
+                <a:spcPts val="450"/>
+              </a:spcAft>
+            </a:pPr>
+            <a:fld id="{CC73A6B6-49ED-C641-8D95-0A84FA800C15}" type="slidenum">
+              <a:rPr lang="en-US" sz="1050"/>
+              <a:pPr>
+                <a:spcAft>
+                  <a:spcPts val="450"/>
+                </a:spcAft>
+              </a:pPr>
+              <a:t>12</a:t>
+            </a:fld>
+            <a:endParaRPr lang="en-US" sz="1050"/>
+          </a:p>
+        </p:txBody>
+      </p:sp>
     </p:spTree>
+    <p:extLst>
+      <p:ext uri="{BB962C8B-B14F-4D97-AF65-F5344CB8AC3E}">
+        <p14:creationId xmlns:p14="http://schemas.microsoft.com/office/powerpoint/2010/main" val="1205145016"/>
+      </p:ext>
+    </p:extLst>
   </p:cSld>
   <p:clrMapOvr>
-    <a:overrideClrMapping bg1="dk1" tx1="lt1" bg2="dk2" tx2="lt2" accent1="accent1" accent2="accent2" accent3="accent3" accent4="accent4" accent5="accent5" accent6="accent6" hlink="hlink" folHlink="folHlink"/>
+    <a:masterClrMapping/>
   </p:clrMapOvr>
 </p:sld>
 </file>
@@ -9434,14 +11188,14 @@
           <a:ln/>
           <a:extLst>
             <a:ext uri="{909E8E84-426E-40dd-AFC4-6F175D3DCCD1}">
-              <a14:hiddenFill xmlns:a14="http://schemas.microsoft.com/office/drawing/2010/main" xmlns="">
+              <a14:hiddenFill xmlns="" xmlns:a14="http://schemas.microsoft.com/office/drawing/2010/main">
                 <a:solidFill>
                   <a:srgbClr val="FFFFFF"/>
                 </a:solidFill>
               </a14:hiddenFill>
             </a:ext>
             <a:ext uri="{91240B29-F687-4f45-9708-019B960494DF}">
-              <a14:hiddenLine xmlns:a14="http://schemas.microsoft.com/office/drawing/2010/main" xmlns="" w="9525">
+              <a14:hiddenLine xmlns="" xmlns:a14="http://schemas.microsoft.com/office/drawing/2010/main" w="9525">
                 <a:solidFill>
                   <a:srgbClr val="000000"/>
                 </a:solidFill>
@@ -14818,6 +16572,385 @@
           <p:cNvPr id="2" name="Title 1">
             <a:extLst>
               <a:ext uri="{FF2B5EF4-FFF2-40B4-BE49-F238E27FC236}">
+                <a16:creationId xmlns:a16="http://schemas.microsoft.com/office/drawing/2014/main" id="{AD1AF025-AA69-A7C3-F53C-CB9078411E53}"/>
+              </a:ext>
+            </a:extLst>
+          </p:cNvPr>
+          <p:cNvSpPr>
+            <a:spLocks noGrp="1"/>
+          </p:cNvSpPr>
+          <p:nvPr>
+            <p:ph type="title"/>
+          </p:nvPr>
+        </p:nvSpPr>
+        <p:spPr/>
+        <p:txBody>
+          <a:bodyPr/>
+          <a:lstStyle/>
+          <a:p>
+            <a:r>
+              <a:rPr lang="en-US" dirty="0"/>
+              <a:t>Our agenda</a:t>
+            </a:r>
+          </a:p>
+        </p:txBody>
+      </p:sp>
+      <p:sp>
+        <p:nvSpPr>
+          <p:cNvPr id="3" name="Content Placeholder 2">
+            <a:extLst>
+              <a:ext uri="{FF2B5EF4-FFF2-40B4-BE49-F238E27FC236}">
+                <a16:creationId xmlns:a16="http://schemas.microsoft.com/office/drawing/2014/main" id="{635F5A9B-48AF-EA68-056A-F5B621C0DBB4}"/>
+              </a:ext>
+            </a:extLst>
+          </p:cNvPr>
+          <p:cNvSpPr>
+            <a:spLocks noGrp="1"/>
+          </p:cNvSpPr>
+          <p:nvPr>
+            <p:ph idx="1"/>
+          </p:nvPr>
+        </p:nvSpPr>
+        <p:spPr>
+          <a:xfrm>
+            <a:off x="510241" y="2336873"/>
+            <a:ext cx="7210396" cy="2006527"/>
+          </a:xfrm>
+        </p:spPr>
+        <p:txBody>
+          <a:bodyPr/>
+          <a:lstStyle/>
+          <a:p>
+            <a:r>
+              <a:rPr lang="en-US" dirty="0"/>
+              <a:t>This Slide Deck – we look at building a minimal version of a primitive parser (parser for character </a:t>
+            </a:r>
+            <a:r>
+              <a:rPr lang="en-US" dirty="0" err="1"/>
+              <a:t>etc</a:t>
+            </a:r>
+            <a:r>
+              <a:rPr lang="en-US" dirty="0"/>
+              <a:t>) </a:t>
+            </a:r>
+          </a:p>
+          <a:p>
+            <a:endParaRPr lang="en-US" dirty="0"/>
+          </a:p>
+          <a:p>
+            <a:r>
+              <a:rPr lang="en-US" dirty="0"/>
+              <a:t>Next Slide Deck -&gt; Having seen a primitive parser, we will look at the use of a library Parser and see how this works on an XML File. </a:t>
+            </a:r>
+          </a:p>
+        </p:txBody>
+      </p:sp>
+      <p:sp>
+        <p:nvSpPr>
+          <p:cNvPr id="4" name="Slide Number Placeholder 3">
+            <a:extLst>
+              <a:ext uri="{FF2B5EF4-FFF2-40B4-BE49-F238E27FC236}">
+                <a16:creationId xmlns:a16="http://schemas.microsoft.com/office/drawing/2014/main" id="{352FC791-9212-AD84-B11A-027AEC9F561F}"/>
+              </a:ext>
+            </a:extLst>
+          </p:cNvPr>
+          <p:cNvSpPr>
+            <a:spLocks noGrp="1"/>
+          </p:cNvSpPr>
+          <p:nvPr>
+            <p:ph type="sldNum" sz="quarter" idx="12"/>
+          </p:nvPr>
+        </p:nvSpPr>
+        <p:spPr/>
+        <p:txBody>
+          <a:bodyPr/>
+          <a:lstStyle/>
+          <a:p>
+            <a:pPr>
+              <a:defRPr/>
+            </a:pPr>
+            <a:fld id="{6BCA5543-1E1F-F043-9EBC-BC37C93D4920}" type="slidenum">
+              <a:rPr lang="en-US" smtClean="0"/>
+              <a:pPr>
+                <a:defRPr/>
+              </a:pPr>
+              <a:t>4</a:t>
+            </a:fld>
+            <a:endParaRPr lang="en-US"/>
+          </a:p>
+        </p:txBody>
+      </p:sp>
+    </p:spTree>
+    <p:extLst>
+      <p:ext uri="{BB962C8B-B14F-4D97-AF65-F5344CB8AC3E}">
+        <p14:creationId xmlns:p14="http://schemas.microsoft.com/office/powerpoint/2010/main" val="195352496"/>
+      </p:ext>
+    </p:extLst>
+  </p:cSld>
+  <p:clrMapOvr>
+    <a:masterClrMapping/>
+  </p:clrMapOvr>
+  <p:timing>
+    <p:tnLst>
+      <p:par>
+        <p:cTn id="1" dur="indefinite" restart="never" nodeType="tmRoot">
+          <p:childTnLst>
+            <p:seq concurrent="1" nextAc="seek">
+              <p:cTn id="2" dur="indefinite" nodeType="mainSeq">
+                <p:childTnLst>
+                  <p:par>
+                    <p:cTn id="3" fill="hold">
+                      <p:stCondLst>
+                        <p:cond delay="indefinite"/>
+                      </p:stCondLst>
+                      <p:childTnLst>
+                        <p:par>
+                          <p:cTn id="4" fill="hold">
+                            <p:stCondLst>
+                              <p:cond delay="0"/>
+                            </p:stCondLst>
+                            <p:childTnLst>
+                              <p:par>
+                                <p:cTn id="5" presetID="2" presetClass="entr" presetSubtype="4" fill="hold" nodeType="clickEffect">
+                                  <p:stCondLst>
+                                    <p:cond delay="0"/>
+                                  </p:stCondLst>
+                                  <p:childTnLst>
+                                    <p:set>
+                                      <p:cBhvr>
+                                        <p:cTn id="6" dur="1" fill="hold">
+                                          <p:stCondLst>
+                                            <p:cond delay="0"/>
+                                          </p:stCondLst>
+                                        </p:cTn>
+                                        <p:tgtEl>
+                                          <p:spTgt spid="3">
+                                            <p:txEl>
+                                              <p:pRg st="0" end="0"/>
+                                            </p:txEl>
+                                          </p:spTgt>
+                                        </p:tgtEl>
+                                        <p:attrNameLst>
+                                          <p:attrName>style.visibility</p:attrName>
+                                        </p:attrNameLst>
+                                      </p:cBhvr>
+                                      <p:to>
+                                        <p:strVal val="visible"/>
+                                      </p:to>
+                                    </p:set>
+                                    <p:anim calcmode="lin" valueType="num">
+                                      <p:cBhvr additive="base">
+                                        <p:cTn id="7" dur="500" fill="hold"/>
+                                        <p:tgtEl>
+                                          <p:spTgt spid="3">
+                                            <p:txEl>
+                                              <p:pRg st="0" end="0"/>
+                                            </p:txEl>
+                                          </p:spTgt>
+                                        </p:tgtEl>
+                                        <p:attrNameLst>
+                                          <p:attrName>ppt_x</p:attrName>
+                                        </p:attrNameLst>
+                                      </p:cBhvr>
+                                      <p:tavLst>
+                                        <p:tav tm="0">
+                                          <p:val>
+                                            <p:strVal val="#ppt_x"/>
+                                          </p:val>
+                                        </p:tav>
+                                        <p:tav tm="100000">
+                                          <p:val>
+                                            <p:strVal val="#ppt_x"/>
+                                          </p:val>
+                                        </p:tav>
+                                      </p:tavLst>
+                                    </p:anim>
+                                    <p:anim calcmode="lin" valueType="num">
+                                      <p:cBhvr additive="base">
+                                        <p:cTn id="8" dur="500" fill="hold"/>
+                                        <p:tgtEl>
+                                          <p:spTgt spid="3">
+                                            <p:txEl>
+                                              <p:pRg st="0" end="0"/>
+                                            </p:txEl>
+                                          </p:spTgt>
+                                        </p:tgtEl>
+                                        <p:attrNameLst>
+                                          <p:attrName>ppt_y</p:attrName>
+                                        </p:attrNameLst>
+                                      </p:cBhvr>
+                                      <p:tavLst>
+                                        <p:tav tm="0">
+                                          <p:val>
+                                            <p:strVal val="1+#ppt_h/2"/>
+                                          </p:val>
+                                        </p:tav>
+                                        <p:tav tm="100000">
+                                          <p:val>
+                                            <p:strVal val="#ppt_y"/>
+                                          </p:val>
+                                        </p:tav>
+                                      </p:tavLst>
+                                    </p:anim>
+                                  </p:childTnLst>
+                                </p:cTn>
+                              </p:par>
+                            </p:childTnLst>
+                          </p:cTn>
+                        </p:par>
+                      </p:childTnLst>
+                    </p:cTn>
+                  </p:par>
+                  <p:par>
+                    <p:cTn id="9" fill="hold">
+                      <p:stCondLst>
+                        <p:cond delay="indefinite"/>
+                      </p:stCondLst>
+                      <p:childTnLst>
+                        <p:par>
+                          <p:cTn id="10" fill="hold">
+                            <p:stCondLst>
+                              <p:cond delay="0"/>
+                            </p:stCondLst>
+                            <p:childTnLst>
+                              <p:par>
+                                <p:cTn id="11" presetID="2" presetClass="entr" presetSubtype="4" fill="hold" nodeType="clickEffect">
+                                  <p:stCondLst>
+                                    <p:cond delay="0"/>
+                                  </p:stCondLst>
+                                  <p:childTnLst>
+                                    <p:set>
+                                      <p:cBhvr>
+                                        <p:cTn id="12" dur="1" fill="hold">
+                                          <p:stCondLst>
+                                            <p:cond delay="0"/>
+                                          </p:stCondLst>
+                                        </p:cTn>
+                                        <p:tgtEl>
+                                          <p:spTgt spid="3">
+                                            <p:txEl>
+                                              <p:pRg st="2" end="2"/>
+                                            </p:txEl>
+                                          </p:spTgt>
+                                        </p:tgtEl>
+                                        <p:attrNameLst>
+                                          <p:attrName>style.visibility</p:attrName>
+                                        </p:attrNameLst>
+                                      </p:cBhvr>
+                                      <p:to>
+                                        <p:strVal val="visible"/>
+                                      </p:to>
+                                    </p:set>
+                                    <p:anim calcmode="lin" valueType="num">
+                                      <p:cBhvr additive="base">
+                                        <p:cTn id="13" dur="500" fill="hold"/>
+                                        <p:tgtEl>
+                                          <p:spTgt spid="3">
+                                            <p:txEl>
+                                              <p:pRg st="2" end="2"/>
+                                            </p:txEl>
+                                          </p:spTgt>
+                                        </p:tgtEl>
+                                        <p:attrNameLst>
+                                          <p:attrName>ppt_x</p:attrName>
+                                        </p:attrNameLst>
+                                      </p:cBhvr>
+                                      <p:tavLst>
+                                        <p:tav tm="0">
+                                          <p:val>
+                                            <p:strVal val="#ppt_x"/>
+                                          </p:val>
+                                        </p:tav>
+                                        <p:tav tm="100000">
+                                          <p:val>
+                                            <p:strVal val="#ppt_x"/>
+                                          </p:val>
+                                        </p:tav>
+                                      </p:tavLst>
+                                    </p:anim>
+                                    <p:anim calcmode="lin" valueType="num">
+                                      <p:cBhvr additive="base">
+                                        <p:cTn id="14" dur="500" fill="hold"/>
+                                        <p:tgtEl>
+                                          <p:spTgt spid="3">
+                                            <p:txEl>
+                                              <p:pRg st="2" end="2"/>
+                                            </p:txEl>
+                                          </p:spTgt>
+                                        </p:tgtEl>
+                                        <p:attrNameLst>
+                                          <p:attrName>ppt_y</p:attrName>
+                                        </p:attrNameLst>
+                                      </p:cBhvr>
+                                      <p:tavLst>
+                                        <p:tav tm="0">
+                                          <p:val>
+                                            <p:strVal val="1+#ppt_h/2"/>
+                                          </p:val>
+                                        </p:tav>
+                                        <p:tav tm="100000">
+                                          <p:val>
+                                            <p:strVal val="#ppt_y"/>
+                                          </p:val>
+                                        </p:tav>
+                                      </p:tavLst>
+                                    </p:anim>
+                                  </p:childTnLst>
+                                </p:cTn>
+                              </p:par>
+                            </p:childTnLst>
+                          </p:cTn>
+                        </p:par>
+                      </p:childTnLst>
+                    </p:cTn>
+                  </p:par>
+                </p:childTnLst>
+              </p:cTn>
+              <p:prevCondLst>
+                <p:cond evt="onPrev" delay="0">
+                  <p:tgtEl>
+                    <p:sldTgt/>
+                  </p:tgtEl>
+                </p:cond>
+              </p:prevCondLst>
+              <p:nextCondLst>
+                <p:cond evt="onNext" delay="0">
+                  <p:tgtEl>
+                    <p:sldTgt/>
+                  </p:tgtEl>
+                </p:cond>
+              </p:nextCondLst>
+            </p:seq>
+          </p:childTnLst>
+        </p:cTn>
+      </p:par>
+    </p:tnLst>
+  </p:timing>
+</p:sld>
+</file>
+
+<file path=ppt/slides/slide6.xml><?xml version="1.0" encoding="utf-8"?>
+<p:sld xmlns:a="http://schemas.openxmlformats.org/drawingml/2006/main" xmlns:r="http://schemas.openxmlformats.org/officeDocument/2006/relationships" xmlns:p="http://schemas.openxmlformats.org/presentationml/2006/main">
+  <p:cSld>
+    <p:spTree>
+      <p:nvGrpSpPr>
+        <p:cNvPr id="1" name=""/>
+        <p:cNvGrpSpPr/>
+        <p:nvPr/>
+      </p:nvGrpSpPr>
+      <p:grpSpPr>
+        <a:xfrm>
+          <a:off x="0" y="0"/>
+          <a:ext cx="0" cy="0"/>
+          <a:chOff x="0" y="0"/>
+          <a:chExt cx="0" cy="0"/>
+        </a:xfrm>
+      </p:grpSpPr>
+      <p:sp>
+        <p:nvSpPr>
+          <p:cNvPr id="2" name="Title 1">
+            <a:extLst>
+              <a:ext uri="{FF2B5EF4-FFF2-40B4-BE49-F238E27FC236}">
                 <a16:creationId xmlns:a16="http://schemas.microsoft.com/office/drawing/2014/main" id="{B32C0129-2825-2ADC-0771-5C9E8FC6EF1F}"/>
               </a:ext>
             </a:extLst>
@@ -15033,7 +17166,7 @@
               <a:pPr>
                 <a:defRPr/>
               </a:pPr>
-              <a:t>4</a:t>
+              <a:t>5</a:t>
             </a:fld>
             <a:endParaRPr lang="en-US"/>
           </a:p>
@@ -15049,13 +17182,13 @@
   <p:clrMapOvr>
     <a:masterClrMapping/>
   </p:clrMapOvr>
-  <mc:AlternateContent xmlns:mc="http://schemas.openxmlformats.org/markup-compatibility/2006">
-    <mc:Choice xmlns:p159="http://schemas.microsoft.com/office/powerpoint/2015/09/main" Requires="p159">
+  <mc:AlternateContent xmlns:mc="http://schemas.openxmlformats.org/markup-compatibility/2006" xmlns:p159="http://schemas.microsoft.com/office/powerpoint/2015/09/main">
+    <mc:Choice Requires="p159">
       <p:transition xmlns:p14="http://schemas.microsoft.com/office/powerpoint/2010/main" spd="slow" p14:dur="2000">
         <p159:morph option="byObject"/>
       </p:transition>
     </mc:Choice>
-    <mc:Fallback>
+    <mc:Fallback xmlns="">
       <p:transition spd="slow">
         <p:fade/>
       </p:transition>
@@ -15064,7 +17197,7 @@
 </p:sld>
 </file>
 
-<file path=ppt/slides/slide6.xml><?xml version="1.0" encoding="utf-8"?>
+<file path=ppt/slides/slide7.xml><?xml version="1.0" encoding="utf-8"?>
 <p:sld xmlns:a="http://schemas.openxmlformats.org/drawingml/2006/main" xmlns:r="http://schemas.openxmlformats.org/officeDocument/2006/relationships" xmlns:p="http://schemas.openxmlformats.org/presentationml/2006/main">
   <p:cSld>
     <p:spTree>
@@ -15309,7 +17442,7 @@
               <a:pPr>
                 <a:defRPr/>
               </a:pPr>
-              <a:t>5</a:t>
+              <a:t>6</a:t>
             </a:fld>
             <a:endParaRPr lang="en-US"/>
           </a:p>
@@ -15678,13 +17811,13 @@
   <p:clrMapOvr>
     <a:masterClrMapping/>
   </p:clrMapOvr>
-  <mc:AlternateContent xmlns:mc="http://schemas.openxmlformats.org/markup-compatibility/2006">
-    <mc:Choice xmlns:p159="http://schemas.microsoft.com/office/powerpoint/2015/09/main" Requires="p159">
+  <mc:AlternateContent xmlns:mc="http://schemas.openxmlformats.org/markup-compatibility/2006" xmlns:p159="http://schemas.microsoft.com/office/powerpoint/2015/09/main">
+    <mc:Choice Requires="p159">
       <p:transition xmlns:p14="http://schemas.microsoft.com/office/powerpoint/2010/main" spd="slow" p14:dur="2000">
         <p159:morph option="byObject"/>
       </p:transition>
     </mc:Choice>
-    <mc:Fallback>
+    <mc:Fallback xmlns="">
       <p:transition spd="slow">
         <p:fade/>
       </p:transition>
@@ -16247,7 +18380,7 @@
 </p:sld>
 </file>
 
-<file path=ppt/slides/slide7.xml><?xml version="1.0" encoding="utf-8"?>
+<file path=ppt/slides/slide8.xml><?xml version="1.0" encoding="utf-8"?>
 <p:sld xmlns:a="http://schemas.openxmlformats.org/drawingml/2006/main" xmlns:r="http://schemas.openxmlformats.org/officeDocument/2006/relationships" xmlns:p="http://schemas.openxmlformats.org/presentationml/2006/main">
   <p:cSld>
     <p:spTree>
@@ -16345,7 +18478,7 @@
               <a:pPr>
                 <a:defRPr/>
               </a:pPr>
-              <a:t>6</a:t>
+              <a:t>7</a:t>
             </a:fld>
             <a:endParaRPr lang="en-US"/>
           </a:p>
@@ -17986,6 +20119,1403 @@
       <p:bldP spid="16" grpId="0" animBg="1"/>
       <p:bldP spid="17" grpId="0" animBg="1"/>
       <p:bldP spid="18" grpId="0" animBg="1"/>
+    </p:bldLst>
+  </p:timing>
+</p:sld>
+</file>
+
+<file path=ppt/slides/slide9.xml><?xml version="1.0" encoding="utf-8"?>
+<p:sld xmlns:a="http://schemas.openxmlformats.org/drawingml/2006/main" xmlns:r="http://schemas.openxmlformats.org/officeDocument/2006/relationships" xmlns:p="http://schemas.openxmlformats.org/presentationml/2006/main">
+  <p:cSld>
+    <p:spTree>
+      <p:nvGrpSpPr>
+        <p:cNvPr id="1" name=""/>
+        <p:cNvGrpSpPr/>
+        <p:nvPr/>
+      </p:nvGrpSpPr>
+      <p:grpSpPr>
+        <a:xfrm>
+          <a:off x="0" y="0"/>
+          <a:ext cx="0" cy="0"/>
+          <a:chOff x="0" y="0"/>
+          <a:chExt cx="0" cy="0"/>
+        </a:xfrm>
+      </p:grpSpPr>
+      <p:sp>
+        <p:nvSpPr>
+          <p:cNvPr id="2" name="Title 1">
+            <a:extLst>
+              <a:ext uri="{FF2B5EF4-FFF2-40B4-BE49-F238E27FC236}">
+                <a16:creationId xmlns:a16="http://schemas.microsoft.com/office/drawing/2014/main" id="{099CB2F2-52FE-C0F0-002C-5BE03EFA62C1}"/>
+              </a:ext>
+            </a:extLst>
+          </p:cNvPr>
+          <p:cNvSpPr>
+            <a:spLocks noGrp="1"/>
+          </p:cNvSpPr>
+          <p:nvPr>
+            <p:ph type="title"/>
+          </p:nvPr>
+        </p:nvSpPr>
+        <p:spPr>
+          <a:xfrm>
+            <a:off x="0" y="753228"/>
+            <a:ext cx="8047092" cy="1080938"/>
+          </a:xfrm>
+        </p:spPr>
+        <p:txBody>
+          <a:bodyPr>
+            <a:normAutofit fontScale="90000"/>
+          </a:bodyPr>
+          <a:lstStyle/>
+          <a:p>
+            <a:r>
+              <a:rPr lang="en-US" dirty="0">
+                <a:latin typeface="Arial Black" charset="0"/>
+                <a:ea typeface="ＭＳ Ｐゴシック" charset="0"/>
+              </a:rPr>
+              <a:t>Alternative -  Trying One Parser, Then Another</a:t>
+            </a:r>
+            <a:br>
+              <a:rPr lang="en-US" sz="2800" dirty="0"/>
+            </a:br>
+            <a:endParaRPr lang="en-US" dirty="0"/>
+          </a:p>
+        </p:txBody>
+      </p:sp>
+      <p:sp>
+        <p:nvSpPr>
+          <p:cNvPr id="4" name="Slide Number Placeholder 3">
+            <a:extLst>
+              <a:ext uri="{FF2B5EF4-FFF2-40B4-BE49-F238E27FC236}">
+                <a16:creationId xmlns:a16="http://schemas.microsoft.com/office/drawing/2014/main" id="{9E32AA33-FD74-9925-4B87-DD29FF747316}"/>
+              </a:ext>
+            </a:extLst>
+          </p:cNvPr>
+          <p:cNvSpPr>
+            <a:spLocks noGrp="1"/>
+          </p:cNvSpPr>
+          <p:nvPr>
+            <p:ph type="sldNum" sz="quarter" idx="12"/>
+          </p:nvPr>
+        </p:nvSpPr>
+        <p:spPr/>
+        <p:txBody>
+          <a:bodyPr/>
+          <a:lstStyle/>
+          <a:p>
+            <a:pPr>
+              <a:defRPr/>
+            </a:pPr>
+            <a:fld id="{6BCA5543-1E1F-F043-9EBC-BC37C93D4920}" type="slidenum">
+              <a:rPr lang="en-US" smtClean="0"/>
+              <a:pPr>
+                <a:defRPr/>
+              </a:pPr>
+              <a:t>8</a:t>
+            </a:fld>
+            <a:endParaRPr lang="en-US"/>
+          </a:p>
+        </p:txBody>
+      </p:sp>
+      <p:sp>
+        <p:nvSpPr>
+          <p:cNvPr id="7" name="Text 2">
+            <a:extLst>
+              <a:ext uri="{FF2B5EF4-FFF2-40B4-BE49-F238E27FC236}">
+                <a16:creationId xmlns:a16="http://schemas.microsoft.com/office/drawing/2014/main" id="{414481B5-7E3F-B0C6-4BE7-E9A550C147D5}"/>
+              </a:ext>
+            </a:extLst>
+          </p:cNvPr>
+          <p:cNvSpPr/>
+          <p:nvPr/>
+        </p:nvSpPr>
+        <p:spPr>
+          <a:xfrm>
+            <a:off x="2236483" y="1992254"/>
+            <a:ext cx="4663440" cy="384048"/>
+          </a:xfrm>
+          <a:prstGeom prst="rect">
+            <a:avLst/>
+          </a:prstGeom>
+          <a:noFill/>
+          <a:ln/>
+        </p:spPr>
+        <p:txBody>
+          <a:bodyPr wrap="square" rtlCol="0" anchor="ctr"/>
+          <a:lstStyle/>
+          <a:p>
+            <a:pPr marL="0" indent="0">
+              <a:buNone/>
+            </a:pPr>
+            <a:r>
+              <a:rPr lang="en-US" sz="1500" dirty="0">
+                <a:solidFill>
+                  <a:srgbClr val="1E2761"/>
+                </a:solidFill>
+                <a:latin typeface="Calibri" pitchFamily="34" charset="0"/>
+                <a:ea typeface="Calibri" pitchFamily="34" charset="-122"/>
+                <a:cs typeface="Calibri" pitchFamily="34" charset="-120"/>
+              </a:rPr>
+              <a:t>The Alternative typeclass adds two operations to a parser:</a:t>
+            </a:r>
+            <a:endParaRPr lang="en-US" sz="1500" dirty="0"/>
+          </a:p>
+        </p:txBody>
+      </p:sp>
+      <p:sp>
+        <p:nvSpPr>
+          <p:cNvPr id="8" name="Shape 3">
+            <a:extLst>
+              <a:ext uri="{FF2B5EF4-FFF2-40B4-BE49-F238E27FC236}">
+                <a16:creationId xmlns:a16="http://schemas.microsoft.com/office/drawing/2014/main" id="{6D1DCCCE-D096-FB6F-9AA8-58C397CCF7A8}"/>
+              </a:ext>
+            </a:extLst>
+          </p:cNvPr>
+          <p:cNvSpPr/>
+          <p:nvPr/>
+        </p:nvSpPr>
+        <p:spPr>
+          <a:xfrm>
+            <a:off x="356334" y="3132528"/>
+            <a:ext cx="3794760" cy="1188720"/>
+          </a:xfrm>
+          <a:prstGeom prst="rect">
+            <a:avLst/>
+          </a:prstGeom>
+          <a:solidFill>
+            <a:srgbClr val="FFFFFF"/>
+          </a:solidFill>
+          <a:ln w="12700">
+            <a:solidFill>
+              <a:srgbClr val="CADCFC"/>
+            </a:solidFill>
+            <a:prstDash val="solid"/>
+          </a:ln>
+        </p:spPr>
+        <p:txBody>
+          <a:bodyPr/>
+          <a:lstStyle/>
+          <a:p>
+            <a:endParaRPr lang="en-US"/>
+          </a:p>
+        </p:txBody>
+      </p:sp>
+      <p:sp>
+        <p:nvSpPr>
+          <p:cNvPr id="9" name="Text 5">
+            <a:extLst>
+              <a:ext uri="{FF2B5EF4-FFF2-40B4-BE49-F238E27FC236}">
+                <a16:creationId xmlns:a16="http://schemas.microsoft.com/office/drawing/2014/main" id="{FD6772EE-9D87-D39B-CF68-7E8645CF979D}"/>
+              </a:ext>
+            </a:extLst>
+          </p:cNvPr>
+          <p:cNvSpPr/>
+          <p:nvPr/>
+        </p:nvSpPr>
+        <p:spPr>
+          <a:xfrm>
+            <a:off x="424914" y="3153180"/>
+            <a:ext cx="3474720" cy="411480"/>
+          </a:xfrm>
+          <a:prstGeom prst="rect">
+            <a:avLst/>
+          </a:prstGeom>
+          <a:noFill/>
+          <a:ln/>
+        </p:spPr>
+        <p:txBody>
+          <a:bodyPr wrap="square" rtlCol="0" anchor="ctr"/>
+          <a:lstStyle/>
+          <a:p>
+            <a:pPr marL="0" indent="0">
+              <a:buNone/>
+            </a:pPr>
+            <a:r>
+              <a:rPr lang="en-US" sz="2000" b="1" dirty="0">
+                <a:solidFill>
+                  <a:srgbClr val="B71C1C"/>
+                </a:solidFill>
+                <a:latin typeface="Consolas" pitchFamily="34" charset="0"/>
+                <a:ea typeface="Consolas" pitchFamily="34" charset="-122"/>
+                <a:cs typeface="Consolas" pitchFamily="34" charset="-120"/>
+              </a:rPr>
+              <a:t>empty</a:t>
+            </a:r>
+            <a:endParaRPr lang="en-US" sz="2000" dirty="0"/>
+          </a:p>
+        </p:txBody>
+      </p:sp>
+      <p:sp>
+        <p:nvSpPr>
+          <p:cNvPr id="11" name="Text 6">
+            <a:extLst>
+              <a:ext uri="{FF2B5EF4-FFF2-40B4-BE49-F238E27FC236}">
+                <a16:creationId xmlns:a16="http://schemas.microsoft.com/office/drawing/2014/main" id="{3C2AAFC0-C95E-6CAE-FA29-2C3E5E6793DF}"/>
+              </a:ext>
+            </a:extLst>
+          </p:cNvPr>
+          <p:cNvSpPr/>
+          <p:nvPr/>
+        </p:nvSpPr>
+        <p:spPr>
+          <a:xfrm>
+            <a:off x="424914" y="3524219"/>
+            <a:ext cx="3474720" cy="621792"/>
+          </a:xfrm>
+          <a:prstGeom prst="rect">
+            <a:avLst/>
+          </a:prstGeom>
+          <a:noFill/>
+          <a:ln/>
+        </p:spPr>
+        <p:txBody>
+          <a:bodyPr wrap="square" rtlCol="0" anchor="ctr"/>
+          <a:lstStyle/>
+          <a:p>
+            <a:pPr marL="0" indent="0">
+              <a:buNone/>
+            </a:pPr>
+            <a:r>
+              <a:rPr lang="en-US" sz="1250" dirty="0">
+                <a:solidFill>
+                  <a:srgbClr val="1E2761"/>
+                </a:solidFill>
+                <a:latin typeface="Calibri" pitchFamily="34" charset="0"/>
+                <a:ea typeface="Calibri" pitchFamily="34" charset="-122"/>
+                <a:cs typeface="Calibri" pitchFamily="34" charset="-120"/>
+              </a:rPr>
+              <a:t>A parser that always fails, regardless of input. It is the identity element for (&lt;|&gt;) — combining anything with empty gives back the original parser.</a:t>
+            </a:r>
+            <a:endParaRPr lang="en-US" sz="1250" dirty="0"/>
+          </a:p>
+        </p:txBody>
+      </p:sp>
+      <p:sp>
+        <p:nvSpPr>
+          <p:cNvPr id="12" name="Shape 7">
+            <a:extLst>
+              <a:ext uri="{FF2B5EF4-FFF2-40B4-BE49-F238E27FC236}">
+                <a16:creationId xmlns:a16="http://schemas.microsoft.com/office/drawing/2014/main" id="{7DBD8DC6-558B-09B3-C49E-BD6A60E2CEC9}"/>
+              </a:ext>
+            </a:extLst>
+          </p:cNvPr>
+          <p:cNvSpPr/>
+          <p:nvPr/>
+        </p:nvSpPr>
+        <p:spPr>
+          <a:xfrm>
+            <a:off x="4992908" y="3132528"/>
+            <a:ext cx="3794760" cy="1188720"/>
+          </a:xfrm>
+          <a:prstGeom prst="rect">
+            <a:avLst/>
+          </a:prstGeom>
+          <a:solidFill>
+            <a:srgbClr val="FFFFFF"/>
+          </a:solidFill>
+          <a:ln w="12700">
+            <a:solidFill>
+              <a:srgbClr val="CADCFC"/>
+            </a:solidFill>
+            <a:prstDash val="solid"/>
+          </a:ln>
+        </p:spPr>
+        <p:txBody>
+          <a:bodyPr/>
+          <a:lstStyle/>
+          <a:p>
+            <a:endParaRPr lang="en-US"/>
+          </a:p>
+        </p:txBody>
+      </p:sp>
+      <p:sp>
+        <p:nvSpPr>
+          <p:cNvPr id="14" name="Text 9">
+            <a:extLst>
+              <a:ext uri="{FF2B5EF4-FFF2-40B4-BE49-F238E27FC236}">
+                <a16:creationId xmlns:a16="http://schemas.microsoft.com/office/drawing/2014/main" id="{A4E72B4A-90F5-0A85-FAB0-12C736C921C3}"/>
+              </a:ext>
+            </a:extLst>
+          </p:cNvPr>
+          <p:cNvSpPr/>
+          <p:nvPr/>
+        </p:nvSpPr>
+        <p:spPr>
+          <a:xfrm>
+            <a:off x="5221508" y="3223968"/>
+            <a:ext cx="3474720" cy="411480"/>
+          </a:xfrm>
+          <a:prstGeom prst="rect">
+            <a:avLst/>
+          </a:prstGeom>
+          <a:noFill/>
+          <a:ln/>
+        </p:spPr>
+        <p:txBody>
+          <a:bodyPr wrap="square" rtlCol="0" anchor="ctr"/>
+          <a:lstStyle/>
+          <a:p>
+            <a:pPr marL="0" indent="0">
+              <a:buNone/>
+            </a:pPr>
+            <a:r>
+              <a:rPr lang="en-US" sz="2000" b="1" dirty="0">
+                <a:solidFill>
+                  <a:srgbClr val="0D47A1"/>
+                </a:solidFill>
+                <a:latin typeface="Consolas" pitchFamily="34" charset="0"/>
+                <a:ea typeface="Consolas" pitchFamily="34" charset="-122"/>
+                <a:cs typeface="Consolas" pitchFamily="34" charset="-120"/>
+              </a:rPr>
+              <a:t>(&lt;|&gt;)</a:t>
+            </a:r>
+            <a:endParaRPr lang="en-US" sz="2000" dirty="0"/>
+          </a:p>
+        </p:txBody>
+      </p:sp>
+      <p:sp>
+        <p:nvSpPr>
+          <p:cNvPr id="15" name="Text 10">
+            <a:extLst>
+              <a:ext uri="{FF2B5EF4-FFF2-40B4-BE49-F238E27FC236}">
+                <a16:creationId xmlns:a16="http://schemas.microsoft.com/office/drawing/2014/main" id="{F62E0EF5-DA30-4B07-D39D-EFC81DE7EE94}"/>
+              </a:ext>
+            </a:extLst>
+          </p:cNvPr>
+          <p:cNvSpPr/>
+          <p:nvPr/>
+        </p:nvSpPr>
+        <p:spPr>
+          <a:xfrm>
+            <a:off x="5221508" y="3635448"/>
+            <a:ext cx="3474720" cy="621792"/>
+          </a:xfrm>
+          <a:prstGeom prst="rect">
+            <a:avLst/>
+          </a:prstGeom>
+          <a:noFill/>
+          <a:ln/>
+        </p:spPr>
+        <p:txBody>
+          <a:bodyPr wrap="square" rtlCol="0" anchor="ctr"/>
+          <a:lstStyle/>
+          <a:p>
+            <a:pPr marL="0" indent="0">
+              <a:buNone/>
+            </a:pPr>
+            <a:r>
+              <a:rPr lang="en-US" sz="1250" dirty="0">
+                <a:solidFill>
+                  <a:srgbClr val="1E2761"/>
+                </a:solidFill>
+                <a:latin typeface="Calibri" pitchFamily="34" charset="0"/>
+                <a:ea typeface="Calibri" pitchFamily="34" charset="-122"/>
+                <a:cs typeface="Calibri" pitchFamily="34" charset="-120"/>
+              </a:rPr>
+              <a:t>Run the left parser. If it fails, run the right parser on the same input. If the left succeeds, the right is never tried.</a:t>
+            </a:r>
+            <a:endParaRPr lang="en-US" sz="1250" dirty="0"/>
+          </a:p>
+        </p:txBody>
+      </p:sp>
+      <p:sp>
+        <p:nvSpPr>
+          <p:cNvPr id="16" name="Left Arrow 15">
+            <a:extLst>
+              <a:ext uri="{FF2B5EF4-FFF2-40B4-BE49-F238E27FC236}">
+                <a16:creationId xmlns:a16="http://schemas.microsoft.com/office/drawing/2014/main" id="{93B4CED1-533C-9523-2121-0B1002CA3B42}"/>
+              </a:ext>
+            </a:extLst>
+          </p:cNvPr>
+          <p:cNvSpPr/>
+          <p:nvPr/>
+        </p:nvSpPr>
+        <p:spPr>
+          <a:xfrm rot="19522172">
+            <a:off x="3076360" y="2474227"/>
+            <a:ext cx="1189822" cy="465947"/>
+          </a:xfrm>
+          <a:prstGeom prst="leftArrow">
+            <a:avLst/>
+          </a:prstGeom>
+          <a:solidFill>
+            <a:schemeClr val="accent4"/>
+          </a:solidFill>
+        </p:spPr>
+        <p:style>
+          <a:lnRef idx="2">
+            <a:schemeClr val="accent1">
+              <a:shade val="15000"/>
+            </a:schemeClr>
+          </a:lnRef>
+          <a:fillRef idx="1">
+            <a:schemeClr val="accent1"/>
+          </a:fillRef>
+          <a:effectRef idx="0">
+            <a:schemeClr val="accent1"/>
+          </a:effectRef>
+          <a:fontRef idx="minor">
+            <a:schemeClr val="lt1"/>
+          </a:fontRef>
+        </p:style>
+        <p:txBody>
+          <a:bodyPr rtlCol="0" anchor="ctr"/>
+          <a:lstStyle/>
+          <a:p>
+            <a:pPr algn="ctr"/>
+            <a:endParaRPr lang="en-US"/>
+          </a:p>
+        </p:txBody>
+      </p:sp>
+      <p:sp>
+        <p:nvSpPr>
+          <p:cNvPr id="17" name="Left Arrow 16">
+            <a:extLst>
+              <a:ext uri="{FF2B5EF4-FFF2-40B4-BE49-F238E27FC236}">
+                <a16:creationId xmlns:a16="http://schemas.microsoft.com/office/drawing/2014/main" id="{5EC29EFF-6C40-C2A9-AE73-D17B8B4BB75E}"/>
+              </a:ext>
+            </a:extLst>
+          </p:cNvPr>
+          <p:cNvSpPr/>
+          <p:nvPr/>
+        </p:nvSpPr>
+        <p:spPr>
+          <a:xfrm rot="13377505">
+            <a:off x="4695085" y="2515669"/>
+            <a:ext cx="1042414" cy="465947"/>
+          </a:xfrm>
+          <a:prstGeom prst="leftArrow">
+            <a:avLst/>
+          </a:prstGeom>
+          <a:solidFill>
+            <a:schemeClr val="accent4"/>
+          </a:solidFill>
+        </p:spPr>
+        <p:style>
+          <a:lnRef idx="2">
+            <a:schemeClr val="accent1">
+              <a:shade val="15000"/>
+            </a:schemeClr>
+          </a:lnRef>
+          <a:fillRef idx="1">
+            <a:schemeClr val="accent1"/>
+          </a:fillRef>
+          <a:effectRef idx="0">
+            <a:schemeClr val="accent1"/>
+          </a:effectRef>
+          <a:fontRef idx="minor">
+            <a:schemeClr val="lt1"/>
+          </a:fontRef>
+        </p:style>
+        <p:txBody>
+          <a:bodyPr rtlCol="0" anchor="ctr"/>
+          <a:lstStyle/>
+          <a:p>
+            <a:pPr algn="ctr"/>
+            <a:endParaRPr lang="en-US"/>
+          </a:p>
+        </p:txBody>
+      </p:sp>
+      <p:sp>
+        <p:nvSpPr>
+          <p:cNvPr id="18" name="TextBox 17">
+            <a:extLst>
+              <a:ext uri="{FF2B5EF4-FFF2-40B4-BE49-F238E27FC236}">
+                <a16:creationId xmlns:a16="http://schemas.microsoft.com/office/drawing/2014/main" id="{6616BD2C-8722-4740-74D6-DB38D2BF0CAD}"/>
+              </a:ext>
+            </a:extLst>
+          </p:cNvPr>
+          <p:cNvSpPr txBox="1"/>
+          <p:nvPr/>
+        </p:nvSpPr>
+        <p:spPr>
+          <a:xfrm>
+            <a:off x="4128234" y="2599457"/>
+            <a:ext cx="858771" cy="523220"/>
+          </a:xfrm>
+          <a:prstGeom prst="rect">
+            <a:avLst/>
+          </a:prstGeom>
+          <a:noFill/>
+        </p:spPr>
+        <p:txBody>
+          <a:bodyPr wrap="square" rtlCol="0">
+            <a:spAutoFit/>
+          </a:bodyPr>
+          <a:lstStyle/>
+          <a:p>
+            <a:r>
+              <a:rPr lang="en-US" dirty="0"/>
+              <a:t>or</a:t>
+            </a:r>
+          </a:p>
+        </p:txBody>
+      </p:sp>
+      <p:sp>
+        <p:nvSpPr>
+          <p:cNvPr id="20" name="TextBox 19">
+            <a:extLst>
+              <a:ext uri="{FF2B5EF4-FFF2-40B4-BE49-F238E27FC236}">
+                <a16:creationId xmlns:a16="http://schemas.microsoft.com/office/drawing/2014/main" id="{6FED67DA-6098-E209-DE39-740098B7CAC6}"/>
+              </a:ext>
+            </a:extLst>
+          </p:cNvPr>
+          <p:cNvSpPr txBox="1"/>
+          <p:nvPr/>
+        </p:nvSpPr>
+        <p:spPr>
+          <a:xfrm>
+            <a:off x="216650" y="4481551"/>
+            <a:ext cx="8918866" cy="2431435"/>
+          </a:xfrm>
+          <a:prstGeom prst="rect">
+            <a:avLst/>
+          </a:prstGeom>
+          <a:solidFill>
+            <a:schemeClr val="accent1"/>
+          </a:solidFill>
+        </p:spPr>
+        <p:txBody>
+          <a:bodyPr wrap="square">
+            <a:spAutoFit/>
+          </a:bodyPr>
+          <a:lstStyle/>
+          <a:p>
+            <a:pPr defTabSz="685800" eaLnBrk="1" hangingPunct="1">
+              <a:lnSpc>
+                <a:spcPct val="80000"/>
+              </a:lnSpc>
+              <a:spcBef>
+                <a:spcPts val="750"/>
+              </a:spcBef>
+            </a:pPr>
+            <a:r>
+              <a:rPr lang="en-US" sz="2000" dirty="0">
+                <a:latin typeface="+mn-lt"/>
+                <a:cs typeface="Consolas" pitchFamily="34" charset="-120"/>
+              </a:rPr>
+              <a:t>instance Alternative Parser where</a:t>
+            </a:r>
+          </a:p>
+          <a:p>
+            <a:pPr defTabSz="685800" eaLnBrk="1" hangingPunct="1">
+              <a:lnSpc>
+                <a:spcPct val="80000"/>
+              </a:lnSpc>
+              <a:spcBef>
+                <a:spcPts val="750"/>
+              </a:spcBef>
+            </a:pPr>
+            <a:r>
+              <a:rPr lang="en-US" sz="2000" dirty="0">
+                <a:latin typeface="+mn-lt"/>
+                <a:cs typeface="Consolas" pitchFamily="34" charset="-120"/>
+              </a:rPr>
+              <a:t>  empty = Parser $ \_ -&gt; Left "no parse"</a:t>
+            </a:r>
+          </a:p>
+          <a:p>
+            <a:pPr defTabSz="685800" eaLnBrk="1" hangingPunct="1">
+              <a:lnSpc>
+                <a:spcPct val="80000"/>
+              </a:lnSpc>
+              <a:spcBef>
+                <a:spcPts val="750"/>
+              </a:spcBef>
+            </a:pPr>
+            <a:endParaRPr lang="en-US" sz="2000" dirty="0">
+              <a:latin typeface="+mn-lt"/>
+              <a:cs typeface="Consolas" pitchFamily="34" charset="-120"/>
+            </a:endParaRPr>
+          </a:p>
+          <a:p>
+            <a:pPr defTabSz="685800" eaLnBrk="1" hangingPunct="1">
+              <a:lnSpc>
+                <a:spcPct val="80000"/>
+              </a:lnSpc>
+              <a:spcBef>
+                <a:spcPts val="750"/>
+              </a:spcBef>
+            </a:pPr>
+            <a:r>
+              <a:rPr lang="en-US" sz="2000" dirty="0">
+                <a:latin typeface="+mn-lt"/>
+                <a:cs typeface="Consolas" pitchFamily="34" charset="-120"/>
+              </a:rPr>
+              <a:t>  Parser p1 &lt;|&gt; Parser p2 = Parser $ \input -&gt;</a:t>
+            </a:r>
+          </a:p>
+          <a:p>
+            <a:pPr defTabSz="685800" eaLnBrk="1" hangingPunct="1">
+              <a:lnSpc>
+                <a:spcPct val="80000"/>
+              </a:lnSpc>
+              <a:spcBef>
+                <a:spcPts val="750"/>
+              </a:spcBef>
+            </a:pPr>
+            <a:r>
+              <a:rPr lang="en-US" sz="2000" dirty="0">
+                <a:latin typeface="+mn-lt"/>
+                <a:cs typeface="Consolas" pitchFamily="34" charset="-120"/>
+              </a:rPr>
+              <a:t>    case p1 input of</a:t>
+            </a:r>
+          </a:p>
+          <a:p>
+            <a:pPr defTabSz="685800" eaLnBrk="1" hangingPunct="1">
+              <a:lnSpc>
+                <a:spcPct val="80000"/>
+              </a:lnSpc>
+              <a:spcBef>
+                <a:spcPts val="750"/>
+              </a:spcBef>
+            </a:pPr>
+            <a:r>
+              <a:rPr lang="en-US" sz="2000" dirty="0">
+                <a:latin typeface="+mn-lt"/>
+                <a:cs typeface="Consolas" pitchFamily="34" charset="-120"/>
+              </a:rPr>
+              <a:t>      Left  _      -&gt; p2 input   -- first failed: try second on same input</a:t>
+            </a:r>
+          </a:p>
+          <a:p>
+            <a:pPr defTabSz="685800" eaLnBrk="1" hangingPunct="1">
+              <a:lnSpc>
+                <a:spcPct val="80000"/>
+              </a:lnSpc>
+              <a:spcBef>
+                <a:spcPts val="750"/>
+              </a:spcBef>
+            </a:pPr>
+            <a:r>
+              <a:rPr lang="en-US" sz="2000" dirty="0">
+                <a:latin typeface="+mn-lt"/>
+                <a:cs typeface="Consolas" pitchFamily="34" charset="-120"/>
+              </a:rPr>
+              <a:t>      Right result -&gt; Right result -- first succeeded: done</a:t>
+            </a:r>
+          </a:p>
+        </p:txBody>
+      </p:sp>
+    </p:spTree>
+    <p:extLst>
+      <p:ext uri="{BB962C8B-B14F-4D97-AF65-F5344CB8AC3E}">
+        <p14:creationId xmlns:p14="http://schemas.microsoft.com/office/powerpoint/2010/main" val="584234900"/>
+      </p:ext>
+    </p:extLst>
+  </p:cSld>
+  <p:clrMapOvr>
+    <a:masterClrMapping/>
+  </p:clrMapOvr>
+  <p:timing>
+    <p:tnLst>
+      <p:par>
+        <p:cTn id="1" dur="indefinite" restart="never" nodeType="tmRoot">
+          <p:childTnLst>
+            <p:seq concurrent="1" nextAc="seek">
+              <p:cTn id="2" dur="indefinite" nodeType="mainSeq">
+                <p:childTnLst>
+                  <p:par>
+                    <p:cTn id="3" fill="hold">
+                      <p:stCondLst>
+                        <p:cond delay="indefinite"/>
+                      </p:stCondLst>
+                      <p:childTnLst>
+                        <p:par>
+                          <p:cTn id="4" fill="hold">
+                            <p:stCondLst>
+                              <p:cond delay="0"/>
+                            </p:stCondLst>
+                            <p:childTnLst>
+                              <p:par>
+                                <p:cTn id="5" presetID="12" presetClass="entr" presetSubtype="4" fill="hold" grpId="1" nodeType="clickEffect">
+                                  <p:stCondLst>
+                                    <p:cond delay="0"/>
+                                  </p:stCondLst>
+                                  <p:childTnLst>
+                                    <p:set>
+                                      <p:cBhvr>
+                                        <p:cTn id="6" dur="1" fill="hold">
+                                          <p:stCondLst>
+                                            <p:cond delay="0"/>
+                                          </p:stCondLst>
+                                        </p:cTn>
+                                        <p:tgtEl>
+                                          <p:spTgt spid="16"/>
+                                        </p:tgtEl>
+                                        <p:attrNameLst>
+                                          <p:attrName>style.visibility</p:attrName>
+                                        </p:attrNameLst>
+                                      </p:cBhvr>
+                                      <p:to>
+                                        <p:strVal val="visible"/>
+                                      </p:to>
+                                    </p:set>
+                                    <p:anim calcmode="lin" valueType="num">
+                                      <p:cBhvr additive="base">
+                                        <p:cTn id="7" dur="500"/>
+                                        <p:tgtEl>
+                                          <p:spTgt spid="16"/>
+                                        </p:tgtEl>
+                                        <p:attrNameLst>
+                                          <p:attrName>ppt_y</p:attrName>
+                                        </p:attrNameLst>
+                                      </p:cBhvr>
+                                      <p:tavLst>
+                                        <p:tav tm="0">
+                                          <p:val>
+                                            <p:strVal val="#ppt_y+#ppt_h*1.125000"/>
+                                          </p:val>
+                                        </p:tav>
+                                        <p:tav tm="100000">
+                                          <p:val>
+                                            <p:strVal val="#ppt_y"/>
+                                          </p:val>
+                                        </p:tav>
+                                      </p:tavLst>
+                                    </p:anim>
+                                    <p:animEffect transition="in" filter="wipe(up)">
+                                      <p:cBhvr>
+                                        <p:cTn id="8" dur="500"/>
+                                        <p:tgtEl>
+                                          <p:spTgt spid="16"/>
+                                        </p:tgtEl>
+                                      </p:cBhvr>
+                                    </p:animEffect>
+                                  </p:childTnLst>
+                                </p:cTn>
+                              </p:par>
+                              <p:par>
+                                <p:cTn id="9" presetID="12" presetClass="entr" presetSubtype="4" fill="hold" grpId="0" nodeType="withEffect">
+                                  <p:stCondLst>
+                                    <p:cond delay="0"/>
+                                  </p:stCondLst>
+                                  <p:childTnLst>
+                                    <p:set>
+                                      <p:cBhvr>
+                                        <p:cTn id="10" dur="1" fill="hold">
+                                          <p:stCondLst>
+                                            <p:cond delay="0"/>
+                                          </p:stCondLst>
+                                        </p:cTn>
+                                        <p:tgtEl>
+                                          <p:spTgt spid="11"/>
+                                        </p:tgtEl>
+                                        <p:attrNameLst>
+                                          <p:attrName>style.visibility</p:attrName>
+                                        </p:attrNameLst>
+                                      </p:cBhvr>
+                                      <p:to>
+                                        <p:strVal val="visible"/>
+                                      </p:to>
+                                    </p:set>
+                                    <p:anim calcmode="lin" valueType="num">
+                                      <p:cBhvr additive="base">
+                                        <p:cTn id="11" dur="500"/>
+                                        <p:tgtEl>
+                                          <p:spTgt spid="11"/>
+                                        </p:tgtEl>
+                                        <p:attrNameLst>
+                                          <p:attrName>ppt_y</p:attrName>
+                                        </p:attrNameLst>
+                                      </p:cBhvr>
+                                      <p:tavLst>
+                                        <p:tav tm="0">
+                                          <p:val>
+                                            <p:strVal val="#ppt_y+#ppt_h*1.125000"/>
+                                          </p:val>
+                                        </p:tav>
+                                        <p:tav tm="100000">
+                                          <p:val>
+                                            <p:strVal val="#ppt_y"/>
+                                          </p:val>
+                                        </p:tav>
+                                      </p:tavLst>
+                                    </p:anim>
+                                    <p:animEffect transition="in" filter="wipe(up)">
+                                      <p:cBhvr>
+                                        <p:cTn id="12" dur="500"/>
+                                        <p:tgtEl>
+                                          <p:spTgt spid="11"/>
+                                        </p:tgtEl>
+                                      </p:cBhvr>
+                                    </p:animEffect>
+                                  </p:childTnLst>
+                                </p:cTn>
+                              </p:par>
+                              <p:par>
+                                <p:cTn id="13" presetID="12" presetClass="entr" presetSubtype="4" fill="hold" grpId="0" nodeType="withEffect">
+                                  <p:stCondLst>
+                                    <p:cond delay="0"/>
+                                  </p:stCondLst>
+                                  <p:childTnLst>
+                                    <p:set>
+                                      <p:cBhvr>
+                                        <p:cTn id="14" dur="1" fill="hold">
+                                          <p:stCondLst>
+                                            <p:cond delay="0"/>
+                                          </p:stCondLst>
+                                        </p:cTn>
+                                        <p:tgtEl>
+                                          <p:spTgt spid="8"/>
+                                        </p:tgtEl>
+                                        <p:attrNameLst>
+                                          <p:attrName>style.visibility</p:attrName>
+                                        </p:attrNameLst>
+                                      </p:cBhvr>
+                                      <p:to>
+                                        <p:strVal val="visible"/>
+                                      </p:to>
+                                    </p:set>
+                                    <p:anim calcmode="lin" valueType="num">
+                                      <p:cBhvr additive="base">
+                                        <p:cTn id="15" dur="500"/>
+                                        <p:tgtEl>
+                                          <p:spTgt spid="8"/>
+                                        </p:tgtEl>
+                                        <p:attrNameLst>
+                                          <p:attrName>ppt_y</p:attrName>
+                                        </p:attrNameLst>
+                                      </p:cBhvr>
+                                      <p:tavLst>
+                                        <p:tav tm="0">
+                                          <p:val>
+                                            <p:strVal val="#ppt_y+#ppt_h*1.125000"/>
+                                          </p:val>
+                                        </p:tav>
+                                        <p:tav tm="100000">
+                                          <p:val>
+                                            <p:strVal val="#ppt_y"/>
+                                          </p:val>
+                                        </p:tav>
+                                      </p:tavLst>
+                                    </p:anim>
+                                    <p:animEffect transition="in" filter="wipe(up)">
+                                      <p:cBhvr>
+                                        <p:cTn id="16" dur="500"/>
+                                        <p:tgtEl>
+                                          <p:spTgt spid="8"/>
+                                        </p:tgtEl>
+                                      </p:cBhvr>
+                                    </p:animEffect>
+                                  </p:childTnLst>
+                                </p:cTn>
+                              </p:par>
+                              <p:par>
+                                <p:cTn id="17" presetID="12" presetClass="entr" presetSubtype="4" fill="hold" grpId="0" nodeType="withEffect">
+                                  <p:stCondLst>
+                                    <p:cond delay="0"/>
+                                  </p:stCondLst>
+                                  <p:childTnLst>
+                                    <p:set>
+                                      <p:cBhvr>
+                                        <p:cTn id="18" dur="1" fill="hold">
+                                          <p:stCondLst>
+                                            <p:cond delay="0"/>
+                                          </p:stCondLst>
+                                        </p:cTn>
+                                        <p:tgtEl>
+                                          <p:spTgt spid="9"/>
+                                        </p:tgtEl>
+                                        <p:attrNameLst>
+                                          <p:attrName>style.visibility</p:attrName>
+                                        </p:attrNameLst>
+                                      </p:cBhvr>
+                                      <p:to>
+                                        <p:strVal val="visible"/>
+                                      </p:to>
+                                    </p:set>
+                                    <p:anim calcmode="lin" valueType="num">
+                                      <p:cBhvr additive="base">
+                                        <p:cTn id="19" dur="500"/>
+                                        <p:tgtEl>
+                                          <p:spTgt spid="9"/>
+                                        </p:tgtEl>
+                                        <p:attrNameLst>
+                                          <p:attrName>ppt_y</p:attrName>
+                                        </p:attrNameLst>
+                                      </p:cBhvr>
+                                      <p:tavLst>
+                                        <p:tav tm="0">
+                                          <p:val>
+                                            <p:strVal val="#ppt_y+#ppt_h*1.125000"/>
+                                          </p:val>
+                                        </p:tav>
+                                        <p:tav tm="100000">
+                                          <p:val>
+                                            <p:strVal val="#ppt_y"/>
+                                          </p:val>
+                                        </p:tav>
+                                      </p:tavLst>
+                                    </p:anim>
+                                    <p:animEffect transition="in" filter="wipe(up)">
+                                      <p:cBhvr>
+                                        <p:cTn id="20" dur="500"/>
+                                        <p:tgtEl>
+                                          <p:spTgt spid="9"/>
+                                        </p:tgtEl>
+                                      </p:cBhvr>
+                                    </p:animEffect>
+                                  </p:childTnLst>
+                                </p:cTn>
+                              </p:par>
+                            </p:childTnLst>
+                          </p:cTn>
+                        </p:par>
+                      </p:childTnLst>
+                    </p:cTn>
+                  </p:par>
+                  <p:par>
+                    <p:cTn id="21" fill="hold">
+                      <p:stCondLst>
+                        <p:cond delay="indefinite"/>
+                      </p:stCondLst>
+                      <p:childTnLst>
+                        <p:par>
+                          <p:cTn id="22" fill="hold">
+                            <p:stCondLst>
+                              <p:cond delay="0"/>
+                            </p:stCondLst>
+                            <p:childTnLst>
+                              <p:par>
+                                <p:cTn id="23" presetID="12" presetClass="entr" presetSubtype="4" fill="hold" grpId="1" nodeType="clickEffect">
+                                  <p:stCondLst>
+                                    <p:cond delay="0"/>
+                                  </p:stCondLst>
+                                  <p:childTnLst>
+                                    <p:set>
+                                      <p:cBhvr>
+                                        <p:cTn id="24" dur="1" fill="hold">
+                                          <p:stCondLst>
+                                            <p:cond delay="0"/>
+                                          </p:stCondLst>
+                                        </p:cTn>
+                                        <p:tgtEl>
+                                          <p:spTgt spid="18"/>
+                                        </p:tgtEl>
+                                        <p:attrNameLst>
+                                          <p:attrName>style.visibility</p:attrName>
+                                        </p:attrNameLst>
+                                      </p:cBhvr>
+                                      <p:to>
+                                        <p:strVal val="visible"/>
+                                      </p:to>
+                                    </p:set>
+                                    <p:anim calcmode="lin" valueType="num">
+                                      <p:cBhvr additive="base">
+                                        <p:cTn id="25" dur="500"/>
+                                        <p:tgtEl>
+                                          <p:spTgt spid="18"/>
+                                        </p:tgtEl>
+                                        <p:attrNameLst>
+                                          <p:attrName>ppt_y</p:attrName>
+                                        </p:attrNameLst>
+                                      </p:cBhvr>
+                                      <p:tavLst>
+                                        <p:tav tm="0">
+                                          <p:val>
+                                            <p:strVal val="#ppt_y+#ppt_h*1.125000"/>
+                                          </p:val>
+                                        </p:tav>
+                                        <p:tav tm="100000">
+                                          <p:val>
+                                            <p:strVal val="#ppt_y"/>
+                                          </p:val>
+                                        </p:tav>
+                                      </p:tavLst>
+                                    </p:anim>
+                                    <p:animEffect transition="in" filter="wipe(up)">
+                                      <p:cBhvr>
+                                        <p:cTn id="26" dur="500"/>
+                                        <p:tgtEl>
+                                          <p:spTgt spid="18"/>
+                                        </p:tgtEl>
+                                      </p:cBhvr>
+                                    </p:animEffect>
+                                  </p:childTnLst>
+                                </p:cTn>
+                              </p:par>
+                            </p:childTnLst>
+                          </p:cTn>
+                        </p:par>
+                      </p:childTnLst>
+                    </p:cTn>
+                  </p:par>
+                  <p:par>
+                    <p:cTn id="27" fill="hold">
+                      <p:stCondLst>
+                        <p:cond delay="indefinite"/>
+                      </p:stCondLst>
+                      <p:childTnLst>
+                        <p:par>
+                          <p:cTn id="28" fill="hold">
+                            <p:stCondLst>
+                              <p:cond delay="0"/>
+                            </p:stCondLst>
+                            <p:childTnLst>
+                              <p:par>
+                                <p:cTn id="29" presetID="12" presetClass="entr" presetSubtype="4" fill="hold" grpId="1" nodeType="clickEffect">
+                                  <p:stCondLst>
+                                    <p:cond delay="0"/>
+                                  </p:stCondLst>
+                                  <p:childTnLst>
+                                    <p:set>
+                                      <p:cBhvr>
+                                        <p:cTn id="30" dur="1" fill="hold">
+                                          <p:stCondLst>
+                                            <p:cond delay="0"/>
+                                          </p:stCondLst>
+                                        </p:cTn>
+                                        <p:tgtEl>
+                                          <p:spTgt spid="17"/>
+                                        </p:tgtEl>
+                                        <p:attrNameLst>
+                                          <p:attrName>style.visibility</p:attrName>
+                                        </p:attrNameLst>
+                                      </p:cBhvr>
+                                      <p:to>
+                                        <p:strVal val="visible"/>
+                                      </p:to>
+                                    </p:set>
+                                    <p:anim calcmode="lin" valueType="num">
+                                      <p:cBhvr additive="base">
+                                        <p:cTn id="31" dur="500"/>
+                                        <p:tgtEl>
+                                          <p:spTgt spid="17"/>
+                                        </p:tgtEl>
+                                        <p:attrNameLst>
+                                          <p:attrName>ppt_y</p:attrName>
+                                        </p:attrNameLst>
+                                      </p:cBhvr>
+                                      <p:tavLst>
+                                        <p:tav tm="0">
+                                          <p:val>
+                                            <p:strVal val="#ppt_y+#ppt_h*1.125000"/>
+                                          </p:val>
+                                        </p:tav>
+                                        <p:tav tm="100000">
+                                          <p:val>
+                                            <p:strVal val="#ppt_y"/>
+                                          </p:val>
+                                        </p:tav>
+                                      </p:tavLst>
+                                    </p:anim>
+                                    <p:animEffect transition="in" filter="wipe(up)">
+                                      <p:cBhvr>
+                                        <p:cTn id="32" dur="500"/>
+                                        <p:tgtEl>
+                                          <p:spTgt spid="17"/>
+                                        </p:tgtEl>
+                                      </p:cBhvr>
+                                    </p:animEffect>
+                                  </p:childTnLst>
+                                </p:cTn>
+                              </p:par>
+                              <p:par>
+                                <p:cTn id="33" presetID="12" presetClass="entr" presetSubtype="4" fill="hold" grpId="0" nodeType="withEffect">
+                                  <p:stCondLst>
+                                    <p:cond delay="0"/>
+                                  </p:stCondLst>
+                                  <p:childTnLst>
+                                    <p:set>
+                                      <p:cBhvr>
+                                        <p:cTn id="34" dur="1" fill="hold">
+                                          <p:stCondLst>
+                                            <p:cond delay="0"/>
+                                          </p:stCondLst>
+                                        </p:cTn>
+                                        <p:tgtEl>
+                                          <p:spTgt spid="12"/>
+                                        </p:tgtEl>
+                                        <p:attrNameLst>
+                                          <p:attrName>style.visibility</p:attrName>
+                                        </p:attrNameLst>
+                                      </p:cBhvr>
+                                      <p:to>
+                                        <p:strVal val="visible"/>
+                                      </p:to>
+                                    </p:set>
+                                    <p:anim calcmode="lin" valueType="num">
+                                      <p:cBhvr additive="base">
+                                        <p:cTn id="35" dur="500"/>
+                                        <p:tgtEl>
+                                          <p:spTgt spid="12"/>
+                                        </p:tgtEl>
+                                        <p:attrNameLst>
+                                          <p:attrName>ppt_y</p:attrName>
+                                        </p:attrNameLst>
+                                      </p:cBhvr>
+                                      <p:tavLst>
+                                        <p:tav tm="0">
+                                          <p:val>
+                                            <p:strVal val="#ppt_y+#ppt_h*1.125000"/>
+                                          </p:val>
+                                        </p:tav>
+                                        <p:tav tm="100000">
+                                          <p:val>
+                                            <p:strVal val="#ppt_y"/>
+                                          </p:val>
+                                        </p:tav>
+                                      </p:tavLst>
+                                    </p:anim>
+                                    <p:animEffect transition="in" filter="wipe(up)">
+                                      <p:cBhvr>
+                                        <p:cTn id="36" dur="500"/>
+                                        <p:tgtEl>
+                                          <p:spTgt spid="12"/>
+                                        </p:tgtEl>
+                                      </p:cBhvr>
+                                    </p:animEffect>
+                                  </p:childTnLst>
+                                </p:cTn>
+                              </p:par>
+                              <p:par>
+                                <p:cTn id="37" presetID="12" presetClass="entr" presetSubtype="4" fill="hold" grpId="0" nodeType="withEffect">
+                                  <p:stCondLst>
+                                    <p:cond delay="0"/>
+                                  </p:stCondLst>
+                                  <p:childTnLst>
+                                    <p:set>
+                                      <p:cBhvr>
+                                        <p:cTn id="38" dur="1" fill="hold">
+                                          <p:stCondLst>
+                                            <p:cond delay="0"/>
+                                          </p:stCondLst>
+                                        </p:cTn>
+                                        <p:tgtEl>
+                                          <p:spTgt spid="14"/>
+                                        </p:tgtEl>
+                                        <p:attrNameLst>
+                                          <p:attrName>style.visibility</p:attrName>
+                                        </p:attrNameLst>
+                                      </p:cBhvr>
+                                      <p:to>
+                                        <p:strVal val="visible"/>
+                                      </p:to>
+                                    </p:set>
+                                    <p:anim calcmode="lin" valueType="num">
+                                      <p:cBhvr additive="base">
+                                        <p:cTn id="39" dur="500"/>
+                                        <p:tgtEl>
+                                          <p:spTgt spid="14"/>
+                                        </p:tgtEl>
+                                        <p:attrNameLst>
+                                          <p:attrName>ppt_y</p:attrName>
+                                        </p:attrNameLst>
+                                      </p:cBhvr>
+                                      <p:tavLst>
+                                        <p:tav tm="0">
+                                          <p:val>
+                                            <p:strVal val="#ppt_y+#ppt_h*1.125000"/>
+                                          </p:val>
+                                        </p:tav>
+                                        <p:tav tm="100000">
+                                          <p:val>
+                                            <p:strVal val="#ppt_y"/>
+                                          </p:val>
+                                        </p:tav>
+                                      </p:tavLst>
+                                    </p:anim>
+                                    <p:animEffect transition="in" filter="wipe(up)">
+                                      <p:cBhvr>
+                                        <p:cTn id="40" dur="500"/>
+                                        <p:tgtEl>
+                                          <p:spTgt spid="14"/>
+                                        </p:tgtEl>
+                                      </p:cBhvr>
+                                    </p:animEffect>
+                                  </p:childTnLst>
+                                </p:cTn>
+                              </p:par>
+                              <p:par>
+                                <p:cTn id="41" presetID="12" presetClass="entr" presetSubtype="4" fill="hold" grpId="0" nodeType="withEffect">
+                                  <p:stCondLst>
+                                    <p:cond delay="0"/>
+                                  </p:stCondLst>
+                                  <p:childTnLst>
+                                    <p:set>
+                                      <p:cBhvr>
+                                        <p:cTn id="42" dur="1" fill="hold">
+                                          <p:stCondLst>
+                                            <p:cond delay="0"/>
+                                          </p:stCondLst>
+                                        </p:cTn>
+                                        <p:tgtEl>
+                                          <p:spTgt spid="15"/>
+                                        </p:tgtEl>
+                                        <p:attrNameLst>
+                                          <p:attrName>style.visibility</p:attrName>
+                                        </p:attrNameLst>
+                                      </p:cBhvr>
+                                      <p:to>
+                                        <p:strVal val="visible"/>
+                                      </p:to>
+                                    </p:set>
+                                    <p:anim calcmode="lin" valueType="num">
+                                      <p:cBhvr additive="base">
+                                        <p:cTn id="43" dur="500"/>
+                                        <p:tgtEl>
+                                          <p:spTgt spid="15"/>
+                                        </p:tgtEl>
+                                        <p:attrNameLst>
+                                          <p:attrName>ppt_y</p:attrName>
+                                        </p:attrNameLst>
+                                      </p:cBhvr>
+                                      <p:tavLst>
+                                        <p:tav tm="0">
+                                          <p:val>
+                                            <p:strVal val="#ppt_y+#ppt_h*1.125000"/>
+                                          </p:val>
+                                        </p:tav>
+                                        <p:tav tm="100000">
+                                          <p:val>
+                                            <p:strVal val="#ppt_y"/>
+                                          </p:val>
+                                        </p:tav>
+                                      </p:tavLst>
+                                    </p:anim>
+                                    <p:animEffect transition="in" filter="wipe(up)">
+                                      <p:cBhvr>
+                                        <p:cTn id="44" dur="500"/>
+                                        <p:tgtEl>
+                                          <p:spTgt spid="15"/>
+                                        </p:tgtEl>
+                                      </p:cBhvr>
+                                    </p:animEffect>
+                                  </p:childTnLst>
+                                </p:cTn>
+                              </p:par>
+                            </p:childTnLst>
+                          </p:cTn>
+                        </p:par>
+                      </p:childTnLst>
+                    </p:cTn>
+                  </p:par>
+                  <p:par>
+                    <p:cTn id="45" fill="hold">
+                      <p:stCondLst>
+                        <p:cond delay="indefinite"/>
+                      </p:stCondLst>
+                      <p:childTnLst>
+                        <p:par>
+                          <p:cTn id="46" fill="hold">
+                            <p:stCondLst>
+                              <p:cond delay="0"/>
+                            </p:stCondLst>
+                            <p:childTnLst>
+                              <p:par>
+                                <p:cTn id="47" presetID="2" presetClass="entr" presetSubtype="4" fill="hold" grpId="0" nodeType="clickEffect">
+                                  <p:stCondLst>
+                                    <p:cond delay="0"/>
+                                  </p:stCondLst>
+                                  <p:childTnLst>
+                                    <p:set>
+                                      <p:cBhvr>
+                                        <p:cTn id="48" dur="1" fill="hold">
+                                          <p:stCondLst>
+                                            <p:cond delay="0"/>
+                                          </p:stCondLst>
+                                        </p:cTn>
+                                        <p:tgtEl>
+                                          <p:spTgt spid="20"/>
+                                        </p:tgtEl>
+                                        <p:attrNameLst>
+                                          <p:attrName>style.visibility</p:attrName>
+                                        </p:attrNameLst>
+                                      </p:cBhvr>
+                                      <p:to>
+                                        <p:strVal val="visible"/>
+                                      </p:to>
+                                    </p:set>
+                                    <p:anim calcmode="lin" valueType="num">
+                                      <p:cBhvr additive="base">
+                                        <p:cTn id="49" dur="500" fill="hold"/>
+                                        <p:tgtEl>
+                                          <p:spTgt spid="20"/>
+                                        </p:tgtEl>
+                                        <p:attrNameLst>
+                                          <p:attrName>ppt_x</p:attrName>
+                                        </p:attrNameLst>
+                                      </p:cBhvr>
+                                      <p:tavLst>
+                                        <p:tav tm="0">
+                                          <p:val>
+                                            <p:strVal val="#ppt_x"/>
+                                          </p:val>
+                                        </p:tav>
+                                        <p:tav tm="100000">
+                                          <p:val>
+                                            <p:strVal val="#ppt_x"/>
+                                          </p:val>
+                                        </p:tav>
+                                      </p:tavLst>
+                                    </p:anim>
+                                    <p:anim calcmode="lin" valueType="num">
+                                      <p:cBhvr additive="base">
+                                        <p:cTn id="50" dur="500" fill="hold"/>
+                                        <p:tgtEl>
+                                          <p:spTgt spid="20"/>
+                                        </p:tgtEl>
+                                        <p:attrNameLst>
+                                          <p:attrName>ppt_y</p:attrName>
+                                        </p:attrNameLst>
+                                      </p:cBhvr>
+                                      <p:tavLst>
+                                        <p:tav tm="0">
+                                          <p:val>
+                                            <p:strVal val="1+#ppt_h/2"/>
+                                          </p:val>
+                                        </p:tav>
+                                        <p:tav tm="100000">
+                                          <p:val>
+                                            <p:strVal val="#ppt_y"/>
+                                          </p:val>
+                                        </p:tav>
+                                      </p:tavLst>
+                                    </p:anim>
+                                  </p:childTnLst>
+                                </p:cTn>
+                              </p:par>
+                            </p:childTnLst>
+                          </p:cTn>
+                        </p:par>
+                      </p:childTnLst>
+                    </p:cTn>
+                  </p:par>
+                </p:childTnLst>
+              </p:cTn>
+              <p:prevCondLst>
+                <p:cond evt="onPrev" delay="0">
+                  <p:tgtEl>
+                    <p:sldTgt/>
+                  </p:tgtEl>
+                </p:cond>
+              </p:prevCondLst>
+              <p:nextCondLst>
+                <p:cond evt="onNext" delay="0">
+                  <p:tgtEl>
+                    <p:sldTgt/>
+                  </p:tgtEl>
+                </p:cond>
+              </p:nextCondLst>
+            </p:seq>
+          </p:childTnLst>
+        </p:cTn>
+      </p:par>
+    </p:tnLst>
+    <p:bldLst>
+      <p:bldP spid="8" grpId="0" animBg="1"/>
+      <p:bldP spid="9" grpId="0" animBg="1"/>
+      <p:bldP spid="11" grpId="0" animBg="1"/>
+      <p:bldP spid="12" grpId="0" animBg="1"/>
+      <p:bldP spid="14" grpId="0" animBg="1"/>
+      <p:bldP spid="15" grpId="0" animBg="1"/>
+      <p:bldP spid="16" grpId="1" animBg="1"/>
+      <p:bldP spid="17" grpId="1" animBg="1"/>
+      <p:bldP spid="18" grpId="1"/>
+      <p:bldP spid="20" grpId="0" animBg="1"/>
     </p:bldLst>
   </p:timing>
 </p:sld>

--- a/topic13-parsing/unit-13a-lectures/talk-1/a-parsers.pptx
+++ b/topic13-parsing/unit-13a-lectures/talk-1/a-parsers.pptx
@@ -5,10 +5,10 @@
     <p:sldMasterId id="2147483729" r:id="rId1"/>
   </p:sldMasterIdLst>
   <p:notesMasterIdLst>
-    <p:notesMasterId r:id="rId15"/>
+    <p:notesMasterId r:id="rId17"/>
   </p:notesMasterIdLst>
   <p:handoutMasterIdLst>
-    <p:handoutMasterId r:id="rId16"/>
+    <p:handoutMasterId r:id="rId18"/>
   </p:handoutMasterIdLst>
   <p:sldIdLst>
     <p:sldId id="308" r:id="rId2"/>
@@ -20,10 +20,12 @@
     <p:sldId id="313" r:id="rId8"/>
     <p:sldId id="312" r:id="rId9"/>
     <p:sldId id="314" r:id="rId10"/>
-    <p:sldId id="315" r:id="rId11"/>
-    <p:sldId id="316" r:id="rId12"/>
-    <p:sldId id="317" r:id="rId13"/>
-    <p:sldId id="343" r:id="rId14"/>
+    <p:sldId id="345" r:id="rId11"/>
+    <p:sldId id="346" r:id="rId12"/>
+    <p:sldId id="315" r:id="rId13"/>
+    <p:sldId id="316" r:id="rId14"/>
+    <p:sldId id="317" r:id="rId15"/>
+    <p:sldId id="343" r:id="rId16"/>
   </p:sldIdLst>
   <p:sldSz cx="9144000" cy="6858000" type="screen4x3"/>
   <p:notesSz cx="7089775" cy="10218738"/>
@@ -578,14 +580,14 @@
           </a:ln>
           <a:extLst>
             <a:ext uri="{909E8E84-426E-40dd-AFC4-6F175D3DCCD1}">
-              <a14:hiddenFill xmlns="" xmlns:a14="http://schemas.microsoft.com/office/drawing/2010/main">
+              <a14:hiddenFill xmlns:a14="http://schemas.microsoft.com/office/drawing/2010/main" xmlns="">
                 <a:solidFill>
                   <a:srgbClr val="FFFFFF"/>
                 </a:solidFill>
               </a14:hiddenFill>
             </a:ext>
             <a:ext uri="{FAA26D3D-D897-4be2-8F04-BA451C77F1D7}">
-              <ma14:placeholderFlag xmlns="" xmlns:ma14="http://schemas.microsoft.com/office/mac/drawingml/2011/main" val="1"/>
+              <ma14:placeholderFlag xmlns:ma14="http://schemas.microsoft.com/office/mac/drawingml/2011/main" xmlns="" val="1"/>
             </a:ext>
           </a:extLst>
         </p:spPr>
@@ -1177,7 +1179,7 @@
               <a:pPr>
                 <a:defRPr/>
               </a:pPr>
-              <a:t>4/2/26</a:t>
+              <a:t>4/3/26</a:t>
             </a:fld>
             <a:endParaRPr lang="en-US" altLang="en-US"/>
           </a:p>
@@ -1607,7 +1609,7 @@
               <a:pPr>
                 <a:defRPr/>
               </a:pPr>
-              <a:t>4/2/26</a:t>
+              <a:t>4/3/26</a:t>
             </a:fld>
             <a:endParaRPr lang="en-US" altLang="en-US"/>
           </a:p>
@@ -1959,7 +1961,7 @@
               <a:pPr>
                 <a:defRPr/>
               </a:pPr>
-              <a:t>4/2/26</a:t>
+              <a:t>4/3/26</a:t>
             </a:fld>
             <a:endParaRPr lang="en-US" altLang="en-US"/>
           </a:p>
@@ -2380,7 +2382,7 @@
               <a:pPr>
                 <a:defRPr/>
               </a:pPr>
-              <a:t>4/2/26</a:t>
+              <a:t>4/3/26</a:t>
             </a:fld>
             <a:endParaRPr lang="en-US" altLang="en-US"/>
           </a:p>
@@ -2964,7 +2966,7 @@
               <a:pPr>
                 <a:defRPr/>
               </a:pPr>
-              <a:t>4/2/26</a:t>
+              <a:t>4/3/26</a:t>
             </a:fld>
             <a:endParaRPr lang="en-US" altLang="en-US"/>
           </a:p>
@@ -3661,7 +3663,7 @@
               <a:pPr>
                 <a:defRPr/>
               </a:pPr>
-              <a:t>4/2/26</a:t>
+              <a:t>4/3/26</a:t>
             </a:fld>
             <a:endParaRPr lang="en-US" altLang="en-US"/>
           </a:p>
@@ -4590,7 +4592,7 @@
               <a:pPr>
                 <a:defRPr/>
               </a:pPr>
-              <a:t>4/2/26</a:t>
+              <a:t>4/3/26</a:t>
             </a:fld>
             <a:endParaRPr lang="en-US" altLang="en-US"/>
           </a:p>
@@ -4919,7 +4921,7 @@
               <a:pPr>
                 <a:defRPr/>
               </a:pPr>
-              <a:t>4/2/26</a:t>
+              <a:t>4/3/26</a:t>
             </a:fld>
             <a:endParaRPr lang="en-US" altLang="en-US"/>
           </a:p>
@@ -5201,7 +5203,7 @@
               <a:pPr>
                 <a:defRPr/>
               </a:pPr>
-              <a:t>4/2/26</a:t>
+              <a:t>4/3/26</a:t>
             </a:fld>
             <a:endParaRPr lang="en-US" altLang="en-US"/>
           </a:p>
@@ -5556,7 +5558,7 @@
               <a:pPr>
                 <a:defRPr/>
               </a:pPr>
-              <a:t>4/2/26</a:t>
+              <a:t>4/3/26</a:t>
             </a:fld>
             <a:endParaRPr lang="en-US" altLang="en-US"/>
           </a:p>
@@ -5960,7 +5962,7 @@
               <a:pPr>
                 <a:defRPr/>
               </a:pPr>
-              <a:t>4/2/26</a:t>
+              <a:t>4/3/26</a:t>
             </a:fld>
             <a:endParaRPr lang="en-US" altLang="en-US"/>
           </a:p>
@@ -6351,7 +6353,7 @@
               <a:pPr>
                 <a:defRPr/>
               </a:pPr>
-              <a:t>4/2/26</a:t>
+              <a:t>4/3/26</a:t>
             </a:fld>
             <a:endParaRPr lang="en-US" altLang="en-US"/>
           </a:p>
@@ -6872,7 +6874,7 @@
               <a:pPr>
                 <a:defRPr/>
               </a:pPr>
-              <a:t>4/2/26</a:t>
+              <a:t>4/3/26</a:t>
             </a:fld>
             <a:endParaRPr lang="en-US" altLang="en-US"/>
           </a:p>
@@ -7158,7 +7160,7 @@
               <a:pPr>
                 <a:defRPr/>
               </a:pPr>
-              <a:t>4/2/26</a:t>
+              <a:t>4/3/26</a:t>
             </a:fld>
             <a:endParaRPr lang="en-US" altLang="en-US"/>
           </a:p>
@@ -7343,7 +7345,7 @@
               <a:pPr>
                 <a:defRPr/>
               </a:pPr>
-              <a:t>4/2/26</a:t>
+              <a:t>4/3/26</a:t>
             </a:fld>
             <a:endParaRPr lang="en-US" altLang="en-US"/>
           </a:p>
@@ -7748,7 +7750,7 @@
               <a:pPr>
                 <a:defRPr/>
               </a:pPr>
-              <a:t>4/2/26</a:t>
+              <a:t>4/3/26</a:t>
             </a:fld>
             <a:endParaRPr lang="en-US" altLang="en-US"/>
           </a:p>
@@ -8175,7 +8177,7 @@
               <a:pPr>
                 <a:defRPr/>
               </a:pPr>
-              <a:t>4/2/26</a:t>
+              <a:t>4/3/26</a:t>
             </a:fld>
             <a:endParaRPr lang="en-US" altLang="en-US"/>
           </a:p>
@@ -8437,7 +8439,7 @@
               <a:pPr>
                 <a:defRPr/>
               </a:pPr>
-              <a:t>4/2/26</a:t>
+              <a:t>4/3/26</a:t>
             </a:fld>
             <a:endParaRPr lang="en-US" altLang="en-US"/>
           </a:p>
@@ -8878,14 +8880,14 @@
           <a:ln/>
           <a:extLst>
             <a:ext uri="{909E8E84-426E-40dd-AFC4-6F175D3DCCD1}">
-              <a14:hiddenFill xmlns="" xmlns:a14="http://schemas.microsoft.com/office/drawing/2010/main">
+              <a14:hiddenFill xmlns:a14="http://schemas.microsoft.com/office/drawing/2010/main" xmlns="">
                 <a:solidFill>
                   <a:srgbClr val="FFFFFF"/>
                 </a:solidFill>
               </a14:hiddenFill>
             </a:ext>
             <a:ext uri="{91240B29-F687-4f45-9708-019B960494DF}">
-              <a14:hiddenLine xmlns="" xmlns:a14="http://schemas.microsoft.com/office/drawing/2010/main" w="9525">
+              <a14:hiddenLine xmlns:a14="http://schemas.microsoft.com/office/drawing/2010/main" xmlns="" w="9525">
                 <a:solidFill>
                   <a:srgbClr val="000000"/>
                 </a:solidFill>
@@ -9038,14 +9040,14 @@
           </a:ln>
           <a:extLst>
             <a:ext uri="{909E8E84-426E-40dd-AFC4-6F175D3DCCD1}">
-              <a14:hiddenFill xmlns="" xmlns:a14="http://schemas.microsoft.com/office/drawing/2010/main">
+              <a14:hiddenFill xmlns:a14="http://schemas.microsoft.com/office/drawing/2010/main" xmlns="">
                 <a:solidFill>
                   <a:srgbClr val="FFFFFF"/>
                 </a:solidFill>
               </a14:hiddenFill>
             </a:ext>
             <a:ext uri="{91240B29-F687-4f45-9708-019B960494DF}">
-              <a14:hiddenLine xmlns="" xmlns:a14="http://schemas.microsoft.com/office/drawing/2010/main" w="9525">
+              <a14:hiddenLine xmlns:a14="http://schemas.microsoft.com/office/drawing/2010/main" xmlns="" w="9525">
                 <a:solidFill>
                   <a:srgbClr val="000000"/>
                 </a:solidFill>
@@ -9204,14 +9206,14 @@
           </a:ln>
           <a:extLst>
             <a:ext uri="{909E8E84-426E-40dd-AFC4-6F175D3DCCD1}">
-              <a14:hiddenFill xmlns="" xmlns:a14="http://schemas.microsoft.com/office/drawing/2010/main">
+              <a14:hiddenFill xmlns:a14="http://schemas.microsoft.com/office/drawing/2010/main" xmlns="">
                 <a:solidFill>
                   <a:srgbClr val="FFFFFF"/>
                 </a:solidFill>
               </a14:hiddenFill>
             </a:ext>
             <a:ext uri="{91240B29-F687-4f45-9708-019B960494DF}">
-              <a14:hiddenLine xmlns="" xmlns:a14="http://schemas.microsoft.com/office/drawing/2010/main" w="9525">
+              <a14:hiddenLine xmlns:a14="http://schemas.microsoft.com/office/drawing/2010/main" xmlns="" w="9525">
                 <a:solidFill>
                   <a:srgbClr val="000000"/>
                 </a:solidFill>
@@ -9273,14 +9275,14 @@
           </a:ln>
           <a:extLst>
             <a:ext uri="{909E8E84-426E-40dd-AFC4-6F175D3DCCD1}">
-              <a14:hiddenFill xmlns="" xmlns:a14="http://schemas.microsoft.com/office/drawing/2010/main">
+              <a14:hiddenFill xmlns:a14="http://schemas.microsoft.com/office/drawing/2010/main" xmlns="">
                 <a:solidFill>
                   <a:srgbClr val="FFFFFF"/>
                 </a:solidFill>
               </a14:hiddenFill>
             </a:ext>
             <a:ext uri="{91240B29-F687-4f45-9708-019B960494DF}">
-              <a14:hiddenLine xmlns="" xmlns:a14="http://schemas.microsoft.com/office/drawing/2010/main" w="9525">
+              <a14:hiddenLine xmlns:a14="http://schemas.microsoft.com/office/drawing/2010/main" xmlns="" w="9525">
                 <a:solidFill>
                   <a:srgbClr val="000000"/>
                 </a:solidFill>
@@ -9322,7 +9324,7 @@
           <p:cNvPr id="2" name="Title 1">
             <a:extLst>
               <a:ext uri="{FF2B5EF4-FFF2-40B4-BE49-F238E27FC236}">
-                <a16:creationId xmlns:a16="http://schemas.microsoft.com/office/drawing/2014/main" id="{304B3FD9-D314-3406-8E4D-44F02A3261A6}"/>
+                <a16:creationId xmlns:a16="http://schemas.microsoft.com/office/drawing/2014/main" id="{B5729CCB-AEE6-1141-38DC-FD55756388BF}"/>
               </a:ext>
             </a:extLst>
           </p:cNvPr>
@@ -9340,7 +9342,7 @@
           <a:p>
             <a:r>
               <a:rPr lang="en-US" dirty="0"/>
-              <a:t>Helper function - satisfy</a:t>
+              <a:t>empty and &lt;|&gt; </a:t>
             </a:r>
           </a:p>
         </p:txBody>
@@ -9350,7 +9352,7 @@
           <p:cNvPr id="3" name="Content Placeholder 2">
             <a:extLst>
               <a:ext uri="{FF2B5EF4-FFF2-40B4-BE49-F238E27FC236}">
-                <a16:creationId xmlns:a16="http://schemas.microsoft.com/office/drawing/2014/main" id="{4D5E0EA5-E81C-7B0F-08BC-4EEBD3635D46}"/>
+                <a16:creationId xmlns:a16="http://schemas.microsoft.com/office/drawing/2014/main" id="{22A17669-EC73-1149-BF46-C9E8C25641E0}"/>
               </a:ext>
             </a:extLst>
           </p:cNvPr>
@@ -9363,23 +9365,32 @@
         </p:nvSpPr>
         <p:spPr>
           <a:xfrm>
-            <a:off x="510241" y="2336873"/>
-            <a:ext cx="7210396" cy="3120651"/>
+            <a:off x="748128" y="5130453"/>
+            <a:ext cx="6734621" cy="1419816"/>
           </a:xfrm>
           <a:solidFill>
-            <a:schemeClr val="accent1"/>
+            <a:schemeClr val="bg2">
+              <a:lumMod val="60000"/>
+              <a:lumOff val="40000"/>
+            </a:schemeClr>
           </a:solidFill>
         </p:spPr>
         <p:txBody>
-          <a:bodyPr/>
+          <a:bodyPr>
+            <a:normAutofit/>
+          </a:bodyPr>
           <a:lstStyle/>
           <a:p>
             <a:pPr marL="0" indent="0">
               <a:buNone/>
             </a:pPr>
             <a:r>
+              <a:rPr lang="en-IE" b="1" dirty="0"/>
+              <a:t>--- List</a:t>
+            </a:r>
+            <a:r>
               <a:rPr lang="en-IE" dirty="0"/>
-              <a:t>--  Parse one character satisfying a predicate.</a:t>
+              <a:t> — failure is [], choice is concatenation:</a:t>
             </a:r>
           </a:p>
           <a:p>
@@ -9388,7 +9399,7 @@
             </a:pPr>
             <a:r>
               <a:rPr lang="en-IE" dirty="0"/>
-              <a:t>-- This is the most general primitive; everything else is built on it.</a:t>
+              <a:t>[] &lt;|&gt; [] = [] </a:t>
             </a:r>
           </a:p>
           <a:p>
@@ -9397,7 +9408,7 @@
             </a:pPr>
             <a:r>
               <a:rPr lang="en-IE" dirty="0"/>
-              <a:t>satisfy :: (Char -&gt; Bool) -&gt; String -&gt; Parser Char</a:t>
+              <a:t>[] &lt;|&gt; [2] = [2] </a:t>
             </a:r>
           </a:p>
           <a:p>
@@ -9406,86 +9417,8 @@
             </a:pPr>
             <a:r>
               <a:rPr lang="en-IE" dirty="0"/>
-              <a:t>satisfy p </a:t>
-            </a:r>
-            <a:r>
-              <a:rPr lang="en-IE" dirty="0" err="1"/>
-              <a:t>desc</a:t>
-            </a:r>
-            <a:r>
-              <a:rPr lang="en-IE" dirty="0"/>
-              <a:t> = Parser $ \input -&gt;</a:t>
-            </a:r>
-          </a:p>
-          <a:p>
-            <a:pPr marL="0" indent="0">
-              <a:buNone/>
-            </a:pPr>
-            <a:r>
-              <a:rPr lang="en-IE" dirty="0"/>
-              <a:t>      case input of</a:t>
-            </a:r>
-          </a:p>
-          <a:p>
-            <a:pPr marL="0" indent="0">
-              <a:buNone/>
-            </a:pPr>
-            <a:r>
-              <a:rPr lang="en-IE" dirty="0"/>
-              <a:t>           (</a:t>
-            </a:r>
-            <a:r>
-              <a:rPr lang="en-IE" dirty="0" err="1"/>
-              <a:t>x:xs</a:t>
-            </a:r>
-            <a:r>
-              <a:rPr lang="en-IE" dirty="0"/>
-              <a:t>) | p x -&gt; Right (</a:t>
-            </a:r>
-            <a:r>
-              <a:rPr lang="en-IE" dirty="0" err="1"/>
-              <a:t>xs</a:t>
-            </a:r>
-            <a:r>
-              <a:rPr lang="en-IE" dirty="0"/>
-              <a:t>, x)</a:t>
-            </a:r>
-          </a:p>
-          <a:p>
-            <a:pPr marL="0" indent="0">
-              <a:buNone/>
-            </a:pPr>
-            <a:r>
-              <a:rPr lang="en-IE" dirty="0"/>
-              <a:t>           [] -&gt; Left ("unexpected end of input, expected " ++ </a:t>
-            </a:r>
-            <a:r>
-              <a:rPr lang="en-IE" dirty="0" err="1"/>
-              <a:t>desc</a:t>
-            </a:r>
-            <a:r>
-              <a:rPr lang="en-IE" dirty="0"/>
-              <a:t>)</a:t>
-            </a:r>
-          </a:p>
-          <a:p>
-            <a:pPr marL="0" indent="0">
-              <a:buNone/>
-            </a:pPr>
-            <a:r>
-              <a:rPr lang="en-IE" dirty="0"/>
-              <a:t>           (x:_) -&gt; Left ("unexpected '" ++ [x] ++ "', expected " ++ </a:t>
-            </a:r>
-            <a:r>
-              <a:rPr lang="en-IE" dirty="0" err="1"/>
-              <a:t>desc</a:t>
-            </a:r>
-            <a:r>
-              <a:rPr lang="en-IE" dirty="0"/>
-              <a:t>)</a:t>
-            </a:r>
-          </a:p>
-          <a:p>
+              <a:t>[1] &lt;|&gt; [2] = [1, 2] -- both branches kept</a:t>
+            </a:r>
             <a:endParaRPr lang="en-US" dirty="0"/>
           </a:p>
         </p:txBody>
@@ -9495,7 +9428,7 @@
           <p:cNvPr id="4" name="Slide Number Placeholder 3">
             <a:extLst>
               <a:ext uri="{FF2B5EF4-FFF2-40B4-BE49-F238E27FC236}">
-                <a16:creationId xmlns:a16="http://schemas.microsoft.com/office/drawing/2014/main" id="{B844B49B-AD6F-B565-04C9-8563FCB152A3}"/>
+                <a16:creationId xmlns:a16="http://schemas.microsoft.com/office/drawing/2014/main" id="{D8F70807-1C93-36AC-60F1-3CDF222905BD}"/>
               </a:ext>
             </a:extLst>
           </p:cNvPr>
@@ -9525,20 +9458,1960 @@
           </a:p>
         </p:txBody>
       </p:sp>
+      <p:sp>
+        <p:nvSpPr>
+          <p:cNvPr id="5" name="Content Placeholder 2">
+            <a:extLst>
+              <a:ext uri="{FF2B5EF4-FFF2-40B4-BE49-F238E27FC236}">
+                <a16:creationId xmlns:a16="http://schemas.microsoft.com/office/drawing/2014/main" id="{2A9EDEF8-8CE9-2E92-A6F8-753F5E07AC86}"/>
+              </a:ext>
+            </a:extLst>
+          </p:cNvPr>
+          <p:cNvSpPr txBox="1">
+            <a:spLocks/>
+          </p:cNvSpPr>
+          <p:nvPr/>
+        </p:nvSpPr>
+        <p:spPr>
+          <a:xfrm>
+            <a:off x="662641" y="1986566"/>
+            <a:ext cx="6734621" cy="1171258"/>
+          </a:xfrm>
+          <a:prstGeom prst="rect">
+            <a:avLst/>
+          </a:prstGeom>
+          <a:solidFill>
+            <a:schemeClr val="bg2">
+              <a:lumMod val="60000"/>
+              <a:lumOff val="40000"/>
+            </a:schemeClr>
+          </a:solidFill>
+        </p:spPr>
+        <p:txBody>
+          <a:bodyPr vert="horz" lIns="91440" tIns="45720" rIns="91440" bIns="45720" rtlCol="0">
+            <a:normAutofit/>
+          </a:bodyPr>
+          <a:lstStyle>
+            <a:lvl1pPr marL="171450" indent="-171450" algn="l" defTabSz="685800" rtl="0" eaLnBrk="1" latinLnBrk="0" hangingPunct="1">
+              <a:lnSpc>
+                <a:spcPct val="90000"/>
+              </a:lnSpc>
+              <a:spcBef>
+                <a:spcPts val="750"/>
+              </a:spcBef>
+              <a:buFont typeface="Arial" panose="020B0604020202020204" pitchFamily="34" charset="0"/>
+              <a:buChar char="•"/>
+              <a:defRPr sz="1800" kern="1200">
+                <a:solidFill>
+                  <a:schemeClr val="tx1"/>
+                </a:solidFill>
+                <a:latin typeface="+mn-lt"/>
+                <a:ea typeface="+mn-ea"/>
+                <a:cs typeface="+mn-cs"/>
+              </a:defRPr>
+            </a:lvl1pPr>
+            <a:lvl2pPr marL="514350" indent="-171450" algn="l" defTabSz="685800" rtl="0" eaLnBrk="1" latinLnBrk="0" hangingPunct="1">
+              <a:lnSpc>
+                <a:spcPct val="90000"/>
+              </a:lnSpc>
+              <a:spcBef>
+                <a:spcPts val="375"/>
+              </a:spcBef>
+              <a:buFont typeface="Arial" panose="020B0604020202020204" pitchFamily="34" charset="0"/>
+              <a:buChar char="•"/>
+              <a:defRPr sz="1500" kern="1200">
+                <a:solidFill>
+                  <a:schemeClr val="tx1"/>
+                </a:solidFill>
+                <a:latin typeface="+mn-lt"/>
+                <a:ea typeface="+mn-ea"/>
+                <a:cs typeface="+mn-cs"/>
+              </a:defRPr>
+            </a:lvl2pPr>
+            <a:lvl3pPr marL="857250" indent="-171450" algn="l" defTabSz="685800" rtl="0" eaLnBrk="1" latinLnBrk="0" hangingPunct="1">
+              <a:lnSpc>
+                <a:spcPct val="90000"/>
+              </a:lnSpc>
+              <a:spcBef>
+                <a:spcPts val="375"/>
+              </a:spcBef>
+              <a:buFont typeface="Arial" panose="020B0604020202020204" pitchFamily="34" charset="0"/>
+              <a:buChar char="•"/>
+              <a:defRPr sz="1350" kern="1200">
+                <a:solidFill>
+                  <a:schemeClr val="tx1"/>
+                </a:solidFill>
+                <a:latin typeface="+mn-lt"/>
+                <a:ea typeface="+mn-ea"/>
+                <a:cs typeface="+mn-cs"/>
+              </a:defRPr>
+            </a:lvl3pPr>
+            <a:lvl4pPr marL="1200150" indent="-171450" algn="l" defTabSz="685800" rtl="0" eaLnBrk="1" latinLnBrk="0" hangingPunct="1">
+              <a:lnSpc>
+                <a:spcPct val="90000"/>
+              </a:lnSpc>
+              <a:spcBef>
+                <a:spcPts val="375"/>
+              </a:spcBef>
+              <a:buFont typeface="Arial" panose="020B0604020202020204" pitchFamily="34" charset="0"/>
+              <a:buChar char="•"/>
+              <a:defRPr sz="1200" kern="1200">
+                <a:solidFill>
+                  <a:schemeClr val="tx1"/>
+                </a:solidFill>
+                <a:latin typeface="+mn-lt"/>
+                <a:ea typeface="+mn-ea"/>
+                <a:cs typeface="+mn-cs"/>
+              </a:defRPr>
+            </a:lvl4pPr>
+            <a:lvl5pPr marL="1543050" indent="-171450" algn="l" defTabSz="685800" rtl="0" eaLnBrk="1" latinLnBrk="0" hangingPunct="1">
+              <a:lnSpc>
+                <a:spcPct val="90000"/>
+              </a:lnSpc>
+              <a:spcBef>
+                <a:spcPts val="375"/>
+              </a:spcBef>
+              <a:buFont typeface="Arial" panose="020B0604020202020204" pitchFamily="34" charset="0"/>
+              <a:buChar char="•"/>
+              <a:defRPr sz="1200" kern="1200">
+                <a:solidFill>
+                  <a:schemeClr val="tx1"/>
+                </a:solidFill>
+                <a:latin typeface="+mn-lt"/>
+                <a:ea typeface="+mn-ea"/>
+                <a:cs typeface="+mn-cs"/>
+              </a:defRPr>
+            </a:lvl5pPr>
+            <a:lvl6pPr marL="1885950" indent="-171450" algn="l" defTabSz="685800" rtl="0" eaLnBrk="1" latinLnBrk="0" hangingPunct="1">
+              <a:lnSpc>
+                <a:spcPct val="90000"/>
+              </a:lnSpc>
+              <a:spcBef>
+                <a:spcPts val="375"/>
+              </a:spcBef>
+              <a:buFont typeface="Arial" panose="020B0604020202020204" pitchFamily="34" charset="0"/>
+              <a:buChar char="•"/>
+              <a:defRPr sz="1050" kern="1200">
+                <a:solidFill>
+                  <a:schemeClr val="tx1"/>
+                </a:solidFill>
+                <a:latin typeface="+mn-lt"/>
+                <a:ea typeface="+mn-ea"/>
+                <a:cs typeface="+mn-cs"/>
+              </a:defRPr>
+            </a:lvl6pPr>
+            <a:lvl7pPr marL="2228850" indent="-171450" algn="l" defTabSz="685800" rtl="0" eaLnBrk="1" latinLnBrk="0" hangingPunct="1">
+              <a:lnSpc>
+                <a:spcPct val="90000"/>
+              </a:lnSpc>
+              <a:spcBef>
+                <a:spcPts val="375"/>
+              </a:spcBef>
+              <a:buFont typeface="Arial" panose="020B0604020202020204" pitchFamily="34" charset="0"/>
+              <a:buChar char="•"/>
+              <a:defRPr sz="1050" kern="1200">
+                <a:solidFill>
+                  <a:schemeClr val="tx1"/>
+                </a:solidFill>
+                <a:latin typeface="+mn-lt"/>
+                <a:ea typeface="+mn-ea"/>
+                <a:cs typeface="+mn-cs"/>
+              </a:defRPr>
+            </a:lvl7pPr>
+            <a:lvl8pPr marL="2571750" indent="-171450" algn="l" defTabSz="685800" rtl="0" eaLnBrk="1" latinLnBrk="0" hangingPunct="1">
+              <a:lnSpc>
+                <a:spcPct val="90000"/>
+              </a:lnSpc>
+              <a:spcBef>
+                <a:spcPts val="375"/>
+              </a:spcBef>
+              <a:buFont typeface="Arial" panose="020B0604020202020204" pitchFamily="34" charset="0"/>
+              <a:buChar char="•"/>
+              <a:defRPr sz="1050" kern="1200">
+                <a:solidFill>
+                  <a:schemeClr val="tx1"/>
+                </a:solidFill>
+                <a:latin typeface="+mn-lt"/>
+                <a:ea typeface="+mn-ea"/>
+                <a:cs typeface="+mn-cs"/>
+              </a:defRPr>
+            </a:lvl8pPr>
+            <a:lvl9pPr marL="2914650" indent="-171450" algn="l" defTabSz="685800" rtl="0" eaLnBrk="1" latinLnBrk="0" hangingPunct="1">
+              <a:lnSpc>
+                <a:spcPct val="90000"/>
+              </a:lnSpc>
+              <a:spcBef>
+                <a:spcPts val="375"/>
+              </a:spcBef>
+              <a:buFont typeface="Arial" panose="020B0604020202020204" pitchFamily="34" charset="0"/>
+              <a:buChar char="•"/>
+              <a:defRPr sz="1050" kern="1200">
+                <a:solidFill>
+                  <a:schemeClr val="tx1"/>
+                </a:solidFill>
+                <a:latin typeface="+mn-lt"/>
+                <a:ea typeface="+mn-ea"/>
+                <a:cs typeface="+mn-cs"/>
+              </a:defRPr>
+            </a:lvl9pPr>
+          </a:lstStyle>
+          <a:p>
+            <a:pPr marL="0" indent="0" fontAlgn="auto">
+              <a:spcAft>
+                <a:spcPts val="0"/>
+              </a:spcAft>
+              <a:buFont typeface="Arial" panose="020B0604020202020204" pitchFamily="34" charset="0"/>
+              <a:buNone/>
+            </a:pPr>
+            <a:r>
+              <a:rPr lang="en-IE" dirty="0"/>
+              <a:t>class Applicative f =&gt; Alternative f where </a:t>
+            </a:r>
+          </a:p>
+          <a:p>
+            <a:pPr marL="0" indent="0" fontAlgn="auto">
+              <a:spcAft>
+                <a:spcPts val="0"/>
+              </a:spcAft>
+              <a:buFont typeface="Arial" panose="020B0604020202020204" pitchFamily="34" charset="0"/>
+              <a:buNone/>
+            </a:pPr>
+            <a:r>
+              <a:rPr lang="en-IE" dirty="0"/>
+              <a:t>empty :: f a -- failure / the identity element </a:t>
+            </a:r>
+          </a:p>
+          <a:p>
+            <a:pPr marL="0" indent="0" fontAlgn="auto">
+              <a:spcAft>
+                <a:spcPts val="0"/>
+              </a:spcAft>
+              <a:buFont typeface="Arial" panose="020B0604020202020204" pitchFamily="34" charset="0"/>
+              <a:buNone/>
+            </a:pPr>
+            <a:r>
+              <a:rPr lang="en-IE" dirty="0"/>
+              <a:t>(&lt;|&gt;) ::  f a -&gt; f a -&gt; f a -- "or" / choice</a:t>
+            </a:r>
+            <a:endParaRPr lang="en-US" dirty="0"/>
+          </a:p>
+        </p:txBody>
+      </p:sp>
+      <p:sp>
+        <p:nvSpPr>
+          <p:cNvPr id="6" name="TextBox 5">
+            <a:extLst>
+              <a:ext uri="{FF2B5EF4-FFF2-40B4-BE49-F238E27FC236}">
+                <a16:creationId xmlns:a16="http://schemas.microsoft.com/office/drawing/2014/main" id="{73EA6B6F-A4CA-EE2E-6841-286EB87CADB2}"/>
+              </a:ext>
+            </a:extLst>
+          </p:cNvPr>
+          <p:cNvSpPr txBox="1"/>
+          <p:nvPr/>
+        </p:nvSpPr>
+        <p:spPr>
+          <a:xfrm>
+            <a:off x="258666" y="3167390"/>
+            <a:ext cx="8626668" cy="523220"/>
+          </a:xfrm>
+          <a:prstGeom prst="rect">
+            <a:avLst/>
+          </a:prstGeom>
+          <a:solidFill>
+            <a:schemeClr val="accent4"/>
+          </a:solidFill>
+        </p:spPr>
+        <p:txBody>
+          <a:bodyPr wrap="square" rtlCol="0">
+            <a:spAutoFit/>
+          </a:bodyPr>
+          <a:lstStyle/>
+          <a:p>
+            <a:r>
+              <a:rPr lang="en-IE" dirty="0"/>
+              <a:t>Think of it as: </a:t>
+            </a:r>
+            <a:r>
+              <a:rPr lang="en-IE" i="1" dirty="0"/>
+              <a:t>"try the left, if it fails, try the right."</a:t>
+            </a:r>
+            <a:endParaRPr lang="en-US" dirty="0"/>
+          </a:p>
+        </p:txBody>
+      </p:sp>
+      <p:sp>
+        <p:nvSpPr>
+          <p:cNvPr id="7" name="Content Placeholder 2">
+            <a:extLst>
+              <a:ext uri="{FF2B5EF4-FFF2-40B4-BE49-F238E27FC236}">
+                <a16:creationId xmlns:a16="http://schemas.microsoft.com/office/drawing/2014/main" id="{C6EC40A3-9A10-C5FE-4117-08A246798885}"/>
+              </a:ext>
+            </a:extLst>
+          </p:cNvPr>
+          <p:cNvSpPr txBox="1">
+            <a:spLocks/>
+          </p:cNvSpPr>
+          <p:nvPr/>
+        </p:nvSpPr>
+        <p:spPr>
+          <a:xfrm>
+            <a:off x="662641" y="3822743"/>
+            <a:ext cx="6734621" cy="1171258"/>
+          </a:xfrm>
+          <a:prstGeom prst="rect">
+            <a:avLst/>
+          </a:prstGeom>
+          <a:solidFill>
+            <a:schemeClr val="bg2">
+              <a:lumMod val="60000"/>
+              <a:lumOff val="40000"/>
+            </a:schemeClr>
+          </a:solidFill>
+        </p:spPr>
+        <p:txBody>
+          <a:bodyPr vert="horz" lIns="91440" tIns="45720" rIns="91440" bIns="45720" rtlCol="0">
+            <a:normAutofit fontScale="92500" lnSpcReduction="20000"/>
+          </a:bodyPr>
+          <a:lstStyle>
+            <a:lvl1pPr marL="171450" indent="-171450" algn="l" defTabSz="685800" rtl="0" eaLnBrk="1" latinLnBrk="0" hangingPunct="1">
+              <a:lnSpc>
+                <a:spcPct val="90000"/>
+              </a:lnSpc>
+              <a:spcBef>
+                <a:spcPts val="750"/>
+              </a:spcBef>
+              <a:buFont typeface="Arial" panose="020B0604020202020204" pitchFamily="34" charset="0"/>
+              <a:buChar char="•"/>
+              <a:defRPr sz="1800" kern="1200">
+                <a:solidFill>
+                  <a:schemeClr val="tx1"/>
+                </a:solidFill>
+                <a:latin typeface="+mn-lt"/>
+                <a:ea typeface="+mn-ea"/>
+                <a:cs typeface="+mn-cs"/>
+              </a:defRPr>
+            </a:lvl1pPr>
+            <a:lvl2pPr marL="514350" indent="-171450" algn="l" defTabSz="685800" rtl="0" eaLnBrk="1" latinLnBrk="0" hangingPunct="1">
+              <a:lnSpc>
+                <a:spcPct val="90000"/>
+              </a:lnSpc>
+              <a:spcBef>
+                <a:spcPts val="375"/>
+              </a:spcBef>
+              <a:buFont typeface="Arial" panose="020B0604020202020204" pitchFamily="34" charset="0"/>
+              <a:buChar char="•"/>
+              <a:defRPr sz="1500" kern="1200">
+                <a:solidFill>
+                  <a:schemeClr val="tx1"/>
+                </a:solidFill>
+                <a:latin typeface="+mn-lt"/>
+                <a:ea typeface="+mn-ea"/>
+                <a:cs typeface="+mn-cs"/>
+              </a:defRPr>
+            </a:lvl2pPr>
+            <a:lvl3pPr marL="857250" indent="-171450" algn="l" defTabSz="685800" rtl="0" eaLnBrk="1" latinLnBrk="0" hangingPunct="1">
+              <a:lnSpc>
+                <a:spcPct val="90000"/>
+              </a:lnSpc>
+              <a:spcBef>
+                <a:spcPts val="375"/>
+              </a:spcBef>
+              <a:buFont typeface="Arial" panose="020B0604020202020204" pitchFamily="34" charset="0"/>
+              <a:buChar char="•"/>
+              <a:defRPr sz="1350" kern="1200">
+                <a:solidFill>
+                  <a:schemeClr val="tx1"/>
+                </a:solidFill>
+                <a:latin typeface="+mn-lt"/>
+                <a:ea typeface="+mn-ea"/>
+                <a:cs typeface="+mn-cs"/>
+              </a:defRPr>
+            </a:lvl3pPr>
+            <a:lvl4pPr marL="1200150" indent="-171450" algn="l" defTabSz="685800" rtl="0" eaLnBrk="1" latinLnBrk="0" hangingPunct="1">
+              <a:lnSpc>
+                <a:spcPct val="90000"/>
+              </a:lnSpc>
+              <a:spcBef>
+                <a:spcPts val="375"/>
+              </a:spcBef>
+              <a:buFont typeface="Arial" panose="020B0604020202020204" pitchFamily="34" charset="0"/>
+              <a:buChar char="•"/>
+              <a:defRPr sz="1200" kern="1200">
+                <a:solidFill>
+                  <a:schemeClr val="tx1"/>
+                </a:solidFill>
+                <a:latin typeface="+mn-lt"/>
+                <a:ea typeface="+mn-ea"/>
+                <a:cs typeface="+mn-cs"/>
+              </a:defRPr>
+            </a:lvl4pPr>
+            <a:lvl5pPr marL="1543050" indent="-171450" algn="l" defTabSz="685800" rtl="0" eaLnBrk="1" latinLnBrk="0" hangingPunct="1">
+              <a:lnSpc>
+                <a:spcPct val="90000"/>
+              </a:lnSpc>
+              <a:spcBef>
+                <a:spcPts val="375"/>
+              </a:spcBef>
+              <a:buFont typeface="Arial" panose="020B0604020202020204" pitchFamily="34" charset="0"/>
+              <a:buChar char="•"/>
+              <a:defRPr sz="1200" kern="1200">
+                <a:solidFill>
+                  <a:schemeClr val="tx1"/>
+                </a:solidFill>
+                <a:latin typeface="+mn-lt"/>
+                <a:ea typeface="+mn-ea"/>
+                <a:cs typeface="+mn-cs"/>
+              </a:defRPr>
+            </a:lvl5pPr>
+            <a:lvl6pPr marL="1885950" indent="-171450" algn="l" defTabSz="685800" rtl="0" eaLnBrk="1" latinLnBrk="0" hangingPunct="1">
+              <a:lnSpc>
+                <a:spcPct val="90000"/>
+              </a:lnSpc>
+              <a:spcBef>
+                <a:spcPts val="375"/>
+              </a:spcBef>
+              <a:buFont typeface="Arial" panose="020B0604020202020204" pitchFamily="34" charset="0"/>
+              <a:buChar char="•"/>
+              <a:defRPr sz="1050" kern="1200">
+                <a:solidFill>
+                  <a:schemeClr val="tx1"/>
+                </a:solidFill>
+                <a:latin typeface="+mn-lt"/>
+                <a:ea typeface="+mn-ea"/>
+                <a:cs typeface="+mn-cs"/>
+              </a:defRPr>
+            </a:lvl6pPr>
+            <a:lvl7pPr marL="2228850" indent="-171450" algn="l" defTabSz="685800" rtl="0" eaLnBrk="1" latinLnBrk="0" hangingPunct="1">
+              <a:lnSpc>
+                <a:spcPct val="90000"/>
+              </a:lnSpc>
+              <a:spcBef>
+                <a:spcPts val="375"/>
+              </a:spcBef>
+              <a:buFont typeface="Arial" panose="020B0604020202020204" pitchFamily="34" charset="0"/>
+              <a:buChar char="•"/>
+              <a:defRPr sz="1050" kern="1200">
+                <a:solidFill>
+                  <a:schemeClr val="tx1"/>
+                </a:solidFill>
+                <a:latin typeface="+mn-lt"/>
+                <a:ea typeface="+mn-ea"/>
+                <a:cs typeface="+mn-cs"/>
+              </a:defRPr>
+            </a:lvl7pPr>
+            <a:lvl8pPr marL="2571750" indent="-171450" algn="l" defTabSz="685800" rtl="0" eaLnBrk="1" latinLnBrk="0" hangingPunct="1">
+              <a:lnSpc>
+                <a:spcPct val="90000"/>
+              </a:lnSpc>
+              <a:spcBef>
+                <a:spcPts val="375"/>
+              </a:spcBef>
+              <a:buFont typeface="Arial" panose="020B0604020202020204" pitchFamily="34" charset="0"/>
+              <a:buChar char="•"/>
+              <a:defRPr sz="1050" kern="1200">
+                <a:solidFill>
+                  <a:schemeClr val="tx1"/>
+                </a:solidFill>
+                <a:latin typeface="+mn-lt"/>
+                <a:ea typeface="+mn-ea"/>
+                <a:cs typeface="+mn-cs"/>
+              </a:defRPr>
+            </a:lvl8pPr>
+            <a:lvl9pPr marL="2914650" indent="-171450" algn="l" defTabSz="685800" rtl="0" eaLnBrk="1" latinLnBrk="0" hangingPunct="1">
+              <a:lnSpc>
+                <a:spcPct val="90000"/>
+              </a:lnSpc>
+              <a:spcBef>
+                <a:spcPts val="375"/>
+              </a:spcBef>
+              <a:buFont typeface="Arial" panose="020B0604020202020204" pitchFamily="34" charset="0"/>
+              <a:buChar char="•"/>
+              <a:defRPr sz="1050" kern="1200">
+                <a:solidFill>
+                  <a:schemeClr val="tx1"/>
+                </a:solidFill>
+                <a:latin typeface="+mn-lt"/>
+                <a:ea typeface="+mn-ea"/>
+                <a:cs typeface="+mn-cs"/>
+              </a:defRPr>
+            </a:lvl9pPr>
+          </a:lstStyle>
+          <a:p>
+            <a:pPr marL="0" indent="0" fontAlgn="auto">
+              <a:spcAft>
+                <a:spcPts val="0"/>
+              </a:spcAft>
+              <a:buFont typeface="Arial" panose="020B0604020202020204" pitchFamily="34" charset="0"/>
+              <a:buNone/>
+            </a:pPr>
+            <a:r>
+              <a:rPr lang="en-IE" dirty="0"/>
+              <a:t>--- Maybe – failure is Nothing</a:t>
+            </a:r>
+          </a:p>
+          <a:p>
+            <a:pPr marL="0" indent="0" fontAlgn="auto">
+              <a:spcAft>
+                <a:spcPts val="0"/>
+              </a:spcAft>
+              <a:buFont typeface="Arial" panose="020B0604020202020204" pitchFamily="34" charset="0"/>
+              <a:buNone/>
+            </a:pPr>
+            <a:r>
+              <a:rPr lang="en-IE" dirty="0"/>
+              <a:t>Nothing &lt;|&gt; Nothing = Nothing </a:t>
+            </a:r>
+          </a:p>
+          <a:p>
+            <a:pPr marL="0" indent="0" fontAlgn="auto">
+              <a:spcAft>
+                <a:spcPts val="0"/>
+              </a:spcAft>
+              <a:buFont typeface="Arial" panose="020B0604020202020204" pitchFamily="34" charset="0"/>
+              <a:buNone/>
+            </a:pPr>
+            <a:r>
+              <a:rPr lang="en-IE" dirty="0"/>
+              <a:t>Nothing &lt;|&gt; Just 2 = Just 2 </a:t>
+            </a:r>
+          </a:p>
+          <a:p>
+            <a:pPr marL="0" indent="0" fontAlgn="auto">
+              <a:spcAft>
+                <a:spcPts val="0"/>
+              </a:spcAft>
+              <a:buFont typeface="Arial" panose="020B0604020202020204" pitchFamily="34" charset="0"/>
+              <a:buNone/>
+            </a:pPr>
+            <a:r>
+              <a:rPr lang="en-IE" dirty="0"/>
+              <a:t>Just 1 &lt;|&gt; Just 2 = Just 1 -- left succeeds, so use it</a:t>
+            </a:r>
+            <a:endParaRPr lang="en-US" dirty="0"/>
+          </a:p>
+        </p:txBody>
+      </p:sp>
     </p:spTree>
     <p:extLst>
       <p:ext uri="{BB962C8B-B14F-4D97-AF65-F5344CB8AC3E}">
-        <p14:creationId xmlns:p14="http://schemas.microsoft.com/office/powerpoint/2010/main" val="1362674803"/>
+        <p14:creationId xmlns:p14="http://schemas.microsoft.com/office/powerpoint/2010/main" val="747882568"/>
       </p:ext>
     </p:extLst>
   </p:cSld>
   <p:clrMapOvr>
     <a:masterClrMapping/>
   </p:clrMapOvr>
+  <p:timing>
+    <p:tnLst>
+      <p:par>
+        <p:cTn id="1" dur="indefinite" restart="never" nodeType="tmRoot">
+          <p:childTnLst>
+            <p:seq concurrent="1" nextAc="seek">
+              <p:cTn id="2" dur="indefinite" nodeType="mainSeq">
+                <p:childTnLst>
+                  <p:par>
+                    <p:cTn id="3" fill="hold">
+                      <p:stCondLst>
+                        <p:cond delay="indefinite"/>
+                      </p:stCondLst>
+                      <p:childTnLst>
+                        <p:par>
+                          <p:cTn id="4" fill="hold">
+                            <p:stCondLst>
+                              <p:cond delay="0"/>
+                            </p:stCondLst>
+                            <p:childTnLst>
+                              <p:par>
+                                <p:cTn id="5" presetID="2" presetClass="entr" presetSubtype="4" fill="hold" grpId="0" nodeType="clickEffect">
+                                  <p:stCondLst>
+                                    <p:cond delay="0"/>
+                                  </p:stCondLst>
+                                  <p:childTnLst>
+                                    <p:set>
+                                      <p:cBhvr>
+                                        <p:cTn id="6" dur="1" fill="hold">
+                                          <p:stCondLst>
+                                            <p:cond delay="0"/>
+                                          </p:stCondLst>
+                                        </p:cTn>
+                                        <p:tgtEl>
+                                          <p:spTgt spid="5"/>
+                                        </p:tgtEl>
+                                        <p:attrNameLst>
+                                          <p:attrName>style.visibility</p:attrName>
+                                        </p:attrNameLst>
+                                      </p:cBhvr>
+                                      <p:to>
+                                        <p:strVal val="visible"/>
+                                      </p:to>
+                                    </p:set>
+                                    <p:anim calcmode="lin" valueType="num">
+                                      <p:cBhvr additive="base">
+                                        <p:cTn id="7" dur="500" fill="hold"/>
+                                        <p:tgtEl>
+                                          <p:spTgt spid="5"/>
+                                        </p:tgtEl>
+                                        <p:attrNameLst>
+                                          <p:attrName>ppt_x</p:attrName>
+                                        </p:attrNameLst>
+                                      </p:cBhvr>
+                                      <p:tavLst>
+                                        <p:tav tm="0">
+                                          <p:val>
+                                            <p:strVal val="#ppt_x"/>
+                                          </p:val>
+                                        </p:tav>
+                                        <p:tav tm="100000">
+                                          <p:val>
+                                            <p:strVal val="#ppt_x"/>
+                                          </p:val>
+                                        </p:tav>
+                                      </p:tavLst>
+                                    </p:anim>
+                                    <p:anim calcmode="lin" valueType="num">
+                                      <p:cBhvr additive="base">
+                                        <p:cTn id="8" dur="500" fill="hold"/>
+                                        <p:tgtEl>
+                                          <p:spTgt spid="5"/>
+                                        </p:tgtEl>
+                                        <p:attrNameLst>
+                                          <p:attrName>ppt_y</p:attrName>
+                                        </p:attrNameLst>
+                                      </p:cBhvr>
+                                      <p:tavLst>
+                                        <p:tav tm="0">
+                                          <p:val>
+                                            <p:strVal val="1+#ppt_h/2"/>
+                                          </p:val>
+                                        </p:tav>
+                                        <p:tav tm="100000">
+                                          <p:val>
+                                            <p:strVal val="#ppt_y"/>
+                                          </p:val>
+                                        </p:tav>
+                                      </p:tavLst>
+                                    </p:anim>
+                                  </p:childTnLst>
+                                </p:cTn>
+                              </p:par>
+                            </p:childTnLst>
+                          </p:cTn>
+                        </p:par>
+                      </p:childTnLst>
+                    </p:cTn>
+                  </p:par>
+                  <p:par>
+                    <p:cTn id="9" fill="hold">
+                      <p:stCondLst>
+                        <p:cond delay="indefinite"/>
+                      </p:stCondLst>
+                      <p:childTnLst>
+                        <p:par>
+                          <p:cTn id="10" fill="hold">
+                            <p:stCondLst>
+                              <p:cond delay="0"/>
+                            </p:stCondLst>
+                            <p:childTnLst>
+                              <p:par>
+                                <p:cTn id="11" presetID="2" presetClass="entr" presetSubtype="4" fill="hold" grpId="0" nodeType="clickEffect">
+                                  <p:stCondLst>
+                                    <p:cond delay="0"/>
+                                  </p:stCondLst>
+                                  <p:childTnLst>
+                                    <p:set>
+                                      <p:cBhvr>
+                                        <p:cTn id="12" dur="1" fill="hold">
+                                          <p:stCondLst>
+                                            <p:cond delay="0"/>
+                                          </p:stCondLst>
+                                        </p:cTn>
+                                        <p:tgtEl>
+                                          <p:spTgt spid="6"/>
+                                        </p:tgtEl>
+                                        <p:attrNameLst>
+                                          <p:attrName>style.visibility</p:attrName>
+                                        </p:attrNameLst>
+                                      </p:cBhvr>
+                                      <p:to>
+                                        <p:strVal val="visible"/>
+                                      </p:to>
+                                    </p:set>
+                                    <p:anim calcmode="lin" valueType="num">
+                                      <p:cBhvr additive="base">
+                                        <p:cTn id="13" dur="500" fill="hold"/>
+                                        <p:tgtEl>
+                                          <p:spTgt spid="6"/>
+                                        </p:tgtEl>
+                                        <p:attrNameLst>
+                                          <p:attrName>ppt_x</p:attrName>
+                                        </p:attrNameLst>
+                                      </p:cBhvr>
+                                      <p:tavLst>
+                                        <p:tav tm="0">
+                                          <p:val>
+                                            <p:strVal val="#ppt_x"/>
+                                          </p:val>
+                                        </p:tav>
+                                        <p:tav tm="100000">
+                                          <p:val>
+                                            <p:strVal val="#ppt_x"/>
+                                          </p:val>
+                                        </p:tav>
+                                      </p:tavLst>
+                                    </p:anim>
+                                    <p:anim calcmode="lin" valueType="num">
+                                      <p:cBhvr additive="base">
+                                        <p:cTn id="14" dur="500" fill="hold"/>
+                                        <p:tgtEl>
+                                          <p:spTgt spid="6"/>
+                                        </p:tgtEl>
+                                        <p:attrNameLst>
+                                          <p:attrName>ppt_y</p:attrName>
+                                        </p:attrNameLst>
+                                      </p:cBhvr>
+                                      <p:tavLst>
+                                        <p:tav tm="0">
+                                          <p:val>
+                                            <p:strVal val="1+#ppt_h/2"/>
+                                          </p:val>
+                                        </p:tav>
+                                        <p:tav tm="100000">
+                                          <p:val>
+                                            <p:strVal val="#ppt_y"/>
+                                          </p:val>
+                                        </p:tav>
+                                      </p:tavLst>
+                                    </p:anim>
+                                  </p:childTnLst>
+                                </p:cTn>
+                              </p:par>
+                            </p:childTnLst>
+                          </p:cTn>
+                        </p:par>
+                      </p:childTnLst>
+                    </p:cTn>
+                  </p:par>
+                  <p:par>
+                    <p:cTn id="15" fill="hold">
+                      <p:stCondLst>
+                        <p:cond delay="indefinite"/>
+                      </p:stCondLst>
+                      <p:childTnLst>
+                        <p:par>
+                          <p:cTn id="16" fill="hold">
+                            <p:stCondLst>
+                              <p:cond delay="0"/>
+                            </p:stCondLst>
+                            <p:childTnLst>
+                              <p:par>
+                                <p:cTn id="17" presetID="2" presetClass="entr" presetSubtype="4" fill="hold" grpId="0" nodeType="clickEffect">
+                                  <p:stCondLst>
+                                    <p:cond delay="0"/>
+                                  </p:stCondLst>
+                                  <p:childTnLst>
+                                    <p:set>
+                                      <p:cBhvr>
+                                        <p:cTn id="18" dur="1" fill="hold">
+                                          <p:stCondLst>
+                                            <p:cond delay="0"/>
+                                          </p:stCondLst>
+                                        </p:cTn>
+                                        <p:tgtEl>
+                                          <p:spTgt spid="7"/>
+                                        </p:tgtEl>
+                                        <p:attrNameLst>
+                                          <p:attrName>style.visibility</p:attrName>
+                                        </p:attrNameLst>
+                                      </p:cBhvr>
+                                      <p:to>
+                                        <p:strVal val="visible"/>
+                                      </p:to>
+                                    </p:set>
+                                    <p:anim calcmode="lin" valueType="num">
+                                      <p:cBhvr additive="base">
+                                        <p:cTn id="19" dur="500" fill="hold"/>
+                                        <p:tgtEl>
+                                          <p:spTgt spid="7"/>
+                                        </p:tgtEl>
+                                        <p:attrNameLst>
+                                          <p:attrName>ppt_x</p:attrName>
+                                        </p:attrNameLst>
+                                      </p:cBhvr>
+                                      <p:tavLst>
+                                        <p:tav tm="0">
+                                          <p:val>
+                                            <p:strVal val="#ppt_x"/>
+                                          </p:val>
+                                        </p:tav>
+                                        <p:tav tm="100000">
+                                          <p:val>
+                                            <p:strVal val="#ppt_x"/>
+                                          </p:val>
+                                        </p:tav>
+                                      </p:tavLst>
+                                    </p:anim>
+                                    <p:anim calcmode="lin" valueType="num">
+                                      <p:cBhvr additive="base">
+                                        <p:cTn id="20" dur="500" fill="hold"/>
+                                        <p:tgtEl>
+                                          <p:spTgt spid="7"/>
+                                        </p:tgtEl>
+                                        <p:attrNameLst>
+                                          <p:attrName>ppt_y</p:attrName>
+                                        </p:attrNameLst>
+                                      </p:cBhvr>
+                                      <p:tavLst>
+                                        <p:tav tm="0">
+                                          <p:val>
+                                            <p:strVal val="1+#ppt_h/2"/>
+                                          </p:val>
+                                        </p:tav>
+                                        <p:tav tm="100000">
+                                          <p:val>
+                                            <p:strVal val="#ppt_y"/>
+                                          </p:val>
+                                        </p:tav>
+                                      </p:tavLst>
+                                    </p:anim>
+                                  </p:childTnLst>
+                                </p:cTn>
+                              </p:par>
+                            </p:childTnLst>
+                          </p:cTn>
+                        </p:par>
+                      </p:childTnLst>
+                    </p:cTn>
+                  </p:par>
+                  <p:par>
+                    <p:cTn id="21" fill="hold">
+                      <p:stCondLst>
+                        <p:cond delay="indefinite"/>
+                      </p:stCondLst>
+                      <p:childTnLst>
+                        <p:par>
+                          <p:cTn id="22" fill="hold">
+                            <p:stCondLst>
+                              <p:cond delay="0"/>
+                            </p:stCondLst>
+                            <p:childTnLst>
+                              <p:par>
+                                <p:cTn id="23" presetID="2" presetClass="entr" presetSubtype="4" fill="hold" grpId="0" nodeType="clickEffect">
+                                  <p:stCondLst>
+                                    <p:cond delay="0"/>
+                                  </p:stCondLst>
+                                  <p:childTnLst>
+                                    <p:set>
+                                      <p:cBhvr>
+                                        <p:cTn id="24" dur="1" fill="hold">
+                                          <p:stCondLst>
+                                            <p:cond delay="0"/>
+                                          </p:stCondLst>
+                                        </p:cTn>
+                                        <p:tgtEl>
+                                          <p:spTgt spid="3">
+                                            <p:bg/>
+                                          </p:spTgt>
+                                        </p:tgtEl>
+                                        <p:attrNameLst>
+                                          <p:attrName>style.visibility</p:attrName>
+                                        </p:attrNameLst>
+                                      </p:cBhvr>
+                                      <p:to>
+                                        <p:strVal val="visible"/>
+                                      </p:to>
+                                    </p:set>
+                                    <p:anim calcmode="lin" valueType="num">
+                                      <p:cBhvr additive="base">
+                                        <p:cTn id="25" dur="500" fill="hold"/>
+                                        <p:tgtEl>
+                                          <p:spTgt spid="3">
+                                            <p:bg/>
+                                          </p:spTgt>
+                                        </p:tgtEl>
+                                        <p:attrNameLst>
+                                          <p:attrName>ppt_x</p:attrName>
+                                        </p:attrNameLst>
+                                      </p:cBhvr>
+                                      <p:tavLst>
+                                        <p:tav tm="0">
+                                          <p:val>
+                                            <p:strVal val="#ppt_x"/>
+                                          </p:val>
+                                        </p:tav>
+                                        <p:tav tm="100000">
+                                          <p:val>
+                                            <p:strVal val="#ppt_x"/>
+                                          </p:val>
+                                        </p:tav>
+                                      </p:tavLst>
+                                    </p:anim>
+                                    <p:anim calcmode="lin" valueType="num">
+                                      <p:cBhvr additive="base">
+                                        <p:cTn id="26" dur="500" fill="hold"/>
+                                        <p:tgtEl>
+                                          <p:spTgt spid="3">
+                                            <p:bg/>
+                                          </p:spTgt>
+                                        </p:tgtEl>
+                                        <p:attrNameLst>
+                                          <p:attrName>ppt_y</p:attrName>
+                                        </p:attrNameLst>
+                                      </p:cBhvr>
+                                      <p:tavLst>
+                                        <p:tav tm="0">
+                                          <p:val>
+                                            <p:strVal val="1+#ppt_h/2"/>
+                                          </p:val>
+                                        </p:tav>
+                                        <p:tav tm="100000">
+                                          <p:val>
+                                            <p:strVal val="#ppt_y"/>
+                                          </p:val>
+                                        </p:tav>
+                                      </p:tavLst>
+                                    </p:anim>
+                                  </p:childTnLst>
+                                </p:cTn>
+                              </p:par>
+                            </p:childTnLst>
+                          </p:cTn>
+                        </p:par>
+                      </p:childTnLst>
+                    </p:cTn>
+                  </p:par>
+                  <p:par>
+                    <p:cTn id="27" fill="hold">
+                      <p:stCondLst>
+                        <p:cond delay="indefinite"/>
+                      </p:stCondLst>
+                      <p:childTnLst>
+                        <p:par>
+                          <p:cTn id="28" fill="hold">
+                            <p:stCondLst>
+                              <p:cond delay="0"/>
+                            </p:stCondLst>
+                            <p:childTnLst>
+                              <p:par>
+                                <p:cTn id="29" presetID="2" presetClass="entr" presetSubtype="4" fill="hold" grpId="0" nodeType="clickEffect">
+                                  <p:stCondLst>
+                                    <p:cond delay="0"/>
+                                  </p:stCondLst>
+                                  <p:childTnLst>
+                                    <p:set>
+                                      <p:cBhvr>
+                                        <p:cTn id="30" dur="1" fill="hold">
+                                          <p:stCondLst>
+                                            <p:cond delay="0"/>
+                                          </p:stCondLst>
+                                        </p:cTn>
+                                        <p:tgtEl>
+                                          <p:spTgt spid="3">
+                                            <p:txEl>
+                                              <p:pRg st="0" end="0"/>
+                                            </p:txEl>
+                                          </p:spTgt>
+                                        </p:tgtEl>
+                                        <p:attrNameLst>
+                                          <p:attrName>style.visibility</p:attrName>
+                                        </p:attrNameLst>
+                                      </p:cBhvr>
+                                      <p:to>
+                                        <p:strVal val="visible"/>
+                                      </p:to>
+                                    </p:set>
+                                    <p:anim calcmode="lin" valueType="num">
+                                      <p:cBhvr additive="base">
+                                        <p:cTn id="31" dur="500" fill="hold"/>
+                                        <p:tgtEl>
+                                          <p:spTgt spid="3">
+                                            <p:txEl>
+                                              <p:pRg st="0" end="0"/>
+                                            </p:txEl>
+                                          </p:spTgt>
+                                        </p:tgtEl>
+                                        <p:attrNameLst>
+                                          <p:attrName>ppt_x</p:attrName>
+                                        </p:attrNameLst>
+                                      </p:cBhvr>
+                                      <p:tavLst>
+                                        <p:tav tm="0">
+                                          <p:val>
+                                            <p:strVal val="#ppt_x"/>
+                                          </p:val>
+                                        </p:tav>
+                                        <p:tav tm="100000">
+                                          <p:val>
+                                            <p:strVal val="#ppt_x"/>
+                                          </p:val>
+                                        </p:tav>
+                                      </p:tavLst>
+                                    </p:anim>
+                                    <p:anim calcmode="lin" valueType="num">
+                                      <p:cBhvr additive="base">
+                                        <p:cTn id="32" dur="500" fill="hold"/>
+                                        <p:tgtEl>
+                                          <p:spTgt spid="3">
+                                            <p:txEl>
+                                              <p:pRg st="0" end="0"/>
+                                            </p:txEl>
+                                          </p:spTgt>
+                                        </p:tgtEl>
+                                        <p:attrNameLst>
+                                          <p:attrName>ppt_y</p:attrName>
+                                        </p:attrNameLst>
+                                      </p:cBhvr>
+                                      <p:tavLst>
+                                        <p:tav tm="0">
+                                          <p:val>
+                                            <p:strVal val="1+#ppt_h/2"/>
+                                          </p:val>
+                                        </p:tav>
+                                        <p:tav tm="100000">
+                                          <p:val>
+                                            <p:strVal val="#ppt_y"/>
+                                          </p:val>
+                                        </p:tav>
+                                      </p:tavLst>
+                                    </p:anim>
+                                  </p:childTnLst>
+                                </p:cTn>
+                              </p:par>
+                            </p:childTnLst>
+                          </p:cTn>
+                        </p:par>
+                      </p:childTnLst>
+                    </p:cTn>
+                  </p:par>
+                  <p:par>
+                    <p:cTn id="33" fill="hold">
+                      <p:stCondLst>
+                        <p:cond delay="indefinite"/>
+                      </p:stCondLst>
+                      <p:childTnLst>
+                        <p:par>
+                          <p:cTn id="34" fill="hold">
+                            <p:stCondLst>
+                              <p:cond delay="0"/>
+                            </p:stCondLst>
+                            <p:childTnLst>
+                              <p:par>
+                                <p:cTn id="35" presetID="2" presetClass="entr" presetSubtype="4" fill="hold" grpId="0" nodeType="clickEffect">
+                                  <p:stCondLst>
+                                    <p:cond delay="0"/>
+                                  </p:stCondLst>
+                                  <p:childTnLst>
+                                    <p:set>
+                                      <p:cBhvr>
+                                        <p:cTn id="36" dur="1" fill="hold">
+                                          <p:stCondLst>
+                                            <p:cond delay="0"/>
+                                          </p:stCondLst>
+                                        </p:cTn>
+                                        <p:tgtEl>
+                                          <p:spTgt spid="3">
+                                            <p:txEl>
+                                              <p:pRg st="1" end="1"/>
+                                            </p:txEl>
+                                          </p:spTgt>
+                                        </p:tgtEl>
+                                        <p:attrNameLst>
+                                          <p:attrName>style.visibility</p:attrName>
+                                        </p:attrNameLst>
+                                      </p:cBhvr>
+                                      <p:to>
+                                        <p:strVal val="visible"/>
+                                      </p:to>
+                                    </p:set>
+                                    <p:anim calcmode="lin" valueType="num">
+                                      <p:cBhvr additive="base">
+                                        <p:cTn id="37" dur="500" fill="hold"/>
+                                        <p:tgtEl>
+                                          <p:spTgt spid="3">
+                                            <p:txEl>
+                                              <p:pRg st="1" end="1"/>
+                                            </p:txEl>
+                                          </p:spTgt>
+                                        </p:tgtEl>
+                                        <p:attrNameLst>
+                                          <p:attrName>ppt_x</p:attrName>
+                                        </p:attrNameLst>
+                                      </p:cBhvr>
+                                      <p:tavLst>
+                                        <p:tav tm="0">
+                                          <p:val>
+                                            <p:strVal val="#ppt_x"/>
+                                          </p:val>
+                                        </p:tav>
+                                        <p:tav tm="100000">
+                                          <p:val>
+                                            <p:strVal val="#ppt_x"/>
+                                          </p:val>
+                                        </p:tav>
+                                      </p:tavLst>
+                                    </p:anim>
+                                    <p:anim calcmode="lin" valueType="num">
+                                      <p:cBhvr additive="base">
+                                        <p:cTn id="38" dur="500" fill="hold"/>
+                                        <p:tgtEl>
+                                          <p:spTgt spid="3">
+                                            <p:txEl>
+                                              <p:pRg st="1" end="1"/>
+                                            </p:txEl>
+                                          </p:spTgt>
+                                        </p:tgtEl>
+                                        <p:attrNameLst>
+                                          <p:attrName>ppt_y</p:attrName>
+                                        </p:attrNameLst>
+                                      </p:cBhvr>
+                                      <p:tavLst>
+                                        <p:tav tm="0">
+                                          <p:val>
+                                            <p:strVal val="1+#ppt_h/2"/>
+                                          </p:val>
+                                        </p:tav>
+                                        <p:tav tm="100000">
+                                          <p:val>
+                                            <p:strVal val="#ppt_y"/>
+                                          </p:val>
+                                        </p:tav>
+                                      </p:tavLst>
+                                    </p:anim>
+                                  </p:childTnLst>
+                                </p:cTn>
+                              </p:par>
+                            </p:childTnLst>
+                          </p:cTn>
+                        </p:par>
+                      </p:childTnLst>
+                    </p:cTn>
+                  </p:par>
+                  <p:par>
+                    <p:cTn id="39" fill="hold">
+                      <p:stCondLst>
+                        <p:cond delay="indefinite"/>
+                      </p:stCondLst>
+                      <p:childTnLst>
+                        <p:par>
+                          <p:cTn id="40" fill="hold">
+                            <p:stCondLst>
+                              <p:cond delay="0"/>
+                            </p:stCondLst>
+                            <p:childTnLst>
+                              <p:par>
+                                <p:cTn id="41" presetID="2" presetClass="entr" presetSubtype="4" fill="hold" grpId="0" nodeType="clickEffect">
+                                  <p:stCondLst>
+                                    <p:cond delay="0"/>
+                                  </p:stCondLst>
+                                  <p:childTnLst>
+                                    <p:set>
+                                      <p:cBhvr>
+                                        <p:cTn id="42" dur="1" fill="hold">
+                                          <p:stCondLst>
+                                            <p:cond delay="0"/>
+                                          </p:stCondLst>
+                                        </p:cTn>
+                                        <p:tgtEl>
+                                          <p:spTgt spid="3">
+                                            <p:txEl>
+                                              <p:pRg st="2" end="2"/>
+                                            </p:txEl>
+                                          </p:spTgt>
+                                        </p:tgtEl>
+                                        <p:attrNameLst>
+                                          <p:attrName>style.visibility</p:attrName>
+                                        </p:attrNameLst>
+                                      </p:cBhvr>
+                                      <p:to>
+                                        <p:strVal val="visible"/>
+                                      </p:to>
+                                    </p:set>
+                                    <p:anim calcmode="lin" valueType="num">
+                                      <p:cBhvr additive="base">
+                                        <p:cTn id="43" dur="500" fill="hold"/>
+                                        <p:tgtEl>
+                                          <p:spTgt spid="3">
+                                            <p:txEl>
+                                              <p:pRg st="2" end="2"/>
+                                            </p:txEl>
+                                          </p:spTgt>
+                                        </p:tgtEl>
+                                        <p:attrNameLst>
+                                          <p:attrName>ppt_x</p:attrName>
+                                        </p:attrNameLst>
+                                      </p:cBhvr>
+                                      <p:tavLst>
+                                        <p:tav tm="0">
+                                          <p:val>
+                                            <p:strVal val="#ppt_x"/>
+                                          </p:val>
+                                        </p:tav>
+                                        <p:tav tm="100000">
+                                          <p:val>
+                                            <p:strVal val="#ppt_x"/>
+                                          </p:val>
+                                        </p:tav>
+                                      </p:tavLst>
+                                    </p:anim>
+                                    <p:anim calcmode="lin" valueType="num">
+                                      <p:cBhvr additive="base">
+                                        <p:cTn id="44" dur="500" fill="hold"/>
+                                        <p:tgtEl>
+                                          <p:spTgt spid="3">
+                                            <p:txEl>
+                                              <p:pRg st="2" end="2"/>
+                                            </p:txEl>
+                                          </p:spTgt>
+                                        </p:tgtEl>
+                                        <p:attrNameLst>
+                                          <p:attrName>ppt_y</p:attrName>
+                                        </p:attrNameLst>
+                                      </p:cBhvr>
+                                      <p:tavLst>
+                                        <p:tav tm="0">
+                                          <p:val>
+                                            <p:strVal val="1+#ppt_h/2"/>
+                                          </p:val>
+                                        </p:tav>
+                                        <p:tav tm="100000">
+                                          <p:val>
+                                            <p:strVal val="#ppt_y"/>
+                                          </p:val>
+                                        </p:tav>
+                                      </p:tavLst>
+                                    </p:anim>
+                                  </p:childTnLst>
+                                </p:cTn>
+                              </p:par>
+                            </p:childTnLst>
+                          </p:cTn>
+                        </p:par>
+                      </p:childTnLst>
+                    </p:cTn>
+                  </p:par>
+                  <p:par>
+                    <p:cTn id="45" fill="hold">
+                      <p:stCondLst>
+                        <p:cond delay="indefinite"/>
+                      </p:stCondLst>
+                      <p:childTnLst>
+                        <p:par>
+                          <p:cTn id="46" fill="hold">
+                            <p:stCondLst>
+                              <p:cond delay="0"/>
+                            </p:stCondLst>
+                            <p:childTnLst>
+                              <p:par>
+                                <p:cTn id="47" presetID="2" presetClass="entr" presetSubtype="4" fill="hold" grpId="0" nodeType="clickEffect">
+                                  <p:stCondLst>
+                                    <p:cond delay="0"/>
+                                  </p:stCondLst>
+                                  <p:childTnLst>
+                                    <p:set>
+                                      <p:cBhvr>
+                                        <p:cTn id="48" dur="1" fill="hold">
+                                          <p:stCondLst>
+                                            <p:cond delay="0"/>
+                                          </p:stCondLst>
+                                        </p:cTn>
+                                        <p:tgtEl>
+                                          <p:spTgt spid="3">
+                                            <p:txEl>
+                                              <p:pRg st="3" end="3"/>
+                                            </p:txEl>
+                                          </p:spTgt>
+                                        </p:tgtEl>
+                                        <p:attrNameLst>
+                                          <p:attrName>style.visibility</p:attrName>
+                                        </p:attrNameLst>
+                                      </p:cBhvr>
+                                      <p:to>
+                                        <p:strVal val="visible"/>
+                                      </p:to>
+                                    </p:set>
+                                    <p:anim calcmode="lin" valueType="num">
+                                      <p:cBhvr additive="base">
+                                        <p:cTn id="49" dur="500" fill="hold"/>
+                                        <p:tgtEl>
+                                          <p:spTgt spid="3">
+                                            <p:txEl>
+                                              <p:pRg st="3" end="3"/>
+                                            </p:txEl>
+                                          </p:spTgt>
+                                        </p:tgtEl>
+                                        <p:attrNameLst>
+                                          <p:attrName>ppt_x</p:attrName>
+                                        </p:attrNameLst>
+                                      </p:cBhvr>
+                                      <p:tavLst>
+                                        <p:tav tm="0">
+                                          <p:val>
+                                            <p:strVal val="#ppt_x"/>
+                                          </p:val>
+                                        </p:tav>
+                                        <p:tav tm="100000">
+                                          <p:val>
+                                            <p:strVal val="#ppt_x"/>
+                                          </p:val>
+                                        </p:tav>
+                                      </p:tavLst>
+                                    </p:anim>
+                                    <p:anim calcmode="lin" valueType="num">
+                                      <p:cBhvr additive="base">
+                                        <p:cTn id="50" dur="500" fill="hold"/>
+                                        <p:tgtEl>
+                                          <p:spTgt spid="3">
+                                            <p:txEl>
+                                              <p:pRg st="3" end="3"/>
+                                            </p:txEl>
+                                          </p:spTgt>
+                                        </p:tgtEl>
+                                        <p:attrNameLst>
+                                          <p:attrName>ppt_y</p:attrName>
+                                        </p:attrNameLst>
+                                      </p:cBhvr>
+                                      <p:tavLst>
+                                        <p:tav tm="0">
+                                          <p:val>
+                                            <p:strVal val="1+#ppt_h/2"/>
+                                          </p:val>
+                                        </p:tav>
+                                        <p:tav tm="100000">
+                                          <p:val>
+                                            <p:strVal val="#ppt_y"/>
+                                          </p:val>
+                                        </p:tav>
+                                      </p:tavLst>
+                                    </p:anim>
+                                  </p:childTnLst>
+                                </p:cTn>
+                              </p:par>
+                            </p:childTnLst>
+                          </p:cTn>
+                        </p:par>
+                      </p:childTnLst>
+                    </p:cTn>
+                  </p:par>
+                </p:childTnLst>
+              </p:cTn>
+              <p:prevCondLst>
+                <p:cond evt="onPrev" delay="0">
+                  <p:tgtEl>
+                    <p:sldTgt/>
+                  </p:tgtEl>
+                </p:cond>
+              </p:prevCondLst>
+              <p:nextCondLst>
+                <p:cond evt="onNext" delay="0">
+                  <p:tgtEl>
+                    <p:sldTgt/>
+                  </p:tgtEl>
+                </p:cond>
+              </p:nextCondLst>
+            </p:seq>
+          </p:childTnLst>
+        </p:cTn>
+      </p:par>
+    </p:tnLst>
+    <p:bldLst>
+      <p:bldP spid="3" grpId="0" build="p" animBg="1"/>
+      <p:bldP spid="5" grpId="0" animBg="1"/>
+      <p:bldP spid="6" grpId="0" animBg="1"/>
+      <p:bldP spid="7" grpId="0" animBg="1"/>
+    </p:bldLst>
+  </p:timing>
 </p:sld>
 </file>
 
 <file path=ppt/slides/slide11.xml><?xml version="1.0" encoding="utf-8"?>
+<p:sld xmlns:a="http://schemas.openxmlformats.org/drawingml/2006/main" xmlns:r="http://schemas.openxmlformats.org/officeDocument/2006/relationships" xmlns:p="http://schemas.openxmlformats.org/presentationml/2006/main">
+  <p:cSld>
+    <p:spTree>
+      <p:nvGrpSpPr>
+        <p:cNvPr id="1" name="">
+          <a:extLst>
+            <a:ext uri="{FF2B5EF4-FFF2-40B4-BE49-F238E27FC236}">
+              <a16:creationId xmlns:a16="http://schemas.microsoft.com/office/drawing/2014/main" id="{9BA3286A-F7CC-4DDD-C2E6-772D18C919FC}"/>
+            </a:ext>
+          </a:extLst>
+        </p:cNvPr>
+        <p:cNvGrpSpPr/>
+        <p:nvPr/>
+      </p:nvGrpSpPr>
+      <p:grpSpPr>
+        <a:xfrm>
+          <a:off x="0" y="0"/>
+          <a:ext cx="0" cy="0"/>
+          <a:chOff x="0" y="0"/>
+          <a:chExt cx="0" cy="0"/>
+        </a:xfrm>
+      </p:grpSpPr>
+      <p:sp>
+        <p:nvSpPr>
+          <p:cNvPr id="2" name="Title 1">
+            <a:extLst>
+              <a:ext uri="{FF2B5EF4-FFF2-40B4-BE49-F238E27FC236}">
+                <a16:creationId xmlns:a16="http://schemas.microsoft.com/office/drawing/2014/main" id="{1CD3BFFB-86DB-CB9C-7B73-C9C56E329888}"/>
+              </a:ext>
+            </a:extLst>
+          </p:cNvPr>
+          <p:cNvSpPr>
+            <a:spLocks noGrp="1"/>
+          </p:cNvSpPr>
+          <p:nvPr>
+            <p:ph type="title"/>
+          </p:nvPr>
+        </p:nvSpPr>
+        <p:spPr/>
+        <p:txBody>
+          <a:bodyPr/>
+          <a:lstStyle/>
+          <a:p>
+            <a:r>
+              <a:rPr lang="en-US" dirty="0"/>
+              <a:t>empty and &lt;|&gt; </a:t>
+            </a:r>
+          </a:p>
+        </p:txBody>
+      </p:sp>
+      <p:sp>
+        <p:nvSpPr>
+          <p:cNvPr id="4" name="Slide Number Placeholder 3">
+            <a:extLst>
+              <a:ext uri="{FF2B5EF4-FFF2-40B4-BE49-F238E27FC236}">
+                <a16:creationId xmlns:a16="http://schemas.microsoft.com/office/drawing/2014/main" id="{828F09B3-0943-D0DA-0412-2CB9E1ADCF78}"/>
+              </a:ext>
+            </a:extLst>
+          </p:cNvPr>
+          <p:cNvSpPr>
+            <a:spLocks noGrp="1"/>
+          </p:cNvSpPr>
+          <p:nvPr>
+            <p:ph type="sldNum" sz="quarter" idx="12"/>
+          </p:nvPr>
+        </p:nvSpPr>
+        <p:spPr/>
+        <p:txBody>
+          <a:bodyPr/>
+          <a:lstStyle/>
+          <a:p>
+            <a:pPr>
+              <a:defRPr/>
+            </a:pPr>
+            <a:fld id="{6BCA5543-1E1F-F043-9EBC-BC37C93D4920}" type="slidenum">
+              <a:rPr lang="en-US" smtClean="0"/>
+              <a:pPr>
+                <a:defRPr/>
+              </a:pPr>
+              <a:t>10</a:t>
+            </a:fld>
+            <a:endParaRPr lang="en-US"/>
+          </a:p>
+        </p:txBody>
+      </p:sp>
+      <p:sp>
+        <p:nvSpPr>
+          <p:cNvPr id="5" name="Content Placeholder 2">
+            <a:extLst>
+              <a:ext uri="{FF2B5EF4-FFF2-40B4-BE49-F238E27FC236}">
+                <a16:creationId xmlns:a16="http://schemas.microsoft.com/office/drawing/2014/main" id="{1027AABB-F17C-B5E3-47B9-685DA663D6C6}"/>
+              </a:ext>
+            </a:extLst>
+          </p:cNvPr>
+          <p:cNvSpPr txBox="1">
+            <a:spLocks/>
+          </p:cNvSpPr>
+          <p:nvPr/>
+        </p:nvSpPr>
+        <p:spPr>
+          <a:xfrm>
+            <a:off x="748128" y="2096391"/>
+            <a:ext cx="3249936" cy="457696"/>
+          </a:xfrm>
+          <a:prstGeom prst="rect">
+            <a:avLst/>
+          </a:prstGeom>
+          <a:solidFill>
+            <a:schemeClr val="bg2">
+              <a:lumMod val="60000"/>
+              <a:lumOff val="40000"/>
+            </a:schemeClr>
+          </a:solidFill>
+        </p:spPr>
+        <p:txBody>
+          <a:bodyPr vert="horz" lIns="91440" tIns="45720" rIns="91440" bIns="45720" rtlCol="0">
+            <a:normAutofit/>
+          </a:bodyPr>
+          <a:lstStyle>
+            <a:lvl1pPr marL="171450" indent="-171450" algn="l" defTabSz="685800" rtl="0" eaLnBrk="1" latinLnBrk="0" hangingPunct="1">
+              <a:lnSpc>
+                <a:spcPct val="90000"/>
+              </a:lnSpc>
+              <a:spcBef>
+                <a:spcPts val="750"/>
+              </a:spcBef>
+              <a:buFont typeface="Arial" panose="020B0604020202020204" pitchFamily="34" charset="0"/>
+              <a:buChar char="•"/>
+              <a:defRPr sz="1800" kern="1200">
+                <a:solidFill>
+                  <a:schemeClr val="tx1"/>
+                </a:solidFill>
+                <a:latin typeface="+mn-lt"/>
+                <a:ea typeface="+mn-ea"/>
+                <a:cs typeface="+mn-cs"/>
+              </a:defRPr>
+            </a:lvl1pPr>
+            <a:lvl2pPr marL="514350" indent="-171450" algn="l" defTabSz="685800" rtl="0" eaLnBrk="1" latinLnBrk="0" hangingPunct="1">
+              <a:lnSpc>
+                <a:spcPct val="90000"/>
+              </a:lnSpc>
+              <a:spcBef>
+                <a:spcPts val="375"/>
+              </a:spcBef>
+              <a:buFont typeface="Arial" panose="020B0604020202020204" pitchFamily="34" charset="0"/>
+              <a:buChar char="•"/>
+              <a:defRPr sz="1500" kern="1200">
+                <a:solidFill>
+                  <a:schemeClr val="tx1"/>
+                </a:solidFill>
+                <a:latin typeface="+mn-lt"/>
+                <a:ea typeface="+mn-ea"/>
+                <a:cs typeface="+mn-cs"/>
+              </a:defRPr>
+            </a:lvl2pPr>
+            <a:lvl3pPr marL="857250" indent="-171450" algn="l" defTabSz="685800" rtl="0" eaLnBrk="1" latinLnBrk="0" hangingPunct="1">
+              <a:lnSpc>
+                <a:spcPct val="90000"/>
+              </a:lnSpc>
+              <a:spcBef>
+                <a:spcPts val="375"/>
+              </a:spcBef>
+              <a:buFont typeface="Arial" panose="020B0604020202020204" pitchFamily="34" charset="0"/>
+              <a:buChar char="•"/>
+              <a:defRPr sz="1350" kern="1200">
+                <a:solidFill>
+                  <a:schemeClr val="tx1"/>
+                </a:solidFill>
+                <a:latin typeface="+mn-lt"/>
+                <a:ea typeface="+mn-ea"/>
+                <a:cs typeface="+mn-cs"/>
+              </a:defRPr>
+            </a:lvl3pPr>
+            <a:lvl4pPr marL="1200150" indent="-171450" algn="l" defTabSz="685800" rtl="0" eaLnBrk="1" latinLnBrk="0" hangingPunct="1">
+              <a:lnSpc>
+                <a:spcPct val="90000"/>
+              </a:lnSpc>
+              <a:spcBef>
+                <a:spcPts val="375"/>
+              </a:spcBef>
+              <a:buFont typeface="Arial" panose="020B0604020202020204" pitchFamily="34" charset="0"/>
+              <a:buChar char="•"/>
+              <a:defRPr sz="1200" kern="1200">
+                <a:solidFill>
+                  <a:schemeClr val="tx1"/>
+                </a:solidFill>
+                <a:latin typeface="+mn-lt"/>
+                <a:ea typeface="+mn-ea"/>
+                <a:cs typeface="+mn-cs"/>
+              </a:defRPr>
+            </a:lvl4pPr>
+            <a:lvl5pPr marL="1543050" indent="-171450" algn="l" defTabSz="685800" rtl="0" eaLnBrk="1" latinLnBrk="0" hangingPunct="1">
+              <a:lnSpc>
+                <a:spcPct val="90000"/>
+              </a:lnSpc>
+              <a:spcBef>
+                <a:spcPts val="375"/>
+              </a:spcBef>
+              <a:buFont typeface="Arial" panose="020B0604020202020204" pitchFamily="34" charset="0"/>
+              <a:buChar char="•"/>
+              <a:defRPr sz="1200" kern="1200">
+                <a:solidFill>
+                  <a:schemeClr val="tx1"/>
+                </a:solidFill>
+                <a:latin typeface="+mn-lt"/>
+                <a:ea typeface="+mn-ea"/>
+                <a:cs typeface="+mn-cs"/>
+              </a:defRPr>
+            </a:lvl5pPr>
+            <a:lvl6pPr marL="1885950" indent="-171450" algn="l" defTabSz="685800" rtl="0" eaLnBrk="1" latinLnBrk="0" hangingPunct="1">
+              <a:lnSpc>
+                <a:spcPct val="90000"/>
+              </a:lnSpc>
+              <a:spcBef>
+                <a:spcPts val="375"/>
+              </a:spcBef>
+              <a:buFont typeface="Arial" panose="020B0604020202020204" pitchFamily="34" charset="0"/>
+              <a:buChar char="•"/>
+              <a:defRPr sz="1050" kern="1200">
+                <a:solidFill>
+                  <a:schemeClr val="tx1"/>
+                </a:solidFill>
+                <a:latin typeface="+mn-lt"/>
+                <a:ea typeface="+mn-ea"/>
+                <a:cs typeface="+mn-cs"/>
+              </a:defRPr>
+            </a:lvl6pPr>
+            <a:lvl7pPr marL="2228850" indent="-171450" algn="l" defTabSz="685800" rtl="0" eaLnBrk="1" latinLnBrk="0" hangingPunct="1">
+              <a:lnSpc>
+                <a:spcPct val="90000"/>
+              </a:lnSpc>
+              <a:spcBef>
+                <a:spcPts val="375"/>
+              </a:spcBef>
+              <a:buFont typeface="Arial" panose="020B0604020202020204" pitchFamily="34" charset="0"/>
+              <a:buChar char="•"/>
+              <a:defRPr sz="1050" kern="1200">
+                <a:solidFill>
+                  <a:schemeClr val="tx1"/>
+                </a:solidFill>
+                <a:latin typeface="+mn-lt"/>
+                <a:ea typeface="+mn-ea"/>
+                <a:cs typeface="+mn-cs"/>
+              </a:defRPr>
+            </a:lvl7pPr>
+            <a:lvl8pPr marL="2571750" indent="-171450" algn="l" defTabSz="685800" rtl="0" eaLnBrk="1" latinLnBrk="0" hangingPunct="1">
+              <a:lnSpc>
+                <a:spcPct val="90000"/>
+              </a:lnSpc>
+              <a:spcBef>
+                <a:spcPts val="375"/>
+              </a:spcBef>
+              <a:buFont typeface="Arial" panose="020B0604020202020204" pitchFamily="34" charset="0"/>
+              <a:buChar char="•"/>
+              <a:defRPr sz="1050" kern="1200">
+                <a:solidFill>
+                  <a:schemeClr val="tx1"/>
+                </a:solidFill>
+                <a:latin typeface="+mn-lt"/>
+                <a:ea typeface="+mn-ea"/>
+                <a:cs typeface="+mn-cs"/>
+              </a:defRPr>
+            </a:lvl8pPr>
+            <a:lvl9pPr marL="2914650" indent="-171450" algn="l" defTabSz="685800" rtl="0" eaLnBrk="1" latinLnBrk="0" hangingPunct="1">
+              <a:lnSpc>
+                <a:spcPct val="90000"/>
+              </a:lnSpc>
+              <a:spcBef>
+                <a:spcPts val="375"/>
+              </a:spcBef>
+              <a:buFont typeface="Arial" panose="020B0604020202020204" pitchFamily="34" charset="0"/>
+              <a:buChar char="•"/>
+              <a:defRPr sz="1050" kern="1200">
+                <a:solidFill>
+                  <a:schemeClr val="tx1"/>
+                </a:solidFill>
+                <a:latin typeface="+mn-lt"/>
+                <a:ea typeface="+mn-ea"/>
+                <a:cs typeface="+mn-cs"/>
+              </a:defRPr>
+            </a:lvl9pPr>
+          </a:lstStyle>
+          <a:p>
+            <a:pPr marL="0" indent="0" fontAlgn="auto">
+              <a:spcAft>
+                <a:spcPts val="0"/>
+              </a:spcAft>
+              <a:buNone/>
+            </a:pPr>
+            <a:r>
+              <a:rPr lang="en-IE" dirty="0" err="1"/>
+              <a:t>parseTrue</a:t>
+            </a:r>
+            <a:r>
+              <a:rPr lang="en-IE" dirty="0"/>
+              <a:t> &lt;|&gt; </a:t>
+            </a:r>
+            <a:r>
+              <a:rPr lang="en-IE" dirty="0" err="1"/>
+              <a:t>parseFalse</a:t>
+            </a:r>
+            <a:endParaRPr lang="en-US" dirty="0"/>
+          </a:p>
+        </p:txBody>
+      </p:sp>
+      <p:sp>
+        <p:nvSpPr>
+          <p:cNvPr id="6" name="TextBox 5">
+            <a:extLst>
+              <a:ext uri="{FF2B5EF4-FFF2-40B4-BE49-F238E27FC236}">
+                <a16:creationId xmlns:a16="http://schemas.microsoft.com/office/drawing/2014/main" id="{91608252-EBCB-6EDD-2C17-B86EB478C26A}"/>
+              </a:ext>
+            </a:extLst>
+          </p:cNvPr>
+          <p:cNvSpPr txBox="1"/>
+          <p:nvPr/>
+        </p:nvSpPr>
+        <p:spPr>
+          <a:xfrm>
+            <a:off x="286037" y="2718645"/>
+            <a:ext cx="8626668" cy="523220"/>
+          </a:xfrm>
+          <a:prstGeom prst="rect">
+            <a:avLst/>
+          </a:prstGeom>
+          <a:solidFill>
+            <a:schemeClr val="accent4"/>
+          </a:solidFill>
+        </p:spPr>
+        <p:txBody>
+          <a:bodyPr wrap="square" rtlCol="0">
+            <a:spAutoFit/>
+          </a:bodyPr>
+          <a:lstStyle/>
+          <a:p>
+            <a:r>
+              <a:rPr lang="en-IE" i="1" dirty="0"/>
+              <a:t>"try </a:t>
+            </a:r>
+            <a:r>
+              <a:rPr lang="en-IE" i="1" dirty="0" err="1"/>
+              <a:t>parseTrue</a:t>
+            </a:r>
+            <a:r>
+              <a:rPr lang="en-IE" i="1" dirty="0"/>
+              <a:t>, and if that fails, try </a:t>
+            </a:r>
+            <a:r>
+              <a:rPr lang="en-IE" i="1" dirty="0" err="1"/>
+              <a:t>parseFalse</a:t>
+            </a:r>
+            <a:r>
+              <a:rPr lang="en-IE" dirty="0"/>
+              <a:t>.</a:t>
+            </a:r>
+            <a:endParaRPr lang="en-US" dirty="0"/>
+          </a:p>
+        </p:txBody>
+      </p:sp>
+    </p:spTree>
+    <p:extLst>
+      <p:ext uri="{BB962C8B-B14F-4D97-AF65-F5344CB8AC3E}">
+        <p14:creationId xmlns:p14="http://schemas.microsoft.com/office/powerpoint/2010/main" val="1706956248"/>
+      </p:ext>
+    </p:extLst>
+  </p:cSld>
+  <p:clrMapOvr>
+    <a:masterClrMapping/>
+  </p:clrMapOvr>
+  <p:timing>
+    <p:tnLst>
+      <p:par>
+        <p:cTn id="1" dur="indefinite" restart="never" nodeType="tmRoot">
+          <p:childTnLst>
+            <p:seq concurrent="1" nextAc="seek">
+              <p:cTn id="2" dur="indefinite" nodeType="mainSeq">
+                <p:childTnLst>
+                  <p:par>
+                    <p:cTn id="3" fill="hold">
+                      <p:stCondLst>
+                        <p:cond delay="indefinite"/>
+                      </p:stCondLst>
+                      <p:childTnLst>
+                        <p:par>
+                          <p:cTn id="4" fill="hold">
+                            <p:stCondLst>
+                              <p:cond delay="0"/>
+                            </p:stCondLst>
+                            <p:childTnLst>
+                              <p:par>
+                                <p:cTn id="5" presetID="2" presetClass="entr" presetSubtype="4" fill="hold" grpId="0" nodeType="clickEffect">
+                                  <p:stCondLst>
+                                    <p:cond delay="0"/>
+                                  </p:stCondLst>
+                                  <p:childTnLst>
+                                    <p:set>
+                                      <p:cBhvr>
+                                        <p:cTn id="6" dur="1" fill="hold">
+                                          <p:stCondLst>
+                                            <p:cond delay="0"/>
+                                          </p:stCondLst>
+                                        </p:cTn>
+                                        <p:tgtEl>
+                                          <p:spTgt spid="5"/>
+                                        </p:tgtEl>
+                                        <p:attrNameLst>
+                                          <p:attrName>style.visibility</p:attrName>
+                                        </p:attrNameLst>
+                                      </p:cBhvr>
+                                      <p:to>
+                                        <p:strVal val="visible"/>
+                                      </p:to>
+                                    </p:set>
+                                    <p:anim calcmode="lin" valueType="num">
+                                      <p:cBhvr additive="base">
+                                        <p:cTn id="7" dur="500" fill="hold"/>
+                                        <p:tgtEl>
+                                          <p:spTgt spid="5"/>
+                                        </p:tgtEl>
+                                        <p:attrNameLst>
+                                          <p:attrName>ppt_x</p:attrName>
+                                        </p:attrNameLst>
+                                      </p:cBhvr>
+                                      <p:tavLst>
+                                        <p:tav tm="0">
+                                          <p:val>
+                                            <p:strVal val="#ppt_x"/>
+                                          </p:val>
+                                        </p:tav>
+                                        <p:tav tm="100000">
+                                          <p:val>
+                                            <p:strVal val="#ppt_x"/>
+                                          </p:val>
+                                        </p:tav>
+                                      </p:tavLst>
+                                    </p:anim>
+                                    <p:anim calcmode="lin" valueType="num">
+                                      <p:cBhvr additive="base">
+                                        <p:cTn id="8" dur="500" fill="hold"/>
+                                        <p:tgtEl>
+                                          <p:spTgt spid="5"/>
+                                        </p:tgtEl>
+                                        <p:attrNameLst>
+                                          <p:attrName>ppt_y</p:attrName>
+                                        </p:attrNameLst>
+                                      </p:cBhvr>
+                                      <p:tavLst>
+                                        <p:tav tm="0">
+                                          <p:val>
+                                            <p:strVal val="1+#ppt_h/2"/>
+                                          </p:val>
+                                        </p:tav>
+                                        <p:tav tm="100000">
+                                          <p:val>
+                                            <p:strVal val="#ppt_y"/>
+                                          </p:val>
+                                        </p:tav>
+                                      </p:tavLst>
+                                    </p:anim>
+                                  </p:childTnLst>
+                                </p:cTn>
+                              </p:par>
+                            </p:childTnLst>
+                          </p:cTn>
+                        </p:par>
+                      </p:childTnLst>
+                    </p:cTn>
+                  </p:par>
+                  <p:par>
+                    <p:cTn id="9" fill="hold">
+                      <p:stCondLst>
+                        <p:cond delay="indefinite"/>
+                      </p:stCondLst>
+                      <p:childTnLst>
+                        <p:par>
+                          <p:cTn id="10" fill="hold">
+                            <p:stCondLst>
+                              <p:cond delay="0"/>
+                            </p:stCondLst>
+                            <p:childTnLst>
+                              <p:par>
+                                <p:cTn id="11" presetID="2" presetClass="entr" presetSubtype="4" fill="hold" grpId="0" nodeType="clickEffect">
+                                  <p:stCondLst>
+                                    <p:cond delay="0"/>
+                                  </p:stCondLst>
+                                  <p:childTnLst>
+                                    <p:set>
+                                      <p:cBhvr>
+                                        <p:cTn id="12" dur="1" fill="hold">
+                                          <p:stCondLst>
+                                            <p:cond delay="0"/>
+                                          </p:stCondLst>
+                                        </p:cTn>
+                                        <p:tgtEl>
+                                          <p:spTgt spid="6"/>
+                                        </p:tgtEl>
+                                        <p:attrNameLst>
+                                          <p:attrName>style.visibility</p:attrName>
+                                        </p:attrNameLst>
+                                      </p:cBhvr>
+                                      <p:to>
+                                        <p:strVal val="visible"/>
+                                      </p:to>
+                                    </p:set>
+                                    <p:anim calcmode="lin" valueType="num">
+                                      <p:cBhvr additive="base">
+                                        <p:cTn id="13" dur="500" fill="hold"/>
+                                        <p:tgtEl>
+                                          <p:spTgt spid="6"/>
+                                        </p:tgtEl>
+                                        <p:attrNameLst>
+                                          <p:attrName>ppt_x</p:attrName>
+                                        </p:attrNameLst>
+                                      </p:cBhvr>
+                                      <p:tavLst>
+                                        <p:tav tm="0">
+                                          <p:val>
+                                            <p:strVal val="#ppt_x"/>
+                                          </p:val>
+                                        </p:tav>
+                                        <p:tav tm="100000">
+                                          <p:val>
+                                            <p:strVal val="#ppt_x"/>
+                                          </p:val>
+                                        </p:tav>
+                                      </p:tavLst>
+                                    </p:anim>
+                                    <p:anim calcmode="lin" valueType="num">
+                                      <p:cBhvr additive="base">
+                                        <p:cTn id="14" dur="500" fill="hold"/>
+                                        <p:tgtEl>
+                                          <p:spTgt spid="6"/>
+                                        </p:tgtEl>
+                                        <p:attrNameLst>
+                                          <p:attrName>ppt_y</p:attrName>
+                                        </p:attrNameLst>
+                                      </p:cBhvr>
+                                      <p:tavLst>
+                                        <p:tav tm="0">
+                                          <p:val>
+                                            <p:strVal val="1+#ppt_h/2"/>
+                                          </p:val>
+                                        </p:tav>
+                                        <p:tav tm="100000">
+                                          <p:val>
+                                            <p:strVal val="#ppt_y"/>
+                                          </p:val>
+                                        </p:tav>
+                                      </p:tavLst>
+                                    </p:anim>
+                                  </p:childTnLst>
+                                </p:cTn>
+                              </p:par>
+                            </p:childTnLst>
+                          </p:cTn>
+                        </p:par>
+                      </p:childTnLst>
+                    </p:cTn>
+                  </p:par>
+                </p:childTnLst>
+              </p:cTn>
+              <p:prevCondLst>
+                <p:cond evt="onPrev" delay="0">
+                  <p:tgtEl>
+                    <p:sldTgt/>
+                  </p:tgtEl>
+                </p:cond>
+              </p:prevCondLst>
+              <p:nextCondLst>
+                <p:cond evt="onNext" delay="0">
+                  <p:tgtEl>
+                    <p:sldTgt/>
+                  </p:tgtEl>
+                </p:cond>
+              </p:nextCondLst>
+            </p:seq>
+          </p:childTnLst>
+        </p:cTn>
+      </p:par>
+    </p:tnLst>
+    <p:bldLst>
+      <p:bldP spid="5" grpId="0" animBg="1"/>
+      <p:bldP spid="6" grpId="0" animBg="1"/>
+    </p:bldLst>
+  </p:timing>
+</p:sld>
+</file>
+
+<file path=ppt/slides/slide12.xml><?xml version="1.0" encoding="utf-8"?>
 <p:sld xmlns:a="http://schemas.openxmlformats.org/drawingml/2006/main" xmlns:r="http://schemas.openxmlformats.org/officeDocument/2006/relationships" xmlns:p="http://schemas.openxmlformats.org/presentationml/2006/main">
   <p:cSld>
     <p:spTree>
@@ -9560,6 +11433,244 @@
           <p:cNvPr id="2" name="Title 1">
             <a:extLst>
               <a:ext uri="{FF2B5EF4-FFF2-40B4-BE49-F238E27FC236}">
+                <a16:creationId xmlns:a16="http://schemas.microsoft.com/office/drawing/2014/main" id="{304B3FD9-D314-3406-8E4D-44F02A3261A6}"/>
+              </a:ext>
+            </a:extLst>
+          </p:cNvPr>
+          <p:cNvSpPr>
+            <a:spLocks noGrp="1"/>
+          </p:cNvSpPr>
+          <p:nvPr>
+            <p:ph type="title"/>
+          </p:nvPr>
+        </p:nvSpPr>
+        <p:spPr/>
+        <p:txBody>
+          <a:bodyPr/>
+          <a:lstStyle/>
+          <a:p>
+            <a:r>
+              <a:rPr lang="en-US" dirty="0"/>
+              <a:t>Helper function - satisfy</a:t>
+            </a:r>
+          </a:p>
+        </p:txBody>
+      </p:sp>
+      <p:sp>
+        <p:nvSpPr>
+          <p:cNvPr id="3" name="Content Placeholder 2">
+            <a:extLst>
+              <a:ext uri="{FF2B5EF4-FFF2-40B4-BE49-F238E27FC236}">
+                <a16:creationId xmlns:a16="http://schemas.microsoft.com/office/drawing/2014/main" id="{4D5E0EA5-E81C-7B0F-08BC-4EEBD3635D46}"/>
+              </a:ext>
+            </a:extLst>
+          </p:cNvPr>
+          <p:cNvSpPr>
+            <a:spLocks noGrp="1"/>
+          </p:cNvSpPr>
+          <p:nvPr>
+            <p:ph idx="1"/>
+          </p:nvPr>
+        </p:nvSpPr>
+        <p:spPr>
+          <a:xfrm>
+            <a:off x="510241" y="2336873"/>
+            <a:ext cx="7210396" cy="3120651"/>
+          </a:xfrm>
+          <a:solidFill>
+            <a:schemeClr val="accent1"/>
+          </a:solidFill>
+        </p:spPr>
+        <p:txBody>
+          <a:bodyPr/>
+          <a:lstStyle/>
+          <a:p>
+            <a:pPr marL="0" indent="0">
+              <a:buNone/>
+            </a:pPr>
+            <a:r>
+              <a:rPr lang="en-IE" dirty="0"/>
+              <a:t>--  Parse one character satisfying a predicate.</a:t>
+            </a:r>
+          </a:p>
+          <a:p>
+            <a:pPr marL="0" indent="0">
+              <a:buNone/>
+            </a:pPr>
+            <a:r>
+              <a:rPr lang="en-IE" dirty="0"/>
+              <a:t>-- This is the most general primitive; everything else is built on it.</a:t>
+            </a:r>
+          </a:p>
+          <a:p>
+            <a:pPr marL="0" indent="0">
+              <a:buNone/>
+            </a:pPr>
+            <a:r>
+              <a:rPr lang="en-IE" dirty="0"/>
+              <a:t>satisfy :: (Char -&gt; Bool) -&gt; String -&gt; Parser Char</a:t>
+            </a:r>
+          </a:p>
+          <a:p>
+            <a:pPr marL="0" indent="0">
+              <a:buNone/>
+            </a:pPr>
+            <a:r>
+              <a:rPr lang="en-IE" dirty="0"/>
+              <a:t>satisfy p </a:t>
+            </a:r>
+            <a:r>
+              <a:rPr lang="en-IE" dirty="0" err="1"/>
+              <a:t>desc</a:t>
+            </a:r>
+            <a:r>
+              <a:rPr lang="en-IE" dirty="0"/>
+              <a:t> = Parser $ \input -&gt;</a:t>
+            </a:r>
+          </a:p>
+          <a:p>
+            <a:pPr marL="0" indent="0">
+              <a:buNone/>
+            </a:pPr>
+            <a:r>
+              <a:rPr lang="en-IE" dirty="0"/>
+              <a:t>      case input of</a:t>
+            </a:r>
+          </a:p>
+          <a:p>
+            <a:pPr marL="0" indent="0">
+              <a:buNone/>
+            </a:pPr>
+            <a:r>
+              <a:rPr lang="en-IE" dirty="0"/>
+              <a:t>           (</a:t>
+            </a:r>
+            <a:r>
+              <a:rPr lang="en-IE" dirty="0" err="1"/>
+              <a:t>x:xs</a:t>
+            </a:r>
+            <a:r>
+              <a:rPr lang="en-IE" dirty="0"/>
+              <a:t>) | p x -&gt; Right (</a:t>
+            </a:r>
+            <a:r>
+              <a:rPr lang="en-IE" dirty="0" err="1"/>
+              <a:t>xs</a:t>
+            </a:r>
+            <a:r>
+              <a:rPr lang="en-IE" dirty="0"/>
+              <a:t>, x)</a:t>
+            </a:r>
+          </a:p>
+          <a:p>
+            <a:pPr marL="0" indent="0">
+              <a:buNone/>
+            </a:pPr>
+            <a:r>
+              <a:rPr lang="en-IE" dirty="0"/>
+              <a:t>           [] -&gt; Left ("unexpected end of input, expected " ++ </a:t>
+            </a:r>
+            <a:r>
+              <a:rPr lang="en-IE" dirty="0" err="1"/>
+              <a:t>desc</a:t>
+            </a:r>
+            <a:r>
+              <a:rPr lang="en-IE" dirty="0"/>
+              <a:t>)</a:t>
+            </a:r>
+          </a:p>
+          <a:p>
+            <a:pPr marL="0" indent="0">
+              <a:buNone/>
+            </a:pPr>
+            <a:r>
+              <a:rPr lang="en-IE" dirty="0"/>
+              <a:t>           (x:_) -&gt; Left ("unexpected '" ++ [x] ++ "', expected " ++ </a:t>
+            </a:r>
+            <a:r>
+              <a:rPr lang="en-IE" dirty="0" err="1"/>
+              <a:t>desc</a:t>
+            </a:r>
+            <a:r>
+              <a:rPr lang="en-IE" dirty="0"/>
+              <a:t>)</a:t>
+            </a:r>
+          </a:p>
+          <a:p>
+            <a:endParaRPr lang="en-US" dirty="0"/>
+          </a:p>
+        </p:txBody>
+      </p:sp>
+      <p:sp>
+        <p:nvSpPr>
+          <p:cNvPr id="4" name="Slide Number Placeholder 3">
+            <a:extLst>
+              <a:ext uri="{FF2B5EF4-FFF2-40B4-BE49-F238E27FC236}">
+                <a16:creationId xmlns:a16="http://schemas.microsoft.com/office/drawing/2014/main" id="{B844B49B-AD6F-B565-04C9-8563FCB152A3}"/>
+              </a:ext>
+            </a:extLst>
+          </p:cNvPr>
+          <p:cNvSpPr>
+            <a:spLocks noGrp="1"/>
+          </p:cNvSpPr>
+          <p:nvPr>
+            <p:ph type="sldNum" sz="quarter" idx="12"/>
+          </p:nvPr>
+        </p:nvSpPr>
+        <p:spPr/>
+        <p:txBody>
+          <a:bodyPr/>
+          <a:lstStyle/>
+          <a:p>
+            <a:pPr>
+              <a:defRPr/>
+            </a:pPr>
+            <a:fld id="{6BCA5543-1E1F-F043-9EBC-BC37C93D4920}" type="slidenum">
+              <a:rPr lang="en-US" smtClean="0"/>
+              <a:pPr>
+                <a:defRPr/>
+              </a:pPr>
+              <a:t>11</a:t>
+            </a:fld>
+            <a:endParaRPr lang="en-US"/>
+          </a:p>
+        </p:txBody>
+      </p:sp>
+    </p:spTree>
+    <p:extLst>
+      <p:ext uri="{BB962C8B-B14F-4D97-AF65-F5344CB8AC3E}">
+        <p14:creationId xmlns:p14="http://schemas.microsoft.com/office/powerpoint/2010/main" val="1362674803"/>
+      </p:ext>
+    </p:extLst>
+  </p:cSld>
+  <p:clrMapOvr>
+    <a:masterClrMapping/>
+  </p:clrMapOvr>
+</p:sld>
+</file>
+
+<file path=ppt/slides/slide13.xml><?xml version="1.0" encoding="utf-8"?>
+<p:sld xmlns:a="http://schemas.openxmlformats.org/drawingml/2006/main" xmlns:r="http://schemas.openxmlformats.org/officeDocument/2006/relationships" xmlns:p="http://schemas.openxmlformats.org/presentationml/2006/main">
+  <p:cSld>
+    <p:spTree>
+      <p:nvGrpSpPr>
+        <p:cNvPr id="1" name=""/>
+        <p:cNvGrpSpPr/>
+        <p:nvPr/>
+      </p:nvGrpSpPr>
+      <p:grpSpPr>
+        <a:xfrm>
+          <a:off x="0" y="0"/>
+          <a:ext cx="0" cy="0"/>
+          <a:chOff x="0" y="0"/>
+          <a:chExt cx="0" cy="0"/>
+        </a:xfrm>
+      </p:grpSpPr>
+      <p:sp>
+        <p:nvSpPr>
+          <p:cNvPr id="2" name="Title 1">
+            <a:extLst>
+              <a:ext uri="{FF2B5EF4-FFF2-40B4-BE49-F238E27FC236}">
                 <a16:creationId xmlns:a16="http://schemas.microsoft.com/office/drawing/2014/main" id="{2537BBC9-231D-3FA1-6514-D24AAB856749}"/>
               </a:ext>
             </a:extLst>
@@ -9616,7 +11727,7 @@
               <a:pPr>
                 <a:defRPr/>
               </a:pPr>
-              <a:t>10</a:t>
+              <a:t>12</a:t>
             </a:fld>
             <a:endParaRPr lang="en-US"/>
           </a:p>
@@ -10361,7 +12472,7 @@
 </p:sld>
 </file>
 
-<file path=ppt/slides/slide12.xml><?xml version="1.0" encoding="utf-8"?>
+<file path=ppt/slides/slide14.xml><?xml version="1.0" encoding="utf-8"?>
 <p:sld xmlns:a="http://schemas.openxmlformats.org/drawingml/2006/main" xmlns:r="http://schemas.openxmlformats.org/officeDocument/2006/relationships" xmlns:p="http://schemas.openxmlformats.org/presentationml/2006/main">
   <p:cSld>
     <p:spTree>
@@ -10435,7 +12546,7 @@
               <a:pPr>
                 <a:defRPr/>
               </a:pPr>
-              <a:t>11</a:t>
+              <a:t>13</a:t>
             </a:fld>
             <a:endParaRPr lang="en-US"/>
           </a:p>
@@ -10825,7 +12936,7 @@
 </p:sld>
 </file>
 
-<file path=ppt/slides/slide13.xml><?xml version="1.0" encoding="utf-8"?>
+<file path=ppt/slides/slide15.xml><?xml version="1.0" encoding="utf-8"?>
 <p:sld xmlns:a="http://schemas.openxmlformats.org/drawingml/2006/main" xmlns:r="http://schemas.openxmlformats.org/officeDocument/2006/relationships" xmlns:p="http://schemas.openxmlformats.org/presentationml/2006/main">
   <p:cSld>
     <p:spTree>
@@ -10886,14 +12997,14 @@
         <p:spPr>
           <a:extLst>
             <a:ext uri="{909E8E84-426E-40dd-AFC4-6F175D3DCCD1}">
-              <a14:hiddenFill xmlns:a14="http://schemas.microsoft.com/office/drawing/2010/main" xmlns="">
+              <a14:hiddenFill xmlns="" xmlns:a14="http://schemas.microsoft.com/office/drawing/2010/main">
                 <a:solidFill>
                   <a:srgbClr val="FFFFFF"/>
                 </a:solidFill>
               </a14:hiddenFill>
             </a:ext>
             <a:ext uri="{91240B29-F687-4f45-9708-019B960494DF}">
-              <a14:hiddenLine xmlns:a14="http://schemas.microsoft.com/office/drawing/2010/main" xmlns="" w="9525">
+              <a14:hiddenLine xmlns="" xmlns:a14="http://schemas.microsoft.com/office/drawing/2010/main" w="9525">
                 <a:solidFill>
                   <a:srgbClr val="000000"/>
                 </a:solidFill>
@@ -11029,7 +13140,7 @@
                   <a:spcPts val="450"/>
                 </a:spcAft>
               </a:pPr>
-              <a:t>12</a:t>
+              <a:t>14</a:t>
             </a:fld>
             <a:endParaRPr lang="en-US" sz="1050"/>
           </a:p>
@@ -11188,14 +13299,14 @@
           <a:ln/>
           <a:extLst>
             <a:ext uri="{909E8E84-426E-40dd-AFC4-6F175D3DCCD1}">
-              <a14:hiddenFill xmlns="" xmlns:a14="http://schemas.microsoft.com/office/drawing/2010/main">
+              <a14:hiddenFill xmlns:a14="http://schemas.microsoft.com/office/drawing/2010/main" xmlns="">
                 <a:solidFill>
                   <a:srgbClr val="FFFFFF"/>
                 </a:solidFill>
               </a14:hiddenFill>
             </a:ext>
             <a:ext uri="{91240B29-F687-4f45-9708-019B960494DF}">
-              <a14:hiddenLine xmlns="" xmlns:a14="http://schemas.microsoft.com/office/drawing/2010/main" w="9525">
+              <a14:hiddenLine xmlns:a14="http://schemas.microsoft.com/office/drawing/2010/main" xmlns="" w="9525">
                 <a:solidFill>
                   <a:srgbClr val="000000"/>
                 </a:solidFill>

--- a/topic13-parsing/unit-13a-lectures/talk-1/a-parsers.pptx
+++ b/topic13-parsing/unit-13a-lectures/talk-1/a-parsers.pptx
@@ -27,7 +27,7 @@
     <p:sldId id="317" r:id="rId15"/>
     <p:sldId id="343" r:id="rId16"/>
   </p:sldIdLst>
-  <p:sldSz cx="9144000" cy="6858000" type="screen4x3"/>
+  <p:sldSz cx="12192000" cy="6858000"/>
   <p:notesSz cx="7089775" cy="10218738"/>
   <p:defaultTextStyle>
     <a:defPPr>
@@ -157,12 +157,12 @@
   <p:extLst>
     <p:ext uri="{EFAFB233-063F-42B5-8137-9DF3F51BA10A}">
       <p15:sldGuideLst xmlns:p15="http://schemas.microsoft.com/office/powerpoint/2012/main">
-        <p15:guide id="1" orient="horz" pos="2160">
+        <p15:guide id="1" orient="horz" pos="2160" userDrawn="1">
           <p15:clr>
             <a:srgbClr val="A4A3A4"/>
           </p15:clr>
         </p15:guide>
-        <p15:guide id="2" pos="2880">
+        <p15:guide id="2" pos="3840" userDrawn="1">
           <p15:clr>
             <a:srgbClr val="A4A3A4"/>
           </p15:clr>
@@ -563,8 +563,8 @@
         </p:nvSpPr>
         <p:spPr bwMode="auto">
           <a:xfrm>
-            <a:off x="1041400" y="762000"/>
-            <a:ext cx="5080000" cy="3810000"/>
+            <a:off x="195263" y="762000"/>
+            <a:ext cx="6772275" cy="3810000"/>
           </a:xfrm>
           <a:prstGeom prst="rect">
             <a:avLst/>
@@ -580,14 +580,14 @@
           </a:ln>
           <a:extLst>
             <a:ext uri="{909E8E84-426E-40dd-AFC4-6F175D3DCCD1}">
-              <a14:hiddenFill xmlns:a14="http://schemas.microsoft.com/office/drawing/2010/main" xmlns="">
+              <a14:hiddenFill xmlns="" xmlns:a14="http://schemas.microsoft.com/office/drawing/2010/main">
                 <a:solidFill>
                   <a:srgbClr val="FFFFFF"/>
                 </a:solidFill>
               </a14:hiddenFill>
             </a:ext>
             <a:ext uri="{FAA26D3D-D897-4be2-8F04-BA451C77F1D7}">
-              <ma14:placeholderFlag xmlns:ma14="http://schemas.microsoft.com/office/mac/drawingml/2011/main" xmlns="" val="1"/>
+              <ma14:placeholderFlag xmlns="" xmlns:ma14="http://schemas.microsoft.com/office/mac/drawingml/2011/main" val="1"/>
             </a:ext>
           </a:extLst>
         </p:spPr>
@@ -938,8 +938,8 @@
         </p:blipFill>
         <p:spPr>
           <a:xfrm>
-            <a:off x="1" y="4242851"/>
-            <a:ext cx="6726063" cy="275942"/>
+            <a:off x="2" y="4242851"/>
+            <a:ext cx="8968084" cy="275942"/>
           </a:xfrm>
           <a:prstGeom prst="rect">
             <a:avLst/>
@@ -968,8 +968,8 @@
         </p:blipFill>
         <p:spPr>
           <a:xfrm>
-            <a:off x="6833787" y="4243845"/>
-            <a:ext cx="2307831" cy="276940"/>
+            <a:off x="9111717" y="4243845"/>
+            <a:ext cx="3077108" cy="276940"/>
           </a:xfrm>
           <a:prstGeom prst="rect">
             <a:avLst/>
@@ -985,7 +985,7 @@
         <p:spPr bwMode="ltGray">
           <a:xfrm>
             <a:off x="0" y="2590078"/>
-            <a:ext cx="6726064" cy="1660332"/>
+            <a:ext cx="8968085" cy="1660332"/>
           </a:xfrm>
           <a:prstGeom prst="rect">
             <a:avLst/>
@@ -1025,8 +1025,8 @@
         </p:nvSpPr>
         <p:spPr>
           <a:xfrm>
-            <a:off x="6833787" y="2590078"/>
-            <a:ext cx="2307832" cy="1660332"/>
+            <a:off x="9111716" y="2590078"/>
+            <a:ext cx="3077109" cy="1660332"/>
           </a:xfrm>
           <a:prstGeom prst="rect">
             <a:avLst/>
@@ -1067,8 +1067,8 @@
         </p:nvSpPr>
         <p:spPr>
           <a:xfrm>
-            <a:off x="510241" y="2733709"/>
-            <a:ext cx="6108101" cy="1373070"/>
+            <a:off x="680322" y="2733709"/>
+            <a:ext cx="8144135" cy="1373070"/>
           </a:xfrm>
         </p:spPr>
         <p:txBody>
@@ -1101,8 +1101,8 @@
         </p:nvSpPr>
         <p:spPr>
           <a:xfrm>
-            <a:off x="510241" y="4394040"/>
-            <a:ext cx="6108101" cy="1117687"/>
+            <a:off x="680322" y="4394041"/>
+            <a:ext cx="8144135" cy="1117687"/>
           </a:xfrm>
         </p:spPr>
         <p:txBody>
@@ -1219,8 +1219,8 @@
         </p:nvSpPr>
         <p:spPr>
           <a:xfrm>
-            <a:off x="6941510" y="2750337"/>
-            <a:ext cx="878916" cy="1356442"/>
+            <a:off x="9255347" y="2750337"/>
+            <a:ext cx="1171888" cy="1356442"/>
           </a:xfrm>
         </p:spPr>
         <p:txBody>
@@ -1294,8 +1294,8 @@
         </p:blipFill>
         <p:spPr>
           <a:xfrm>
-            <a:off x="1" y="5928628"/>
-            <a:ext cx="7828359" cy="321164"/>
+            <a:off x="2" y="5928628"/>
+            <a:ext cx="10437812" cy="321164"/>
           </a:xfrm>
           <a:prstGeom prst="rect">
             <a:avLst/>
@@ -1324,8 +1324,8 @@
         </p:blipFill>
         <p:spPr>
           <a:xfrm>
-            <a:off x="7939370" y="5929622"/>
-            <a:ext cx="1202248" cy="144270"/>
+            <a:off x="10585827" y="5929622"/>
+            <a:ext cx="1602997" cy="144270"/>
           </a:xfrm>
           <a:prstGeom prst="rect">
             <a:avLst/>
@@ -1340,8 +1340,8 @@
         </p:nvSpPr>
         <p:spPr bwMode="ltGray">
           <a:xfrm>
-            <a:off x="0" y="4567988"/>
-            <a:ext cx="7828359" cy="1368198"/>
+            <a:off x="1" y="4567988"/>
+            <a:ext cx="10437812" cy="1368198"/>
           </a:xfrm>
           <a:prstGeom prst="rect">
             <a:avLst/>
@@ -1381,8 +1381,8 @@
         </p:nvSpPr>
         <p:spPr>
           <a:xfrm>
-            <a:off x="7939371" y="4567988"/>
-            <a:ext cx="1202248" cy="1368198"/>
+            <a:off x="10585828" y="4567988"/>
+            <a:ext cx="1602997" cy="1368198"/>
           </a:xfrm>
           <a:prstGeom prst="rect">
             <a:avLst/>
@@ -1423,8 +1423,8 @@
         </p:nvSpPr>
         <p:spPr>
           <a:xfrm>
-            <a:off x="510242" y="4711617"/>
-            <a:ext cx="7210394" cy="453051"/>
+            <a:off x="680322" y="4711618"/>
+            <a:ext cx="9613859" cy="453051"/>
           </a:xfrm>
         </p:spPr>
         <p:txBody>
@@ -1457,8 +1457,8 @@
         </p:nvSpPr>
         <p:spPr>
           <a:xfrm>
-            <a:off x="510242" y="609598"/>
-            <a:ext cx="7210394" cy="3589575"/>
+            <a:off x="680322" y="609599"/>
+            <a:ext cx="9613859" cy="3589575"/>
           </a:xfrm>
           <a:noFill/>
           <a:ln>
@@ -1533,8 +1533,8 @@
         </p:nvSpPr>
         <p:spPr>
           <a:xfrm>
-            <a:off x="510239" y="5169584"/>
-            <a:ext cx="7210397" cy="622971"/>
+            <a:off x="680319" y="5169585"/>
+            <a:ext cx="9613863" cy="622971"/>
           </a:xfrm>
         </p:spPr>
         <p:txBody>
@@ -1649,8 +1649,8 @@
         </p:nvSpPr>
         <p:spPr>
           <a:xfrm>
-            <a:off x="8047092" y="4711310"/>
-            <a:ext cx="865613" cy="1090789"/>
+            <a:off x="10729457" y="4711311"/>
+            <a:ext cx="1154151" cy="1090789"/>
           </a:xfrm>
         </p:spPr>
         <p:txBody>
@@ -1724,8 +1724,8 @@
         </p:blipFill>
         <p:spPr>
           <a:xfrm>
-            <a:off x="1" y="5928628"/>
-            <a:ext cx="7828359" cy="321164"/>
+            <a:off x="2" y="5928628"/>
+            <a:ext cx="10437812" cy="321164"/>
           </a:xfrm>
           <a:prstGeom prst="rect">
             <a:avLst/>
@@ -1754,8 +1754,8 @@
         </p:blipFill>
         <p:spPr>
           <a:xfrm>
-            <a:off x="7939370" y="5929622"/>
-            <a:ext cx="1202248" cy="144270"/>
+            <a:off x="10585827" y="5929622"/>
+            <a:ext cx="1602997" cy="144270"/>
           </a:xfrm>
           <a:prstGeom prst="rect">
             <a:avLst/>
@@ -1770,8 +1770,8 @@
         </p:nvSpPr>
         <p:spPr bwMode="ltGray">
           <a:xfrm>
-            <a:off x="0" y="4567988"/>
-            <a:ext cx="7828359" cy="1368198"/>
+            <a:off x="1" y="4567988"/>
+            <a:ext cx="10437812" cy="1368198"/>
           </a:xfrm>
           <a:prstGeom prst="rect">
             <a:avLst/>
@@ -1811,8 +1811,8 @@
         </p:nvSpPr>
         <p:spPr>
           <a:xfrm>
-            <a:off x="7939371" y="4567988"/>
-            <a:ext cx="1202248" cy="1368198"/>
+            <a:off x="10585828" y="4567988"/>
+            <a:ext cx="1602997" cy="1368198"/>
           </a:xfrm>
           <a:prstGeom prst="rect">
             <a:avLst/>
@@ -1853,8 +1853,8 @@
         </p:nvSpPr>
         <p:spPr>
           <a:xfrm>
-            <a:off x="510241" y="609597"/>
-            <a:ext cx="7210394" cy="3592750"/>
+            <a:off x="680321" y="609597"/>
+            <a:ext cx="9613859" cy="3592750"/>
           </a:xfrm>
         </p:spPr>
         <p:txBody>
@@ -1885,8 +1885,8 @@
         </p:nvSpPr>
         <p:spPr>
           <a:xfrm>
-            <a:off x="510242" y="4711616"/>
-            <a:ext cx="7210394" cy="1090789"/>
+            <a:off x="680322" y="4711617"/>
+            <a:ext cx="9613859" cy="1090789"/>
           </a:xfrm>
         </p:spPr>
         <p:txBody>
@@ -2001,8 +2001,8 @@
         </p:nvSpPr>
         <p:spPr>
           <a:xfrm>
-            <a:off x="8047092" y="4711616"/>
-            <a:ext cx="865613" cy="1090789"/>
+            <a:off x="10729457" y="4711617"/>
+            <a:ext cx="1154151" cy="1090789"/>
           </a:xfrm>
         </p:spPr>
         <p:txBody>
@@ -2076,8 +2076,8 @@
         </p:blipFill>
         <p:spPr>
           <a:xfrm>
-            <a:off x="1" y="5928628"/>
-            <a:ext cx="7828359" cy="321164"/>
+            <a:off x="2" y="5928628"/>
+            <a:ext cx="10437812" cy="321164"/>
           </a:xfrm>
           <a:prstGeom prst="rect">
             <a:avLst/>
@@ -2106,8 +2106,8 @@
         </p:blipFill>
         <p:spPr>
           <a:xfrm>
-            <a:off x="7939370" y="5929622"/>
-            <a:ext cx="1202248" cy="144270"/>
+            <a:off x="10585827" y="5929622"/>
+            <a:ext cx="1602997" cy="144270"/>
           </a:xfrm>
           <a:prstGeom prst="rect">
             <a:avLst/>
@@ -2122,8 +2122,8 @@
         </p:nvSpPr>
         <p:spPr bwMode="ltGray">
           <a:xfrm>
-            <a:off x="0" y="4567988"/>
-            <a:ext cx="7828359" cy="1368198"/>
+            <a:off x="1" y="4567988"/>
+            <a:ext cx="10437812" cy="1368198"/>
           </a:xfrm>
           <a:prstGeom prst="rect">
             <a:avLst/>
@@ -2163,8 +2163,8 @@
         </p:nvSpPr>
         <p:spPr>
           <a:xfrm>
-            <a:off x="7939371" y="4567988"/>
-            <a:ext cx="1202248" cy="1368198"/>
+            <a:off x="10585828" y="4567988"/>
+            <a:ext cx="1602997" cy="1368198"/>
           </a:xfrm>
           <a:prstGeom prst="rect">
             <a:avLst/>
@@ -2205,8 +2205,8 @@
         </p:nvSpPr>
         <p:spPr>
           <a:xfrm>
-            <a:off x="845892" y="609598"/>
-            <a:ext cx="6539158" cy="3036061"/>
+            <a:off x="1127856" y="609598"/>
+            <a:ext cx="8718877" cy="3036061"/>
           </a:xfrm>
         </p:spPr>
         <p:txBody>
@@ -2237,8 +2237,8 @@
         </p:nvSpPr>
         <p:spPr>
           <a:xfrm>
-            <a:off x="1051717" y="3653379"/>
-            <a:ext cx="6117434" cy="548968"/>
+            <a:off x="1402289" y="3653379"/>
+            <a:ext cx="8156579" cy="548968"/>
           </a:xfrm>
         </p:spPr>
         <p:txBody>
@@ -2304,8 +2304,8 @@
         </p:nvSpPr>
         <p:spPr>
           <a:xfrm>
-            <a:off x="510242" y="4711616"/>
-            <a:ext cx="7210394" cy="1090789"/>
+            <a:off x="680322" y="4711617"/>
+            <a:ext cx="9613859" cy="1090789"/>
           </a:xfrm>
         </p:spPr>
         <p:txBody>
@@ -2422,8 +2422,8 @@
         </p:nvSpPr>
         <p:spPr>
           <a:xfrm>
-            <a:off x="8047092" y="4709926"/>
-            <a:ext cx="865613" cy="1090789"/>
+            <a:off x="10729457" y="4709927"/>
+            <a:ext cx="1154151" cy="1090789"/>
           </a:xfrm>
         </p:spPr>
         <p:txBody>
@@ -2452,8 +2452,8 @@
         </p:nvSpPr>
         <p:spPr>
           <a:xfrm>
-            <a:off x="437679" y="748116"/>
-            <a:ext cx="457200" cy="584776"/>
+            <a:off x="583572" y="748116"/>
+            <a:ext cx="609600" cy="584776"/>
           </a:xfrm>
           <a:prstGeom prst="rect">
             <a:avLst/>
@@ -2568,8 +2568,8 @@
         </p:nvSpPr>
         <p:spPr>
           <a:xfrm>
-            <a:off x="7247107" y="3033524"/>
-            <a:ext cx="457200" cy="584776"/>
+            <a:off x="9662809" y="3033524"/>
+            <a:ext cx="609600" cy="584776"/>
           </a:xfrm>
           <a:prstGeom prst="rect">
             <a:avLst/>
@@ -2729,8 +2729,8 @@
         </p:blipFill>
         <p:spPr>
           <a:xfrm>
-            <a:off x="1" y="5928628"/>
-            <a:ext cx="7828359" cy="321164"/>
+            <a:off x="2" y="5928628"/>
+            <a:ext cx="10437812" cy="321164"/>
           </a:xfrm>
           <a:prstGeom prst="rect">
             <a:avLst/>
@@ -2759,8 +2759,8 @@
         </p:blipFill>
         <p:spPr>
           <a:xfrm>
-            <a:off x="7939370" y="5929622"/>
-            <a:ext cx="1202248" cy="144270"/>
+            <a:off x="10585827" y="5929622"/>
+            <a:ext cx="1602997" cy="144270"/>
           </a:xfrm>
           <a:prstGeom prst="rect">
             <a:avLst/>
@@ -2775,8 +2775,8 @@
         </p:nvSpPr>
         <p:spPr bwMode="ltGray">
           <a:xfrm>
-            <a:off x="0" y="4567988"/>
-            <a:ext cx="7828359" cy="1368198"/>
+            <a:off x="1" y="4567988"/>
+            <a:ext cx="10437812" cy="1368198"/>
           </a:xfrm>
           <a:prstGeom prst="rect">
             <a:avLst/>
@@ -2816,8 +2816,8 @@
         </p:nvSpPr>
         <p:spPr>
           <a:xfrm>
-            <a:off x="7939371" y="4567988"/>
-            <a:ext cx="1202248" cy="1368198"/>
+            <a:off x="10585828" y="4567988"/>
+            <a:ext cx="1602997" cy="1368198"/>
           </a:xfrm>
           <a:prstGeom prst="rect">
             <a:avLst/>
@@ -2858,8 +2858,8 @@
         </p:nvSpPr>
         <p:spPr>
           <a:xfrm>
-            <a:off x="510239" y="4711616"/>
-            <a:ext cx="7210397" cy="588535"/>
+            <a:off x="680319" y="4711617"/>
+            <a:ext cx="9613863" cy="588535"/>
           </a:xfrm>
         </p:spPr>
         <p:txBody>
@@ -2890,8 +2890,8 @@
         </p:nvSpPr>
         <p:spPr>
           <a:xfrm>
-            <a:off x="510240" y="5300150"/>
-            <a:ext cx="7210397" cy="502255"/>
+            <a:off x="680320" y="5300151"/>
+            <a:ext cx="9613863" cy="502255"/>
           </a:xfrm>
         </p:spPr>
         <p:txBody>
@@ -3006,8 +3006,8 @@
         </p:nvSpPr>
         <p:spPr>
           <a:xfrm>
-            <a:off x="8047092" y="4709926"/>
-            <a:ext cx="865613" cy="1090789"/>
+            <a:off x="10729457" y="4709927"/>
+            <a:ext cx="1154151" cy="1090789"/>
           </a:xfrm>
         </p:spPr>
         <p:txBody>
@@ -3081,8 +3081,8 @@
         </p:blipFill>
         <p:spPr>
           <a:xfrm>
-            <a:off x="1" y="1970240"/>
-            <a:ext cx="7828359" cy="321164"/>
+            <a:off x="2" y="1970240"/>
+            <a:ext cx="10437812" cy="321164"/>
           </a:xfrm>
           <a:prstGeom prst="rect">
             <a:avLst/>
@@ -3111,8 +3111,8 @@
         </p:blipFill>
         <p:spPr>
           <a:xfrm>
-            <a:off x="7939370" y="1971234"/>
-            <a:ext cx="1202248" cy="144270"/>
+            <a:off x="10585827" y="1971234"/>
+            <a:ext cx="1602997" cy="144270"/>
           </a:xfrm>
           <a:prstGeom prst="rect">
             <a:avLst/>
@@ -3127,8 +3127,8 @@
         </p:nvSpPr>
         <p:spPr bwMode="ltGray">
           <a:xfrm>
-            <a:off x="0" y="609600"/>
-            <a:ext cx="7828359" cy="1368198"/>
+            <a:off x="1" y="609600"/>
+            <a:ext cx="10437812" cy="1368198"/>
           </a:xfrm>
           <a:prstGeom prst="rect">
             <a:avLst/>
@@ -3168,8 +3168,8 @@
         </p:nvSpPr>
         <p:spPr>
           <a:xfrm>
-            <a:off x="7939371" y="609600"/>
-            <a:ext cx="1202248" cy="1368198"/>
+            <a:off x="10585828" y="609600"/>
+            <a:ext cx="1602997" cy="1368198"/>
           </a:xfrm>
           <a:prstGeom prst="rect">
             <a:avLst/>
@@ -3210,8 +3210,8 @@
         </p:nvSpPr>
         <p:spPr>
           <a:xfrm>
-            <a:off x="501916" y="753228"/>
-            <a:ext cx="7218720" cy="1080938"/>
+            <a:off x="669221" y="753228"/>
+            <a:ext cx="9624960" cy="1080938"/>
           </a:xfrm>
         </p:spPr>
         <p:txBody>
@@ -3238,8 +3238,8 @@
         </p:nvSpPr>
         <p:spPr>
           <a:xfrm>
-            <a:off x="495709" y="2336873"/>
-            <a:ext cx="2302526" cy="576262"/>
+            <a:off x="660945" y="2336873"/>
+            <a:ext cx="3070035" cy="576262"/>
           </a:xfrm>
         </p:spPr>
         <p:txBody>
@@ -3309,8 +3309,8 @@
         </p:nvSpPr>
         <p:spPr>
           <a:xfrm>
-            <a:off x="510241" y="3022674"/>
-            <a:ext cx="2287277" cy="2913513"/>
+            <a:off x="680322" y="3022674"/>
+            <a:ext cx="3049703" cy="2913513"/>
           </a:xfrm>
         </p:spPr>
         <p:txBody>
@@ -3376,8 +3376,8 @@
         </p:nvSpPr>
         <p:spPr>
           <a:xfrm>
-            <a:off x="2967019" y="2336873"/>
-            <a:ext cx="2297430" cy="576262"/>
+            <a:off x="3956025" y="2336873"/>
+            <a:ext cx="3063240" cy="576262"/>
           </a:xfrm>
         </p:spPr>
         <p:txBody>
@@ -3447,8 +3447,8 @@
         </p:nvSpPr>
         <p:spPr>
           <a:xfrm>
-            <a:off x="2959103" y="3022674"/>
-            <a:ext cx="2297430" cy="2913513"/>
+            <a:off x="3945471" y="3022674"/>
+            <a:ext cx="3063240" cy="2913513"/>
           </a:xfrm>
         </p:spPr>
         <p:txBody>
@@ -3514,8 +3514,8 @@
         </p:nvSpPr>
         <p:spPr>
           <a:xfrm>
-            <a:off x="5418117" y="2336873"/>
-            <a:ext cx="2302519" cy="576262"/>
+            <a:off x="7224157" y="2336873"/>
+            <a:ext cx="3070025" cy="576262"/>
           </a:xfrm>
         </p:spPr>
         <p:txBody>
@@ -3585,8 +3585,8 @@
         </p:nvSpPr>
         <p:spPr>
           <a:xfrm>
-            <a:off x="5418117" y="3022674"/>
-            <a:ext cx="2302519" cy="2913513"/>
+            <a:off x="7224157" y="3022674"/>
+            <a:ext cx="3070025" cy="2913513"/>
           </a:xfrm>
         </p:spPr>
         <p:txBody>
@@ -3773,8 +3773,8 @@
         </p:blipFill>
         <p:spPr>
           <a:xfrm>
-            <a:off x="1" y="1970240"/>
-            <a:ext cx="7828359" cy="321164"/>
+            <a:off x="2" y="1970240"/>
+            <a:ext cx="10437812" cy="321164"/>
           </a:xfrm>
           <a:prstGeom prst="rect">
             <a:avLst/>
@@ -3803,8 +3803,8 @@
         </p:blipFill>
         <p:spPr>
           <a:xfrm>
-            <a:off x="7939370" y="1971234"/>
-            <a:ext cx="1202248" cy="144270"/>
+            <a:off x="10585827" y="1971234"/>
+            <a:ext cx="1602997" cy="144270"/>
           </a:xfrm>
           <a:prstGeom prst="rect">
             <a:avLst/>
@@ -3819,8 +3819,8 @@
         </p:nvSpPr>
         <p:spPr bwMode="ltGray">
           <a:xfrm>
-            <a:off x="0" y="609600"/>
-            <a:ext cx="7828359" cy="1368198"/>
+            <a:off x="1" y="609600"/>
+            <a:ext cx="10437812" cy="1368198"/>
           </a:xfrm>
           <a:prstGeom prst="rect">
             <a:avLst/>
@@ -3860,8 +3860,8 @@
         </p:nvSpPr>
         <p:spPr>
           <a:xfrm>
-            <a:off x="7939371" y="609600"/>
-            <a:ext cx="1202248" cy="1368198"/>
+            <a:off x="10585828" y="609600"/>
+            <a:ext cx="1602997" cy="1368198"/>
           </a:xfrm>
           <a:prstGeom prst="rect">
             <a:avLst/>
@@ -3902,8 +3902,8 @@
         </p:nvSpPr>
         <p:spPr>
           <a:xfrm>
-            <a:off x="510241" y="753228"/>
-            <a:ext cx="7210395" cy="1080938"/>
+            <a:off x="680322" y="753228"/>
+            <a:ext cx="9613860" cy="1080938"/>
           </a:xfrm>
         </p:spPr>
         <p:txBody>
@@ -3930,8 +3930,8 @@
         </p:nvSpPr>
         <p:spPr>
           <a:xfrm>
-            <a:off x="510239" y="4297503"/>
-            <a:ext cx="2287279" cy="576262"/>
+            <a:off x="680320" y="4297503"/>
+            <a:ext cx="3049705" cy="576262"/>
           </a:xfrm>
         </p:spPr>
         <p:txBody>
@@ -4001,8 +4001,8 @@
         </p:nvSpPr>
         <p:spPr>
           <a:xfrm>
-            <a:off x="510239" y="2336873"/>
-            <a:ext cx="2287279" cy="1524000"/>
+            <a:off x="680320" y="2336873"/>
+            <a:ext cx="3049705" cy="1524000"/>
           </a:xfrm>
           <a:prstGeom prst="roundRect">
             <a:avLst>
@@ -4080,8 +4080,8 @@
         </p:nvSpPr>
         <p:spPr>
           <a:xfrm>
-            <a:off x="510239" y="4873765"/>
-            <a:ext cx="2287279" cy="1062422"/>
+            <a:off x="680320" y="4873765"/>
+            <a:ext cx="3049705" cy="1062422"/>
           </a:xfrm>
         </p:spPr>
         <p:txBody>
@@ -4147,8 +4147,8 @@
         </p:nvSpPr>
         <p:spPr>
           <a:xfrm>
-            <a:off x="2959103" y="4297503"/>
-            <a:ext cx="2297430" cy="576262"/>
+            <a:off x="3945471" y="4297503"/>
+            <a:ext cx="3063240" cy="576262"/>
           </a:xfrm>
         </p:spPr>
         <p:txBody>
@@ -4218,8 +4218,8 @@
         </p:nvSpPr>
         <p:spPr>
           <a:xfrm>
-            <a:off x="2959103" y="2336873"/>
-            <a:ext cx="2297430" cy="1524000"/>
+            <a:off x="3945471" y="2336873"/>
+            <a:ext cx="3063240" cy="1524000"/>
           </a:xfrm>
           <a:prstGeom prst="roundRect">
             <a:avLst>
@@ -4297,8 +4297,8 @@
         </p:nvSpPr>
         <p:spPr>
           <a:xfrm>
-            <a:off x="2958088" y="4873764"/>
-            <a:ext cx="2300473" cy="1062422"/>
+            <a:off x="3944118" y="4873764"/>
+            <a:ext cx="3067297" cy="1062422"/>
           </a:xfrm>
         </p:spPr>
         <p:txBody>
@@ -4364,8 +4364,8 @@
         </p:nvSpPr>
         <p:spPr>
           <a:xfrm>
-            <a:off x="5423009" y="4297503"/>
-            <a:ext cx="2297629" cy="576262"/>
+            <a:off x="7230680" y="4297503"/>
+            <a:ext cx="3063505" cy="576262"/>
           </a:xfrm>
         </p:spPr>
         <p:txBody>
@@ -4435,8 +4435,8 @@
         </p:nvSpPr>
         <p:spPr>
           <a:xfrm>
-            <a:off x="5423008" y="2336873"/>
-            <a:ext cx="2297629" cy="1524000"/>
+            <a:off x="7230678" y="2336873"/>
+            <a:ext cx="3063505" cy="1524000"/>
           </a:xfrm>
           <a:prstGeom prst="roundRect">
             <a:avLst>
@@ -4514,8 +4514,8 @@
         </p:nvSpPr>
         <p:spPr>
           <a:xfrm>
-            <a:off x="5422915" y="4873762"/>
-            <a:ext cx="2300672" cy="1062422"/>
+            <a:off x="7230553" y="4873762"/>
+            <a:ext cx="3067563" cy="1062422"/>
           </a:xfrm>
         </p:spPr>
         <p:txBody>
@@ -4702,8 +4702,8 @@
         </p:blipFill>
         <p:spPr>
           <a:xfrm>
-            <a:off x="1" y="1970240"/>
-            <a:ext cx="7828359" cy="321164"/>
+            <a:off x="2" y="1970240"/>
+            <a:ext cx="10437812" cy="321164"/>
           </a:xfrm>
           <a:prstGeom prst="rect">
             <a:avLst/>
@@ -4732,8 +4732,8 @@
         </p:blipFill>
         <p:spPr>
           <a:xfrm>
-            <a:off x="7939370" y="1971234"/>
-            <a:ext cx="1202248" cy="144270"/>
+            <a:off x="10585827" y="1971234"/>
+            <a:ext cx="1602997" cy="144270"/>
           </a:xfrm>
           <a:prstGeom prst="rect">
             <a:avLst/>
@@ -4748,8 +4748,8 @@
         </p:nvSpPr>
         <p:spPr bwMode="ltGray">
           <a:xfrm>
-            <a:off x="0" y="609600"/>
-            <a:ext cx="7828359" cy="1368198"/>
+            <a:off x="1" y="609600"/>
+            <a:ext cx="10437812" cy="1368198"/>
           </a:xfrm>
           <a:prstGeom prst="rect">
             <a:avLst/>
@@ -4789,8 +4789,8 @@
         </p:nvSpPr>
         <p:spPr>
           <a:xfrm>
-            <a:off x="7939371" y="609600"/>
-            <a:ext cx="1202248" cy="1368198"/>
+            <a:off x="10585828" y="609600"/>
+            <a:ext cx="1602997" cy="1368198"/>
           </a:xfrm>
           <a:prstGeom prst="rect">
             <a:avLst/>
@@ -5019,8 +5019,8 @@
         </p:nvSpPr>
         <p:spPr bwMode="ltGray">
           <a:xfrm rot="5400000">
-            <a:off x="5448782" y="2040420"/>
-            <a:ext cx="5106988" cy="1026149"/>
+            <a:off x="8116207" y="1869395"/>
+            <a:ext cx="5106988" cy="1368199"/>
           </a:xfrm>
           <a:prstGeom prst="rect">
             <a:avLst/>
@@ -5060,8 +5060,8 @@
         </p:nvSpPr>
         <p:spPr>
           <a:xfrm rot="5400000">
-            <a:off x="7200777" y="5543428"/>
-            <a:ext cx="1602997" cy="1026149"/>
+            <a:off x="9868203" y="5372404"/>
+            <a:ext cx="1602997" cy="1368199"/>
           </a:xfrm>
           <a:prstGeom prst="rect">
             <a:avLst/>
@@ -5102,8 +5102,8 @@
         </p:nvSpPr>
         <p:spPr>
           <a:xfrm>
-            <a:off x="7596923" y="609597"/>
-            <a:ext cx="805352" cy="4353760"/>
+            <a:off x="10129231" y="609597"/>
+            <a:ext cx="1073803" cy="4353760"/>
           </a:xfrm>
         </p:spPr>
         <p:txBody>
@@ -5130,8 +5130,8 @@
         </p:nvSpPr>
         <p:spPr>
           <a:xfrm>
-            <a:off x="510241" y="609598"/>
-            <a:ext cx="6652503" cy="5326589"/>
+            <a:off x="680322" y="609599"/>
+            <a:ext cx="8870004" cy="5326589"/>
           </a:xfrm>
         </p:spPr>
         <p:txBody>
@@ -5187,8 +5187,8 @@
         </p:nvSpPr>
         <p:spPr>
           <a:xfrm>
-            <a:off x="5105344" y="5936188"/>
-            <a:ext cx="2057400" cy="365125"/>
+            <a:off x="6807125" y="5936189"/>
+            <a:ext cx="2743200" cy="365125"/>
           </a:xfrm>
         </p:spPr>
         <p:txBody>
@@ -5221,8 +5221,8 @@
         </p:nvSpPr>
         <p:spPr>
           <a:xfrm>
-            <a:off x="510241" y="5936189"/>
-            <a:ext cx="4595104" cy="365125"/>
+            <a:off x="680321" y="5936190"/>
+            <a:ext cx="6126805" cy="365125"/>
           </a:xfrm>
         </p:spPr>
         <p:txBody>
@@ -5251,8 +5251,8 @@
         </p:nvSpPr>
         <p:spPr>
           <a:xfrm>
-            <a:off x="7573163" y="5398634"/>
-            <a:ext cx="865613" cy="1090789"/>
+            <a:off x="10097551" y="5398635"/>
+            <a:ext cx="1154151" cy="1090789"/>
           </a:xfrm>
         </p:spPr>
         <p:txBody>
@@ -5329,8 +5329,8 @@
         </p:blipFill>
         <p:spPr>
           <a:xfrm>
-            <a:off x="1" y="1970240"/>
-            <a:ext cx="7828359" cy="321164"/>
+            <a:off x="2" y="1970240"/>
+            <a:ext cx="10437812" cy="321164"/>
           </a:xfrm>
           <a:prstGeom prst="rect">
             <a:avLst/>
@@ -5359,8 +5359,8 @@
         </p:blipFill>
         <p:spPr>
           <a:xfrm>
-            <a:off x="7939370" y="1971234"/>
-            <a:ext cx="1202248" cy="144270"/>
+            <a:off x="10585827" y="1971234"/>
+            <a:ext cx="1602997" cy="144270"/>
           </a:xfrm>
           <a:prstGeom prst="rect">
             <a:avLst/>
@@ -5375,8 +5375,8 @@
         </p:nvSpPr>
         <p:spPr bwMode="ltGray">
           <a:xfrm>
-            <a:off x="0" y="609600"/>
-            <a:ext cx="7828359" cy="1368198"/>
+            <a:off x="1" y="609600"/>
+            <a:ext cx="10437812" cy="1368198"/>
           </a:xfrm>
           <a:prstGeom prst="rect">
             <a:avLst/>
@@ -5411,7 +5411,7 @@
           <a:bodyPr/>
           <a:lstStyle/>
           <a:p>
-            <a:endParaRPr lang="en-US"/>
+            <a:endParaRPr lang="en-US" sz="2800"/>
           </a:p>
         </p:txBody>
       </p:sp>
@@ -5423,8 +5423,8 @@
         </p:nvSpPr>
         <p:spPr>
           <a:xfrm>
-            <a:off x="7939371" y="609600"/>
-            <a:ext cx="1202248" cy="1368198"/>
+            <a:off x="10585828" y="609600"/>
+            <a:ext cx="1602997" cy="1368198"/>
           </a:xfrm>
           <a:prstGeom prst="rect">
             <a:avLst/>
@@ -5456,7 +5456,7 @@
           <a:bodyPr/>
           <a:lstStyle/>
           <a:p>
-            <a:endParaRPr lang="en-US"/>
+            <a:endParaRPr lang="en-US" sz="2800"/>
           </a:p>
         </p:txBody>
       </p:sp>
@@ -5668,7 +5668,7 @@
         <p:spPr>
           <a:xfrm>
             <a:off x="-1" y="4086907"/>
-            <a:ext cx="7828359" cy="321164"/>
+            <a:ext cx="10437812" cy="321164"/>
           </a:xfrm>
           <a:prstGeom prst="rect">
             <a:avLst/>
@@ -5697,8 +5697,8 @@
         </p:blipFill>
         <p:spPr>
           <a:xfrm>
-            <a:off x="7939368" y="4087901"/>
-            <a:ext cx="1202248" cy="144270"/>
+            <a:off x="10585824" y="4087901"/>
+            <a:ext cx="1602997" cy="144270"/>
           </a:xfrm>
           <a:prstGeom prst="rect">
             <a:avLst/>
@@ -5714,7 +5714,7 @@
         <p:spPr bwMode="ltGray">
           <a:xfrm>
             <a:off x="-2" y="2726267"/>
-            <a:ext cx="7828359" cy="1368198"/>
+            <a:ext cx="10437812" cy="1368198"/>
           </a:xfrm>
           <a:prstGeom prst="rect">
             <a:avLst/>
@@ -5754,8 +5754,8 @@
         </p:nvSpPr>
         <p:spPr>
           <a:xfrm>
-            <a:off x="7939369" y="2726267"/>
-            <a:ext cx="1202248" cy="1368198"/>
+            <a:off x="10585826" y="2726267"/>
+            <a:ext cx="1602997" cy="1368198"/>
           </a:xfrm>
           <a:prstGeom prst="rect">
             <a:avLst/>
@@ -5796,8 +5796,8 @@
         </p:nvSpPr>
         <p:spPr>
           <a:xfrm>
-            <a:off x="510241" y="2869895"/>
-            <a:ext cx="7210395" cy="1090788"/>
+            <a:off x="680322" y="2869895"/>
+            <a:ext cx="9613860" cy="1090788"/>
           </a:xfrm>
         </p:spPr>
         <p:txBody>
@@ -5830,8 +5830,8 @@
         </p:nvSpPr>
         <p:spPr>
           <a:xfrm>
-            <a:off x="510241" y="4232172"/>
-            <a:ext cx="7210395" cy="1704017"/>
+            <a:off x="680322" y="4232173"/>
+            <a:ext cx="9613860" cy="1704017"/>
           </a:xfrm>
         </p:spPr>
         <p:txBody>
@@ -6002,8 +6002,8 @@
         </p:nvSpPr>
         <p:spPr>
           <a:xfrm>
-            <a:off x="8047092" y="2869896"/>
-            <a:ext cx="865613" cy="1090789"/>
+            <a:off x="10729457" y="2869897"/>
+            <a:ext cx="1154151" cy="1090789"/>
           </a:xfrm>
         </p:spPr>
         <p:txBody>
@@ -6076,8 +6076,8 @@
         </p:blipFill>
         <p:spPr>
           <a:xfrm>
-            <a:off x="1" y="1970240"/>
-            <a:ext cx="7828359" cy="321164"/>
+            <a:off x="2" y="1970240"/>
+            <a:ext cx="10437812" cy="321164"/>
           </a:xfrm>
           <a:prstGeom prst="rect">
             <a:avLst/>
@@ -6106,8 +6106,8 @@
         </p:blipFill>
         <p:spPr>
           <a:xfrm>
-            <a:off x="7939370" y="1971234"/>
-            <a:ext cx="1202248" cy="144270"/>
+            <a:off x="10585827" y="1971234"/>
+            <a:ext cx="1602997" cy="144270"/>
           </a:xfrm>
           <a:prstGeom prst="rect">
             <a:avLst/>
@@ -6122,8 +6122,8 @@
         </p:nvSpPr>
         <p:spPr bwMode="ltGray">
           <a:xfrm>
-            <a:off x="0" y="609600"/>
-            <a:ext cx="7828359" cy="1368198"/>
+            <a:off x="1" y="609600"/>
+            <a:ext cx="10437812" cy="1368198"/>
           </a:xfrm>
           <a:prstGeom prst="rect">
             <a:avLst/>
@@ -6163,8 +6163,8 @@
         </p:nvSpPr>
         <p:spPr>
           <a:xfrm>
-            <a:off x="7939371" y="609600"/>
-            <a:ext cx="1202248" cy="1368198"/>
+            <a:off x="10585828" y="609600"/>
+            <a:ext cx="1602997" cy="1368198"/>
           </a:xfrm>
           <a:prstGeom prst="rect">
             <a:avLst/>
@@ -6228,8 +6228,8 @@
         </p:nvSpPr>
         <p:spPr>
           <a:xfrm>
-            <a:off x="510240" y="2336873"/>
-            <a:ext cx="3523769" cy="3599316"/>
+            <a:off x="680321" y="2336873"/>
+            <a:ext cx="4698359" cy="3599316"/>
           </a:xfrm>
         </p:spPr>
         <p:txBody>
@@ -6285,8 +6285,8 @@
         </p:nvSpPr>
         <p:spPr>
           <a:xfrm>
-            <a:off x="4195592" y="2336873"/>
-            <a:ext cx="3525044" cy="3599316"/>
+            <a:off x="5594123" y="2336873"/>
+            <a:ext cx="4700059" cy="3599316"/>
           </a:xfrm>
         </p:spPr>
         <p:txBody>
@@ -6462,8 +6462,8 @@
         </p:blipFill>
         <p:spPr>
           <a:xfrm>
-            <a:off x="1" y="1970240"/>
-            <a:ext cx="7828359" cy="321164"/>
+            <a:off x="2" y="1970240"/>
+            <a:ext cx="10437812" cy="321164"/>
           </a:xfrm>
           <a:prstGeom prst="rect">
             <a:avLst/>
@@ -6492,8 +6492,8 @@
         </p:blipFill>
         <p:spPr>
           <a:xfrm>
-            <a:off x="7939370" y="1971234"/>
-            <a:ext cx="1202248" cy="144270"/>
+            <a:off x="10585827" y="1971234"/>
+            <a:ext cx="1602997" cy="144270"/>
           </a:xfrm>
           <a:prstGeom prst="rect">
             <a:avLst/>
@@ -6508,8 +6508,8 @@
         </p:nvSpPr>
         <p:spPr bwMode="ltGray">
           <a:xfrm>
-            <a:off x="0" y="609600"/>
-            <a:ext cx="7828359" cy="1368198"/>
+            <a:off x="1" y="609600"/>
+            <a:ext cx="10437812" cy="1368198"/>
           </a:xfrm>
           <a:prstGeom prst="rect">
             <a:avLst/>
@@ -6549,8 +6549,8 @@
         </p:nvSpPr>
         <p:spPr>
           <a:xfrm>
-            <a:off x="7939371" y="609600"/>
-            <a:ext cx="1202248" cy="1368198"/>
+            <a:off x="10585828" y="609600"/>
+            <a:ext cx="1602997" cy="1368198"/>
           </a:xfrm>
           <a:prstGeom prst="rect">
             <a:avLst/>
@@ -6591,8 +6591,8 @@
         </p:nvSpPr>
         <p:spPr>
           <a:xfrm>
-            <a:off x="510240" y="753230"/>
-            <a:ext cx="7210397" cy="1080937"/>
+            <a:off x="680320" y="753231"/>
+            <a:ext cx="9613863" cy="1080937"/>
           </a:xfrm>
         </p:spPr>
         <p:txBody>
@@ -6619,8 +6619,8 @@
         </p:nvSpPr>
         <p:spPr>
           <a:xfrm>
-            <a:off x="679763" y="2336874"/>
-            <a:ext cx="3354245" cy="693135"/>
+            <a:off x="906351" y="2336875"/>
+            <a:ext cx="4472327" cy="693135"/>
           </a:xfrm>
         </p:spPr>
         <p:txBody>
@@ -6684,8 +6684,8 @@
         </p:nvSpPr>
         <p:spPr>
           <a:xfrm>
-            <a:off x="510242" y="3030009"/>
-            <a:ext cx="3523766" cy="2906179"/>
+            <a:off x="680323" y="3030010"/>
+            <a:ext cx="4698355" cy="2906179"/>
           </a:xfrm>
         </p:spPr>
         <p:txBody>
@@ -6741,8 +6741,8 @@
         </p:nvSpPr>
         <p:spPr>
           <a:xfrm>
-            <a:off x="4365116" y="2336873"/>
-            <a:ext cx="3355521" cy="692076"/>
+            <a:off x="5820155" y="2336873"/>
+            <a:ext cx="4474028" cy="692076"/>
           </a:xfrm>
         </p:spPr>
         <p:txBody>
@@ -6806,8 +6806,8 @@
         </p:nvSpPr>
         <p:spPr>
           <a:xfrm>
-            <a:off x="4195593" y="3030009"/>
-            <a:ext cx="3525044" cy="2906179"/>
+            <a:off x="5594124" y="3030010"/>
+            <a:ext cx="4700059" cy="2906179"/>
           </a:xfrm>
         </p:spPr>
         <p:txBody>
@@ -6983,8 +6983,8 @@
         </p:blipFill>
         <p:spPr>
           <a:xfrm>
-            <a:off x="1" y="1970240"/>
-            <a:ext cx="7828359" cy="321164"/>
+            <a:off x="2" y="1970240"/>
+            <a:ext cx="10437812" cy="321164"/>
           </a:xfrm>
           <a:prstGeom prst="rect">
             <a:avLst/>
@@ -7013,8 +7013,8 @@
         </p:blipFill>
         <p:spPr>
           <a:xfrm>
-            <a:off x="7939370" y="1971234"/>
-            <a:ext cx="1202248" cy="144270"/>
+            <a:off x="10585827" y="1971234"/>
+            <a:ext cx="1602997" cy="144270"/>
           </a:xfrm>
           <a:prstGeom prst="rect">
             <a:avLst/>
@@ -7029,8 +7029,8 @@
         </p:nvSpPr>
         <p:spPr bwMode="ltGray">
           <a:xfrm>
-            <a:off x="0" y="609600"/>
-            <a:ext cx="7828359" cy="1368198"/>
+            <a:off x="1" y="609600"/>
+            <a:ext cx="10437812" cy="1368198"/>
           </a:xfrm>
           <a:prstGeom prst="rect">
             <a:avLst/>
@@ -7065,7 +7065,7 @@
           <a:bodyPr/>
           <a:lstStyle/>
           <a:p>
-            <a:endParaRPr lang="en-US"/>
+            <a:endParaRPr lang="en-US" sz="2800"/>
           </a:p>
         </p:txBody>
       </p:sp>
@@ -7077,8 +7077,8 @@
         </p:nvSpPr>
         <p:spPr>
           <a:xfrm>
-            <a:off x="7939371" y="609600"/>
-            <a:ext cx="1202248" cy="1368198"/>
+            <a:off x="10585828" y="609600"/>
+            <a:ext cx="1602997" cy="1368198"/>
           </a:xfrm>
           <a:prstGeom prst="rect">
             <a:avLst/>
@@ -7110,7 +7110,7 @@
           <a:bodyPr/>
           <a:lstStyle/>
           <a:p>
-            <a:endParaRPr lang="en-US"/>
+            <a:endParaRPr lang="en-US" sz="2800"/>
           </a:p>
         </p:txBody>
       </p:sp>
@@ -7269,8 +7269,8 @@
         </p:blipFill>
         <p:spPr>
           <a:xfrm>
-            <a:off x="7939370" y="1971234"/>
-            <a:ext cx="1202248" cy="144270"/>
+            <a:off x="10585827" y="1971234"/>
+            <a:ext cx="1602997" cy="144270"/>
           </a:xfrm>
           <a:prstGeom prst="rect">
             <a:avLst/>
@@ -7285,8 +7285,8 @@
         </p:nvSpPr>
         <p:spPr>
           <a:xfrm>
-            <a:off x="7939371" y="609600"/>
-            <a:ext cx="1202248" cy="1368198"/>
+            <a:off x="10585828" y="609600"/>
+            <a:ext cx="1602997" cy="1368198"/>
           </a:xfrm>
           <a:prstGeom prst="rect">
             <a:avLst/>
@@ -7318,7 +7318,7 @@
           <a:bodyPr/>
           <a:lstStyle/>
           <a:p>
-            <a:endParaRPr lang="en-US"/>
+            <a:endParaRPr lang="en-US" sz="2800"/>
           </a:p>
         </p:txBody>
       </p:sp>
@@ -7454,8 +7454,8 @@
         </p:blipFill>
         <p:spPr>
           <a:xfrm>
-            <a:off x="1" y="1970240"/>
-            <a:ext cx="7828359" cy="321164"/>
+            <a:off x="2" y="1970240"/>
+            <a:ext cx="10437812" cy="321164"/>
           </a:xfrm>
           <a:prstGeom prst="rect">
             <a:avLst/>
@@ -7484,8 +7484,8 @@
         </p:blipFill>
         <p:spPr>
           <a:xfrm>
-            <a:off x="7939370" y="1971234"/>
-            <a:ext cx="1202248" cy="144270"/>
+            <a:off x="10585827" y="1971234"/>
+            <a:ext cx="1602997" cy="144270"/>
           </a:xfrm>
           <a:prstGeom prst="rect">
             <a:avLst/>
@@ -7500,8 +7500,8 @@
         </p:nvSpPr>
         <p:spPr bwMode="ltGray">
           <a:xfrm>
-            <a:off x="0" y="609600"/>
-            <a:ext cx="7828359" cy="1368198"/>
+            <a:off x="1" y="609600"/>
+            <a:ext cx="10437812" cy="1368198"/>
           </a:xfrm>
           <a:prstGeom prst="rect">
             <a:avLst/>
@@ -7541,8 +7541,8 @@
         </p:nvSpPr>
         <p:spPr>
           <a:xfrm>
-            <a:off x="7939371" y="609600"/>
-            <a:ext cx="1202248" cy="1368198"/>
+            <a:off x="10585828" y="609600"/>
+            <a:ext cx="1602997" cy="1368198"/>
           </a:xfrm>
           <a:prstGeom prst="rect">
             <a:avLst/>
@@ -7583,8 +7583,8 @@
         </p:nvSpPr>
         <p:spPr>
           <a:xfrm>
-            <a:off x="510241" y="753227"/>
-            <a:ext cx="7210394" cy="1080940"/>
+            <a:off x="680321" y="753227"/>
+            <a:ext cx="9613859" cy="1080940"/>
           </a:xfrm>
         </p:spPr>
         <p:txBody>
@@ -7617,8 +7617,8 @@
         </p:nvSpPr>
         <p:spPr>
           <a:xfrm>
-            <a:off x="3514385" y="2336874"/>
-            <a:ext cx="4206252" cy="3599313"/>
+            <a:off x="4685847" y="2336875"/>
+            <a:ext cx="5608336" cy="3599313"/>
           </a:xfrm>
         </p:spPr>
         <p:txBody>
@@ -7674,8 +7674,8 @@
         </p:nvSpPr>
         <p:spPr>
           <a:xfrm>
-            <a:off x="510241" y="2336873"/>
-            <a:ext cx="2842559" cy="3599317"/>
+            <a:off x="680322" y="2336874"/>
+            <a:ext cx="3790079" cy="3599317"/>
           </a:xfrm>
         </p:spPr>
         <p:txBody>
@@ -7862,8 +7862,8 @@
         </p:blipFill>
         <p:spPr>
           <a:xfrm>
-            <a:off x="1" y="1970240"/>
-            <a:ext cx="7828359" cy="321164"/>
+            <a:off x="2" y="1970240"/>
+            <a:ext cx="10437812" cy="321164"/>
           </a:xfrm>
           <a:prstGeom prst="rect">
             <a:avLst/>
@@ -7892,8 +7892,8 @@
         </p:blipFill>
         <p:spPr>
           <a:xfrm>
-            <a:off x="7939370" y="1971234"/>
-            <a:ext cx="1202248" cy="144270"/>
+            <a:off x="10585827" y="1971234"/>
+            <a:ext cx="1602997" cy="144270"/>
           </a:xfrm>
           <a:prstGeom prst="rect">
             <a:avLst/>
@@ -7908,8 +7908,8 @@
         </p:nvSpPr>
         <p:spPr bwMode="ltGray">
           <a:xfrm>
-            <a:off x="0" y="609600"/>
-            <a:ext cx="7828359" cy="1368198"/>
+            <a:off x="1" y="609600"/>
+            <a:ext cx="10437812" cy="1368198"/>
           </a:xfrm>
           <a:prstGeom prst="rect">
             <a:avLst/>
@@ -7949,8 +7949,8 @@
         </p:nvSpPr>
         <p:spPr>
           <a:xfrm>
-            <a:off x="7939371" y="609600"/>
-            <a:ext cx="1202248" cy="1368198"/>
+            <a:off x="10585828" y="609600"/>
+            <a:ext cx="1602997" cy="1368198"/>
           </a:xfrm>
           <a:prstGeom prst="rect">
             <a:avLst/>
@@ -7991,8 +7991,8 @@
         </p:nvSpPr>
         <p:spPr>
           <a:xfrm>
-            <a:off x="510242" y="753228"/>
-            <a:ext cx="7210393" cy="1080938"/>
+            <a:off x="680323" y="753228"/>
+            <a:ext cx="9613857" cy="1080938"/>
           </a:xfrm>
         </p:spPr>
         <p:txBody>
@@ -8025,8 +8025,8 @@
         </p:nvSpPr>
         <p:spPr>
           <a:xfrm>
-            <a:off x="3651250" y="2336874"/>
-            <a:ext cx="4069387" cy="3599312"/>
+            <a:off x="4868334" y="2336874"/>
+            <a:ext cx="5425849" cy="3599312"/>
           </a:xfrm>
           <a:noFill/>
           <a:ln>
@@ -8101,8 +8101,8 @@
         </p:nvSpPr>
         <p:spPr>
           <a:xfrm>
-            <a:off x="510242" y="2336874"/>
-            <a:ext cx="2907192" cy="3599315"/>
+            <a:off x="680323" y="2336875"/>
+            <a:ext cx="3876256" cy="3599315"/>
           </a:xfrm>
         </p:spPr>
         <p:txBody>
@@ -8296,7 +8296,7 @@
         <p:spPr>
           <a:xfrm>
             <a:off x="0" y="0"/>
-            <a:ext cx="9144000" cy="6858000"/>
+            <a:ext cx="12192000" cy="6858000"/>
           </a:xfrm>
           <a:prstGeom prst="rect">
             <a:avLst/>
@@ -8315,8 +8315,8 @@
         </p:nvSpPr>
         <p:spPr>
           <a:xfrm>
-            <a:off x="510241" y="753228"/>
-            <a:ext cx="7210396" cy="1080938"/>
+            <a:off x="680321" y="753228"/>
+            <a:ext cx="9613861" cy="1080938"/>
           </a:xfrm>
           <a:prstGeom prst="rect">
             <a:avLst/>
@@ -8348,8 +8348,8 @@
         </p:nvSpPr>
         <p:spPr>
           <a:xfrm>
-            <a:off x="510241" y="2336873"/>
-            <a:ext cx="7210396" cy="3599316"/>
+            <a:off x="680321" y="2336873"/>
+            <a:ext cx="9613861" cy="3599316"/>
           </a:xfrm>
           <a:prstGeom prst="rect">
             <a:avLst/>
@@ -8410,8 +8410,8 @@
         </p:nvSpPr>
         <p:spPr>
           <a:xfrm>
-            <a:off x="5663236" y="5936188"/>
-            <a:ext cx="2057400" cy="365125"/>
+            <a:off x="7550981" y="5936189"/>
+            <a:ext cx="2743200" cy="365125"/>
           </a:xfrm>
           <a:prstGeom prst="rect">
             <a:avLst/>
@@ -8457,8 +8457,8 @@
         </p:nvSpPr>
         <p:spPr>
           <a:xfrm>
-            <a:off x="510241" y="5936189"/>
-            <a:ext cx="5152995" cy="365125"/>
+            <a:off x="680322" y="5936190"/>
+            <a:ext cx="6870660" cy="365125"/>
           </a:xfrm>
           <a:prstGeom prst="rect">
             <a:avLst/>
@@ -8497,8 +8497,8 @@
         </p:nvSpPr>
         <p:spPr>
           <a:xfrm>
-            <a:off x="8047092" y="753228"/>
-            <a:ext cx="865613" cy="1090789"/>
+            <a:off x="10729457" y="753228"/>
+            <a:ext cx="1154151" cy="1090789"/>
           </a:xfrm>
           <a:prstGeom prst="rect">
             <a:avLst/>
@@ -8880,14 +8880,14 @@
           <a:ln/>
           <a:extLst>
             <a:ext uri="{909E8E84-426E-40dd-AFC4-6F175D3DCCD1}">
-              <a14:hiddenFill xmlns:a14="http://schemas.microsoft.com/office/drawing/2010/main" xmlns="">
+              <a14:hiddenFill xmlns="" xmlns:a14="http://schemas.microsoft.com/office/drawing/2010/main">
                 <a:solidFill>
                   <a:srgbClr val="FFFFFF"/>
                 </a:solidFill>
               </a14:hiddenFill>
             </a:ext>
             <a:ext uri="{91240B29-F687-4f45-9708-019B960494DF}">
-              <a14:hiddenLine xmlns:a14="http://schemas.microsoft.com/office/drawing/2010/main" xmlns="" w="9525">
+              <a14:hiddenLine xmlns="" xmlns:a14="http://schemas.microsoft.com/office/drawing/2010/main" w="9525">
                 <a:solidFill>
                   <a:srgbClr val="000000"/>
                 </a:solidFill>
@@ -9028,7 +9028,7 @@
         </p:nvSpPr>
         <p:spPr bwMode="auto">
           <a:xfrm>
-            <a:off x="115888" y="1001713"/>
+            <a:off x="1639889" y="1001713"/>
             <a:ext cx="8910637" cy="641350"/>
           </a:xfrm>
           <a:prstGeom prst="rect">
@@ -9040,14 +9040,14 @@
           </a:ln>
           <a:extLst>
             <a:ext uri="{909E8E84-426E-40dd-AFC4-6F175D3DCCD1}">
-              <a14:hiddenFill xmlns:a14="http://schemas.microsoft.com/office/drawing/2010/main" xmlns="">
+              <a14:hiddenFill xmlns="" xmlns:a14="http://schemas.microsoft.com/office/drawing/2010/main">
                 <a:solidFill>
                   <a:srgbClr val="FFFFFF"/>
                 </a:solidFill>
               </a14:hiddenFill>
             </a:ext>
             <a:ext uri="{91240B29-F687-4f45-9708-019B960494DF}">
-              <a14:hiddenLine xmlns:a14="http://schemas.microsoft.com/office/drawing/2010/main" xmlns="" w="9525">
+              <a14:hiddenLine xmlns="" xmlns:a14="http://schemas.microsoft.com/office/drawing/2010/main" w="9525">
                 <a:solidFill>
                   <a:srgbClr val="000000"/>
                 </a:solidFill>
@@ -9194,7 +9194,7 @@
         </p:nvSpPr>
         <p:spPr bwMode="auto">
           <a:xfrm>
-            <a:off x="176213" y="5164137"/>
+            <a:off x="1700214" y="5164138"/>
             <a:ext cx="8791575" cy="984871"/>
           </a:xfrm>
           <a:prstGeom prst="rect">
@@ -9206,14 +9206,14 @@
           </a:ln>
           <a:extLst>
             <a:ext uri="{909E8E84-426E-40dd-AFC4-6F175D3DCCD1}">
-              <a14:hiddenFill xmlns:a14="http://schemas.microsoft.com/office/drawing/2010/main" xmlns="">
+              <a14:hiddenFill xmlns="" xmlns:a14="http://schemas.microsoft.com/office/drawing/2010/main">
                 <a:solidFill>
                   <a:srgbClr val="FFFFFF"/>
                 </a:solidFill>
               </a14:hiddenFill>
             </a:ext>
             <a:ext uri="{91240B29-F687-4f45-9708-019B960494DF}">
-              <a14:hiddenLine xmlns:a14="http://schemas.microsoft.com/office/drawing/2010/main" xmlns="" w="9525">
+              <a14:hiddenLine xmlns="" xmlns:a14="http://schemas.microsoft.com/office/drawing/2010/main" w="9525">
                 <a:solidFill>
                   <a:srgbClr val="000000"/>
                 </a:solidFill>
@@ -9231,7 +9231,7 @@
             <a:pPr algn="ctr"/>
             <a:r>
               <a:rPr kumimoji="1" lang="en-US" sz="3200" dirty="0"/>
-              <a:t>Topic 13 – Parsers in Haskell</a:t>
+              <a:t>Topic 13.1 – Parsers in Haskell</a:t>
             </a:r>
           </a:p>
           <a:p>
@@ -9263,7 +9263,7 @@
         </p:blipFill>
         <p:spPr bwMode="auto">
           <a:xfrm>
-            <a:off x="3151188" y="2400300"/>
+            <a:off x="4675189" y="2400300"/>
             <a:ext cx="2841625" cy="2006600"/>
           </a:xfrm>
           <a:prstGeom prst="rect">
@@ -9275,14 +9275,14 @@
           </a:ln>
           <a:extLst>
             <a:ext uri="{909E8E84-426E-40dd-AFC4-6F175D3DCCD1}">
-              <a14:hiddenFill xmlns:a14="http://schemas.microsoft.com/office/drawing/2010/main" xmlns="">
+              <a14:hiddenFill xmlns="" xmlns:a14="http://schemas.microsoft.com/office/drawing/2010/main">
                 <a:solidFill>
                   <a:srgbClr val="FFFFFF"/>
                 </a:solidFill>
               </a14:hiddenFill>
             </a:ext>
             <a:ext uri="{91240B29-F687-4f45-9708-019B960494DF}">
-              <a14:hiddenLine xmlns:a14="http://schemas.microsoft.com/office/drawing/2010/main" xmlns="" w="9525">
+              <a14:hiddenLine xmlns="" xmlns:a14="http://schemas.microsoft.com/office/drawing/2010/main" w="9525">
                 <a:solidFill>
                   <a:srgbClr val="000000"/>
                 </a:solidFill>
@@ -9365,7 +9365,7 @@
         </p:nvSpPr>
         <p:spPr>
           <a:xfrm>
-            <a:off x="748128" y="5130453"/>
+            <a:off x="2272129" y="5130453"/>
             <a:ext cx="6734621" cy="1419816"/>
           </a:xfrm>
           <a:solidFill>
@@ -9474,7 +9474,7 @@
         </p:nvSpPr>
         <p:spPr>
           <a:xfrm>
-            <a:off x="662641" y="1986566"/>
+            <a:off x="2186642" y="1986566"/>
             <a:ext cx="6734621" cy="1171258"/>
           </a:xfrm>
           <a:prstGeom prst="rect">
@@ -9660,7 +9660,6 @@
               <a:spcAft>
                 <a:spcPts val="0"/>
               </a:spcAft>
-              <a:buFont typeface="Arial" panose="020B0604020202020204" pitchFamily="34" charset="0"/>
               <a:buNone/>
             </a:pPr>
             <a:r>
@@ -9673,7 +9672,6 @@
               <a:spcAft>
                 <a:spcPts val="0"/>
               </a:spcAft>
-              <a:buFont typeface="Arial" panose="020B0604020202020204" pitchFamily="34" charset="0"/>
               <a:buNone/>
             </a:pPr>
             <a:r>
@@ -9686,7 +9684,6 @@
               <a:spcAft>
                 <a:spcPts val="0"/>
               </a:spcAft>
-              <a:buFont typeface="Arial" panose="020B0604020202020204" pitchFamily="34" charset="0"/>
               <a:buNone/>
             </a:pPr>
             <a:r>
@@ -9711,7 +9708,7 @@
         </p:nvSpPr>
         <p:spPr>
           <a:xfrm>
-            <a:off x="258666" y="3167390"/>
+            <a:off x="1782666" y="3167390"/>
             <a:ext cx="8626668" cy="523220"/>
           </a:xfrm>
           <a:prstGeom prst="rect">
@@ -9755,7 +9752,7 @@
         </p:nvSpPr>
         <p:spPr>
           <a:xfrm>
-            <a:off x="662641" y="3822743"/>
+            <a:off x="2186642" y="3822743"/>
             <a:ext cx="6734621" cy="1171258"/>
           </a:xfrm>
           <a:prstGeom prst="rect">
@@ -9941,7 +9938,6 @@
               <a:spcAft>
                 <a:spcPts val="0"/>
               </a:spcAft>
-              <a:buFont typeface="Arial" panose="020B0604020202020204" pitchFamily="34" charset="0"/>
               <a:buNone/>
             </a:pPr>
             <a:r>
@@ -9954,7 +9950,6 @@
               <a:spcAft>
                 <a:spcPts val="0"/>
               </a:spcAft>
-              <a:buFont typeface="Arial" panose="020B0604020202020204" pitchFamily="34" charset="0"/>
               <a:buNone/>
             </a:pPr>
             <a:r>
@@ -9967,7 +9962,6 @@
               <a:spcAft>
                 <a:spcPts val="0"/>
               </a:spcAft>
-              <a:buFont typeface="Arial" panose="020B0604020202020204" pitchFamily="34" charset="0"/>
               <a:buNone/>
             </a:pPr>
             <a:r>
@@ -9980,7 +9974,6 @@
               <a:spcAft>
                 <a:spcPts val="0"/>
               </a:spcAft>
-              <a:buFont typeface="Arial" panose="020B0604020202020204" pitchFamily="34" charset="0"/>
               <a:buNone/>
             </a:pPr>
             <a:r>
@@ -10924,7 +10917,7 @@
         </p:nvSpPr>
         <p:spPr>
           <a:xfrm>
-            <a:off x="748128" y="2096391"/>
+            <a:off x="4020246" y="2848458"/>
             <a:ext cx="3249936" cy="457696"/>
           </a:xfrm>
           <a:prstGeom prst="rect">
@@ -11142,7 +11135,7 @@
         </p:nvSpPr>
         <p:spPr>
           <a:xfrm>
-            <a:off x="286037" y="2718645"/>
+            <a:off x="1899684" y="3780694"/>
             <a:ext cx="8626668" cy="523220"/>
           </a:xfrm>
           <a:prstGeom prst="rect">
@@ -11474,7 +11467,7 @@
         </p:nvSpPr>
         <p:spPr>
           <a:xfrm>
-            <a:off x="510241" y="2336873"/>
+            <a:off x="2034241" y="2336874"/>
             <a:ext cx="7210396" cy="3120651"/>
           </a:xfrm>
           <a:solidFill>
@@ -11751,7 +11744,7 @@
         </p:nvSpPr>
         <p:spPr>
           <a:xfrm>
-            <a:off x="336194" y="2302657"/>
+            <a:off x="1860194" y="2302658"/>
             <a:ext cx="8229498" cy="483329"/>
           </a:xfrm>
           <a:prstGeom prst="rect">
@@ -11930,10 +11923,7 @@
             </a:lvl9pPr>
           </a:lstStyle>
           <a:p>
-            <a:pPr marL="0" indent="0" fontAlgn="auto">
-              <a:spcAft>
-                <a:spcPts val="0"/>
-              </a:spcAft>
+            <a:pPr marL="0" indent="0">
               <a:buNone/>
             </a:pPr>
             <a:r>
@@ -11946,10 +11936,7 @@
             </a:r>
           </a:p>
           <a:p>
-            <a:pPr marL="0" indent="0" fontAlgn="auto">
-              <a:spcAft>
-                <a:spcPts val="0"/>
-              </a:spcAft>
+            <a:pPr marL="0" indent="0">
               <a:buNone/>
             </a:pPr>
             <a:endParaRPr lang="en-US" dirty="0"/>
@@ -11972,7 +11959,7 @@
         </p:nvSpPr>
         <p:spPr>
           <a:xfrm>
-            <a:off x="385114" y="3155513"/>
+            <a:off x="1909114" y="3155514"/>
             <a:ext cx="3940702" cy="1080939"/>
           </a:xfrm>
           <a:prstGeom prst="rect">
@@ -12155,7 +12142,6 @@
               <a:spcAft>
                 <a:spcPts val="0"/>
               </a:spcAft>
-              <a:buFont typeface="Arial" panose="020B0604020202020204" pitchFamily="34" charset="0"/>
               <a:buNone/>
             </a:pPr>
             <a:r>
@@ -12169,7 +12155,6 @@
               <a:spcAft>
                 <a:spcPts val="0"/>
               </a:spcAft>
-              <a:buFont typeface="Arial" panose="020B0604020202020204" pitchFamily="34" charset="0"/>
               <a:buNone/>
             </a:pPr>
             <a:r>
@@ -12182,7 +12167,6 @@
               <a:spcAft>
                 <a:spcPts val="0"/>
               </a:spcAft>
-              <a:buFont typeface="Arial" panose="020B0604020202020204" pitchFamily="34" charset="0"/>
               <a:buNone/>
             </a:pPr>
             <a:r>
@@ -12203,7 +12187,6 @@
               <a:spcAft>
                 <a:spcPts val="0"/>
               </a:spcAft>
-              <a:buFont typeface="Arial" panose="020B0604020202020204" pitchFamily="34" charset="0"/>
               <a:buNone/>
             </a:pPr>
             <a:endParaRPr lang="en-US" dirty="0"/>
@@ -12226,7 +12209,7 @@
         </p:nvSpPr>
         <p:spPr>
           <a:xfrm>
-            <a:off x="457251" y="4695092"/>
+            <a:off x="1981251" y="4695093"/>
             <a:ext cx="3604796" cy="1336431"/>
           </a:xfrm>
           <a:prstGeom prst="rect">
@@ -12566,7 +12549,7 @@
         </p:nvSpPr>
         <p:spPr>
           <a:xfrm>
-            <a:off x="1230922" y="2762944"/>
+            <a:off x="2754923" y="2762945"/>
             <a:ext cx="5908431" cy="954107"/>
           </a:xfrm>
           <a:prstGeom prst="rect">
@@ -12665,7 +12648,7 @@
         </p:blipFill>
         <p:spPr>
           <a:xfrm>
-            <a:off x="1230922" y="4602080"/>
+            <a:off x="2754923" y="4602080"/>
             <a:ext cx="4579155" cy="756556"/>
           </a:xfrm>
           <a:prstGeom prst="rect">
@@ -12687,7 +12670,7 @@
         </p:nvSpPr>
         <p:spPr>
           <a:xfrm>
-            <a:off x="1336431" y="3897955"/>
+            <a:off x="2860431" y="3897955"/>
             <a:ext cx="1820008" cy="523220"/>
           </a:xfrm>
           <a:prstGeom prst="rect">
@@ -12975,7 +12958,7 @@
         </p:blipFill>
         <p:spPr>
           <a:xfrm>
-            <a:off x="1171136" y="1012380"/>
+            <a:off x="2695136" y="1012380"/>
             <a:ext cx="6359526" cy="4833240"/>
           </a:xfrm>
           <a:prstGeom prst="rect">
@@ -12997,14 +12980,14 @@
         <p:spPr>
           <a:extLst>
             <a:ext uri="{909E8E84-426E-40dd-AFC4-6F175D3DCCD1}">
-              <a14:hiddenFill xmlns="" xmlns:a14="http://schemas.microsoft.com/office/drawing/2010/main">
+              <a14:hiddenFill xmlns:a14="http://schemas.microsoft.com/office/drawing/2010/main" xmlns="">
                 <a:solidFill>
                   <a:srgbClr val="FFFFFF"/>
                 </a:solidFill>
               </a14:hiddenFill>
             </a:ext>
             <a:ext uri="{91240B29-F687-4f45-9708-019B960494DF}">
-              <a14:hiddenLine xmlns="" xmlns:a14="http://schemas.microsoft.com/office/drawing/2010/main" w="9525">
+              <a14:hiddenLine xmlns:a14="http://schemas.microsoft.com/office/drawing/2010/main" xmlns="" w="9525">
                 <a:solidFill>
                   <a:srgbClr val="000000"/>
                 </a:solidFill>
@@ -13195,7 +13178,7 @@
         </p:nvSpPr>
         <p:spPr>
           <a:xfrm>
-            <a:off x="625647" y="5815694"/>
+            <a:off x="2149647" y="5815694"/>
             <a:ext cx="1664208" cy="683046"/>
           </a:xfrm>
           <a:prstGeom prst="rect">
@@ -13215,9 +13198,7 @@
           <a:bodyPr/>
           <a:lstStyle/>
           <a:p>
-            <a:pPr marL="0" indent="0" algn="ctr">
-              <a:buNone/>
-            </a:pPr>
+            <a:pPr algn="ctr"/>
             <a:endParaRPr lang="en-US" sz="1400" b="1" dirty="0">
               <a:solidFill>
                 <a:srgbClr val="FFFFFF"/>
@@ -13228,9 +13209,7 @@
             </a:endParaRPr>
           </a:p>
           <a:p>
-            <a:pPr marL="0" indent="0" algn="ctr">
-              <a:buNone/>
-            </a:pPr>
+            <a:pPr algn="ctr"/>
             <a:r>
               <a:rPr lang="en-US" sz="1400" b="1" dirty="0">
                 <a:solidFill>
@@ -13260,7 +13239,7 @@
         </p:nvSpPr>
         <p:spPr>
           <a:xfrm>
-            <a:off x="5788121" y="5737785"/>
+            <a:off x="7312121" y="5737785"/>
             <a:ext cx="2331720" cy="749808"/>
           </a:xfrm>
           <a:prstGeom prst="rect">
@@ -13299,14 +13278,14 @@
           <a:ln/>
           <a:extLst>
             <a:ext uri="{909E8E84-426E-40dd-AFC4-6F175D3DCCD1}">
-              <a14:hiddenFill xmlns:a14="http://schemas.microsoft.com/office/drawing/2010/main" xmlns="">
+              <a14:hiddenFill xmlns="" xmlns:a14="http://schemas.microsoft.com/office/drawing/2010/main">
                 <a:solidFill>
                   <a:srgbClr val="FFFFFF"/>
                 </a:solidFill>
               </a14:hiddenFill>
             </a:ext>
             <a:ext uri="{91240B29-F687-4f45-9708-019B960494DF}">
-              <a14:hiddenLine xmlns:a14="http://schemas.microsoft.com/office/drawing/2010/main" xmlns="" w="9525">
+              <a14:hiddenLine xmlns="" xmlns:a14="http://schemas.microsoft.com/office/drawing/2010/main" w="9525">
                 <a:solidFill>
                   <a:srgbClr val="000000"/>
                 </a:solidFill>
@@ -13451,7 +13430,7 @@
         </p:nvSpPr>
         <p:spPr>
           <a:xfrm>
-            <a:off x="510241" y="1065481"/>
+            <a:off x="2034242" y="1065482"/>
             <a:ext cx="3276603" cy="466281"/>
           </a:xfrm>
           <a:prstGeom prst="rect">
@@ -13494,7 +13473,7 @@
         </p:nvSpPr>
         <p:spPr>
           <a:xfrm>
-            <a:off x="510241" y="2155824"/>
+            <a:off x="2034241" y="2155824"/>
             <a:ext cx="8229600" cy="658368"/>
           </a:xfrm>
           <a:prstGeom prst="rect">
@@ -13507,9 +13486,6 @@
           <a:bodyPr wrap="square" rtlCol="0" anchor="ctr"/>
           <a:lstStyle/>
           <a:p>
-            <a:pPr marL="0" indent="0">
-              <a:buNone/>
-            </a:pPr>
             <a:r>
               <a:rPr lang="en-US" sz="2400" dirty="0">
                 <a:latin typeface="+mn-lt"/>
@@ -13538,7 +13514,7 @@
         </p:nvSpPr>
         <p:spPr>
           <a:xfrm>
-            <a:off x="359426" y="4344258"/>
+            <a:off x="1883426" y="4344258"/>
             <a:ext cx="8229600" cy="384048"/>
           </a:xfrm>
           <a:prstGeom prst="rect">
@@ -13551,9 +13527,6 @@
           <a:bodyPr wrap="square" rtlCol="0" anchor="ctr"/>
           <a:lstStyle/>
           <a:p>
-            <a:pPr marL="0" indent="0">
-              <a:buNone/>
-            </a:pPr>
             <a:r>
               <a:rPr lang="en-US" sz="2000" b="1" dirty="0">
                 <a:solidFill>
@@ -13583,7 +13556,7 @@
         </p:nvSpPr>
         <p:spPr>
           <a:xfrm>
-            <a:off x="365759" y="4731382"/>
+            <a:off x="1889759" y="4731382"/>
             <a:ext cx="8412480" cy="658368"/>
           </a:xfrm>
           <a:prstGeom prst="rect">
@@ -13603,9 +13576,6 @@
           <a:bodyPr/>
           <a:lstStyle/>
           <a:p>
-            <a:pPr marL="0" indent="0">
-              <a:buNone/>
-            </a:pPr>
             <a:r>
               <a:rPr lang="en-US" sz="1800" dirty="0">
                 <a:solidFill>
@@ -13701,7 +13671,7 @@
         </p:nvSpPr>
         <p:spPr>
           <a:xfrm>
-            <a:off x="107966" y="3337670"/>
+            <a:off x="1631966" y="3337670"/>
             <a:ext cx="3749040" cy="1051560"/>
           </a:xfrm>
           <a:prstGeom prst="rect">
@@ -13739,7 +13709,7 @@
         </p:nvSpPr>
         <p:spPr>
           <a:xfrm>
-            <a:off x="359426" y="3461114"/>
+            <a:off x="1883426" y="3461114"/>
             <a:ext cx="3383280" cy="365760"/>
           </a:xfrm>
           <a:prstGeom prst="rect">
@@ -13752,9 +13722,6 @@
           <a:bodyPr wrap="square" rtlCol="0" anchor="ctr"/>
           <a:lstStyle/>
           <a:p>
-            <a:pPr marL="0" indent="0">
-              <a:buNone/>
-            </a:pPr>
             <a:r>
               <a:rPr lang="en-US" sz="1600" b="1" dirty="0">
                 <a:solidFill>
@@ -13784,7 +13751,7 @@
         </p:nvSpPr>
         <p:spPr>
           <a:xfrm>
-            <a:off x="359426" y="3845162"/>
+            <a:off x="1883426" y="3845162"/>
             <a:ext cx="3383280" cy="457200"/>
           </a:xfrm>
           <a:prstGeom prst="rect">
@@ -13797,9 +13764,6 @@
           <a:bodyPr wrap="square" rtlCol="0" anchor="ctr"/>
           <a:lstStyle/>
           <a:p>
-            <a:pPr marL="0" indent="0">
-              <a:buNone/>
-            </a:pPr>
             <a:r>
               <a:rPr lang="en-US" sz="1300" dirty="0">
                 <a:latin typeface="Calibri" pitchFamily="34" charset="0"/>
@@ -13826,7 +13790,7 @@
         </p:nvSpPr>
         <p:spPr>
           <a:xfrm>
-            <a:off x="4990801" y="3346814"/>
+            <a:off x="6514801" y="3346814"/>
             <a:ext cx="3749040" cy="1051560"/>
           </a:xfrm>
           <a:prstGeom prst="rect">
@@ -13864,7 +13828,7 @@
         </p:nvSpPr>
         <p:spPr>
           <a:xfrm>
-            <a:off x="5003472" y="3370280"/>
+            <a:off x="6527472" y="3370280"/>
             <a:ext cx="3383280" cy="365760"/>
           </a:xfrm>
           <a:prstGeom prst="rect">
@@ -13877,9 +13841,6 @@
           <a:bodyPr wrap="square" rtlCol="0" anchor="ctr"/>
           <a:lstStyle/>
           <a:p>
-            <a:pPr marL="0" indent="0">
-              <a:buNone/>
-            </a:pPr>
             <a:r>
               <a:rPr lang="en-US" sz="1550" b="1" dirty="0">
                 <a:solidFill>
@@ -13909,7 +13870,7 @@
         </p:nvSpPr>
         <p:spPr>
           <a:xfrm>
-            <a:off x="5003472" y="3754328"/>
+            <a:off x="6527472" y="3754328"/>
             <a:ext cx="3383280" cy="457200"/>
           </a:xfrm>
           <a:prstGeom prst="rect">
@@ -13922,9 +13883,6 @@
           <a:bodyPr wrap="square" rtlCol="0" anchor="ctr"/>
           <a:lstStyle/>
           <a:p>
-            <a:pPr marL="0" indent="0">
-              <a:buNone/>
-            </a:pPr>
             <a:r>
               <a:rPr lang="en-US" sz="1300" dirty="0">
                 <a:latin typeface="Calibri" pitchFamily="34" charset="0"/>
@@ -13951,7 +13909,7 @@
         </p:nvSpPr>
         <p:spPr>
           <a:xfrm rot="19522172">
-            <a:off x="3068555" y="2661153"/>
+            <a:off x="4592555" y="2661153"/>
             <a:ext cx="1189822" cy="506776"/>
           </a:xfrm>
           <a:prstGeom prst="leftArrow">
@@ -14000,7 +13958,7 @@
         </p:nvSpPr>
         <p:spPr>
           <a:xfrm rot="13377505">
-            <a:off x="4585149" y="2654227"/>
+            <a:off x="6109149" y="2654227"/>
             <a:ext cx="1189822" cy="506776"/>
           </a:xfrm>
           <a:prstGeom prst="leftArrow">
@@ -14049,7 +14007,7 @@
         </p:nvSpPr>
         <p:spPr>
           <a:xfrm>
-            <a:off x="4132030" y="2823594"/>
+            <a:off x="5656031" y="2823594"/>
             <a:ext cx="858771" cy="523220"/>
           </a:xfrm>
           <a:prstGeom prst="rect">
@@ -14084,7 +14042,7 @@
         </p:nvSpPr>
         <p:spPr>
           <a:xfrm>
-            <a:off x="2289855" y="5748932"/>
+            <a:off x="3813855" y="5748932"/>
             <a:ext cx="798846" cy="749808"/>
           </a:xfrm>
           <a:prstGeom prst="rect">
@@ -14097,9 +14055,7 @@
           <a:bodyPr wrap="square" rtlCol="0" anchor="ctr"/>
           <a:lstStyle/>
           <a:p>
-            <a:pPr marL="0" indent="0" algn="ctr">
-              <a:buNone/>
-            </a:pPr>
+            <a:pPr algn="ctr"/>
             <a:r>
               <a:rPr lang="en-US" sz="2400" dirty="0">
                 <a:solidFill>
@@ -14126,7 +14082,7 @@
         </p:nvSpPr>
         <p:spPr>
           <a:xfrm>
-            <a:off x="2907223" y="5748932"/>
+            <a:off x="4431223" y="5748932"/>
             <a:ext cx="1993392" cy="749808"/>
           </a:xfrm>
           <a:prstGeom prst="rect">
@@ -14164,7 +14120,7 @@
         </p:nvSpPr>
         <p:spPr>
           <a:xfrm>
-            <a:off x="2872444" y="5804547"/>
+            <a:off x="4396444" y="5804547"/>
             <a:ext cx="1828800" cy="683046"/>
           </a:xfrm>
           <a:prstGeom prst="rect">
@@ -14177,9 +14133,7 @@
           <a:bodyPr wrap="square" rtlCol="0" anchor="ctr"/>
           <a:lstStyle/>
           <a:p>
-            <a:pPr marL="0" indent="0" algn="ctr">
-              <a:buNone/>
-            </a:pPr>
+            <a:pPr algn="ctr"/>
             <a:r>
               <a:rPr lang="en-US" sz="1300" b="1" dirty="0">
                 <a:solidFill>
@@ -14209,7 +14163,7 @@
         </p:nvSpPr>
         <p:spPr>
           <a:xfrm>
-            <a:off x="5003472" y="5748932"/>
+            <a:off x="6527473" y="5748932"/>
             <a:ext cx="623943" cy="749808"/>
           </a:xfrm>
           <a:prstGeom prst="rect">
@@ -14222,9 +14176,7 @@
           <a:bodyPr wrap="square" rtlCol="0" anchor="ctr"/>
           <a:lstStyle/>
           <a:p>
-            <a:pPr marL="0" indent="0" algn="ctr">
-              <a:buNone/>
-            </a:pPr>
+            <a:pPr algn="ctr"/>
             <a:r>
               <a:rPr lang="en-US" sz="2400" dirty="0">
                 <a:solidFill>
@@ -14251,7 +14203,7 @@
         </p:nvSpPr>
         <p:spPr>
           <a:xfrm>
-            <a:off x="5627415" y="5748932"/>
+            <a:off x="7151415" y="5748932"/>
             <a:ext cx="2331720" cy="749808"/>
           </a:xfrm>
           <a:prstGeom prst="rect">
@@ -14264,9 +14216,7 @@
           <a:bodyPr wrap="square" rtlCol="0" anchor="ctr"/>
           <a:lstStyle/>
           <a:p>
-            <a:pPr marL="0" indent="0" algn="ctr">
-              <a:buNone/>
-            </a:pPr>
+            <a:pPr algn="ctr"/>
             <a:r>
               <a:rPr lang="en-US" sz="1300" b="1" dirty="0">
                 <a:solidFill>
@@ -14281,9 +14231,7 @@
             <a:endParaRPr lang="en-US" sz="1300" dirty="0"/>
           </a:p>
           <a:p>
-            <a:pPr marL="0" indent="0" algn="ctr">
-              <a:buNone/>
-            </a:pPr>
+            <a:pPr algn="ctr"/>
             <a:r>
               <a:rPr lang="en-US" sz="1300" b="1" dirty="0">
                 <a:solidFill>
@@ -16025,7 +15973,7 @@
         </p:nvSpPr>
         <p:spPr>
           <a:xfrm>
-            <a:off x="365760" y="3204587"/>
+            <a:off x="1889760" y="3204587"/>
             <a:ext cx="3840480" cy="3584448"/>
           </a:xfrm>
           <a:prstGeom prst="rect">
@@ -16063,7 +16011,7 @@
         </p:nvSpPr>
         <p:spPr>
           <a:xfrm>
-            <a:off x="4937760" y="3204587"/>
+            <a:off x="6461760" y="3204587"/>
             <a:ext cx="3840480" cy="3584448"/>
           </a:xfrm>
           <a:prstGeom prst="rect">
@@ -16101,7 +16049,7 @@
         </p:nvSpPr>
         <p:spPr>
           <a:xfrm>
-            <a:off x="4206240" y="4247003"/>
+            <a:off x="5730240" y="4247003"/>
             <a:ext cx="731520" cy="777240"/>
           </a:xfrm>
           <a:prstGeom prst="rect">
@@ -16114,9 +16062,7 @@
           <a:bodyPr wrap="square" rtlCol="0" anchor="ctr"/>
           <a:lstStyle/>
           <a:p>
-            <a:pPr marL="0" indent="0" algn="ctr">
-              <a:buNone/>
-            </a:pPr>
+            <a:pPr algn="ctr"/>
             <a:r>
               <a:rPr lang="en-US" sz="2600" b="1" dirty="0">
                 <a:solidFill>
@@ -16143,7 +16089,7 @@
         </p:nvSpPr>
         <p:spPr>
           <a:xfrm>
-            <a:off x="365760" y="3204587"/>
+            <a:off x="1889760" y="3204587"/>
             <a:ext cx="3840480" cy="3584448"/>
           </a:xfrm>
           <a:prstGeom prst="rect">
@@ -16184,7 +16130,7 @@
         </p:nvSpPr>
         <p:spPr>
           <a:xfrm>
-            <a:off x="566928" y="3296027"/>
+            <a:off x="2090928" y="3296027"/>
             <a:ext cx="3456432" cy="475488"/>
           </a:xfrm>
           <a:prstGeom prst="rect">
@@ -16197,9 +16143,6 @@
           <a:bodyPr wrap="square" rtlCol="0" anchor="ctr"/>
           <a:lstStyle/>
           <a:p>
-            <a:pPr marL="0" indent="0">
-              <a:buNone/>
-            </a:pPr>
             <a:r>
               <a:rPr lang="en-US" sz="1250" dirty="0">
                 <a:solidFill>
@@ -16229,7 +16172,7 @@
         </p:nvSpPr>
         <p:spPr>
           <a:xfrm>
-            <a:off x="566928" y="3817235"/>
+            <a:off x="2090928" y="3817235"/>
             <a:ext cx="3456432" cy="475488"/>
           </a:xfrm>
           <a:prstGeom prst="rect">
@@ -16242,9 +16185,6 @@
           <a:bodyPr wrap="square" rtlCol="0" anchor="ctr"/>
           <a:lstStyle/>
           <a:p>
-            <a:pPr marL="0" indent="0">
-              <a:buNone/>
-            </a:pPr>
             <a:r>
               <a:rPr lang="en-US" sz="1250" dirty="0">
                 <a:solidFill>
@@ -16274,7 +16214,7 @@
         </p:nvSpPr>
         <p:spPr>
           <a:xfrm>
-            <a:off x="566928" y="4338443"/>
+            <a:off x="2090928" y="4338443"/>
             <a:ext cx="3456432" cy="475488"/>
           </a:xfrm>
           <a:prstGeom prst="rect">
@@ -16287,9 +16227,6 @@
           <a:bodyPr wrap="square" rtlCol="0" anchor="ctr"/>
           <a:lstStyle/>
           <a:p>
-            <a:pPr marL="0" indent="0">
-              <a:buNone/>
-            </a:pPr>
             <a:r>
               <a:rPr lang="en-US" sz="1250" dirty="0">
                 <a:solidFill>
@@ -16319,7 +16256,7 @@
         </p:nvSpPr>
         <p:spPr>
           <a:xfrm>
-            <a:off x="566928" y="4859651"/>
+            <a:off x="2090928" y="4859651"/>
             <a:ext cx="3456432" cy="475488"/>
           </a:xfrm>
           <a:prstGeom prst="rect">
@@ -16332,9 +16269,6 @@
           <a:bodyPr wrap="square" rtlCol="0" anchor="ctr"/>
           <a:lstStyle/>
           <a:p>
-            <a:pPr marL="0" indent="0">
-              <a:buNone/>
-            </a:pPr>
             <a:r>
               <a:rPr lang="en-US" sz="1250" dirty="0">
                 <a:solidFill>
@@ -16364,7 +16298,7 @@
         </p:nvSpPr>
         <p:spPr>
           <a:xfrm>
-            <a:off x="566928" y="5380859"/>
+            <a:off x="2090928" y="5380859"/>
             <a:ext cx="3456432" cy="475488"/>
           </a:xfrm>
           <a:prstGeom prst="rect">
@@ -16377,9 +16311,6 @@
           <a:bodyPr wrap="square" rtlCol="0" anchor="ctr"/>
           <a:lstStyle/>
           <a:p>
-            <a:pPr marL="0" indent="0">
-              <a:buNone/>
-            </a:pPr>
             <a:r>
               <a:rPr lang="en-US" sz="1250" dirty="0">
                 <a:solidFill>
@@ -16409,7 +16340,7 @@
         </p:nvSpPr>
         <p:spPr>
           <a:xfrm>
-            <a:off x="566928" y="5902067"/>
+            <a:off x="2090928" y="5902067"/>
             <a:ext cx="3456432" cy="475488"/>
           </a:xfrm>
           <a:prstGeom prst="rect">
@@ -16422,9 +16353,6 @@
           <a:bodyPr wrap="square" rtlCol="0" anchor="ctr"/>
           <a:lstStyle/>
           <a:p>
-            <a:pPr marL="0" indent="0">
-              <a:buNone/>
-            </a:pPr>
             <a:r>
               <a:rPr lang="en-US" sz="1250" dirty="0">
                 <a:solidFill>
@@ -16454,7 +16382,7 @@
         </p:nvSpPr>
         <p:spPr>
           <a:xfrm>
-            <a:off x="374904" y="2747132"/>
+            <a:off x="1898904" y="2747132"/>
             <a:ext cx="3840480" cy="475488"/>
           </a:xfrm>
           <a:prstGeom prst="rect">
@@ -16498,7 +16426,7 @@
         </p:nvSpPr>
         <p:spPr>
           <a:xfrm>
-            <a:off x="5312664" y="3341747"/>
+            <a:off x="6836664" y="3341747"/>
             <a:ext cx="3456432" cy="475488"/>
           </a:xfrm>
           <a:prstGeom prst="rect">
@@ -16511,9 +16439,6 @@
           <a:bodyPr wrap="square" rtlCol="0" anchor="ctr"/>
           <a:lstStyle/>
           <a:p>
-            <a:pPr marL="0" indent="0">
-              <a:buNone/>
-            </a:pPr>
             <a:r>
               <a:rPr lang="en-US" sz="1250" dirty="0">
                 <a:solidFill>
@@ -16543,7 +16468,7 @@
         </p:nvSpPr>
         <p:spPr>
           <a:xfrm>
-            <a:off x="5312664" y="3862955"/>
+            <a:off x="6836664" y="3862955"/>
             <a:ext cx="3456432" cy="475488"/>
           </a:xfrm>
           <a:prstGeom prst="rect">
@@ -16556,9 +16481,6 @@
           <a:bodyPr wrap="square" rtlCol="0" anchor="ctr"/>
           <a:lstStyle/>
           <a:p>
-            <a:pPr marL="0" indent="0">
-              <a:buNone/>
-            </a:pPr>
             <a:r>
               <a:rPr lang="en-US" sz="1250" dirty="0">
                 <a:solidFill>
@@ -16588,7 +16510,7 @@
         </p:nvSpPr>
         <p:spPr>
           <a:xfrm>
-            <a:off x="5312664" y="4384163"/>
+            <a:off x="6836664" y="4384163"/>
             <a:ext cx="3456432" cy="475488"/>
           </a:xfrm>
           <a:prstGeom prst="rect">
@@ -16601,9 +16523,6 @@
           <a:bodyPr wrap="square" rtlCol="0" anchor="ctr"/>
           <a:lstStyle/>
           <a:p>
-            <a:pPr marL="0" indent="0">
-              <a:buNone/>
-            </a:pPr>
             <a:r>
               <a:rPr lang="en-US" sz="1250" dirty="0">
                 <a:solidFill>
@@ -16633,7 +16552,7 @@
         </p:nvSpPr>
         <p:spPr>
           <a:xfrm>
-            <a:off x="5312664" y="4905371"/>
+            <a:off x="6836664" y="4905371"/>
             <a:ext cx="3456432" cy="475488"/>
           </a:xfrm>
           <a:prstGeom prst="rect">
@@ -16646,9 +16565,6 @@
           <a:bodyPr wrap="square" rtlCol="0" anchor="ctr"/>
           <a:lstStyle/>
           <a:p>
-            <a:pPr marL="0" indent="0">
-              <a:buNone/>
-            </a:pPr>
             <a:r>
               <a:rPr lang="en-US" sz="1250" dirty="0">
                 <a:solidFill>
@@ -16678,7 +16594,7 @@
         </p:nvSpPr>
         <p:spPr>
           <a:xfrm>
-            <a:off x="5312664" y="5426579"/>
+            <a:off x="6836664" y="5426579"/>
             <a:ext cx="3456432" cy="475488"/>
           </a:xfrm>
           <a:prstGeom prst="rect">
@@ -16691,9 +16607,6 @@
           <a:bodyPr wrap="square" rtlCol="0" anchor="ctr"/>
           <a:lstStyle/>
           <a:p>
-            <a:pPr marL="0" indent="0">
-              <a:buNone/>
-            </a:pPr>
             <a:r>
               <a:rPr lang="en-US" sz="1250" dirty="0">
                 <a:solidFill>
@@ -16723,7 +16636,7 @@
         </p:nvSpPr>
         <p:spPr>
           <a:xfrm>
-            <a:off x="5312664" y="5947787"/>
+            <a:off x="6836664" y="5947787"/>
             <a:ext cx="3456432" cy="475488"/>
           </a:xfrm>
           <a:prstGeom prst="rect">
@@ -16736,9 +16649,6 @@
           <a:bodyPr wrap="square" rtlCol="0" anchor="ctr"/>
           <a:lstStyle/>
           <a:p>
-            <a:pPr marL="0" indent="0">
-              <a:buNone/>
-            </a:pPr>
             <a:r>
               <a:rPr lang="en-US" sz="1250" dirty="0">
                 <a:solidFill>
@@ -16768,7 +16678,7 @@
         </p:nvSpPr>
         <p:spPr>
           <a:xfrm>
-            <a:off x="4928616" y="2719955"/>
+            <a:off x="6452616" y="2719955"/>
             <a:ext cx="3840480" cy="475488"/>
           </a:xfrm>
           <a:prstGeom prst="rect">
@@ -16783,9 +16693,7 @@
           <a:bodyPr wrap="square" rtlCol="0" anchor="ctr"/>
           <a:lstStyle/>
           <a:p>
-            <a:pPr marL="0" indent="0" algn="ctr">
-              <a:buNone/>
-            </a:pPr>
+            <a:pPr algn="ctr"/>
             <a:r>
               <a:rPr lang="en-US" dirty="0"/>
               <a:t>newtype  (wrapper)</a:t>
@@ -17988,7 +17896,7 @@
         </p:nvSpPr>
         <p:spPr>
           <a:xfrm>
-            <a:off x="433122" y="800211"/>
+            <a:off x="1957122" y="800211"/>
             <a:ext cx="7210396" cy="1080938"/>
           </a:xfrm>
         </p:spPr>
@@ -18060,7 +17968,7 @@
         </p:nvSpPr>
         <p:spPr>
           <a:xfrm>
-            <a:off x="638978" y="2434728"/>
+            <a:off x="2162979" y="2434728"/>
             <a:ext cx="8064347" cy="523220"/>
           </a:xfrm>
           <a:prstGeom prst="rect">
@@ -18097,7 +18005,7 @@
         </p:nvSpPr>
         <p:spPr bwMode="auto">
           <a:xfrm>
-            <a:off x="1269392" y="3049862"/>
+            <a:off x="2793392" y="3049863"/>
             <a:ext cx="3717684" cy="461665"/>
           </a:xfrm>
           <a:prstGeom prst="rect">
@@ -18144,7 +18052,7 @@
         </p:nvSpPr>
         <p:spPr>
           <a:xfrm>
-            <a:off x="638978" y="3638443"/>
+            <a:off x="2162979" y="3638443"/>
             <a:ext cx="8064347" cy="523220"/>
           </a:xfrm>
           <a:prstGeom prst="rect">
@@ -18181,7 +18089,7 @@
         </p:nvSpPr>
         <p:spPr bwMode="auto">
           <a:xfrm>
-            <a:off x="1269392" y="4288579"/>
+            <a:off x="2793392" y="4288580"/>
             <a:ext cx="7808548" cy="461665"/>
           </a:xfrm>
           <a:prstGeom prst="rect">
@@ -18230,7 +18138,7 @@
         </p:nvSpPr>
         <p:spPr bwMode="auto">
           <a:xfrm>
-            <a:off x="1269392" y="5504607"/>
+            <a:off x="2793392" y="5504608"/>
             <a:ext cx="7622600" cy="1200329"/>
           </a:xfrm>
           <a:prstGeom prst="rect">
@@ -18319,7 +18227,7 @@
         </p:nvSpPr>
         <p:spPr>
           <a:xfrm>
-            <a:off x="638978" y="4981387"/>
+            <a:off x="2162979" y="4981387"/>
             <a:ext cx="8516039" cy="523220"/>
           </a:xfrm>
           <a:prstGeom prst="rect">
@@ -18724,7 +18632,7 @@
         </p:nvSpPr>
         <p:spPr>
           <a:xfrm>
-            <a:off x="510241" y="2336873"/>
+            <a:off x="2034241" y="2336874"/>
             <a:ext cx="7210396" cy="2006527"/>
           </a:xfrm>
         </p:spPr>
@@ -19111,7 +19019,7 @@
         </p:nvSpPr>
         <p:spPr>
           <a:xfrm>
-            <a:off x="475458" y="2085519"/>
+            <a:off x="1999458" y="2085519"/>
             <a:ext cx="8193084" cy="2686962"/>
           </a:xfrm>
           <a:solidFill>
@@ -19387,7 +19295,7 @@
         </p:nvSpPr>
         <p:spPr>
           <a:xfrm>
-            <a:off x="80041" y="1994903"/>
+            <a:off x="1604041" y="1994903"/>
             <a:ext cx="3391128" cy="1530892"/>
           </a:xfrm>
           <a:solidFill>
@@ -19573,7 +19481,7 @@
         </p:nvSpPr>
         <p:spPr>
           <a:xfrm>
-            <a:off x="242686" y="3776719"/>
+            <a:off x="1766686" y="3776719"/>
             <a:ext cx="8046720" cy="347472"/>
           </a:xfrm>
           <a:prstGeom prst="rect">
@@ -19586,9 +19494,6 @@
           <a:bodyPr wrap="square" rtlCol="0" anchor="ctr"/>
           <a:lstStyle/>
           <a:p>
-            <a:pPr marL="0" indent="0">
-              <a:buNone/>
-            </a:pPr>
             <a:r>
               <a:rPr lang="en-US" sz="1250" b="1" dirty="0">
                 <a:latin typeface="Consolas" pitchFamily="34" charset="0"/>
@@ -19634,7 +19539,7 @@
         </p:nvSpPr>
         <p:spPr>
           <a:xfrm>
-            <a:off x="242686" y="4201379"/>
+            <a:off x="1766686" y="4201379"/>
             <a:ext cx="8046720" cy="347472"/>
           </a:xfrm>
           <a:prstGeom prst="rect">
@@ -19647,9 +19552,6 @@
           <a:bodyPr wrap="square" rtlCol="0" anchor="ctr"/>
           <a:lstStyle/>
           <a:p>
-            <a:pPr marL="0" indent="0">
-              <a:buNone/>
-            </a:pPr>
             <a:r>
               <a:rPr lang="en-US" sz="1250" b="1" dirty="0">
                 <a:solidFill>
@@ -19687,7 +19589,7 @@
         </p:nvSpPr>
         <p:spPr>
           <a:xfrm>
-            <a:off x="242686" y="4666512"/>
+            <a:off x="1766686" y="4666512"/>
             <a:ext cx="8720996" cy="347472"/>
           </a:xfrm>
           <a:prstGeom prst="rect">
@@ -19700,9 +19602,6 @@
           <a:bodyPr wrap="square" rtlCol="0" anchor="ctr"/>
           <a:lstStyle/>
           <a:p>
-            <a:pPr marL="0" indent="0">
-              <a:buNone/>
-            </a:pPr>
             <a:r>
               <a:rPr lang="en-US" sz="1250" b="1" dirty="0">
                 <a:solidFill>
@@ -19751,7 +19650,7 @@
         </p:nvSpPr>
         <p:spPr>
           <a:xfrm>
-            <a:off x="242686" y="5131645"/>
+            <a:off x="1766686" y="5131645"/>
             <a:ext cx="8046720" cy="347472"/>
           </a:xfrm>
           <a:prstGeom prst="rect">
@@ -19764,9 +19663,6 @@
           <a:bodyPr wrap="square" rtlCol="0" anchor="ctr"/>
           <a:lstStyle/>
           <a:p>
-            <a:pPr marL="0" indent="0">
-              <a:buNone/>
-            </a:pPr>
             <a:r>
               <a:rPr lang="en-US" sz="1250" b="1" dirty="0">
                 <a:solidFill>
@@ -19812,7 +19708,7 @@
         </p:nvSpPr>
         <p:spPr>
           <a:xfrm>
-            <a:off x="242686" y="5596778"/>
+            <a:off x="1766686" y="5596778"/>
             <a:ext cx="8046720" cy="347472"/>
           </a:xfrm>
           <a:prstGeom prst="rect">
@@ -19825,9 +19721,6 @@
           <a:bodyPr wrap="square" rtlCol="0" anchor="ctr"/>
           <a:lstStyle/>
           <a:p>
-            <a:pPr marL="0" indent="0">
-              <a:buNone/>
-            </a:pPr>
             <a:r>
               <a:rPr lang="en-US" sz="1250" b="1" dirty="0">
                 <a:solidFill>
@@ -19873,7 +19766,7 @@
         </p:nvSpPr>
         <p:spPr>
           <a:xfrm>
-            <a:off x="242686" y="6042064"/>
+            <a:off x="1766686" y="6042064"/>
             <a:ext cx="8046720" cy="347472"/>
           </a:xfrm>
           <a:prstGeom prst="rect">
@@ -19886,9 +19779,6 @@
           <a:bodyPr wrap="square" rtlCol="0" anchor="ctr"/>
           <a:lstStyle/>
           <a:p>
-            <a:pPr marL="0" indent="0">
-              <a:buNone/>
-            </a:pPr>
             <a:r>
               <a:rPr lang="en-US" sz="1250" b="1" dirty="0">
                 <a:solidFill>
@@ -20609,7 +20499,7 @@
         </p:nvSpPr>
         <p:spPr>
           <a:xfrm>
-            <a:off x="5394312" y="2152881"/>
+            <a:off x="6918312" y="2152881"/>
             <a:ext cx="3349638" cy="438912"/>
           </a:xfrm>
           <a:prstGeom prst="rect">
@@ -20624,9 +20514,6 @@
           <a:bodyPr wrap="square" rtlCol="0" anchor="ctr"/>
           <a:lstStyle/>
           <a:p>
-            <a:pPr marL="0" indent="0">
-              <a:buNone/>
-            </a:pPr>
             <a:r>
               <a:rPr lang="en-US" sz="1600" b="1" dirty="0">
                 <a:solidFill>
@@ -20678,7 +20565,7 @@
         </p:nvSpPr>
         <p:spPr>
           <a:xfrm>
-            <a:off x="294121" y="2767478"/>
+            <a:off x="1818121" y="2767478"/>
             <a:ext cx="2725862" cy="502920"/>
           </a:xfrm>
           <a:prstGeom prst="rect">
@@ -20698,9 +20585,6 @@
           <a:bodyPr/>
           <a:lstStyle/>
           <a:p>
-            <a:pPr marL="0" indent="0">
-              <a:buNone/>
-            </a:pPr>
             <a:r>
               <a:rPr lang="en-US" sz="1600" b="1" dirty="0" err="1">
                 <a:solidFill>
@@ -20778,7 +20662,7 @@
         </p:nvSpPr>
         <p:spPr>
           <a:xfrm>
-            <a:off x="294121" y="3639896"/>
+            <a:off x="1818122" y="3639896"/>
             <a:ext cx="2358843" cy="502920"/>
           </a:xfrm>
           <a:prstGeom prst="rect">
@@ -20793,9 +20677,6 @@
           <a:bodyPr wrap="square" rtlCol="0" anchor="ctr"/>
           <a:lstStyle/>
           <a:p>
-            <a:pPr marL="0" indent="0">
-              <a:buNone/>
-            </a:pPr>
             <a:r>
               <a:rPr lang="en-US" sz="1600" b="1" dirty="0">
                 <a:solidFill>
@@ -20823,7 +20704,7 @@
         </p:nvSpPr>
         <p:spPr>
           <a:xfrm>
-            <a:off x="294121" y="4512314"/>
+            <a:off x="1818122" y="4512315"/>
             <a:ext cx="3513381" cy="1235477"/>
           </a:xfrm>
           <a:prstGeom prst="rect">
@@ -20843,9 +20724,6 @@
           <a:bodyPr/>
           <a:lstStyle/>
           <a:p>
-            <a:pPr marL="0" indent="0">
-              <a:buNone/>
-            </a:pPr>
             <a:r>
               <a:rPr lang="en-US" sz="1400" dirty="0">
                 <a:solidFill>
@@ -20882,9 +20760,6 @@
             <a:endParaRPr lang="en-US" sz="1400" dirty="0"/>
           </a:p>
           <a:p>
-            <a:pPr marL="0" indent="0">
-              <a:buNone/>
-            </a:pPr>
             <a:r>
               <a:rPr lang="en-US" sz="1400" dirty="0">
                 <a:solidFill>
@@ -20899,15 +20774,9 @@
             <a:endParaRPr lang="en-US" sz="1400" dirty="0"/>
           </a:p>
           <a:p>
-            <a:pPr marL="0" indent="0">
-              <a:buNone/>
-            </a:pPr>
             <a:endParaRPr lang="en-US" sz="1400" dirty="0"/>
           </a:p>
           <a:p>
-            <a:pPr marL="0" indent="0">
-              <a:buNone/>
-            </a:pPr>
             <a:r>
               <a:rPr lang="en-US" sz="1400" dirty="0">
                 <a:solidFill>
@@ -20944,9 +20813,6 @@
             <a:endParaRPr lang="en-US" sz="1400" dirty="0"/>
           </a:p>
           <a:p>
-            <a:pPr marL="0" indent="0">
-              <a:buNone/>
-            </a:pPr>
             <a:r>
               <a:rPr lang="en-US" sz="1400" dirty="0">
                 <a:solidFill>
@@ -20998,7 +20864,7 @@
         </p:nvSpPr>
         <p:spPr>
           <a:xfrm>
-            <a:off x="294121" y="2187952"/>
+            <a:off x="1818122" y="2187952"/>
             <a:ext cx="3138627" cy="438912"/>
           </a:xfrm>
           <a:prstGeom prst="rect">
@@ -21018,9 +20884,6 @@
           <a:bodyPr/>
           <a:lstStyle/>
           <a:p>
-            <a:pPr marL="0" indent="0">
-              <a:buNone/>
-            </a:pPr>
             <a:r>
               <a:rPr lang="en-US" sz="1600" b="1" dirty="0">
                 <a:solidFill>
@@ -21068,7 +20931,7 @@
         </p:nvSpPr>
         <p:spPr>
           <a:xfrm>
-            <a:off x="5394312" y="2790335"/>
+            <a:off x="6918312" y="2790335"/>
             <a:ext cx="3463136" cy="502920"/>
           </a:xfrm>
           <a:prstGeom prst="rect">
@@ -21088,9 +20951,6 @@
           <a:bodyPr/>
           <a:lstStyle/>
           <a:p>
-            <a:pPr marL="0" indent="0">
-              <a:buNone/>
-            </a:pPr>
             <a:r>
               <a:rPr lang="en-US" sz="1600" b="1" dirty="0">
                 <a:solidFill>
@@ -21175,7 +21035,7 @@
         </p:nvSpPr>
         <p:spPr>
           <a:xfrm>
-            <a:off x="5511372" y="3639896"/>
+            <a:off x="7035372" y="3639896"/>
             <a:ext cx="2968526" cy="502920"/>
           </a:xfrm>
           <a:prstGeom prst="rect">
@@ -21217,7 +21077,7 @@
         </p:nvSpPr>
         <p:spPr>
           <a:xfrm>
-            <a:off x="5482466" y="4515496"/>
+            <a:off x="7006466" y="4515497"/>
             <a:ext cx="3026338" cy="1235477"/>
           </a:xfrm>
           <a:prstGeom prst="rect">
@@ -21329,7 +21189,7 @@
         </p:nvSpPr>
         <p:spPr>
           <a:xfrm>
-            <a:off x="343050" y="6028266"/>
+            <a:off x="1867050" y="6028266"/>
             <a:ext cx="8229600" cy="594360"/>
           </a:xfrm>
           <a:prstGeom prst="rect">
@@ -21344,9 +21204,6 @@
           <a:bodyPr wrap="square" rtlCol="0" anchor="ctr"/>
           <a:lstStyle/>
           <a:p>
-            <a:pPr marL="0" indent="0">
-              <a:buNone/>
-            </a:pPr>
             <a:r>
               <a:rPr lang="en-US" sz="1800" dirty="0">
                 <a:solidFill>
@@ -22270,7 +22127,7 @@
         </p:nvSpPr>
         <p:spPr>
           <a:xfrm>
-            <a:off x="0" y="753228"/>
+            <a:off x="1524000" y="753228"/>
             <a:ext cx="8047092" cy="1080938"/>
           </a:xfrm>
         </p:spPr>
@@ -22343,7 +22200,7 @@
         </p:nvSpPr>
         <p:spPr>
           <a:xfrm>
-            <a:off x="2236483" y="1992254"/>
+            <a:off x="3760483" y="1992254"/>
             <a:ext cx="4663440" cy="384048"/>
           </a:xfrm>
           <a:prstGeom prst="rect">
@@ -22356,9 +22213,6 @@
           <a:bodyPr wrap="square" rtlCol="0" anchor="ctr"/>
           <a:lstStyle/>
           <a:p>
-            <a:pPr marL="0" indent="0">
-              <a:buNone/>
-            </a:pPr>
             <a:r>
               <a:rPr lang="en-US" sz="1500" dirty="0">
                 <a:solidFill>
@@ -22388,7 +22242,7 @@
         </p:nvSpPr>
         <p:spPr>
           <a:xfrm>
-            <a:off x="356334" y="3132528"/>
+            <a:off x="1880334" y="3132528"/>
             <a:ext cx="3794760" cy="1188720"/>
           </a:xfrm>
           <a:prstGeom prst="rect">
@@ -22426,7 +22280,7 @@
         </p:nvSpPr>
         <p:spPr>
           <a:xfrm>
-            <a:off x="424914" y="3153180"/>
+            <a:off x="1948914" y="3153180"/>
             <a:ext cx="3474720" cy="411480"/>
           </a:xfrm>
           <a:prstGeom prst="rect">
@@ -22439,9 +22293,6 @@
           <a:bodyPr wrap="square" rtlCol="0" anchor="ctr"/>
           <a:lstStyle/>
           <a:p>
-            <a:pPr marL="0" indent="0">
-              <a:buNone/>
-            </a:pPr>
             <a:r>
               <a:rPr lang="en-US" sz="2000" b="1" dirty="0">
                 <a:solidFill>
@@ -22471,7 +22322,7 @@
         </p:nvSpPr>
         <p:spPr>
           <a:xfrm>
-            <a:off x="424914" y="3524219"/>
+            <a:off x="1948914" y="3524219"/>
             <a:ext cx="3474720" cy="621792"/>
           </a:xfrm>
           <a:prstGeom prst="rect">
@@ -22484,9 +22335,6 @@
           <a:bodyPr wrap="square" rtlCol="0" anchor="ctr"/>
           <a:lstStyle/>
           <a:p>
-            <a:pPr marL="0" indent="0">
-              <a:buNone/>
-            </a:pPr>
             <a:r>
               <a:rPr lang="en-US" sz="1250" dirty="0">
                 <a:solidFill>
@@ -22516,7 +22364,7 @@
         </p:nvSpPr>
         <p:spPr>
           <a:xfrm>
-            <a:off x="4992908" y="3132528"/>
+            <a:off x="6516908" y="3132528"/>
             <a:ext cx="3794760" cy="1188720"/>
           </a:xfrm>
           <a:prstGeom prst="rect">
@@ -22554,7 +22402,7 @@
         </p:nvSpPr>
         <p:spPr>
           <a:xfrm>
-            <a:off x="5221508" y="3223968"/>
+            <a:off x="6745508" y="3223968"/>
             <a:ext cx="3474720" cy="411480"/>
           </a:xfrm>
           <a:prstGeom prst="rect">
@@ -22567,9 +22415,6 @@
           <a:bodyPr wrap="square" rtlCol="0" anchor="ctr"/>
           <a:lstStyle/>
           <a:p>
-            <a:pPr marL="0" indent="0">
-              <a:buNone/>
-            </a:pPr>
             <a:r>
               <a:rPr lang="en-US" sz="2000" b="1" dirty="0">
                 <a:solidFill>
@@ -22599,7 +22444,7 @@
         </p:nvSpPr>
         <p:spPr>
           <a:xfrm>
-            <a:off x="5221508" y="3635448"/>
+            <a:off x="6745508" y="3635448"/>
             <a:ext cx="3474720" cy="621792"/>
           </a:xfrm>
           <a:prstGeom prst="rect">
@@ -22612,9 +22457,6 @@
           <a:bodyPr wrap="square" rtlCol="0" anchor="ctr"/>
           <a:lstStyle/>
           <a:p>
-            <a:pPr marL="0" indent="0">
-              <a:buNone/>
-            </a:pPr>
             <a:r>
               <a:rPr lang="en-US" sz="1250" dirty="0">
                 <a:solidFill>
@@ -22644,7 +22486,7 @@
         </p:nvSpPr>
         <p:spPr>
           <a:xfrm rot="19522172">
-            <a:off x="3076360" y="2474227"/>
+            <a:off x="4600360" y="2474228"/>
             <a:ext cx="1189822" cy="465947"/>
           </a:xfrm>
           <a:prstGeom prst="leftArrow">
@@ -22693,7 +22535,7 @@
         </p:nvSpPr>
         <p:spPr>
           <a:xfrm rot="13377505">
-            <a:off x="4695085" y="2515669"/>
+            <a:off x="6219085" y="2515670"/>
             <a:ext cx="1042414" cy="465947"/>
           </a:xfrm>
           <a:prstGeom prst="leftArrow">
@@ -22742,7 +22584,7 @@
         </p:nvSpPr>
         <p:spPr>
           <a:xfrm>
-            <a:off x="4128234" y="2599457"/>
+            <a:off x="5652235" y="2599457"/>
             <a:ext cx="858771" cy="523220"/>
           </a:xfrm>
           <a:prstGeom prst="rect">
@@ -22777,7 +22619,7 @@
         </p:nvSpPr>
         <p:spPr>
           <a:xfrm>
-            <a:off x="216650" y="4481551"/>
+            <a:off x="1740650" y="4481552"/>
             <a:ext cx="8918866" cy="2431435"/>
           </a:xfrm>
           <a:prstGeom prst="rect">

--- a/topic13-parsing/unit-13a-lectures/talk-1/a-parsers.pptx
+++ b/topic13-parsing/unit-13a-lectures/talk-1/a-parsers.pptx
@@ -580,14 +580,14 @@
           </a:ln>
           <a:extLst>
             <a:ext uri="{909E8E84-426E-40dd-AFC4-6F175D3DCCD1}">
-              <a14:hiddenFill xmlns="" xmlns:a14="http://schemas.microsoft.com/office/drawing/2010/main">
+              <a14:hiddenFill xmlns:a14="http://schemas.microsoft.com/office/drawing/2010/main" xmlns="">
                 <a:solidFill>
                   <a:srgbClr val="FFFFFF"/>
                 </a:solidFill>
               </a14:hiddenFill>
             </a:ext>
             <a:ext uri="{FAA26D3D-D897-4be2-8F04-BA451C77F1D7}">
-              <ma14:placeholderFlag xmlns="" xmlns:ma14="http://schemas.microsoft.com/office/mac/drawingml/2011/main" val="1"/>
+              <ma14:placeholderFlag xmlns:ma14="http://schemas.microsoft.com/office/mac/drawingml/2011/main" xmlns="" val="1"/>
             </a:ext>
           </a:extLst>
         </p:spPr>
@@ -1179,7 +1179,7 @@
               <a:pPr>
                 <a:defRPr/>
               </a:pPr>
-              <a:t>4/3/26</a:t>
+              <a:t>4/13/26</a:t>
             </a:fld>
             <a:endParaRPr lang="en-US" altLang="en-US"/>
           </a:p>
@@ -1609,7 +1609,7 @@
               <a:pPr>
                 <a:defRPr/>
               </a:pPr>
-              <a:t>4/3/26</a:t>
+              <a:t>4/13/26</a:t>
             </a:fld>
             <a:endParaRPr lang="en-US" altLang="en-US"/>
           </a:p>
@@ -1961,7 +1961,7 @@
               <a:pPr>
                 <a:defRPr/>
               </a:pPr>
-              <a:t>4/3/26</a:t>
+              <a:t>4/13/26</a:t>
             </a:fld>
             <a:endParaRPr lang="en-US" altLang="en-US"/>
           </a:p>
@@ -2382,7 +2382,7 @@
               <a:pPr>
                 <a:defRPr/>
               </a:pPr>
-              <a:t>4/3/26</a:t>
+              <a:t>4/13/26</a:t>
             </a:fld>
             <a:endParaRPr lang="en-US" altLang="en-US"/>
           </a:p>
@@ -2966,7 +2966,7 @@
               <a:pPr>
                 <a:defRPr/>
               </a:pPr>
-              <a:t>4/3/26</a:t>
+              <a:t>4/13/26</a:t>
             </a:fld>
             <a:endParaRPr lang="en-US" altLang="en-US"/>
           </a:p>
@@ -3663,7 +3663,7 @@
               <a:pPr>
                 <a:defRPr/>
               </a:pPr>
-              <a:t>4/3/26</a:t>
+              <a:t>4/13/26</a:t>
             </a:fld>
             <a:endParaRPr lang="en-US" altLang="en-US"/>
           </a:p>
@@ -4592,7 +4592,7 @@
               <a:pPr>
                 <a:defRPr/>
               </a:pPr>
-              <a:t>4/3/26</a:t>
+              <a:t>4/13/26</a:t>
             </a:fld>
             <a:endParaRPr lang="en-US" altLang="en-US"/>
           </a:p>
@@ -4921,7 +4921,7 @@
               <a:pPr>
                 <a:defRPr/>
               </a:pPr>
-              <a:t>4/3/26</a:t>
+              <a:t>4/13/26</a:t>
             </a:fld>
             <a:endParaRPr lang="en-US" altLang="en-US"/>
           </a:p>
@@ -5203,7 +5203,7 @@
               <a:pPr>
                 <a:defRPr/>
               </a:pPr>
-              <a:t>4/3/26</a:t>
+              <a:t>4/13/26</a:t>
             </a:fld>
             <a:endParaRPr lang="en-US" altLang="en-US"/>
           </a:p>
@@ -5558,7 +5558,7 @@
               <a:pPr>
                 <a:defRPr/>
               </a:pPr>
-              <a:t>4/3/26</a:t>
+              <a:t>4/13/26</a:t>
             </a:fld>
             <a:endParaRPr lang="en-US" altLang="en-US"/>
           </a:p>
@@ -5962,7 +5962,7 @@
               <a:pPr>
                 <a:defRPr/>
               </a:pPr>
-              <a:t>4/3/26</a:t>
+              <a:t>4/13/26</a:t>
             </a:fld>
             <a:endParaRPr lang="en-US" altLang="en-US"/>
           </a:p>
@@ -6353,7 +6353,7 @@
               <a:pPr>
                 <a:defRPr/>
               </a:pPr>
-              <a:t>4/3/26</a:t>
+              <a:t>4/13/26</a:t>
             </a:fld>
             <a:endParaRPr lang="en-US" altLang="en-US"/>
           </a:p>
@@ -6874,7 +6874,7 @@
               <a:pPr>
                 <a:defRPr/>
               </a:pPr>
-              <a:t>4/3/26</a:t>
+              <a:t>4/13/26</a:t>
             </a:fld>
             <a:endParaRPr lang="en-US" altLang="en-US"/>
           </a:p>
@@ -7160,7 +7160,7 @@
               <a:pPr>
                 <a:defRPr/>
               </a:pPr>
-              <a:t>4/3/26</a:t>
+              <a:t>4/13/26</a:t>
             </a:fld>
             <a:endParaRPr lang="en-US" altLang="en-US"/>
           </a:p>
@@ -7345,7 +7345,7 @@
               <a:pPr>
                 <a:defRPr/>
               </a:pPr>
-              <a:t>4/3/26</a:t>
+              <a:t>4/13/26</a:t>
             </a:fld>
             <a:endParaRPr lang="en-US" altLang="en-US"/>
           </a:p>
@@ -7750,7 +7750,7 @@
               <a:pPr>
                 <a:defRPr/>
               </a:pPr>
-              <a:t>4/3/26</a:t>
+              <a:t>4/13/26</a:t>
             </a:fld>
             <a:endParaRPr lang="en-US" altLang="en-US"/>
           </a:p>
@@ -8177,7 +8177,7 @@
               <a:pPr>
                 <a:defRPr/>
               </a:pPr>
-              <a:t>4/3/26</a:t>
+              <a:t>4/13/26</a:t>
             </a:fld>
             <a:endParaRPr lang="en-US" altLang="en-US"/>
           </a:p>
@@ -8439,7 +8439,7 @@
               <a:pPr>
                 <a:defRPr/>
               </a:pPr>
-              <a:t>4/3/26</a:t>
+              <a:t>4/13/26</a:t>
             </a:fld>
             <a:endParaRPr lang="en-US" altLang="en-US"/>
           </a:p>
@@ -8880,14 +8880,14 @@
           <a:ln/>
           <a:extLst>
             <a:ext uri="{909E8E84-426E-40dd-AFC4-6F175D3DCCD1}">
-              <a14:hiddenFill xmlns="" xmlns:a14="http://schemas.microsoft.com/office/drawing/2010/main">
+              <a14:hiddenFill xmlns:a14="http://schemas.microsoft.com/office/drawing/2010/main" xmlns="">
                 <a:solidFill>
                   <a:srgbClr val="FFFFFF"/>
                 </a:solidFill>
               </a14:hiddenFill>
             </a:ext>
             <a:ext uri="{91240B29-F687-4f45-9708-019B960494DF}">
-              <a14:hiddenLine xmlns="" xmlns:a14="http://schemas.microsoft.com/office/drawing/2010/main" w="9525">
+              <a14:hiddenLine xmlns:a14="http://schemas.microsoft.com/office/drawing/2010/main" xmlns="" w="9525">
                 <a:solidFill>
                   <a:srgbClr val="000000"/>
                 </a:solidFill>
@@ -9040,14 +9040,14 @@
           </a:ln>
           <a:extLst>
             <a:ext uri="{909E8E84-426E-40dd-AFC4-6F175D3DCCD1}">
-              <a14:hiddenFill xmlns="" xmlns:a14="http://schemas.microsoft.com/office/drawing/2010/main">
+              <a14:hiddenFill xmlns:a14="http://schemas.microsoft.com/office/drawing/2010/main" xmlns="">
                 <a:solidFill>
                   <a:srgbClr val="FFFFFF"/>
                 </a:solidFill>
               </a14:hiddenFill>
             </a:ext>
             <a:ext uri="{91240B29-F687-4f45-9708-019B960494DF}">
-              <a14:hiddenLine xmlns="" xmlns:a14="http://schemas.microsoft.com/office/drawing/2010/main" w="9525">
+              <a14:hiddenLine xmlns:a14="http://schemas.microsoft.com/office/drawing/2010/main" xmlns="" w="9525">
                 <a:solidFill>
                   <a:srgbClr val="000000"/>
                 </a:solidFill>
@@ -9206,14 +9206,14 @@
           </a:ln>
           <a:extLst>
             <a:ext uri="{909E8E84-426E-40dd-AFC4-6F175D3DCCD1}">
-              <a14:hiddenFill xmlns="" xmlns:a14="http://schemas.microsoft.com/office/drawing/2010/main">
+              <a14:hiddenFill xmlns:a14="http://schemas.microsoft.com/office/drawing/2010/main" xmlns="">
                 <a:solidFill>
                   <a:srgbClr val="FFFFFF"/>
                 </a:solidFill>
               </a14:hiddenFill>
             </a:ext>
             <a:ext uri="{91240B29-F687-4f45-9708-019B960494DF}">
-              <a14:hiddenLine xmlns="" xmlns:a14="http://schemas.microsoft.com/office/drawing/2010/main" w="9525">
+              <a14:hiddenLine xmlns:a14="http://schemas.microsoft.com/office/drawing/2010/main" xmlns="" w="9525">
                 <a:solidFill>
                   <a:srgbClr val="000000"/>
                 </a:solidFill>
@@ -9275,14 +9275,14 @@
           </a:ln>
           <a:extLst>
             <a:ext uri="{909E8E84-426E-40dd-AFC4-6F175D3DCCD1}">
-              <a14:hiddenFill xmlns="" xmlns:a14="http://schemas.microsoft.com/office/drawing/2010/main">
+              <a14:hiddenFill xmlns:a14="http://schemas.microsoft.com/office/drawing/2010/main" xmlns="">
                 <a:solidFill>
                   <a:srgbClr val="FFFFFF"/>
                 </a:solidFill>
               </a14:hiddenFill>
             </a:ext>
             <a:ext uri="{91240B29-F687-4f45-9708-019B960494DF}">
-              <a14:hiddenLine xmlns="" xmlns:a14="http://schemas.microsoft.com/office/drawing/2010/main" w="9525">
+              <a14:hiddenLine xmlns:a14="http://schemas.microsoft.com/office/drawing/2010/main" xmlns="" w="9525">
                 <a:solidFill>
                   <a:srgbClr val="000000"/>
                 </a:solidFill>
@@ -12980,14 +12980,14 @@
         <p:spPr>
           <a:extLst>
             <a:ext uri="{909E8E84-426E-40dd-AFC4-6F175D3DCCD1}">
-              <a14:hiddenFill xmlns:a14="http://schemas.microsoft.com/office/drawing/2010/main" xmlns="">
+              <a14:hiddenFill xmlns="" xmlns:a14="http://schemas.microsoft.com/office/drawing/2010/main">
                 <a:solidFill>
                   <a:srgbClr val="FFFFFF"/>
                 </a:solidFill>
               </a14:hiddenFill>
             </a:ext>
             <a:ext uri="{91240B29-F687-4f45-9708-019B960494DF}">
-              <a14:hiddenLine xmlns:a14="http://schemas.microsoft.com/office/drawing/2010/main" xmlns="" w="9525">
+              <a14:hiddenLine xmlns="" xmlns:a14="http://schemas.microsoft.com/office/drawing/2010/main" w="9525">
                 <a:solidFill>
                   <a:srgbClr val="000000"/>
                 </a:solidFill>
@@ -13278,14 +13278,14 @@
           <a:ln/>
           <a:extLst>
             <a:ext uri="{909E8E84-426E-40dd-AFC4-6F175D3DCCD1}">
-              <a14:hiddenFill xmlns="" xmlns:a14="http://schemas.microsoft.com/office/drawing/2010/main">
+              <a14:hiddenFill xmlns:a14="http://schemas.microsoft.com/office/drawing/2010/main" xmlns="">
                 <a:solidFill>
                   <a:srgbClr val="FFFFFF"/>
                 </a:solidFill>
               </a14:hiddenFill>
             </a:ext>
             <a:ext uri="{91240B29-F687-4f45-9708-019B960494DF}">
-              <a14:hiddenLine xmlns="" xmlns:a14="http://schemas.microsoft.com/office/drawing/2010/main" w="9525">
+              <a14:hiddenLine xmlns:a14="http://schemas.microsoft.com/office/drawing/2010/main" xmlns="" w="9525">
                 <a:solidFill>
                   <a:srgbClr val="000000"/>
                 </a:solidFill>
@@ -19037,6 +19037,9 @@
             </a:pPr>
             <a:r>
               <a:rPr lang="en-US" sz="2800" dirty="0" err="1">
+                <a:solidFill>
+                  <a:schemeClr val="bg1"/>
+                </a:solidFill>
                 <a:ea typeface="Consolas" pitchFamily="34" charset="-122"/>
                 <a:cs typeface="Consolas" pitchFamily="34" charset="-120"/>
               </a:rPr>
@@ -19044,12 +19047,19 @@
             </a:r>
             <a:r>
               <a:rPr lang="en-US" sz="2800" dirty="0">
+                <a:solidFill>
+                  <a:schemeClr val="bg1"/>
+                </a:solidFill>
                 <a:ea typeface="Consolas" pitchFamily="34" charset="-122"/>
                 <a:cs typeface="Consolas" pitchFamily="34" charset="-120"/>
               </a:rPr>
               <a:t> :: Char -&gt; Parser Char</a:t>
             </a:r>
-            <a:endParaRPr lang="en-US" sz="2800" dirty="0"/>
+            <a:endParaRPr lang="en-US" sz="2800" dirty="0">
+              <a:solidFill>
+                <a:schemeClr val="bg1"/>
+              </a:solidFill>
+            </a:endParaRPr>
           </a:p>
           <a:p>
             <a:pPr marL="0" indent="0">
@@ -19057,6 +19067,9 @@
             </a:pPr>
             <a:r>
               <a:rPr lang="en-US" sz="2800" dirty="0" err="1">
+                <a:solidFill>
+                  <a:schemeClr val="bg1"/>
+                </a:solidFill>
                 <a:ea typeface="Consolas" pitchFamily="34" charset="-122"/>
                 <a:cs typeface="Consolas" pitchFamily="34" charset="-120"/>
               </a:rPr>
@@ -19064,12 +19077,19 @@
             </a:r>
             <a:r>
               <a:rPr lang="en-US" sz="2800" dirty="0">
+                <a:solidFill>
+                  <a:schemeClr val="bg1"/>
+                </a:solidFill>
                 <a:ea typeface="Consolas" pitchFamily="34" charset="-122"/>
                 <a:cs typeface="Consolas" pitchFamily="34" charset="-120"/>
               </a:rPr>
               <a:t> c =</a:t>
             </a:r>
-            <a:endParaRPr lang="en-US" sz="2800" dirty="0"/>
+            <a:endParaRPr lang="en-US" sz="2800" dirty="0">
+              <a:solidFill>
+                <a:schemeClr val="bg1"/>
+              </a:solidFill>
+            </a:endParaRPr>
           </a:p>
           <a:p>
             <a:pPr marL="0" indent="0">
@@ -19077,12 +19097,19 @@
             </a:pPr>
             <a:r>
               <a:rPr lang="en-US" sz="2800" dirty="0">
+                <a:solidFill>
+                  <a:schemeClr val="bg1"/>
+                </a:solidFill>
                 <a:ea typeface="Consolas" pitchFamily="34" charset="-122"/>
                 <a:cs typeface="Consolas" pitchFamily="34" charset="-120"/>
               </a:rPr>
               <a:t>    Parser $ \input -&gt;</a:t>
             </a:r>
-            <a:endParaRPr lang="en-US" sz="2800" dirty="0"/>
+            <a:endParaRPr lang="en-US" sz="2800" dirty="0">
+              <a:solidFill>
+                <a:schemeClr val="bg1"/>
+              </a:solidFill>
+            </a:endParaRPr>
           </a:p>
           <a:p>
             <a:pPr marL="0" indent="0">
@@ -19090,12 +19117,19 @@
             </a:pPr>
             <a:r>
               <a:rPr lang="en-US" sz="2800" dirty="0">
+                <a:solidFill>
+                  <a:schemeClr val="bg1"/>
+                </a:solidFill>
                 <a:ea typeface="Consolas" pitchFamily="34" charset="-122"/>
                 <a:cs typeface="Consolas" pitchFamily="34" charset="-120"/>
               </a:rPr>
               <a:t>       case input of</a:t>
             </a:r>
-            <a:endParaRPr lang="en-US" sz="2800" dirty="0"/>
+            <a:endParaRPr lang="en-US" sz="2800" dirty="0">
+              <a:solidFill>
+                <a:schemeClr val="bg1"/>
+              </a:solidFill>
+            </a:endParaRPr>
           </a:p>
           <a:p>
             <a:pPr marL="0" indent="0">
@@ -19103,6 +19137,9 @@
             </a:pPr>
             <a:r>
               <a:rPr lang="en-US" sz="2800" dirty="0">
+                <a:solidFill>
+                  <a:schemeClr val="bg1"/>
+                </a:solidFill>
                 <a:ea typeface="Consolas" pitchFamily="34" charset="-122"/>
                 <a:cs typeface="Consolas" pitchFamily="34" charset="-120"/>
               </a:rPr>
@@ -19110,6 +19147,9 @@
             </a:r>
             <a:r>
               <a:rPr lang="en-US" sz="2800" dirty="0" err="1">
+                <a:solidFill>
+                  <a:schemeClr val="bg1"/>
+                </a:solidFill>
                 <a:ea typeface="Consolas" pitchFamily="34" charset="-122"/>
                 <a:cs typeface="Consolas" pitchFamily="34" charset="-120"/>
               </a:rPr>
@@ -19117,6 +19157,9 @@
             </a:r>
             <a:r>
               <a:rPr lang="en-US" sz="2800" dirty="0">
+                <a:solidFill>
+                  <a:schemeClr val="bg1"/>
+                </a:solidFill>
                 <a:ea typeface="Consolas" pitchFamily="34" charset="-122"/>
                 <a:cs typeface="Consolas" pitchFamily="34" charset="-120"/>
               </a:rPr>
@@ -19124,6 +19167,9 @@
             </a:r>
             <a:r>
               <a:rPr lang="en-US" sz="2800" dirty="0" err="1">
+                <a:solidFill>
+                  <a:schemeClr val="bg1"/>
+                </a:solidFill>
                 <a:ea typeface="Consolas" pitchFamily="34" charset="-122"/>
                 <a:cs typeface="Consolas" pitchFamily="34" charset="-120"/>
               </a:rPr>
@@ -19131,12 +19177,19 @@
             </a:r>
             <a:r>
               <a:rPr lang="en-US" sz="2800" dirty="0">
+                <a:solidFill>
+                  <a:schemeClr val="bg1"/>
+                </a:solidFill>
                 <a:ea typeface="Consolas" pitchFamily="34" charset="-122"/>
                 <a:cs typeface="Consolas" pitchFamily="34" charset="-120"/>
               </a:rPr>
               <a:t>, x)</a:t>
             </a:r>
-            <a:endParaRPr lang="en-US" sz="2800" dirty="0"/>
+            <a:endParaRPr lang="en-US" sz="2800" dirty="0">
+              <a:solidFill>
+                <a:schemeClr val="bg1"/>
+              </a:solidFill>
+            </a:endParaRPr>
           </a:p>
           <a:p>
             <a:pPr marL="0" indent="0">
@@ -19144,15 +19197,26 @@
             </a:pPr>
             <a:r>
               <a:rPr lang="en-US" sz="2800" dirty="0">
+                <a:solidFill>
+                  <a:schemeClr val="bg1"/>
+                </a:solidFill>
                 <a:ea typeface="Consolas" pitchFamily="34" charset="-122"/>
                 <a:cs typeface="Consolas" pitchFamily="34" charset="-120"/>
               </a:rPr>
               <a:t>           _                     -&gt;  Left "character not found"</a:t>
             </a:r>
-            <a:endParaRPr lang="en-US" sz="2800" dirty="0"/>
-          </a:p>
-          <a:p>
-            <a:endParaRPr lang="en-US" dirty="0"/>
+            <a:endParaRPr lang="en-US" sz="2800" dirty="0">
+              <a:solidFill>
+                <a:schemeClr val="bg1"/>
+              </a:solidFill>
+            </a:endParaRPr>
+          </a:p>
+          <a:p>
+            <a:endParaRPr lang="en-US" dirty="0">
+              <a:solidFill>
+                <a:schemeClr val="bg1"/>
+              </a:solidFill>
+            </a:endParaRPr>
           </a:p>
         </p:txBody>
       </p:sp>
@@ -19313,6 +19377,9 @@
             </a:pPr>
             <a:r>
               <a:rPr lang="en-US" sz="1000" dirty="0" err="1">
+                <a:solidFill>
+                  <a:schemeClr val="bg1"/>
+                </a:solidFill>
                 <a:ea typeface="Consolas" pitchFamily="34" charset="-122"/>
                 <a:cs typeface="Consolas" pitchFamily="34" charset="-120"/>
               </a:rPr>
@@ -19320,12 +19387,19 @@
             </a:r>
             <a:r>
               <a:rPr lang="en-US" sz="1000" dirty="0">
+                <a:solidFill>
+                  <a:schemeClr val="bg1"/>
+                </a:solidFill>
                 <a:ea typeface="Consolas" pitchFamily="34" charset="-122"/>
                 <a:cs typeface="Consolas" pitchFamily="34" charset="-120"/>
               </a:rPr>
               <a:t> :: Char -&gt; Parser Char</a:t>
             </a:r>
-            <a:endParaRPr lang="en-US" sz="1000" dirty="0"/>
+            <a:endParaRPr lang="en-US" sz="1000" dirty="0">
+              <a:solidFill>
+                <a:schemeClr val="bg1"/>
+              </a:solidFill>
+            </a:endParaRPr>
           </a:p>
           <a:p>
             <a:pPr marL="0" indent="0">
@@ -19333,6 +19407,9 @@
             </a:pPr>
             <a:r>
               <a:rPr lang="en-US" sz="1000" dirty="0" err="1">
+                <a:solidFill>
+                  <a:schemeClr val="bg1"/>
+                </a:solidFill>
                 <a:ea typeface="Consolas" pitchFamily="34" charset="-122"/>
                 <a:cs typeface="Consolas" pitchFamily="34" charset="-120"/>
               </a:rPr>
@@ -19340,12 +19417,19 @@
             </a:r>
             <a:r>
               <a:rPr lang="en-US" sz="1000" dirty="0">
+                <a:solidFill>
+                  <a:schemeClr val="bg1"/>
+                </a:solidFill>
                 <a:ea typeface="Consolas" pitchFamily="34" charset="-122"/>
                 <a:cs typeface="Consolas" pitchFamily="34" charset="-120"/>
               </a:rPr>
               <a:t> c =</a:t>
             </a:r>
-            <a:endParaRPr lang="en-US" sz="1000" dirty="0"/>
+            <a:endParaRPr lang="en-US" sz="1000" dirty="0">
+              <a:solidFill>
+                <a:schemeClr val="bg1"/>
+              </a:solidFill>
+            </a:endParaRPr>
           </a:p>
           <a:p>
             <a:pPr marL="0" indent="0">
@@ -19353,12 +19437,19 @@
             </a:pPr>
             <a:r>
               <a:rPr lang="en-US" sz="1000" dirty="0">
+                <a:solidFill>
+                  <a:schemeClr val="bg1"/>
+                </a:solidFill>
                 <a:ea typeface="Consolas" pitchFamily="34" charset="-122"/>
                 <a:cs typeface="Consolas" pitchFamily="34" charset="-120"/>
               </a:rPr>
               <a:t>    Parser $ \input -&gt;</a:t>
             </a:r>
-            <a:endParaRPr lang="en-US" sz="1000" dirty="0"/>
+            <a:endParaRPr lang="en-US" sz="1000" dirty="0">
+              <a:solidFill>
+                <a:schemeClr val="bg1"/>
+              </a:solidFill>
+            </a:endParaRPr>
           </a:p>
           <a:p>
             <a:pPr marL="0" indent="0">
@@ -19366,12 +19457,19 @@
             </a:pPr>
             <a:r>
               <a:rPr lang="en-US" sz="1000" dirty="0">
+                <a:solidFill>
+                  <a:schemeClr val="bg1"/>
+                </a:solidFill>
                 <a:ea typeface="Consolas" pitchFamily="34" charset="-122"/>
                 <a:cs typeface="Consolas" pitchFamily="34" charset="-120"/>
               </a:rPr>
               <a:t>       case input of</a:t>
             </a:r>
-            <a:endParaRPr lang="en-US" sz="1000" dirty="0"/>
+            <a:endParaRPr lang="en-US" sz="1000" dirty="0">
+              <a:solidFill>
+                <a:schemeClr val="bg1"/>
+              </a:solidFill>
+            </a:endParaRPr>
           </a:p>
           <a:p>
             <a:pPr marL="0" indent="0">
@@ -19379,6 +19477,9 @@
             </a:pPr>
             <a:r>
               <a:rPr lang="en-US" sz="1000" dirty="0">
+                <a:solidFill>
+                  <a:schemeClr val="bg1"/>
+                </a:solidFill>
                 <a:ea typeface="Consolas" pitchFamily="34" charset="-122"/>
                 <a:cs typeface="Consolas" pitchFamily="34" charset="-120"/>
               </a:rPr>
@@ -19386,6 +19487,9 @@
             </a:r>
             <a:r>
               <a:rPr lang="en-US" sz="1000" dirty="0" err="1">
+                <a:solidFill>
+                  <a:schemeClr val="bg1"/>
+                </a:solidFill>
                 <a:ea typeface="Consolas" pitchFamily="34" charset="-122"/>
                 <a:cs typeface="Consolas" pitchFamily="34" charset="-120"/>
               </a:rPr>
@@ -19393,6 +19497,9 @@
             </a:r>
             <a:r>
               <a:rPr lang="en-US" sz="1000" dirty="0">
+                <a:solidFill>
+                  <a:schemeClr val="bg1"/>
+                </a:solidFill>
                 <a:ea typeface="Consolas" pitchFamily="34" charset="-122"/>
                 <a:cs typeface="Consolas" pitchFamily="34" charset="-120"/>
               </a:rPr>
@@ -19400,6 +19507,9 @@
             </a:r>
             <a:r>
               <a:rPr lang="en-US" sz="1000" dirty="0" err="1">
+                <a:solidFill>
+                  <a:schemeClr val="bg1"/>
+                </a:solidFill>
                 <a:ea typeface="Consolas" pitchFamily="34" charset="-122"/>
                 <a:cs typeface="Consolas" pitchFamily="34" charset="-120"/>
               </a:rPr>
@@ -19407,12 +19517,19 @@
             </a:r>
             <a:r>
               <a:rPr lang="en-US" sz="1000" dirty="0">
+                <a:solidFill>
+                  <a:schemeClr val="bg1"/>
+                </a:solidFill>
                 <a:ea typeface="Consolas" pitchFamily="34" charset="-122"/>
                 <a:cs typeface="Consolas" pitchFamily="34" charset="-120"/>
               </a:rPr>
               <a:t>, x)</a:t>
             </a:r>
-            <a:endParaRPr lang="en-US" sz="1000" dirty="0"/>
+            <a:endParaRPr lang="en-US" sz="1000" dirty="0">
+              <a:solidFill>
+                <a:schemeClr val="bg1"/>
+              </a:solidFill>
+            </a:endParaRPr>
           </a:p>
           <a:p>
             <a:pPr marL="0" indent="0">
@@ -19420,15 +19537,26 @@
             </a:pPr>
             <a:r>
               <a:rPr lang="en-US" sz="1000" dirty="0">
+                <a:solidFill>
+                  <a:schemeClr val="bg1"/>
+                </a:solidFill>
                 <a:ea typeface="Consolas" pitchFamily="34" charset="-122"/>
                 <a:cs typeface="Consolas" pitchFamily="34" charset="-120"/>
               </a:rPr>
               <a:t>           _                     -&gt;  Left "character not found"</a:t>
             </a:r>
-            <a:endParaRPr lang="en-US" sz="1000" dirty="0"/>
-          </a:p>
-          <a:p>
-            <a:endParaRPr lang="en-US" dirty="0"/>
+            <a:endParaRPr lang="en-US" sz="1000" dirty="0">
+              <a:solidFill>
+                <a:schemeClr val="bg1"/>
+              </a:solidFill>
+            </a:endParaRPr>
+          </a:p>
+          <a:p>
+            <a:endParaRPr lang="en-US" dirty="0">
+              <a:solidFill>
+                <a:schemeClr val="bg1"/>
+              </a:solidFill>
+            </a:endParaRPr>
           </a:p>
         </p:txBody>
       </p:sp>
